--- a/docs/UrbanHeat-AlKhor-Pitch.pptx
+++ b/docs/UrbanHeat-AlKhor-Pitch.pptx
@@ -2,22 +2,22 @@
 <file path=ppt/presentation.xml><?xml version="1.0" encoding="utf-8"?>
 <p:presentation xmlns:p="http://schemas.openxmlformats.org/presentationml/2006/main">
   <p:sldMasterIdLst>
-    <p:sldMasterId xmlns:r="http://schemas.openxmlformats.org/officeDocument/2006/relationships" id="2147483648" r:id="R29b5e6d0090e471f"/>
+    <p:sldMasterId xmlns:r="http://schemas.openxmlformats.org/officeDocument/2006/relationships" id="2147483648" r:id="R9da7009cf8e744ee"/>
   </p:sldMasterIdLst>
   <p:notesMasterIdLst>
-    <p:notesMasterId xmlns:r="http://schemas.openxmlformats.org/officeDocument/2006/relationships" r:id="Rae1f87207e8d41d3"/>
+    <p:notesMasterId xmlns:r="http://schemas.openxmlformats.org/officeDocument/2006/relationships" r:id="R235bd7e8e53a4bf3"/>
   </p:notesMasterIdLst>
   <p:sldIdLst>
-    <p:sldId xmlns:r="http://schemas.openxmlformats.org/officeDocument/2006/relationships" id="256" r:id="R7ad63c7350a24cb8"/>
-    <p:sldId xmlns:r="http://schemas.openxmlformats.org/officeDocument/2006/relationships" id="257" r:id="R05bcd668e3184890"/>
-    <p:sldId xmlns:r="http://schemas.openxmlformats.org/officeDocument/2006/relationships" id="258" r:id="R98884ac51eb2409d"/>
-    <p:sldId xmlns:r="http://schemas.openxmlformats.org/officeDocument/2006/relationships" id="259" r:id="Rd31bb4790a534889"/>
-    <p:sldId xmlns:r="http://schemas.openxmlformats.org/officeDocument/2006/relationships" id="260" r:id="R8180472a85584b92"/>
-    <p:sldId xmlns:r="http://schemas.openxmlformats.org/officeDocument/2006/relationships" id="261" r:id="R1a8f3709d29e4218"/>
-    <p:sldId xmlns:r="http://schemas.openxmlformats.org/officeDocument/2006/relationships" id="262" r:id="R4825db9f5711471e"/>
-    <p:sldId xmlns:r="http://schemas.openxmlformats.org/officeDocument/2006/relationships" id="263" r:id="Rfb972e8293744935"/>
-    <p:sldId xmlns:r="http://schemas.openxmlformats.org/officeDocument/2006/relationships" id="264" r:id="R92093056806048e0"/>
-    <p:sldId xmlns:r="http://schemas.openxmlformats.org/officeDocument/2006/relationships" id="265" r:id="Rfdb04b198bb24b61"/>
+    <p:sldId xmlns:r="http://schemas.openxmlformats.org/officeDocument/2006/relationships" id="256" r:id="Rd9a1fdf8d16d48d4"/>
+    <p:sldId xmlns:r="http://schemas.openxmlformats.org/officeDocument/2006/relationships" id="257" r:id="Rd5854f3ed8a94889"/>
+    <p:sldId xmlns:r="http://schemas.openxmlformats.org/officeDocument/2006/relationships" id="258" r:id="Rd04dda95d7f84c87"/>
+    <p:sldId xmlns:r="http://schemas.openxmlformats.org/officeDocument/2006/relationships" id="259" r:id="R8d5e1eaee84146ef"/>
+    <p:sldId xmlns:r="http://schemas.openxmlformats.org/officeDocument/2006/relationships" id="260" r:id="Ra319be216f944813"/>
+    <p:sldId xmlns:r="http://schemas.openxmlformats.org/officeDocument/2006/relationships" id="261" r:id="Re037c46e76b34f9a"/>
+    <p:sldId xmlns:r="http://schemas.openxmlformats.org/officeDocument/2006/relationships" id="262" r:id="R7b6622cb1e90437e"/>
+    <p:sldId xmlns:r="http://schemas.openxmlformats.org/officeDocument/2006/relationships" id="263" r:id="R18e1387fdd1d4f64"/>
+    <p:sldId xmlns:r="http://schemas.openxmlformats.org/officeDocument/2006/relationships" id="264" r:id="R4b07a4b6df7d4ed9"/>
+    <p:sldId xmlns:r="http://schemas.openxmlformats.org/officeDocument/2006/relationships" id="265" r:id="R79ea4d32003d46b4"/>
   </p:sldIdLst>
   <p:sldSz cx="12192000" cy="6858000"/>
   <p:notesSz cx="6858000" cy="9144000"/>
@@ -941,7 +941,7 @@
           <a:lstStyle xmlns:a="http://schemas.openxmlformats.org/drawingml/2006/main"/>
           <a:p xmlns:a="http://schemas.openxmlformats.org/drawingml/2006/main">
             <a:r>
-              <a:t>Source: README sections 6 and 8, reference-samples.csv, notebook-verification.json when available. 20/30 coastal references agree with the spectral/QA screen. All 30 OSM water-polygon references disagree, with some contributed polygons spanning dry land. These positive-only agreement tests do not establish overall accuracy. Reproducibility does not establish scientific accuracy.</a:t>
+              <a:t>Source: README sections 6 and 8, reference-samples.csv, notebook-verification.json when available. 20/30 coastal references agree with the spectral/QA screen. All 30 OSM water-polygon references disagree, with some contributed polygons spanning dry land. These positive-only agreement tests do not establish overall accuracy. Reproducibility does not establish scientific accuracy. Normal-kernel verification: https://github.com/NasserAlhuri/spaceHacathon/actions/runs/37269889977. Source commit 9781b95a46d86eb858ae9714ee53198ad22cfb6c. The executed notebook was retrieved from artifact 11328001190. All seven regenerated CSV tables match the supplied baseline byte for byte.</a:t>
             </a:r>
           </a:p>
         </p:txBody>
@@ -1128,7 +1128,7 @@
           <p:cNvPr id="4" name="Accent rule">
             <a:extLst xmlns:a="http://schemas.openxmlformats.org/drawingml/2006/main">
               <a:ext uri="{FF2B5EF4-FFF2-40B4-BE49-F238E27FC236}">
-                <a16:creationId xmlns:a16="http://schemas.microsoft.com/office/drawing/2014/main" id="{0D9EF4FF-1324-4208-BABB-E978D3A3A708}"/>
+                <a16:creationId xmlns:a16="http://schemas.microsoft.com/office/drawing/2014/main" id="{9EDD7714-C480-43FC-A47A-552F72BBF919}"/>
               </a:ext>
             </a:extLst>
           </p:cNvPr>
@@ -1159,7 +1159,7 @@
           <p:cNvPr id="2" name="Title">
             <a:extLst xmlns:a="http://schemas.openxmlformats.org/drawingml/2006/main">
               <a:ext uri="{FF2B5EF4-FFF2-40B4-BE49-F238E27FC236}">
-                <a16:creationId xmlns:a16="http://schemas.microsoft.com/office/drawing/2014/main" id="{F525DBC5-6563-4B75-B6FD-1CB9E6CC2139}"/>
+                <a16:creationId xmlns:a16="http://schemas.microsoft.com/office/drawing/2014/main" id="{A20D4BFD-8B9A-4A39-BA88-1C81679BB957}"/>
               </a:ext>
             </a:extLst>
           </p:cNvPr>
@@ -1306,7 +1306,7 @@
           <p:cNvPr id="3" name="Subtitle">
             <a:extLst xmlns:a="http://schemas.openxmlformats.org/drawingml/2006/main">
               <a:ext uri="{FF2B5EF4-FFF2-40B4-BE49-F238E27FC236}">
-                <a16:creationId xmlns:a16="http://schemas.microsoft.com/office/drawing/2014/main" id="{0642550B-D477-42F8-A770-8E71474F8206}"/>
+                <a16:creationId xmlns:a16="http://schemas.microsoft.com/office/drawing/2014/main" id="{6B710D1C-3F91-4C88-ADFD-B4F54E5E7C37}"/>
               </a:ext>
             </a:extLst>
           </p:cNvPr>
@@ -1470,7 +1470,7 @@
           <p:cNvPr id="3" name="Accent rule">
             <a:extLst xmlns:a="http://schemas.openxmlformats.org/drawingml/2006/main">
               <a:ext uri="{FF2B5EF4-FFF2-40B4-BE49-F238E27FC236}">
-                <a16:creationId xmlns:a16="http://schemas.microsoft.com/office/drawing/2014/main" id="{15C38C32-31B3-459A-99B3-62B2F4F3C41D}"/>
+                <a16:creationId xmlns:a16="http://schemas.microsoft.com/office/drawing/2014/main" id="{F1FF3A68-0FB4-49BB-83F2-DBC2DEA6E8B9}"/>
               </a:ext>
             </a:extLst>
           </p:cNvPr>
@@ -1501,7 +1501,7 @@
           <p:cNvPr id="2" name="Section title">
             <a:extLst xmlns:a="http://schemas.openxmlformats.org/drawingml/2006/main">
               <a:ext uri="{FF2B5EF4-FFF2-40B4-BE49-F238E27FC236}">
-                <a16:creationId xmlns:a16="http://schemas.microsoft.com/office/drawing/2014/main" id="{485664FB-F00B-4956-8D93-B811E045FCB4}"/>
+                <a16:creationId xmlns:a16="http://schemas.microsoft.com/office/drawing/2014/main" id="{96EE6CC2-1894-4130-BFC1-E12F53C697C6}"/>
               </a:ext>
             </a:extLst>
           </p:cNvPr>
@@ -1665,7 +1665,7 @@
           <p:cNvPr id="4" name="Accent rule">
             <a:extLst xmlns:a="http://schemas.openxmlformats.org/drawingml/2006/main">
               <a:ext uri="{FF2B5EF4-FFF2-40B4-BE49-F238E27FC236}">
-                <a16:creationId xmlns:a16="http://schemas.microsoft.com/office/drawing/2014/main" id="{22DA991B-0A26-4489-8ED6-A25AF85DB92E}"/>
+                <a16:creationId xmlns:a16="http://schemas.microsoft.com/office/drawing/2014/main" id="{772A98FE-A9B2-4420-8B6C-49B01B8795BE}"/>
               </a:ext>
             </a:extLst>
           </p:cNvPr>
@@ -1696,7 +1696,7 @@
           <p:cNvPr id="2" name="Title">
             <a:extLst xmlns:a="http://schemas.openxmlformats.org/drawingml/2006/main">
               <a:ext uri="{FF2B5EF4-FFF2-40B4-BE49-F238E27FC236}">
-                <a16:creationId xmlns:a16="http://schemas.microsoft.com/office/drawing/2014/main" id="{A9BB009B-8E2C-49CF-BE9A-CBD0D4C55718}"/>
+                <a16:creationId xmlns:a16="http://schemas.microsoft.com/office/drawing/2014/main" id="{9BF7433B-B877-4F7D-8988-C4C549378D37}"/>
               </a:ext>
             </a:extLst>
           </p:cNvPr>
@@ -1843,7 +1843,7 @@
           <p:cNvPr id="3" name="Body">
             <a:extLst xmlns:a="http://schemas.openxmlformats.org/drawingml/2006/main">
               <a:ext uri="{FF2B5EF4-FFF2-40B4-BE49-F238E27FC236}">
-                <a16:creationId xmlns:a16="http://schemas.microsoft.com/office/drawing/2014/main" id="{42C59126-2183-48C6-95BC-04EE63639DC0}"/>
+                <a16:creationId xmlns:a16="http://schemas.microsoft.com/office/drawing/2014/main" id="{3F1B5D70-C4BF-4521-A165-3F7F63AA5653}"/>
               </a:ext>
             </a:extLst>
           </p:cNvPr>
@@ -2007,7 +2007,7 @@
           <p:cNvPr id="5" name="Accent rule">
             <a:extLst xmlns:a="http://schemas.openxmlformats.org/drawingml/2006/main">
               <a:ext uri="{FF2B5EF4-FFF2-40B4-BE49-F238E27FC236}">
-                <a16:creationId xmlns:a16="http://schemas.microsoft.com/office/drawing/2014/main" id="{23F097F9-A922-4AD5-B682-EE7ECE4ECDFB}"/>
+                <a16:creationId xmlns:a16="http://schemas.microsoft.com/office/drawing/2014/main" id="{CF9F64ED-8F83-4059-944D-0C218E35CFFC}"/>
               </a:ext>
             </a:extLst>
           </p:cNvPr>
@@ -2038,7 +2038,7 @@
           <p:cNvPr id="2" name="Title">
             <a:extLst xmlns:a="http://schemas.openxmlformats.org/drawingml/2006/main">
               <a:ext uri="{FF2B5EF4-FFF2-40B4-BE49-F238E27FC236}">
-                <a16:creationId xmlns:a16="http://schemas.microsoft.com/office/drawing/2014/main" id="{BAA82C2E-06EC-4916-95A6-319A3521FF7D}"/>
+                <a16:creationId xmlns:a16="http://schemas.microsoft.com/office/drawing/2014/main" id="{0D14A448-D16A-4F91-9585-026F9D6235F8}"/>
               </a:ext>
             </a:extLst>
           </p:cNvPr>
@@ -2185,7 +2185,7 @@
           <p:cNvPr id="3" name="Left column">
             <a:extLst xmlns:a="http://schemas.openxmlformats.org/drawingml/2006/main">
               <a:ext uri="{FF2B5EF4-FFF2-40B4-BE49-F238E27FC236}">
-                <a16:creationId xmlns:a16="http://schemas.microsoft.com/office/drawing/2014/main" id="{5A368AF5-074D-4AAE-B546-C2A7E3E8FD40}"/>
+                <a16:creationId xmlns:a16="http://schemas.microsoft.com/office/drawing/2014/main" id="{53B9ABC2-F42A-46F7-A073-6AC0190B8EDC}"/>
               </a:ext>
             </a:extLst>
           </p:cNvPr>
@@ -2332,7 +2332,7 @@
           <p:cNvPr id="4" name="Right column">
             <a:extLst xmlns:a="http://schemas.openxmlformats.org/drawingml/2006/main">
               <a:ext uri="{FF2B5EF4-FFF2-40B4-BE49-F238E27FC236}">
-                <a16:creationId xmlns:a16="http://schemas.microsoft.com/office/drawing/2014/main" id="{F1FE9C5A-82BB-4423-B497-4551B68C2D9E}"/>
+                <a16:creationId xmlns:a16="http://schemas.microsoft.com/office/drawing/2014/main" id="{B23B4821-99AE-4936-9210-9F6A140C4782}"/>
               </a:ext>
             </a:extLst>
           </p:cNvPr>
@@ -2496,7 +2496,7 @@
           <p:cNvPr id="4" name="Accent rule">
             <a:extLst xmlns:a="http://schemas.openxmlformats.org/drawingml/2006/main">
               <a:ext uri="{FF2B5EF4-FFF2-40B4-BE49-F238E27FC236}">
-                <a16:creationId xmlns:a16="http://schemas.microsoft.com/office/drawing/2014/main" id="{025F0749-E31E-451A-B580-DB5550314C44}"/>
+                <a16:creationId xmlns:a16="http://schemas.microsoft.com/office/drawing/2014/main" id="{4D70C221-C50F-4A29-8C19-5DAD3C22707F}"/>
               </a:ext>
             </a:extLst>
           </p:cNvPr>
@@ -2527,7 +2527,7 @@
           <p:cNvPr id="2" name="Title">
             <a:extLst xmlns:a="http://schemas.openxmlformats.org/drawingml/2006/main">
               <a:ext uri="{FF2B5EF4-FFF2-40B4-BE49-F238E27FC236}">
-                <a16:creationId xmlns:a16="http://schemas.microsoft.com/office/drawing/2014/main" id="{72228C82-122B-493C-B467-015616465D03}"/>
+                <a16:creationId xmlns:a16="http://schemas.microsoft.com/office/drawing/2014/main" id="{74081264-31A8-4FB8-B8BE-0736AEE2830B}"/>
               </a:ext>
             </a:extLst>
           </p:cNvPr>
@@ -2674,7 +2674,7 @@
           <p:cNvPr id="3" name="Left column">
             <a:extLst xmlns:a="http://schemas.openxmlformats.org/drawingml/2006/main">
               <a:ext uri="{FF2B5EF4-FFF2-40B4-BE49-F238E27FC236}">
-                <a16:creationId xmlns:a16="http://schemas.microsoft.com/office/drawing/2014/main" id="{324B4903-DE7E-47BA-96CB-35452D9623AB}"/>
+                <a16:creationId xmlns:a16="http://schemas.microsoft.com/office/drawing/2014/main" id="{DE35C9B9-D91F-4362-8F2F-191A6A68991C}"/>
               </a:ext>
             </a:extLst>
           </p:cNvPr>
@@ -2859,12 +2859,12 @@
   </p:cSld>
   <p:clrMap bg1="lt1" tx1="dk1" bg2="lt2" tx2="dk2" accent1="accent1" accent2="accent2" accent3="accent3" accent4="accent4" accent5="accent5" accent6="accent6" hlink="hlink" folHlink="folHlink"/>
   <p:sldLayoutIdLst>
-    <p:sldLayoutId xmlns:r="http://schemas.openxmlformats.org/officeDocument/2006/relationships" id="2147483649" r:id="Reebee5c8acf84ac9"/>
-    <p:sldLayoutId xmlns:r="http://schemas.openxmlformats.org/officeDocument/2006/relationships" id="2147483650" r:id="Rad09a3a0e03a46a2"/>
-    <p:sldLayoutId xmlns:r="http://schemas.openxmlformats.org/officeDocument/2006/relationships" id="2147483651" r:id="Rf1c1eeadb90044b6"/>
-    <p:sldLayoutId xmlns:r="http://schemas.openxmlformats.org/officeDocument/2006/relationships" id="2147483652" r:id="R110ae852861d48e7"/>
-    <p:sldLayoutId xmlns:r="http://schemas.openxmlformats.org/officeDocument/2006/relationships" id="2147483653" r:id="Ra333be8968d5412c"/>
-    <p:sldLayoutId xmlns:r="http://schemas.openxmlformats.org/officeDocument/2006/relationships" id="2147483654" r:id="R280242c6292e433f"/>
+    <p:sldLayoutId xmlns:r="http://schemas.openxmlformats.org/officeDocument/2006/relationships" id="2147483649" r:id="R6f6b47049fb14a9e"/>
+    <p:sldLayoutId xmlns:r="http://schemas.openxmlformats.org/officeDocument/2006/relationships" id="2147483650" r:id="R76b0c59d321642fb"/>
+    <p:sldLayoutId xmlns:r="http://schemas.openxmlformats.org/officeDocument/2006/relationships" id="2147483651" r:id="Re8032767f81e4f80"/>
+    <p:sldLayoutId xmlns:r="http://schemas.openxmlformats.org/officeDocument/2006/relationships" id="2147483652" r:id="R588a25390ad1443e"/>
+    <p:sldLayoutId xmlns:r="http://schemas.openxmlformats.org/officeDocument/2006/relationships" id="2147483653" r:id="R6981ce1ca4ef4d74"/>
+    <p:sldLayoutId xmlns:r="http://schemas.openxmlformats.org/officeDocument/2006/relationships" id="2147483654" r:id="R4fa89c9d80a745a5"/>
   </p:sldLayoutIdLst>
   <p:txStyles>
     <p:titleStyle>
@@ -3415,7 +3415,7 @@
           <p:cNvPr id="6" name="">
             <a:extLst xmlns:a="http://schemas.openxmlformats.org/drawingml/2006/main">
               <a:ext uri="{FF2B5EF4-FFF2-40B4-BE49-F238E27FC236}">
-                <a16:creationId xmlns:a16="http://schemas.microsoft.com/office/drawing/2014/main" id="{553E543C-ACFA-49E0-BD89-061F60B1C357}"/>
+                <a16:creationId xmlns:a16="http://schemas.microsoft.com/office/drawing/2014/main" id="{8F2341BF-72B5-43BF-AD8E-C508EC9B45D3}"/>
               </a:ext>
             </a:extLst>
           </p:cNvPr>
@@ -3472,7 +3472,7 @@
           <p:cNvPr id="2" name="">
             <a:extLst xmlns:a="http://schemas.openxmlformats.org/drawingml/2006/main">
               <a:ext uri="{FF2B5EF4-FFF2-40B4-BE49-F238E27FC236}">
-                <a16:creationId xmlns:a16="http://schemas.microsoft.com/office/drawing/2014/main" id="{52B8EB54-FE8A-4A34-B0A2-4072383D5E27}"/>
+                <a16:creationId xmlns:a16="http://schemas.microsoft.com/office/drawing/2014/main" id="{D0FFD07E-3317-475C-AA20-49FE6B38C18D}"/>
               </a:ext>
             </a:extLst>
           </p:cNvPr>
@@ -3529,7 +3529,7 @@
           <p:cNvPr id="3" name="">
             <a:extLst xmlns:a="http://schemas.openxmlformats.org/drawingml/2006/main">
               <a:ext uri="{FF2B5EF4-FFF2-40B4-BE49-F238E27FC236}">
-                <a16:creationId xmlns:a16="http://schemas.microsoft.com/office/drawing/2014/main" id="{F918271A-75DA-489F-BD6C-364313F4818C}"/>
+                <a16:creationId xmlns:a16="http://schemas.microsoft.com/office/drawing/2014/main" id="{BDE7178B-B153-4EF8-A3C1-E769F0A6E371}"/>
               </a:ext>
             </a:extLst>
           </p:cNvPr>
@@ -3586,7 +3586,7 @@
           <p:cNvPr id="4" name="">
             <a:extLst xmlns:a="http://schemas.openxmlformats.org/drawingml/2006/main">
               <a:ext uri="{FF2B5EF4-FFF2-40B4-BE49-F238E27FC236}">
-                <a16:creationId xmlns:a16="http://schemas.microsoft.com/office/drawing/2014/main" id="{62C41D7D-C420-4687-BF5A-1317B5CCFDA5}"/>
+                <a16:creationId xmlns:a16="http://schemas.microsoft.com/office/drawing/2014/main" id="{8ADE11C8-7041-4CDD-B054-F295A8A590E6}"/>
               </a:ext>
             </a:extLst>
           </p:cNvPr>
@@ -3643,7 +3643,7 @@
           <p:cNvPr id="5" name="">
             <a:extLst xmlns:a="http://schemas.openxmlformats.org/drawingml/2006/main">
               <a:ext uri="{FF2B5EF4-FFF2-40B4-BE49-F238E27FC236}">
-                <a16:creationId xmlns:a16="http://schemas.microsoft.com/office/drawing/2014/main" id="{36A7E298-9604-4588-BAAF-9D053D392EC1}"/>
+                <a16:creationId xmlns:a16="http://schemas.microsoft.com/office/drawing/2014/main" id="{D7A3C2EB-1661-4B64-86C7-D3EAD191053F}"/>
               </a:ext>
             </a:extLst>
           </p:cNvPr>
@@ -3698,7 +3698,7 @@
     </p:spTree>
     <p:extLst>
       <p:ext uri="{BB962C8B-B14F-4D97-AF65-F5344CB8AC3E}">
-        <p14:creationId xmlns:p14="http://schemas.microsoft.com/office/powerpoint/2010/main" val="1168123761"/>
+        <p14:creationId xmlns:p14="http://schemas.microsoft.com/office/powerpoint/2010/main" val="1494649470"/>
       </p:ext>
     </p:extLst>
   </p:cSld>
@@ -3729,7 +3729,7 @@
           <p:cNvPr id="7" name="">
             <a:extLst xmlns:a="http://schemas.openxmlformats.org/drawingml/2006/main">
               <a:ext uri="{FF2B5EF4-FFF2-40B4-BE49-F238E27FC236}">
-                <a16:creationId xmlns:a16="http://schemas.microsoft.com/office/drawing/2014/main" id="{614B621C-12B4-4EB5-B94E-3BD4F0D316FA}"/>
+                <a16:creationId xmlns:a16="http://schemas.microsoft.com/office/drawing/2014/main" id="{B016C474-575F-4D1C-97BA-9256525DC53B}"/>
               </a:ext>
             </a:extLst>
           </p:cNvPr>
@@ -3786,7 +3786,7 @@
           <p:cNvPr id="2" name="">
             <a:extLst xmlns:a="http://schemas.openxmlformats.org/drawingml/2006/main">
               <a:ext uri="{FF2B5EF4-FFF2-40B4-BE49-F238E27FC236}">
-                <a16:creationId xmlns:a16="http://schemas.microsoft.com/office/drawing/2014/main" id="{35A1C949-69D1-4A48-A009-8F4622CC5A30}"/>
+                <a16:creationId xmlns:a16="http://schemas.microsoft.com/office/drawing/2014/main" id="{3747672D-39AC-4950-82A0-52A02B7513DB}"/>
               </a:ext>
             </a:extLst>
           </p:cNvPr>
@@ -3843,7 +3843,7 @@
           <p:cNvPr id="3" name="">
             <a:extLst xmlns:a="http://schemas.openxmlformats.org/drawingml/2006/main">
               <a:ext uri="{FF2B5EF4-FFF2-40B4-BE49-F238E27FC236}">
-                <a16:creationId xmlns:a16="http://schemas.microsoft.com/office/drawing/2014/main" id="{8CE8CF97-6AFB-4B16-87AA-A8E292BB6C99}"/>
+                <a16:creationId xmlns:a16="http://schemas.microsoft.com/office/drawing/2014/main" id="{7F489D04-2378-41E6-B571-6D9FE2EDCC52}"/>
               </a:ext>
             </a:extLst>
           </p:cNvPr>
@@ -3900,7 +3900,7 @@
           <p:cNvPr id="4" name="">
             <a:extLst xmlns:a="http://schemas.openxmlformats.org/drawingml/2006/main">
               <a:ext uri="{FF2B5EF4-FFF2-40B4-BE49-F238E27FC236}">
-                <a16:creationId xmlns:a16="http://schemas.microsoft.com/office/drawing/2014/main" id="{55959313-7E8F-416C-BAC0-8319BDB72DFB}"/>
+                <a16:creationId xmlns:a16="http://schemas.microsoft.com/office/drawing/2014/main" id="{2D412FDB-06EB-4044-98D0-CC1AC0A2374E}"/>
               </a:ext>
             </a:extLst>
           </p:cNvPr>
@@ -3957,7 +3957,7 @@
           <p:cNvPr id="5" name="">
             <a:extLst xmlns:a="http://schemas.openxmlformats.org/drawingml/2006/main">
               <a:ext uri="{FF2B5EF4-FFF2-40B4-BE49-F238E27FC236}">
-                <a16:creationId xmlns:a16="http://schemas.microsoft.com/office/drawing/2014/main" id="{8C3A03FB-EA49-42CC-8901-6D67B93F1DA3}"/>
+                <a16:creationId xmlns:a16="http://schemas.microsoft.com/office/drawing/2014/main" id="{ED1B40E3-0C06-4CF7-A683-079E2FED6A1C}"/>
               </a:ext>
             </a:extLst>
           </p:cNvPr>
@@ -4014,7 +4014,7 @@
           <p:cNvPr id="6" name="">
             <a:extLst xmlns:a="http://schemas.openxmlformats.org/drawingml/2006/main">
               <a:ext uri="{FF2B5EF4-FFF2-40B4-BE49-F238E27FC236}">
-                <a16:creationId xmlns:a16="http://schemas.microsoft.com/office/drawing/2014/main" id="{09920662-2B87-4373-B3A6-08B8EE0D07F5}"/>
+                <a16:creationId xmlns:a16="http://schemas.microsoft.com/office/drawing/2014/main" id="{FF03E988-A4AF-40F0-99DD-ACB7BB44B200}"/>
               </a:ext>
             </a:extLst>
           </p:cNvPr>
@@ -4069,7 +4069,7 @@
     </p:spTree>
     <p:extLst>
       <p:ext uri="{BB962C8B-B14F-4D97-AF65-F5344CB8AC3E}">
-        <p14:creationId xmlns:p14="http://schemas.microsoft.com/office/powerpoint/2010/main" val="1255995712"/>
+        <p14:creationId xmlns:p14="http://schemas.microsoft.com/office/powerpoint/2010/main" val="499692637"/>
       </p:ext>
     </p:extLst>
   </p:cSld>
@@ -4100,7 +4100,7 @@
           <p:cNvPr id="6" name="">
             <a:extLst xmlns:a="http://schemas.openxmlformats.org/drawingml/2006/main">
               <a:ext uri="{FF2B5EF4-FFF2-40B4-BE49-F238E27FC236}">
-                <a16:creationId xmlns:a16="http://schemas.microsoft.com/office/drawing/2014/main" id="{A85E0963-DB8B-477C-AF08-CB700AF9C1CA}"/>
+                <a16:creationId xmlns:a16="http://schemas.microsoft.com/office/drawing/2014/main" id="{5F6BA2CE-E5B5-4B7D-BF77-60CDD6D97739}"/>
               </a:ext>
             </a:extLst>
           </p:cNvPr>
@@ -4157,7 +4157,7 @@
           <p:cNvPr id="2" name="">
             <a:extLst xmlns:a="http://schemas.openxmlformats.org/drawingml/2006/main">
               <a:ext uri="{FF2B5EF4-FFF2-40B4-BE49-F238E27FC236}">
-                <a16:creationId xmlns:a16="http://schemas.microsoft.com/office/drawing/2014/main" id="{751A89F7-7D16-4CCF-8387-D44A6CAEDB6D}"/>
+                <a16:creationId xmlns:a16="http://schemas.microsoft.com/office/drawing/2014/main" id="{9658B023-1F65-4344-B310-56E8D78FA658}"/>
               </a:ext>
             </a:extLst>
           </p:cNvPr>
@@ -4214,7 +4214,7 @@
           <p:cNvPr id="3" name="">
             <a:extLst xmlns:a="http://schemas.openxmlformats.org/drawingml/2006/main">
               <a:ext uri="{FF2B5EF4-FFF2-40B4-BE49-F238E27FC236}">
-                <a16:creationId xmlns:a16="http://schemas.microsoft.com/office/drawing/2014/main" id="{9B716589-E6C4-41DF-A22A-46B3635665B1}"/>
+                <a16:creationId xmlns:a16="http://schemas.microsoft.com/office/drawing/2014/main" id="{4FB0D851-7F4E-4977-AA0A-DE3BD9F02632}"/>
               </a:ext>
             </a:extLst>
           </p:cNvPr>
@@ -4271,7 +4271,7 @@
           <p:cNvPr id="4" name="">
             <a:extLst xmlns:a="http://schemas.openxmlformats.org/drawingml/2006/main">
               <a:ext uri="{FF2B5EF4-FFF2-40B4-BE49-F238E27FC236}">
-                <a16:creationId xmlns:a16="http://schemas.microsoft.com/office/drawing/2014/main" id="{E8A31F4F-8455-4502-9C36-FD386E9BCCB5}"/>
+                <a16:creationId xmlns:a16="http://schemas.microsoft.com/office/drawing/2014/main" id="{F7EBA082-4E19-41A3-A272-46DEFFB8EB3D}"/>
               </a:ext>
             </a:extLst>
           </p:cNvPr>
@@ -4328,7 +4328,7 @@
           <p:cNvPr id="5" name="">
             <a:extLst xmlns:a="http://schemas.openxmlformats.org/drawingml/2006/main">
               <a:ext uri="{FF2B5EF4-FFF2-40B4-BE49-F238E27FC236}">
-                <a16:creationId xmlns:a16="http://schemas.microsoft.com/office/drawing/2014/main" id="{41AD4358-8208-4717-9300-5B606D9E10DB}"/>
+                <a16:creationId xmlns:a16="http://schemas.microsoft.com/office/drawing/2014/main" id="{70F0F58E-D5F0-4F27-9D7D-ADDD417F92A5}"/>
               </a:ext>
             </a:extLst>
           </p:cNvPr>
@@ -4383,7 +4383,7 @@
     </p:spTree>
     <p:extLst>
       <p:ext uri="{BB962C8B-B14F-4D97-AF65-F5344CB8AC3E}">
-        <p14:creationId xmlns:p14="http://schemas.microsoft.com/office/powerpoint/2010/main" val="819491075"/>
+        <p14:creationId xmlns:p14="http://schemas.microsoft.com/office/powerpoint/2010/main" val="1075667241"/>
       </p:ext>
     </p:extLst>
   </p:cSld>
@@ -4414,7 +4414,7 @@
           <p:cNvPr id="6" name="">
             <a:extLst xmlns:a="http://schemas.openxmlformats.org/drawingml/2006/main">
               <a:ext uri="{FF2B5EF4-FFF2-40B4-BE49-F238E27FC236}">
-                <a16:creationId xmlns:a16="http://schemas.microsoft.com/office/drawing/2014/main" id="{5DE507EE-C0D7-464C-95C2-CDD53AE06165}"/>
+                <a16:creationId xmlns:a16="http://schemas.microsoft.com/office/drawing/2014/main" id="{CC63E1A1-0A6E-4A56-B116-140CD5B5F182}"/>
               </a:ext>
             </a:extLst>
           </p:cNvPr>
@@ -4471,7 +4471,7 @@
           <p:cNvPr id="2" name="">
             <a:extLst xmlns:a="http://schemas.openxmlformats.org/drawingml/2006/main">
               <a:ext uri="{FF2B5EF4-FFF2-40B4-BE49-F238E27FC236}">
-                <a16:creationId xmlns:a16="http://schemas.microsoft.com/office/drawing/2014/main" id="{75EA6C7A-4169-401A-B9D7-CE9638E5E620}"/>
+                <a16:creationId xmlns:a16="http://schemas.microsoft.com/office/drawing/2014/main" id="{6C550A39-4F36-4A92-AA20-BFD50CCD2EAD}"/>
               </a:ext>
             </a:extLst>
           </p:cNvPr>
@@ -4528,7 +4528,7 @@
           <p:cNvPr id="3" name="">
             <a:extLst xmlns:a="http://schemas.openxmlformats.org/drawingml/2006/main">
               <a:ext uri="{FF2B5EF4-FFF2-40B4-BE49-F238E27FC236}">
-                <a16:creationId xmlns:a16="http://schemas.microsoft.com/office/drawing/2014/main" id="{594ECBAC-88B0-4E35-93BC-F7F66569F311}"/>
+                <a16:creationId xmlns:a16="http://schemas.microsoft.com/office/drawing/2014/main" id="{93B50D6A-ABC6-4A93-8DCB-679B84E7C8BC}"/>
               </a:ext>
             </a:extLst>
           </p:cNvPr>
@@ -4585,7 +4585,7 @@
           <p:cNvPr id="4" name="">
             <a:extLst xmlns:a="http://schemas.openxmlformats.org/drawingml/2006/main">
               <a:ext uri="{FF2B5EF4-FFF2-40B4-BE49-F238E27FC236}">
-                <a16:creationId xmlns:a16="http://schemas.microsoft.com/office/drawing/2014/main" id="{4A58EA27-529E-4B0B-8928-DABF37C13CAB}"/>
+                <a16:creationId xmlns:a16="http://schemas.microsoft.com/office/drawing/2014/main" id="{CE4D4D6E-0069-4345-8475-FAF7184B5FE4}"/>
               </a:ext>
             </a:extLst>
           </p:cNvPr>
@@ -4642,7 +4642,7 @@
           <p:cNvPr id="5" name="">
             <a:extLst xmlns:a="http://schemas.openxmlformats.org/drawingml/2006/main">
               <a:ext uri="{FF2B5EF4-FFF2-40B4-BE49-F238E27FC236}">
-                <a16:creationId xmlns:a16="http://schemas.microsoft.com/office/drawing/2014/main" id="{4D2D146D-5CCF-4764-9FE0-AFAC30A1FE70}"/>
+                <a16:creationId xmlns:a16="http://schemas.microsoft.com/office/drawing/2014/main" id="{7B846B23-251F-4F6F-8E18-A80700350755}"/>
               </a:ext>
             </a:extLst>
           </p:cNvPr>
@@ -4697,7 +4697,7 @@
     </p:spTree>
     <p:extLst>
       <p:ext uri="{BB962C8B-B14F-4D97-AF65-F5344CB8AC3E}">
-        <p14:creationId xmlns:p14="http://schemas.microsoft.com/office/powerpoint/2010/main" val="1705114144"/>
+        <p14:creationId xmlns:p14="http://schemas.microsoft.com/office/powerpoint/2010/main" val="1176789693"/>
       </p:ext>
     </p:extLst>
   </p:cSld>
@@ -4728,7 +4728,7 @@
           <p:cNvPr id="4" name="">
             <a:extLst xmlns:a="http://schemas.openxmlformats.org/drawingml/2006/main">
               <a:ext uri="{FF2B5EF4-FFF2-40B4-BE49-F238E27FC236}">
-                <a16:creationId xmlns:a16="http://schemas.microsoft.com/office/drawing/2014/main" id="{DE6F87DF-3847-4EB0-AA30-3ACE769A9AA6}"/>
+                <a16:creationId xmlns:a16="http://schemas.microsoft.com/office/drawing/2014/main" id="{1F3701E0-1170-4032-B1CA-E88A1FA97AF6}"/>
               </a:ext>
             </a:extLst>
           </p:cNvPr>
@@ -4789,7 +4789,7 @@
           <p:nvPr/>
         </p:nvPicPr>
         <p:blipFill>
-          <a:blip xmlns:r="http://schemas.openxmlformats.org/officeDocument/2006/relationships" xmlns:a="http://schemas.openxmlformats.org/drawingml/2006/main" r:embed="Rc2badd1924d048d6"/>
+          <a:blip xmlns:r="http://schemas.openxmlformats.org/officeDocument/2006/relationships" xmlns:a="http://schemas.openxmlformats.org/drawingml/2006/main" r:embed="Rb6e9f70348fb4fe0"/>
           <a:stretch xmlns:a="http://schemas.openxmlformats.org/drawingml/2006/main"/>
         </p:blipFill>
         <p:spPr>
@@ -4807,7 +4807,7 @@
           <p:cNvPr id="3" name="">
             <a:extLst xmlns:a="http://schemas.openxmlformats.org/drawingml/2006/main">
               <a:ext uri="{FF2B5EF4-FFF2-40B4-BE49-F238E27FC236}">
-                <a16:creationId xmlns:a16="http://schemas.microsoft.com/office/drawing/2014/main" id="{A38814E1-CBF7-41AC-B048-491A9B9ADF14}"/>
+                <a16:creationId xmlns:a16="http://schemas.microsoft.com/office/drawing/2014/main" id="{DA9A37DA-DAC3-461D-AE5A-4B2310718DE7}"/>
               </a:ext>
             </a:extLst>
           </p:cNvPr>
@@ -4862,7 +4862,7 @@
     </p:spTree>
     <p:extLst>
       <p:ext uri="{BB962C8B-B14F-4D97-AF65-F5344CB8AC3E}">
-        <p14:creationId xmlns:p14="http://schemas.microsoft.com/office/powerpoint/2010/main" val="2104536143"/>
+        <p14:creationId xmlns:p14="http://schemas.microsoft.com/office/powerpoint/2010/main" val="711346008"/>
       </p:ext>
     </p:extLst>
   </p:cSld>
@@ -4893,7 +4893,7 @@
           <p:cNvPr id="4" name="">
             <a:extLst xmlns:a="http://schemas.openxmlformats.org/drawingml/2006/main">
               <a:ext uri="{FF2B5EF4-FFF2-40B4-BE49-F238E27FC236}">
-                <a16:creationId xmlns:a16="http://schemas.microsoft.com/office/drawing/2014/main" id="{DB98E02D-23BE-47C9-ACB3-55E559E47A66}"/>
+                <a16:creationId xmlns:a16="http://schemas.microsoft.com/office/drawing/2014/main" id="{E5A48779-BD3D-47C8-BEEB-E49AA7704264}"/>
               </a:ext>
             </a:extLst>
           </p:cNvPr>
@@ -4954,7 +4954,7 @@
           <p:nvPr/>
         </p:nvPicPr>
         <p:blipFill>
-          <a:blip xmlns:r="http://schemas.openxmlformats.org/officeDocument/2006/relationships" xmlns:a="http://schemas.openxmlformats.org/drawingml/2006/main" r:embed="Rd5f85077fa06453f"/>
+          <a:blip xmlns:r="http://schemas.openxmlformats.org/officeDocument/2006/relationships" xmlns:a="http://schemas.openxmlformats.org/drawingml/2006/main" r:embed="Rf0f02daa4e764e38"/>
           <a:stretch xmlns:a="http://schemas.openxmlformats.org/drawingml/2006/main"/>
         </p:blipFill>
         <p:spPr>
@@ -4972,7 +4972,7 @@
           <p:cNvPr id="3" name="">
             <a:extLst xmlns:a="http://schemas.openxmlformats.org/drawingml/2006/main">
               <a:ext uri="{FF2B5EF4-FFF2-40B4-BE49-F238E27FC236}">
-                <a16:creationId xmlns:a16="http://schemas.microsoft.com/office/drawing/2014/main" id="{BD4B020C-C857-4875-A6D5-5907EE66D7F1}"/>
+                <a16:creationId xmlns:a16="http://schemas.microsoft.com/office/drawing/2014/main" id="{81816CD5-1B5A-4181-B7BD-36038F6A4D88}"/>
               </a:ext>
             </a:extLst>
           </p:cNvPr>
@@ -5027,7 +5027,7 @@
     </p:spTree>
     <p:extLst>
       <p:ext uri="{BB962C8B-B14F-4D97-AF65-F5344CB8AC3E}">
-        <p14:creationId xmlns:p14="http://schemas.microsoft.com/office/powerpoint/2010/main" val="252040495"/>
+        <p14:creationId xmlns:p14="http://schemas.microsoft.com/office/powerpoint/2010/main" val="249686725"/>
       </p:ext>
     </p:extLst>
   </p:cSld>
@@ -5058,7 +5058,7 @@
           <p:cNvPr id="6" name="">
             <a:extLst xmlns:a="http://schemas.openxmlformats.org/drawingml/2006/main">
               <a:ext uri="{FF2B5EF4-FFF2-40B4-BE49-F238E27FC236}">
-                <a16:creationId xmlns:a16="http://schemas.microsoft.com/office/drawing/2014/main" id="{785D518C-93A4-4E7C-A4FE-481C4985BECE}"/>
+                <a16:creationId xmlns:a16="http://schemas.microsoft.com/office/drawing/2014/main" id="{57A8689F-AD49-4D28-A23D-420BE81C26AB}"/>
               </a:ext>
             </a:extLst>
           </p:cNvPr>
@@ -5568,7 +5568,7 @@
           <p:cNvPr id="3" name="">
             <a:extLst xmlns:a="http://schemas.openxmlformats.org/drawingml/2006/main">
               <a:ext uri="{FF2B5EF4-FFF2-40B4-BE49-F238E27FC236}">
-                <a16:creationId xmlns:a16="http://schemas.microsoft.com/office/drawing/2014/main" id="{C7A30F0B-0677-4DF5-A31D-7BC7F0A5DD5E}"/>
+                <a16:creationId xmlns:a16="http://schemas.microsoft.com/office/drawing/2014/main" id="{8FDAA67F-2C90-46FF-9620-C5D4031BC97D}"/>
               </a:ext>
             </a:extLst>
           </p:cNvPr>
@@ -5625,7 +5625,7 @@
           <p:cNvPr id="4" name="">
             <a:extLst xmlns:a="http://schemas.openxmlformats.org/drawingml/2006/main">
               <a:ext uri="{FF2B5EF4-FFF2-40B4-BE49-F238E27FC236}">
-                <a16:creationId xmlns:a16="http://schemas.microsoft.com/office/drawing/2014/main" id="{3CF078E7-39DB-4837-ABA1-FDCC50AB4E28}"/>
+                <a16:creationId xmlns:a16="http://schemas.microsoft.com/office/drawing/2014/main" id="{500D7E2D-850E-4790-8176-BEEFBE80A689}"/>
               </a:ext>
             </a:extLst>
           </p:cNvPr>
@@ -5682,7 +5682,7 @@
           <p:cNvPr id="5" name="">
             <a:extLst xmlns:a="http://schemas.openxmlformats.org/drawingml/2006/main">
               <a:ext uri="{FF2B5EF4-FFF2-40B4-BE49-F238E27FC236}">
-                <a16:creationId xmlns:a16="http://schemas.microsoft.com/office/drawing/2014/main" id="{767D00CE-AFDF-4F52-9D57-1A61DBFC6703}"/>
+                <a16:creationId xmlns:a16="http://schemas.microsoft.com/office/drawing/2014/main" id="{C789B88A-E19B-4637-B4D3-D74E372451F7}"/>
               </a:ext>
             </a:extLst>
           </p:cNvPr>
@@ -5737,7 +5737,7 @@
     </p:spTree>
     <p:extLst>
       <p:ext uri="{BB962C8B-B14F-4D97-AF65-F5344CB8AC3E}">
-        <p14:creationId xmlns:p14="http://schemas.microsoft.com/office/powerpoint/2010/main" val="666306987"/>
+        <p14:creationId xmlns:p14="http://schemas.microsoft.com/office/powerpoint/2010/main" val="824666922"/>
       </p:ext>
     </p:extLst>
   </p:cSld>
@@ -5768,7 +5768,7 @@
           <p:cNvPr id="6" name="">
             <a:extLst xmlns:a="http://schemas.openxmlformats.org/drawingml/2006/main">
               <a:ext uri="{FF2B5EF4-FFF2-40B4-BE49-F238E27FC236}">
-                <a16:creationId xmlns:a16="http://schemas.microsoft.com/office/drawing/2014/main" id="{179DE99D-061E-4696-8A26-3D34DDA8E300}"/>
+                <a16:creationId xmlns:a16="http://schemas.microsoft.com/office/drawing/2014/main" id="{39171F42-82C0-4E5B-B6DA-4629E8FAF6A1}"/>
               </a:ext>
             </a:extLst>
           </p:cNvPr>
@@ -5825,7 +5825,7 @@
           <p:cNvPr id="2" name="">
             <a:extLst xmlns:a="http://schemas.openxmlformats.org/drawingml/2006/main">
               <a:ext uri="{FF2B5EF4-FFF2-40B4-BE49-F238E27FC236}">
-                <a16:creationId xmlns:a16="http://schemas.microsoft.com/office/drawing/2014/main" id="{307C6872-DF06-40F1-811E-B79011B1D333}"/>
+                <a16:creationId xmlns:a16="http://schemas.microsoft.com/office/drawing/2014/main" id="{6CCD7EAF-2CAA-44CF-ACAE-E0F35A5D2E0B}"/>
               </a:ext>
             </a:extLst>
           </p:cNvPr>
@@ -5882,7 +5882,7 @@
           <p:cNvPr id="3" name="">
             <a:extLst xmlns:a="http://schemas.openxmlformats.org/drawingml/2006/main">
               <a:ext uri="{FF2B5EF4-FFF2-40B4-BE49-F238E27FC236}">
-                <a16:creationId xmlns:a16="http://schemas.microsoft.com/office/drawing/2014/main" id="{0363FAE6-9593-42A1-907A-F2B52D588518}"/>
+                <a16:creationId xmlns:a16="http://schemas.microsoft.com/office/drawing/2014/main" id="{E512F65E-6D9F-4DFA-A340-7F65FBC6EACF}"/>
               </a:ext>
             </a:extLst>
           </p:cNvPr>
@@ -5929,7 +5929,7 @@
                 <a:ea typeface="Bitstream Charter"/>
                 <a:cs typeface="Bitstream Charter"/>
               </a:rPr>
-              <a:t>Clean command-line regeneration passed. Normal Jupyter-kernel execution remains pending because this workspace blocks kernel sockets.</a:t>
+              <a:t>Clean GitHub execution passed through a normal Jupyter kernel: five cells, zero errors and all 35 input hashes verified.</a:t>
             </a:r>
           </a:p>
         </p:txBody>
@@ -5939,7 +5939,7 @@
           <p:cNvPr id="4" name="">
             <a:extLst xmlns:a="http://schemas.openxmlformats.org/drawingml/2006/main">
               <a:ext uri="{FF2B5EF4-FFF2-40B4-BE49-F238E27FC236}">
-                <a16:creationId xmlns:a16="http://schemas.microsoft.com/office/drawing/2014/main" id="{34A54564-4468-4A89-9FBB-A2A58CC58387}"/>
+                <a16:creationId xmlns:a16="http://schemas.microsoft.com/office/drawing/2014/main" id="{24A4D64E-9494-4A78-B3D7-89CA95977FBF}"/>
               </a:ext>
             </a:extLst>
           </p:cNvPr>
@@ -5996,7 +5996,7 @@
           <p:cNvPr id="5" name="">
             <a:extLst xmlns:a="http://schemas.openxmlformats.org/drawingml/2006/main">
               <a:ext uri="{FF2B5EF4-FFF2-40B4-BE49-F238E27FC236}">
-                <a16:creationId xmlns:a16="http://schemas.microsoft.com/office/drawing/2014/main" id="{9EEDE96B-ECDA-4338-9803-0D32EAA0068B}"/>
+                <a16:creationId xmlns:a16="http://schemas.microsoft.com/office/drawing/2014/main" id="{AFB85701-F656-49F9-93D2-D80A0F1D4D07}"/>
               </a:ext>
             </a:extLst>
           </p:cNvPr>
@@ -6051,7 +6051,7 @@
     </p:spTree>
     <p:extLst>
       <p:ext uri="{BB962C8B-B14F-4D97-AF65-F5344CB8AC3E}">
-        <p14:creationId xmlns:p14="http://schemas.microsoft.com/office/powerpoint/2010/main" val="781179404"/>
+        <p14:creationId xmlns:p14="http://schemas.microsoft.com/office/powerpoint/2010/main" val="1385586393"/>
       </p:ext>
     </p:extLst>
   </p:cSld>
@@ -6082,7 +6082,7 @@
           <p:cNvPr id="6" name="">
             <a:extLst xmlns:a="http://schemas.openxmlformats.org/drawingml/2006/main">
               <a:ext uri="{FF2B5EF4-FFF2-40B4-BE49-F238E27FC236}">
-                <a16:creationId xmlns:a16="http://schemas.microsoft.com/office/drawing/2014/main" id="{A007C271-92BC-4B82-A38C-397D129B5127}"/>
+                <a16:creationId xmlns:a16="http://schemas.microsoft.com/office/drawing/2014/main" id="{8AA25826-8DE6-4392-A427-831EC4467333}"/>
               </a:ext>
             </a:extLst>
           </p:cNvPr>
@@ -6139,7 +6139,7 @@
           <p:cNvPr id="2" name="">
             <a:extLst xmlns:a="http://schemas.openxmlformats.org/drawingml/2006/main">
               <a:ext uri="{FF2B5EF4-FFF2-40B4-BE49-F238E27FC236}">
-                <a16:creationId xmlns:a16="http://schemas.microsoft.com/office/drawing/2014/main" id="{E9D7435F-9B7C-4C07-9503-19FA7BEBB44C}"/>
+                <a16:creationId xmlns:a16="http://schemas.microsoft.com/office/drawing/2014/main" id="{8C90E8E5-13AA-47E5-8FEA-5462B4B37179}"/>
               </a:ext>
             </a:extLst>
           </p:cNvPr>
@@ -6196,7 +6196,7 @@
           <p:cNvPr id="3" name="">
             <a:extLst xmlns:a="http://schemas.openxmlformats.org/drawingml/2006/main">
               <a:ext uri="{FF2B5EF4-FFF2-40B4-BE49-F238E27FC236}">
-                <a16:creationId xmlns:a16="http://schemas.microsoft.com/office/drawing/2014/main" id="{0C57AEA7-D99E-4340-9229-AFE40AEF9D90}"/>
+                <a16:creationId xmlns:a16="http://schemas.microsoft.com/office/drawing/2014/main" id="{ACC1F6C0-A516-459A-AF99-78110774E814}"/>
               </a:ext>
             </a:extLst>
           </p:cNvPr>
@@ -6253,7 +6253,7 @@
           <p:cNvPr id="4" name="">
             <a:extLst xmlns:a="http://schemas.openxmlformats.org/drawingml/2006/main">
               <a:ext uri="{FF2B5EF4-FFF2-40B4-BE49-F238E27FC236}">
-                <a16:creationId xmlns:a16="http://schemas.microsoft.com/office/drawing/2014/main" id="{7EE0A190-C2BF-48C9-8E2D-AE336A08F262}"/>
+                <a16:creationId xmlns:a16="http://schemas.microsoft.com/office/drawing/2014/main" id="{FCB42D8C-1116-4BE9-93CC-F516F07953DA}"/>
               </a:ext>
             </a:extLst>
           </p:cNvPr>
@@ -6310,7 +6310,7 @@
           <p:cNvPr id="5" name="">
             <a:extLst xmlns:a="http://schemas.openxmlformats.org/drawingml/2006/main">
               <a:ext uri="{FF2B5EF4-FFF2-40B4-BE49-F238E27FC236}">
-                <a16:creationId xmlns:a16="http://schemas.microsoft.com/office/drawing/2014/main" id="{295DE752-8173-404A-8929-44196B9A534F}"/>
+                <a16:creationId xmlns:a16="http://schemas.microsoft.com/office/drawing/2014/main" id="{F82F9214-FA0C-44F1-9041-1EE78A4D98E0}"/>
               </a:ext>
             </a:extLst>
           </p:cNvPr>
@@ -6365,7 +6365,7 @@
     </p:spTree>
     <p:extLst>
       <p:ext uri="{BB962C8B-B14F-4D97-AF65-F5344CB8AC3E}">
-        <p14:creationId xmlns:p14="http://schemas.microsoft.com/office/powerpoint/2010/main" val="771717961"/>
+        <p14:creationId xmlns:p14="http://schemas.microsoft.com/office/powerpoint/2010/main" val="1051972793"/>
       </p:ext>
     </p:extLst>
   </p:cSld>
@@ -6396,7 +6396,7 @@
           <p:cNvPr id="7" name="">
             <a:extLst xmlns:a="http://schemas.openxmlformats.org/drawingml/2006/main">
               <a:ext uri="{FF2B5EF4-FFF2-40B4-BE49-F238E27FC236}">
-                <a16:creationId xmlns:a16="http://schemas.microsoft.com/office/drawing/2014/main" id="{6FCDC139-7C77-4FA6-971F-0593B84346DD}"/>
+                <a16:creationId xmlns:a16="http://schemas.microsoft.com/office/drawing/2014/main" id="{AD19CB73-0CF1-4EB8-876E-78EB09EDF48D}"/>
               </a:ext>
             </a:extLst>
           </p:cNvPr>
@@ -6453,7 +6453,7 @@
           <p:cNvPr id="2" name="">
             <a:extLst xmlns:a="http://schemas.openxmlformats.org/drawingml/2006/main">
               <a:ext uri="{FF2B5EF4-FFF2-40B4-BE49-F238E27FC236}">
-                <a16:creationId xmlns:a16="http://schemas.microsoft.com/office/drawing/2014/main" id="{9D7A46B5-4501-43D9-9782-C44E2CE8FDBC}"/>
+                <a16:creationId xmlns:a16="http://schemas.microsoft.com/office/drawing/2014/main" id="{6F220B10-8D1D-448C-B451-13E9245FCD5B}"/>
               </a:ext>
             </a:extLst>
           </p:cNvPr>
@@ -6510,7 +6510,7 @@
           <p:cNvPr id="3" name="">
             <a:extLst xmlns:a="http://schemas.openxmlformats.org/drawingml/2006/main">
               <a:ext uri="{FF2B5EF4-FFF2-40B4-BE49-F238E27FC236}">
-                <a16:creationId xmlns:a16="http://schemas.microsoft.com/office/drawing/2014/main" id="{ED004258-0930-446D-9FAD-8CC529143AAB}"/>
+                <a16:creationId xmlns:a16="http://schemas.microsoft.com/office/drawing/2014/main" id="{05A38501-AF9D-40F8-A2F3-973052AC6FE0}"/>
               </a:ext>
             </a:extLst>
           </p:cNvPr>
@@ -6567,7 +6567,7 @@
           <p:cNvPr id="4" name="">
             <a:extLst xmlns:a="http://schemas.openxmlformats.org/drawingml/2006/main">
               <a:ext uri="{FF2B5EF4-FFF2-40B4-BE49-F238E27FC236}">
-                <a16:creationId xmlns:a16="http://schemas.microsoft.com/office/drawing/2014/main" id="{430E1E32-21D6-4FCC-8727-DEE840C305E9}"/>
+                <a16:creationId xmlns:a16="http://schemas.microsoft.com/office/drawing/2014/main" id="{C5E93F38-C7A1-46E4-867B-73B47DEB74EE}"/>
               </a:ext>
             </a:extLst>
           </p:cNvPr>
@@ -6624,7 +6624,7 @@
           <p:cNvPr id="5" name="">
             <a:extLst xmlns:a="http://schemas.openxmlformats.org/drawingml/2006/main">
               <a:ext uri="{FF2B5EF4-FFF2-40B4-BE49-F238E27FC236}">
-                <a16:creationId xmlns:a16="http://schemas.microsoft.com/office/drawing/2014/main" id="{9BDFC2BE-4F34-4DF3-B409-2053192F85EE}"/>
+                <a16:creationId xmlns:a16="http://schemas.microsoft.com/office/drawing/2014/main" id="{72C4D1B9-B4C0-4437-9277-E9456EE42B0C}"/>
               </a:ext>
             </a:extLst>
           </p:cNvPr>
@@ -6681,7 +6681,7 @@
           <p:cNvPr id="6" name="">
             <a:extLst xmlns:a="http://schemas.openxmlformats.org/drawingml/2006/main">
               <a:ext uri="{FF2B5EF4-FFF2-40B4-BE49-F238E27FC236}">
-                <a16:creationId xmlns:a16="http://schemas.microsoft.com/office/drawing/2014/main" id="{F8B5B72A-1C3C-4729-960D-7DE2EA5F87FB}"/>
+                <a16:creationId xmlns:a16="http://schemas.microsoft.com/office/drawing/2014/main" id="{48E3B712-EF18-4D3A-8D99-1ED49EEF8C14}"/>
               </a:ext>
             </a:extLst>
           </p:cNvPr>
@@ -6736,7 +6736,7 @@
     </p:spTree>
     <p:extLst>
       <p:ext uri="{BB962C8B-B14F-4D97-AF65-F5344CB8AC3E}">
-        <p14:creationId xmlns:p14="http://schemas.microsoft.com/office/powerpoint/2010/main" val="1198386311"/>
+        <p14:creationId xmlns:p14="http://schemas.microsoft.com/office/powerpoint/2010/main" val="226650563"/>
       </p:ext>
     </p:extLst>
   </p:cSld>

--- a/docs/UrbanHeat-AlKhor-Pitch.pptx
+++ b/docs/UrbanHeat-AlKhor-Pitch.pptx
@@ -2,22 +2,24 @@
 <file path=ppt/presentation.xml><?xml version="1.0" encoding="utf-8"?>
 <p:presentation xmlns:p="http://schemas.openxmlformats.org/presentationml/2006/main">
   <p:sldMasterIdLst>
-    <p:sldMasterId xmlns:r="http://schemas.openxmlformats.org/officeDocument/2006/relationships" id="2147483648" r:id="R9da7009cf8e744ee"/>
+    <p:sldMasterId xmlns:r="http://schemas.openxmlformats.org/officeDocument/2006/relationships" id="2147483648" r:id="R34a720634f884fa6"/>
   </p:sldMasterIdLst>
   <p:notesMasterIdLst>
-    <p:notesMasterId xmlns:r="http://schemas.openxmlformats.org/officeDocument/2006/relationships" r:id="R235bd7e8e53a4bf3"/>
+    <p:notesMasterId xmlns:r="http://schemas.openxmlformats.org/officeDocument/2006/relationships" r:id="R7acdba10d2714941"/>
   </p:notesMasterIdLst>
   <p:sldIdLst>
-    <p:sldId xmlns:r="http://schemas.openxmlformats.org/officeDocument/2006/relationships" id="256" r:id="Rd9a1fdf8d16d48d4"/>
-    <p:sldId xmlns:r="http://schemas.openxmlformats.org/officeDocument/2006/relationships" id="257" r:id="Rd5854f3ed8a94889"/>
-    <p:sldId xmlns:r="http://schemas.openxmlformats.org/officeDocument/2006/relationships" id="258" r:id="Rd04dda95d7f84c87"/>
-    <p:sldId xmlns:r="http://schemas.openxmlformats.org/officeDocument/2006/relationships" id="259" r:id="R8d5e1eaee84146ef"/>
-    <p:sldId xmlns:r="http://schemas.openxmlformats.org/officeDocument/2006/relationships" id="260" r:id="Ra319be216f944813"/>
-    <p:sldId xmlns:r="http://schemas.openxmlformats.org/officeDocument/2006/relationships" id="261" r:id="Re037c46e76b34f9a"/>
-    <p:sldId xmlns:r="http://schemas.openxmlformats.org/officeDocument/2006/relationships" id="262" r:id="R7b6622cb1e90437e"/>
-    <p:sldId xmlns:r="http://schemas.openxmlformats.org/officeDocument/2006/relationships" id="263" r:id="R18e1387fdd1d4f64"/>
-    <p:sldId xmlns:r="http://schemas.openxmlformats.org/officeDocument/2006/relationships" id="264" r:id="R4b07a4b6df7d4ed9"/>
-    <p:sldId xmlns:r="http://schemas.openxmlformats.org/officeDocument/2006/relationships" id="265" r:id="R79ea4d32003d46b4"/>
+    <p:sldId xmlns:r="http://schemas.openxmlformats.org/officeDocument/2006/relationships" id="256" r:id="R98937b3c76934bc4"/>
+    <p:sldId xmlns:r="http://schemas.openxmlformats.org/officeDocument/2006/relationships" id="257" r:id="Rf28dc4b617c7440b"/>
+    <p:sldId xmlns:r="http://schemas.openxmlformats.org/officeDocument/2006/relationships" id="258" r:id="R0c88756a305f4ec2"/>
+    <p:sldId xmlns:r="http://schemas.openxmlformats.org/officeDocument/2006/relationships" id="259" r:id="R82837979b3a04773"/>
+    <p:sldId xmlns:r="http://schemas.openxmlformats.org/officeDocument/2006/relationships" id="260" r:id="R0542771bda4a4441"/>
+    <p:sldId xmlns:r="http://schemas.openxmlformats.org/officeDocument/2006/relationships" id="261" r:id="Rea121bcc02dd4701"/>
+    <p:sldId xmlns:r="http://schemas.openxmlformats.org/officeDocument/2006/relationships" id="262" r:id="Ra74c5046c83e4649"/>
+    <p:sldId xmlns:r="http://schemas.openxmlformats.org/officeDocument/2006/relationships" id="263" r:id="R58bcfc7cf28648a8"/>
+    <p:sldId xmlns:r="http://schemas.openxmlformats.org/officeDocument/2006/relationships" id="264" r:id="R4bbacd5e86654ace"/>
+    <p:sldId xmlns:r="http://schemas.openxmlformats.org/officeDocument/2006/relationships" id="265" r:id="R7303b011f8b84302"/>
+    <p:sldId xmlns:r="http://schemas.openxmlformats.org/officeDocument/2006/relationships" id="266" r:id="R5c22cfe2298c4f09"/>
+    <p:sldId xmlns:r="http://schemas.openxmlformats.org/officeDocument/2006/relationships" id="267" r:id="Rc01bd0308261467e"/>
   </p:sldIdLst>
   <p:sldSz cx="12192000" cy="6858000"/>
   <p:notesSz cx="6858000" cy="9144000"/>
@@ -521,6 +523,146 @@
           <a:lstStyle xmlns:a="http://schemas.openxmlformats.org/drawingml/2006/main"/>
           <a:p xmlns:a="http://schemas.openxmlformats.org/drawingml/2006/main">
             <a:r>
+              <a:t>Proposed next-stage activities, not completed work. See README sections 1, 2 and 8. A planner partnership, field validation and suitable imagery are dependencies; no partner agreement or funded incubation is claimed.</a:t>
+            </a:r>
+          </a:p>
+        </p:txBody>
+      </p:sp>
+      <p:sp>
+        <p:nvSpPr>
+          <p:cNvPr id="4" name="Slide Number Placeholder 3"/>
+          <p:cNvSpPr>
+            <a:spLocks xmlns:a="http://schemas.openxmlformats.org/drawingml/2006/main" noGrp="1"/>
+          </p:cNvSpPr>
+          <p:nvPr>
+            <p:ph type="sldNum" idx="5"/>
+          </p:nvPr>
+        </p:nvSpPr>
+        <p:spPr/>
+        <p:txBody>
+          <a:bodyPr xmlns:a="http://schemas.openxmlformats.org/drawingml/2006/main"/>
+          <a:lstStyle xmlns:a="http://schemas.openxmlformats.org/drawingml/2006/main"/>
+          <a:p xmlns:a="http://schemas.openxmlformats.org/drawingml/2006/main"/>
+        </p:txBody>
+      </p:sp>
+    </p:spTree>
+  </p:cSld>
+  <p:clrMapOvr>
+    <a:masterClrMapping xmlns:a="http://schemas.openxmlformats.org/drawingml/2006/main"/>
+  </p:clrMapOvr>
+</p:notes>
+</file>
+
+<file path=ppt/notesSlides/notesSlide11.xml><?xml version="1.0" encoding="utf-8"?>
+<p:notes xmlns:p="http://schemas.openxmlformats.org/presentationml/2006/main">
+  <p:cSld>
+    <p:spTree>
+      <p:nvGrpSpPr>
+        <p:cNvPr id="1" name=""/>
+        <p:cNvGrpSpPr/>
+        <p:nvPr/>
+      </p:nvGrpSpPr>
+      <p:grpSpPr>
+        <a:xfrm xmlns:a="http://schemas.openxmlformats.org/drawingml/2006/main"/>
+      </p:grpSpPr>
+      <p:sp>
+        <p:nvSpPr>
+          <p:cNvPr id="2" name="Slide Image Placeholder 1"/>
+          <p:cNvSpPr>
+            <a:spLocks xmlns:a="http://schemas.openxmlformats.org/drawingml/2006/main" noGrp="1"/>
+          </p:cNvSpPr>
+          <p:nvPr>
+            <p:ph type="sldImg" idx="0"/>
+          </p:nvPr>
+        </p:nvSpPr>
+        <p:spPr/>
+      </p:sp>
+      <p:sp>
+        <p:nvSpPr>
+          <p:cNvPr id="3" name="Notes Placeholder 2"/>
+          <p:cNvSpPr>
+            <a:spLocks xmlns:a="http://schemas.openxmlformats.org/drawingml/2006/main" noGrp="1"/>
+          </p:cNvSpPr>
+          <p:nvPr>
+            <p:ph type="body" idx="1"/>
+          </p:nvPr>
+        </p:nvSpPr>
+        <p:spPr/>
+        <p:txBody>
+          <a:bodyPr xmlns:a="http://schemas.openxmlformats.org/drawingml/2006/main"/>
+          <a:lstStyle xmlns:a="http://schemas.openxmlformats.org/drawingml/2006/main"/>
+          <a:p xmlns:a="http://schemas.openxmlformats.org/drawingml/2006/main">
+            <a:r>
+              <a:t>Roles assigned at the team leader’s request on 5 October 2026. Nasser is registered leader. Other responsibilities are proposed review ownership and actual member review remains pending. All five platform registrations showed Signed in during the live check. Submission still requires final approval; evaluator access is pending.</a:t>
+            </a:r>
+          </a:p>
+        </p:txBody>
+      </p:sp>
+      <p:sp>
+        <p:nvSpPr>
+          <p:cNvPr id="4" name="Slide Number Placeholder 3"/>
+          <p:cNvSpPr>
+            <a:spLocks xmlns:a="http://schemas.openxmlformats.org/drawingml/2006/main" noGrp="1"/>
+          </p:cNvSpPr>
+          <p:nvPr>
+            <p:ph type="sldNum" idx="5"/>
+          </p:nvPr>
+        </p:nvSpPr>
+        <p:spPr/>
+        <p:txBody>
+          <a:bodyPr xmlns:a="http://schemas.openxmlformats.org/drawingml/2006/main"/>
+          <a:lstStyle xmlns:a="http://schemas.openxmlformats.org/drawingml/2006/main"/>
+          <a:p xmlns:a="http://schemas.openxmlformats.org/drawingml/2006/main"/>
+        </p:txBody>
+      </p:sp>
+    </p:spTree>
+  </p:cSld>
+  <p:clrMapOvr>
+    <a:masterClrMapping xmlns:a="http://schemas.openxmlformats.org/drawingml/2006/main"/>
+  </p:clrMapOvr>
+</p:notes>
+</file>
+
+<file path=ppt/notesSlides/notesSlide12.xml><?xml version="1.0" encoding="utf-8"?>
+<p:notes xmlns:p="http://schemas.openxmlformats.org/presentationml/2006/main">
+  <p:cSld>
+    <p:spTree>
+      <p:nvGrpSpPr>
+        <p:cNvPr id="1" name=""/>
+        <p:cNvGrpSpPr/>
+        <p:nvPr/>
+      </p:nvGrpSpPr>
+      <p:grpSpPr>
+        <a:xfrm xmlns:a="http://schemas.openxmlformats.org/drawingml/2006/main"/>
+      </p:grpSpPr>
+      <p:sp>
+        <p:nvSpPr>
+          <p:cNvPr id="2" name="Slide Image Placeholder 1"/>
+          <p:cNvSpPr>
+            <a:spLocks xmlns:a="http://schemas.openxmlformats.org/drawingml/2006/main" noGrp="1"/>
+          </p:cNvSpPr>
+          <p:nvPr>
+            <p:ph type="sldImg" idx="0"/>
+          </p:nvPr>
+        </p:nvSpPr>
+        <p:spPr/>
+      </p:sp>
+      <p:sp>
+        <p:nvSpPr>
+          <p:cNvPr id="3" name="Notes Placeholder 2"/>
+          <p:cNvSpPr>
+            <a:spLocks xmlns:a="http://schemas.openxmlformats.org/drawingml/2006/main" noGrp="1"/>
+          </p:cNvSpPr>
+          <p:nvPr>
+            <p:ph type="body" idx="1"/>
+          </p:nvPr>
+        </p:nvSpPr>
+        <p:spPr/>
+        <p:txBody>
+          <a:bodyPr xmlns:a="http://schemas.openxmlformats.org/drawingml/2006/main"/>
+          <a:lstStyle xmlns:a="http://schemas.openxmlformats.org/drawingml/2006/main"/>
+          <a:p xmlns:a="http://schemas.openxmlformats.org/drawingml/2006/main">
+            <a:r>
               <a:t>Sources: README sections 3 and 10, DATA-LICENSES.md, scene.json, landsat-scene.json and metadata. These are dataset attributions, not claims of field validation.</a:t>
             </a:r>
           </a:p>
@@ -591,7 +733,7 @@
           <a:lstStyle xmlns:a="http://schemas.openxmlformats.org/drawingml/2006/main"/>
           <a:p xmlns:a="http://schemas.openxmlformats.org/drawingml/2006/main">
             <a:r>
-              <a:t>Source: README sections 1, 2 and 8. The use case is proposed, not validated with users.</a:t>
+              <a:t>Proposed problem and user need from README sections 1 and 2. No field interviews, exposure measurements or validated benefit claimed.</a:t>
             </a:r>
           </a:p>
         </p:txBody>
@@ -661,7 +803,7 @@
           <a:lstStyle xmlns:a="http://schemas.openxmlformats.org/drawingml/2006/main"/>
           <a:p xmlns:a="http://schemas.openxmlformats.org/drawingml/2006/main">
             <a:r>
-              <a:t>Sources: scene.json, landsat-scene.json, metadata, README sections 3 and 4. Contains modified Copernicus Sentinel data (2026). Landsat courtesy USGS, doi:10.5066/P9OGBGM6. ESA WorldCover 2021 v200, Zanaga et al. (2022), CC BY 4.0, doi:10.5281/zenodo.7254220. OpenStreetMap contributors, ODbL 1.0.</a:t>
+              <a:t>Source: README sections 1, 2 and 8. The use case is proposed, not validated with users.</a:t>
             </a:r>
           </a:p>
         </p:txBody>
@@ -731,7 +873,7 @@
           <a:lstStyle xmlns:a="http://schemas.openxmlformats.org/drawingml/2006/main"/>
           <a:p xmlns:a="http://schemas.openxmlformats.org/drawingml/2006/main">
             <a:r>
-              <a:t>Source: results/planning-map.png, results/planning-summary.json and aoi.geojson. WGS84 window 51.445-51.555 E, 25.635-25.730 N. Includes city, northern edge, Al Bayt Stadium and surrounding context. It is not an official administrative boundary. All source-image labels must remain visible.</a:t>
+              <a:t>Sources: scene.json, landsat-scene.json, metadata, README sections 3 and 4. Contains modified Copernicus Sentinel data (2026). Landsat courtesy USGS, doi:10.5066/P9OGBGM6. ESA WorldCover 2021 v200, Zanaga et al. (2022), CC BY 4.0, doi:10.5281/zenodo.7254220. OpenStreetMap contributors, ODbL 1.0.</a:t>
             </a:r>
           </a:p>
         </p:txBody>
@@ -801,7 +943,7 @@
           <a:lstStyle xmlns:a="http://schemas.openxmlformats.org/drawingml/2006/main"/>
           <a:p xmlns:a="http://schemas.openxmlformats.org/drawingml/2006/main">
             <a:r>
-              <a:t>Source: results/multidate-temperature.png and coastal-multidate-summary.json. The two accepted dates share screened support. Footprint is observed sample area, not total built-up city area. Surface temperature is not air temperature or heat-health risk.</a:t>
+              <a:t>Editable workflow diagram. Methods are detailed in README section 4. Inputs are 35 hashed files; matching support is required for the two accepted thermal dates. Ranking is an investigation heuristic.</a:t>
             </a:r>
           </a:p>
         </p:txBody>
@@ -871,7 +1013,7 @@
           <a:lstStyle xmlns:a="http://schemas.openxmlformats.org/drawingml/2006/main"/>
           <a:p xmlns:a="http://schemas.openxmlformats.org/drawingml/2006/main">
             <a:r>
-              <a:t>Source: results/planning-summary.json, planning-sensitivity.csv and README section 8. Green-pixel share is thresholded NDVI, not subpixel vegetation fraction. Building coverage is contributed and incomplete. Candidate retained sample footprint totals 31.8195 km².</a:t>
+              <a:t>Source: results/planning-map.png, results/planning-summary.json and aoi.geojson. WGS84 window 51.445-51.555 E, 25.635-25.730 N. Includes city, northern edge, Al Bayt Stadium and surrounding context. It is not an official administrative boundary. All source-image labels must remain visible.</a:t>
             </a:r>
           </a:p>
         </p:txBody>
@@ -941,7 +1083,7 @@
           <a:lstStyle xmlns:a="http://schemas.openxmlformats.org/drawingml/2006/main"/>
           <a:p xmlns:a="http://schemas.openxmlformats.org/drawingml/2006/main">
             <a:r>
-              <a:t>Source: README sections 6 and 8, reference-samples.csv, notebook-verification.json when available. 20/30 coastal references agree with the spectral/QA screen. All 30 OSM water-polygon references disagree, with some contributed polygons spanning dry land. These positive-only agreement tests do not establish overall accuracy. Reproducibility does not establish scientific accuracy. Normal-kernel verification: https://github.com/NasserAlhuri/spaceHacathon/actions/runs/37269889977. Source commit 9781b95a46d86eb858ae9714ee53198ad22cfb6c. The executed notebook was retrieved from artifact 11328001190. All seven regenerated CSV tables match the supplied baseline byte for byte.</a:t>
+              <a:t>Source: results/multidate-temperature.png and coastal-multidate-summary.json. The two accepted dates share screened support. Footprint is observed sample area, not total built-up city area. Surface temperature is not air temperature or heat-health risk.</a:t>
             </a:r>
           </a:p>
         </p:txBody>
@@ -1011,7 +1153,7 @@
           <a:lstStyle xmlns:a="http://schemas.openxmlformats.org/drawingml/2006/main"/>
           <a:p xmlns:a="http://schemas.openxmlformats.org/drawingml/2006/main">
             <a:r>
-              <a:t>Source: README sections 2 and 8 and handover. No proprietary VHR imagery or own segmentation model is used. ST_QA reports product uncertainty and does not include every systematic error. Two morning dates cannot establish long-term change.</a:t>
+              <a:t>Source: results/planning-summary.json, planning-sensitivity.csv and README section 8. Green-pixel share is thresholded NDVI, not subpixel vegetation fraction. Building coverage is contributed and incomplete. Candidate retained sample footprint totals 31.8195 km².</a:t>
             </a:r>
           </a:p>
         </p:txBody>
@@ -1081,7 +1223,7 @@
           <a:lstStyle xmlns:a="http://schemas.openxmlformats.org/drawingml/2006/main"/>
           <a:p xmlns:a="http://schemas.openxmlformats.org/drawingml/2006/main">
             <a:r>
-              <a:t>Source: README section 9 and handover. Do not invent contributions. Prior dashboard reported two Signed in and three Pending, not rechecked in this workspace. Deadline conflict remains unresolved. Nothing has been submitted.</a:t>
+              <a:t>Source: README sections 6 and 8, reference-samples.csv, notebook-verification.json when available. 20/30 coastal references agree with the spectral/QA screen. All 30 OSM water-polygon references disagree, with some contributed polygons spanning dry land. These positive-only agreement tests do not establish overall accuracy. Reproducibility does not establish scientific accuracy. Normal-kernel verification: https://github.com/NasserAlhuri/spaceHacathon/actions/runs/37269889977. Source commit 9781b95a46d86eb858ae9714ee53198ad22cfb6c. The executed notebook was retrieved from artifact 11328001190. All seven regenerated CSV tables match the supplied baseline byte for byte.</a:t>
             </a:r>
           </a:p>
         </p:txBody>
@@ -1128,7 +1270,7 @@
           <p:cNvPr id="4" name="Accent rule">
             <a:extLst xmlns:a="http://schemas.openxmlformats.org/drawingml/2006/main">
               <a:ext uri="{FF2B5EF4-FFF2-40B4-BE49-F238E27FC236}">
-                <a16:creationId xmlns:a16="http://schemas.microsoft.com/office/drawing/2014/main" id="{9EDD7714-C480-43FC-A47A-552F72BBF919}"/>
+                <a16:creationId xmlns:a16="http://schemas.microsoft.com/office/drawing/2014/main" id="{2CC0BA0D-58FF-45AF-B5D5-74814FE1532F}"/>
               </a:ext>
             </a:extLst>
           </p:cNvPr>
@@ -1159,7 +1301,7 @@
           <p:cNvPr id="2" name="Title">
             <a:extLst xmlns:a="http://schemas.openxmlformats.org/drawingml/2006/main">
               <a:ext uri="{FF2B5EF4-FFF2-40B4-BE49-F238E27FC236}">
-                <a16:creationId xmlns:a16="http://schemas.microsoft.com/office/drawing/2014/main" id="{A20D4BFD-8B9A-4A39-BA88-1C81679BB957}"/>
+                <a16:creationId xmlns:a16="http://schemas.microsoft.com/office/drawing/2014/main" id="{B5DBD609-09E9-4D1D-90D1-0D424A343F3B}"/>
               </a:ext>
             </a:extLst>
           </p:cNvPr>
@@ -1306,7 +1448,7 @@
           <p:cNvPr id="3" name="Subtitle">
             <a:extLst xmlns:a="http://schemas.openxmlformats.org/drawingml/2006/main">
               <a:ext uri="{FF2B5EF4-FFF2-40B4-BE49-F238E27FC236}">
-                <a16:creationId xmlns:a16="http://schemas.microsoft.com/office/drawing/2014/main" id="{6B710D1C-3F91-4C88-ADFD-B4F54E5E7C37}"/>
+                <a16:creationId xmlns:a16="http://schemas.microsoft.com/office/drawing/2014/main" id="{63500446-4C60-417A-B129-2505FD2C4D9E}"/>
               </a:ext>
             </a:extLst>
           </p:cNvPr>
@@ -1470,7 +1612,7 @@
           <p:cNvPr id="3" name="Accent rule">
             <a:extLst xmlns:a="http://schemas.openxmlformats.org/drawingml/2006/main">
               <a:ext uri="{FF2B5EF4-FFF2-40B4-BE49-F238E27FC236}">
-                <a16:creationId xmlns:a16="http://schemas.microsoft.com/office/drawing/2014/main" id="{F1FF3A68-0FB4-49BB-83F2-DBC2DEA6E8B9}"/>
+                <a16:creationId xmlns:a16="http://schemas.microsoft.com/office/drawing/2014/main" id="{F60C8584-7584-4899-87AF-0419F0F9E8FF}"/>
               </a:ext>
             </a:extLst>
           </p:cNvPr>
@@ -1501,7 +1643,7 @@
           <p:cNvPr id="2" name="Section title">
             <a:extLst xmlns:a="http://schemas.openxmlformats.org/drawingml/2006/main">
               <a:ext uri="{FF2B5EF4-FFF2-40B4-BE49-F238E27FC236}">
-                <a16:creationId xmlns:a16="http://schemas.microsoft.com/office/drawing/2014/main" id="{96EE6CC2-1894-4130-BFC1-E12F53C697C6}"/>
+                <a16:creationId xmlns:a16="http://schemas.microsoft.com/office/drawing/2014/main" id="{B10D4715-6B12-4FE4-B6DC-5CEE7240168F}"/>
               </a:ext>
             </a:extLst>
           </p:cNvPr>
@@ -1665,7 +1807,7 @@
           <p:cNvPr id="4" name="Accent rule">
             <a:extLst xmlns:a="http://schemas.openxmlformats.org/drawingml/2006/main">
               <a:ext uri="{FF2B5EF4-FFF2-40B4-BE49-F238E27FC236}">
-                <a16:creationId xmlns:a16="http://schemas.microsoft.com/office/drawing/2014/main" id="{772A98FE-A9B2-4420-8B6C-49B01B8795BE}"/>
+                <a16:creationId xmlns:a16="http://schemas.microsoft.com/office/drawing/2014/main" id="{91A73822-E186-4F1D-9135-D30B575063FA}"/>
               </a:ext>
             </a:extLst>
           </p:cNvPr>
@@ -1696,7 +1838,7 @@
           <p:cNvPr id="2" name="Title">
             <a:extLst xmlns:a="http://schemas.openxmlformats.org/drawingml/2006/main">
               <a:ext uri="{FF2B5EF4-FFF2-40B4-BE49-F238E27FC236}">
-                <a16:creationId xmlns:a16="http://schemas.microsoft.com/office/drawing/2014/main" id="{9BF7433B-B877-4F7D-8988-C4C549378D37}"/>
+                <a16:creationId xmlns:a16="http://schemas.microsoft.com/office/drawing/2014/main" id="{8A0BBFBA-DD29-4A4F-9A85-BB154B4CC003}"/>
               </a:ext>
             </a:extLst>
           </p:cNvPr>
@@ -1843,7 +1985,7 @@
           <p:cNvPr id="3" name="Body">
             <a:extLst xmlns:a="http://schemas.openxmlformats.org/drawingml/2006/main">
               <a:ext uri="{FF2B5EF4-FFF2-40B4-BE49-F238E27FC236}">
-                <a16:creationId xmlns:a16="http://schemas.microsoft.com/office/drawing/2014/main" id="{3F1B5D70-C4BF-4521-A165-3F7F63AA5653}"/>
+                <a16:creationId xmlns:a16="http://schemas.microsoft.com/office/drawing/2014/main" id="{F06C5F58-0A1E-46E5-9A3A-89396AE0CDA9}"/>
               </a:ext>
             </a:extLst>
           </p:cNvPr>
@@ -2007,7 +2149,7 @@
           <p:cNvPr id="5" name="Accent rule">
             <a:extLst xmlns:a="http://schemas.openxmlformats.org/drawingml/2006/main">
               <a:ext uri="{FF2B5EF4-FFF2-40B4-BE49-F238E27FC236}">
-                <a16:creationId xmlns:a16="http://schemas.microsoft.com/office/drawing/2014/main" id="{CF9F64ED-8F83-4059-944D-0C218E35CFFC}"/>
+                <a16:creationId xmlns:a16="http://schemas.microsoft.com/office/drawing/2014/main" id="{0A9CE12C-77C2-442D-947C-3DFA997FB606}"/>
               </a:ext>
             </a:extLst>
           </p:cNvPr>
@@ -2038,7 +2180,7 @@
           <p:cNvPr id="2" name="Title">
             <a:extLst xmlns:a="http://schemas.openxmlformats.org/drawingml/2006/main">
               <a:ext uri="{FF2B5EF4-FFF2-40B4-BE49-F238E27FC236}">
-                <a16:creationId xmlns:a16="http://schemas.microsoft.com/office/drawing/2014/main" id="{0D14A448-D16A-4F91-9585-026F9D6235F8}"/>
+                <a16:creationId xmlns:a16="http://schemas.microsoft.com/office/drawing/2014/main" id="{8E6C702E-B61E-4581-A1A5-21A2EE7C6E6B}"/>
               </a:ext>
             </a:extLst>
           </p:cNvPr>
@@ -2185,7 +2327,7 @@
           <p:cNvPr id="3" name="Left column">
             <a:extLst xmlns:a="http://schemas.openxmlformats.org/drawingml/2006/main">
               <a:ext uri="{FF2B5EF4-FFF2-40B4-BE49-F238E27FC236}">
-                <a16:creationId xmlns:a16="http://schemas.microsoft.com/office/drawing/2014/main" id="{53B9ABC2-F42A-46F7-A073-6AC0190B8EDC}"/>
+                <a16:creationId xmlns:a16="http://schemas.microsoft.com/office/drawing/2014/main" id="{61D141DB-9F8B-4642-9385-217FAA901804}"/>
               </a:ext>
             </a:extLst>
           </p:cNvPr>
@@ -2332,7 +2474,7 @@
           <p:cNvPr id="4" name="Right column">
             <a:extLst xmlns:a="http://schemas.openxmlformats.org/drawingml/2006/main">
               <a:ext uri="{FF2B5EF4-FFF2-40B4-BE49-F238E27FC236}">
-                <a16:creationId xmlns:a16="http://schemas.microsoft.com/office/drawing/2014/main" id="{B23B4821-99AE-4936-9210-9F6A140C4782}"/>
+                <a16:creationId xmlns:a16="http://schemas.microsoft.com/office/drawing/2014/main" id="{79D8DD63-91FC-418F-94C4-B808F6D761ED}"/>
               </a:ext>
             </a:extLst>
           </p:cNvPr>
@@ -2496,7 +2638,7 @@
           <p:cNvPr id="4" name="Accent rule">
             <a:extLst xmlns:a="http://schemas.openxmlformats.org/drawingml/2006/main">
               <a:ext uri="{FF2B5EF4-FFF2-40B4-BE49-F238E27FC236}">
-                <a16:creationId xmlns:a16="http://schemas.microsoft.com/office/drawing/2014/main" id="{4D70C221-C50F-4A29-8C19-5DAD3C22707F}"/>
+                <a16:creationId xmlns:a16="http://schemas.microsoft.com/office/drawing/2014/main" id="{48D8D450-9A04-4FF8-BAA7-C4678D9C3664}"/>
               </a:ext>
             </a:extLst>
           </p:cNvPr>
@@ -2527,7 +2669,7 @@
           <p:cNvPr id="2" name="Title">
             <a:extLst xmlns:a="http://schemas.openxmlformats.org/drawingml/2006/main">
               <a:ext uri="{FF2B5EF4-FFF2-40B4-BE49-F238E27FC236}">
-                <a16:creationId xmlns:a16="http://schemas.microsoft.com/office/drawing/2014/main" id="{74081264-31A8-4FB8-B8BE-0736AEE2830B}"/>
+                <a16:creationId xmlns:a16="http://schemas.microsoft.com/office/drawing/2014/main" id="{32A6439C-DF7D-431F-B4D8-467542E59851}"/>
               </a:ext>
             </a:extLst>
           </p:cNvPr>
@@ -2674,7 +2816,7 @@
           <p:cNvPr id="3" name="Left column">
             <a:extLst xmlns:a="http://schemas.openxmlformats.org/drawingml/2006/main">
               <a:ext uri="{FF2B5EF4-FFF2-40B4-BE49-F238E27FC236}">
-                <a16:creationId xmlns:a16="http://schemas.microsoft.com/office/drawing/2014/main" id="{DE35C9B9-D91F-4362-8F2F-191A6A68991C}"/>
+                <a16:creationId xmlns:a16="http://schemas.microsoft.com/office/drawing/2014/main" id="{14F02E7C-D220-49F8-8410-0367F719A652}"/>
               </a:ext>
             </a:extLst>
           </p:cNvPr>
@@ -2859,12 +3001,12 @@
   </p:cSld>
   <p:clrMap bg1="lt1" tx1="dk1" bg2="lt2" tx2="dk2" accent1="accent1" accent2="accent2" accent3="accent3" accent4="accent4" accent5="accent5" accent6="accent6" hlink="hlink" folHlink="folHlink"/>
   <p:sldLayoutIdLst>
-    <p:sldLayoutId xmlns:r="http://schemas.openxmlformats.org/officeDocument/2006/relationships" id="2147483649" r:id="R6f6b47049fb14a9e"/>
-    <p:sldLayoutId xmlns:r="http://schemas.openxmlformats.org/officeDocument/2006/relationships" id="2147483650" r:id="R76b0c59d321642fb"/>
-    <p:sldLayoutId xmlns:r="http://schemas.openxmlformats.org/officeDocument/2006/relationships" id="2147483651" r:id="Re8032767f81e4f80"/>
-    <p:sldLayoutId xmlns:r="http://schemas.openxmlformats.org/officeDocument/2006/relationships" id="2147483652" r:id="R588a25390ad1443e"/>
-    <p:sldLayoutId xmlns:r="http://schemas.openxmlformats.org/officeDocument/2006/relationships" id="2147483653" r:id="R6981ce1ca4ef4d74"/>
-    <p:sldLayoutId xmlns:r="http://schemas.openxmlformats.org/officeDocument/2006/relationships" id="2147483654" r:id="R4fa89c9d80a745a5"/>
+    <p:sldLayoutId xmlns:r="http://schemas.openxmlformats.org/officeDocument/2006/relationships" id="2147483649" r:id="Ra6a2c7ae9ec4407e"/>
+    <p:sldLayoutId xmlns:r="http://schemas.openxmlformats.org/officeDocument/2006/relationships" id="2147483650" r:id="R55b20516cf0c478a"/>
+    <p:sldLayoutId xmlns:r="http://schemas.openxmlformats.org/officeDocument/2006/relationships" id="2147483651" r:id="Ree1322e59e1842c6"/>
+    <p:sldLayoutId xmlns:r="http://schemas.openxmlformats.org/officeDocument/2006/relationships" id="2147483652" r:id="R97c41d82a8ac4422"/>
+    <p:sldLayoutId xmlns:r="http://schemas.openxmlformats.org/officeDocument/2006/relationships" id="2147483653" r:id="Rb1972bbd9b894c4d"/>
+    <p:sldLayoutId xmlns:r="http://schemas.openxmlformats.org/officeDocument/2006/relationships" id="2147483654" r:id="R13e4b030124c4ce5"/>
   </p:sldLayoutIdLst>
   <p:txStyles>
     <p:titleStyle>
@@ -3412,10 +3554,10 @@
       </p:grpSpPr>
       <p:sp>
         <p:nvSpPr>
-          <p:cNvPr id="6" name="">
+          <p:cNvPr id="7" name="">
             <a:extLst xmlns:a="http://schemas.openxmlformats.org/drawingml/2006/main">
               <a:ext uri="{FF2B5EF4-FFF2-40B4-BE49-F238E27FC236}">
-                <a16:creationId xmlns:a16="http://schemas.microsoft.com/office/drawing/2014/main" id="{8F2341BF-72B5-43BF-AD8E-C508EC9B45D3}"/>
+                <a16:creationId xmlns:a16="http://schemas.microsoft.com/office/drawing/2014/main" id="{8ED49F76-FF23-4EF2-88F4-D39403A26550}"/>
               </a:ext>
             </a:extLst>
           </p:cNvPr>
@@ -3472,7 +3614,7 @@
           <p:cNvPr id="2" name="">
             <a:extLst xmlns:a="http://schemas.openxmlformats.org/drawingml/2006/main">
               <a:ext uri="{FF2B5EF4-FFF2-40B4-BE49-F238E27FC236}">
-                <a16:creationId xmlns:a16="http://schemas.microsoft.com/office/drawing/2014/main" id="{D0FFD07E-3317-475C-AA20-49FE6B38C18D}"/>
+                <a16:creationId xmlns:a16="http://schemas.microsoft.com/office/drawing/2014/main" id="{AC234046-9686-467C-AAD0-A02520D8C18B}"/>
               </a:ext>
             </a:extLst>
           </p:cNvPr>
@@ -3529,7 +3671,7 @@
           <p:cNvPr id="3" name="">
             <a:extLst xmlns:a="http://schemas.openxmlformats.org/drawingml/2006/main">
               <a:ext uri="{FF2B5EF4-FFF2-40B4-BE49-F238E27FC236}">
-                <a16:creationId xmlns:a16="http://schemas.microsoft.com/office/drawing/2014/main" id="{BDE7178B-B153-4EF8-A3C1-E769F0A6E371}"/>
+                <a16:creationId xmlns:a16="http://schemas.microsoft.com/office/drawing/2014/main" id="{A4BB9E9E-06DF-4C6E-A316-1CE9A4429251}"/>
               </a:ext>
             </a:extLst>
           </p:cNvPr>
@@ -3576,7 +3718,7 @@
                 <a:ea typeface="Bitstream Charter"/>
                 <a:cs typeface="Bitstream Charter"/>
               </a:rPr>
-              <a:t>Satellite indicators for urban-planning site visits</a:t>
+              <a:t>Theme: Urban Expansion, Land Use Change &amp; Heat Risk</a:t>
             </a:r>
           </a:p>
         </p:txBody>
@@ -3586,7 +3728,7 @@
           <p:cNvPr id="4" name="">
             <a:extLst xmlns:a="http://schemas.openxmlformats.org/drawingml/2006/main">
               <a:ext uri="{FF2B5EF4-FFF2-40B4-BE49-F238E27FC236}">
-                <a16:creationId xmlns:a16="http://schemas.microsoft.com/office/drawing/2014/main" id="{8ADE11C8-7041-4CDD-B054-F295A8A590E6}"/>
+                <a16:creationId xmlns:a16="http://schemas.microsoft.com/office/drawing/2014/main" id="{1025BA85-3DEB-42EA-BCFC-93CE1C88BEB6}"/>
               </a:ext>
             </a:extLst>
           </p:cNvPr>
@@ -3633,7 +3775,7 @@
                 <a:ea typeface="Bitstream Charter"/>
                 <a:cs typeface="Bitstream Charter"/>
               </a:rPr>
-              <a:t>Team Al Zubarah</a:t>
+              <a:t>Satellite indicators for urban-planning site visits</a:t>
             </a:r>
           </a:p>
         </p:txBody>
@@ -3643,7 +3785,7 @@
           <p:cNvPr id="5" name="">
             <a:extLst xmlns:a="http://schemas.openxmlformats.org/drawingml/2006/main">
               <a:ext uri="{FF2B5EF4-FFF2-40B4-BE49-F238E27FC236}">
-                <a16:creationId xmlns:a16="http://schemas.microsoft.com/office/drawing/2014/main" id="{D7A3C2EB-1661-4B64-86C7-D3EAD191053F}"/>
+                <a16:creationId xmlns:a16="http://schemas.microsoft.com/office/drawing/2014/main" id="{AF9B2683-A908-4367-90AA-FF17F8D7EDCE}"/>
               </a:ext>
             </a:extLst>
           </p:cNvPr>
@@ -3690,7 +3832,64 @@
                 <a:ea typeface="Bitstream Charter"/>
                 <a:cs typeface="Bitstream Charter"/>
               </a:rPr>
-              <a:t>UAE Space Academy hackathon, 5 October 2026</a:t>
+              <a:t>Team Al Zubarah, Qatar</a:t>
+            </a:r>
+          </a:p>
+        </p:txBody>
+      </p:sp>
+      <p:sp>
+        <p:nvSpPr>
+          <p:cNvPr id="6" name="">
+            <a:extLst xmlns:a="http://schemas.openxmlformats.org/drawingml/2006/main">
+              <a:ext uri="{FF2B5EF4-FFF2-40B4-BE49-F238E27FC236}">
+                <a16:creationId xmlns:a16="http://schemas.microsoft.com/office/drawing/2014/main" id="{225913F7-AE88-4FAB-ADE0-722F438AFB7F}"/>
+              </a:ext>
+            </a:extLst>
+          </p:cNvPr>
+          <p:cNvSpPr>
+            <a:spLocks xmlns:a="http://schemas.openxmlformats.org/drawingml/2006/main" noGrp="1"/>
+          </p:cNvSpPr>
+          <p:nvPr/>
+        </p:nvSpPr>
+        <p:spPr>
+          <a:xfrm xmlns:a="http://schemas.openxmlformats.org/drawingml/2006/main">
+            <a:off x="609600" y="5334000"/>
+            <a:ext cx="10972800" cy="523875"/>
+          </a:xfrm>
+          <a:prstGeom xmlns:a="http://schemas.openxmlformats.org/drawingml/2006/main" prst="rect">
+            <a:avLst/>
+          </a:prstGeom>
+          <a:noFill xmlns:a="http://schemas.openxmlformats.org/drawingml/2006/main"/>
+          <a:ln xmlns:a="http://schemas.openxmlformats.org/drawingml/2006/main" w="0">
+            <a:noFill/>
+          </a:ln>
+        </p:spPr>
+        <p:txBody>
+          <a:bodyPr xmlns:a="http://schemas.openxmlformats.org/drawingml/2006/main">
+            <a:noAutofit/>
+          </a:bodyPr>
+          <a:lstStyle xmlns:a="http://schemas.openxmlformats.org/drawingml/2006/main"/>
+          <a:p xmlns:a="http://schemas.openxmlformats.org/drawingml/2006/main">
+            <a:pPr>
+              <a:defRPr sz="2250" b="0">
+                <a:solidFill>
+                  <a:srgbClr val="213846"/>
+                </a:solidFill>
+                <a:latin typeface="Bitstream Charter"/>
+                <a:ea typeface="Bitstream Charter"/>
+                <a:cs typeface="Bitstream Charter"/>
+              </a:defRPr>
+            </a:pPr>
+            <a:r>
+              <a:rPr sz="2250" b="0">
+                <a:solidFill>
+                  <a:srgbClr val="213846"/>
+                </a:solidFill>
+                <a:latin typeface="Bitstream Charter"/>
+                <a:ea typeface="Bitstream Charter"/>
+                <a:cs typeface="Bitstream Charter"/>
+              </a:rPr>
+              <a:t>UAE Space Academy hackathon, October 2026</a:t>
             </a:r>
           </a:p>
         </p:txBody>
@@ -3698,7 +3897,7 @@
     </p:spTree>
     <p:extLst>
       <p:ext uri="{BB962C8B-B14F-4D97-AF65-F5344CB8AC3E}">
-        <p14:creationId xmlns:p14="http://schemas.microsoft.com/office/powerpoint/2010/main" val="1494649470"/>
+        <p14:creationId xmlns:p14="http://schemas.microsoft.com/office/powerpoint/2010/main" val="1741564981"/>
       </p:ext>
     </p:extLst>
   </p:cSld>
@@ -3726,10 +3925,10 @@
       </p:grpSpPr>
       <p:sp>
         <p:nvSpPr>
-          <p:cNvPr id="7" name="">
+          <p:cNvPr id="6" name="">
             <a:extLst xmlns:a="http://schemas.openxmlformats.org/drawingml/2006/main">
               <a:ext uri="{FF2B5EF4-FFF2-40B4-BE49-F238E27FC236}">
-                <a16:creationId xmlns:a16="http://schemas.microsoft.com/office/drawing/2014/main" id="{B016C474-575F-4D1C-97BA-9256525DC53B}"/>
+                <a16:creationId xmlns:a16="http://schemas.microsoft.com/office/drawing/2014/main" id="{A004AE9B-97BA-4660-8607-1D7703C3A285}"/>
               </a:ext>
             </a:extLst>
           </p:cNvPr>
@@ -3776,7 +3975,7 @@
                 <a:ea typeface="Bitstream Charter"/>
                 <a:cs typeface="Bitstream Charter"/>
               </a:rPr>
-              <a:t>Data attribution and sources</a:t>
+              <a:t>Potential impact and incubation next steps</a:t>
             </a:r>
           </a:p>
         </p:txBody>
@@ -3786,7 +3985,7 @@
           <p:cNvPr id="2" name="">
             <a:extLst xmlns:a="http://schemas.openxmlformats.org/drawingml/2006/main">
               <a:ext uri="{FF2B5EF4-FFF2-40B4-BE49-F238E27FC236}">
-                <a16:creationId xmlns:a16="http://schemas.microsoft.com/office/drawing/2014/main" id="{3747672D-39AC-4950-82A0-52A02B7513DB}"/>
+                <a16:creationId xmlns:a16="http://schemas.microsoft.com/office/drawing/2014/main" id="{72348A98-59C9-43F3-84F1-D3937B8BF02F}"/>
               </a:ext>
             </a:extLst>
           </p:cNvPr>
@@ -3833,7 +4032,7 @@
                 <a:ea typeface="Bitstream Charter"/>
                 <a:cs typeface="Bitstream Charter"/>
               </a:rPr>
-              <a:t>Contains modified Copernicus Sentinel data (2026). Optical source: Element 84 Earth Search.</a:t>
+              <a:t>Proposed benefit: help planners inspect the evidence behind a shortlist before arranging field visits. No time saving or cooling benefit has been measured.</a:t>
             </a:r>
           </a:p>
         </p:txBody>
@@ -3843,7 +4042,7 @@
           <p:cNvPr id="3" name="">
             <a:extLst xmlns:a="http://schemas.openxmlformats.org/drawingml/2006/main">
               <a:ext uri="{FF2B5EF4-FFF2-40B4-BE49-F238E27FC236}">
-                <a16:creationId xmlns:a16="http://schemas.microsoft.com/office/drawing/2014/main" id="{7F489D04-2378-41E6-B571-6D9FE2EDCC52}"/>
+                <a16:creationId xmlns:a16="http://schemas.microsoft.com/office/drawing/2014/main" id="{62C24E4E-B80B-417A-BAB8-A7D74B72E778}"/>
               </a:ext>
             </a:extLst>
           </p:cNvPr>
@@ -3890,7 +4089,7 @@
                 <a:ea typeface="Bitstream Charter"/>
                 <a:cs typeface="Bitstream Charter"/>
               </a:rPr>
-              <a:t>Landsat imagery courtesy of USGS. Collection 2 Level-2 surface temperature, doi:10.5066/P9OGBGM6.</a:t>
+              <a:t>Next pilot: confirm boundaries and reference labels, visit candidate sites and collect planner feedback.</a:t>
             </a:r>
           </a:p>
         </p:txBody>
@@ -3900,7 +4099,7 @@
           <p:cNvPr id="4" name="">
             <a:extLst xmlns:a="http://schemas.openxmlformats.org/drawingml/2006/main">
               <a:ext uri="{FF2B5EF4-FFF2-40B4-BE49-F238E27FC236}">
-                <a16:creationId xmlns:a16="http://schemas.microsoft.com/office/drawing/2014/main" id="{2D412FDB-06EB-4044-98D0-CC1AC0A2374E}"/>
+                <a16:creationId xmlns:a16="http://schemas.microsoft.com/office/drawing/2014/main" id="{B8A87169-882E-44F3-84FD-F69C96E93693}"/>
               </a:ext>
             </a:extLst>
           </p:cNvPr>
@@ -3947,6 +4146,748 @@
                 <a:ea typeface="Bitstream Charter"/>
                 <a:cs typeface="Bitstream Charter"/>
               </a:rPr>
+              <a:t>Incubation: assess suitable VHR data, implement and validate segmentation, then test shade and paving indicators.</a:t>
+            </a:r>
+          </a:p>
+        </p:txBody>
+      </p:sp>
+      <p:sp>
+        <p:nvSpPr>
+          <p:cNvPr id="5" name="">
+            <a:extLst xmlns:a="http://schemas.openxmlformats.org/drawingml/2006/main">
+              <a:ext uri="{FF2B5EF4-FFF2-40B4-BE49-F238E27FC236}">
+                <a16:creationId xmlns:a16="http://schemas.microsoft.com/office/drawing/2014/main" id="{54492EF2-9A1A-4E88-A3F8-54091CD78E57}"/>
+              </a:ext>
+            </a:extLst>
+          </p:cNvPr>
+          <p:cNvSpPr>
+            <a:spLocks xmlns:a="http://schemas.openxmlformats.org/drawingml/2006/main" noGrp="1"/>
+          </p:cNvSpPr>
+          <p:nvPr/>
+        </p:nvSpPr>
+        <p:spPr>
+          <a:xfrm xmlns:a="http://schemas.openxmlformats.org/drawingml/2006/main">
+            <a:off x="609600" y="6067425"/>
+            <a:ext cx="10668000" cy="590550"/>
+          </a:xfrm>
+          <a:prstGeom xmlns:a="http://schemas.openxmlformats.org/drawingml/2006/main" prst="rect">
+            <a:avLst/>
+          </a:prstGeom>
+          <a:noFill xmlns:a="http://schemas.openxmlformats.org/drawingml/2006/main"/>
+          <a:ln xmlns:a="http://schemas.openxmlformats.org/drawingml/2006/main" w="0">
+            <a:noFill/>
+          </a:ln>
+        </p:spPr>
+        <p:txBody>
+          <a:bodyPr xmlns:a="http://schemas.openxmlformats.org/drawingml/2006/main">
+            <a:noAutofit/>
+          </a:bodyPr>
+          <a:lstStyle xmlns:a="http://schemas.openxmlformats.org/drawingml/2006/main"/>
+          <a:p xmlns:a="http://schemas.openxmlformats.org/drawingml/2006/main">
+            <a:pPr>
+              <a:defRPr sz="1725" b="0">
+                <a:solidFill>
+                  <a:srgbClr val="526569"/>
+                </a:solidFill>
+                <a:latin typeface="Bitstream Charter"/>
+                <a:ea typeface="Bitstream Charter"/>
+                <a:cs typeface="Bitstream Charter"/>
+              </a:defRPr>
+            </a:pPr>
+            <a:r>
+              <a:rPr sz="1725" b="0">
+                <a:solidFill>
+                  <a:srgbClr val="526569"/>
+                </a:solidFill>
+                <a:latin typeface="Bitstream Charter"/>
+                <a:ea typeface="Bitstream Charter"/>
+                <a:cs typeface="Bitstream Charter"/>
+              </a:rPr>
+              <a:t>The current PoC does not measure urban expansion, health risk, causal cooling or long-term warming.</a:t>
+            </a:r>
+          </a:p>
+        </p:txBody>
+      </p:sp>
+    </p:spTree>
+    <p:extLst>
+      <p:ext uri="{BB962C8B-B14F-4D97-AF65-F5344CB8AC3E}">
+        <p14:creationId xmlns:p14="http://schemas.microsoft.com/office/powerpoint/2010/main" val="2142216958"/>
+      </p:ext>
+    </p:extLst>
+  </p:cSld>
+</p:sld>
+</file>
+
+<file path=ppt/slides/slide11.xml><?xml version="1.0" encoding="utf-8"?>
+<p:sld xmlns:p="http://schemas.openxmlformats.org/presentationml/2006/main">
+  <p:cSld>
+    <p:bg>
+      <p:bgPr>
+        <a:solidFill xmlns:a="http://schemas.openxmlformats.org/drawingml/2006/main">
+          <a:srgbClr val="F7F6F1"/>
+        </a:solidFill>
+      </p:bgPr>
+    </p:bg>
+    <p:spTree>
+      <p:nvGrpSpPr>
+        <p:cNvPr id="1" name=""/>
+        <p:cNvGrpSpPr/>
+        <p:nvPr/>
+      </p:nvGrpSpPr>
+      <p:grpSpPr>
+        <a:xfrm xmlns:a="http://schemas.openxmlformats.org/drawingml/2006/main"/>
+      </p:grpSpPr>
+      <p:sp>
+        <p:nvSpPr>
+          <p:cNvPr id="8" name="">
+            <a:extLst xmlns:a="http://schemas.openxmlformats.org/drawingml/2006/main">
+              <a:ext uri="{FF2B5EF4-FFF2-40B4-BE49-F238E27FC236}">
+                <a16:creationId xmlns:a16="http://schemas.microsoft.com/office/drawing/2014/main" id="{CE2C9003-D0A4-4253-8717-B0AE51444300}"/>
+              </a:ext>
+            </a:extLst>
+          </p:cNvPr>
+          <p:cNvSpPr>
+            <a:spLocks xmlns:a="http://schemas.openxmlformats.org/drawingml/2006/main" noGrp="1"/>
+          </p:cNvSpPr>
+          <p:nvPr/>
+        </p:nvSpPr>
+        <p:spPr>
+          <a:xfrm xmlns:a="http://schemas.openxmlformats.org/drawingml/2006/main">
+            <a:off x="609600" y="400050"/>
+            <a:ext cx="10972800" cy="857250"/>
+          </a:xfrm>
+          <a:prstGeom xmlns:a="http://schemas.openxmlformats.org/drawingml/2006/main" prst="rect">
+            <a:avLst/>
+          </a:prstGeom>
+          <a:noFill xmlns:a="http://schemas.openxmlformats.org/drawingml/2006/main"/>
+          <a:ln xmlns:a="http://schemas.openxmlformats.org/drawingml/2006/main" w="0">
+            <a:noFill/>
+          </a:ln>
+        </p:spPr>
+        <p:txBody>
+          <a:bodyPr xmlns:a="http://schemas.openxmlformats.org/drawingml/2006/main">
+            <a:noAutofit/>
+          </a:bodyPr>
+          <a:lstStyle xmlns:a="http://schemas.openxmlformats.org/drawingml/2006/main"/>
+          <a:p xmlns:a="http://schemas.openxmlformats.org/drawingml/2006/main">
+            <a:pPr>
+              <a:defRPr sz="3300" b="1">
+                <a:solidFill>
+                  <a:srgbClr val="163D46"/>
+                </a:solidFill>
+                <a:latin typeface="Bitstream Charter"/>
+                <a:ea typeface="Bitstream Charter"/>
+                <a:cs typeface="Bitstream Charter"/>
+              </a:defRPr>
+            </a:pPr>
+            <a:r>
+              <a:rPr sz="3300" b="1">
+                <a:solidFill>
+                  <a:srgbClr val="163D46"/>
+                </a:solidFill>
+                <a:latin typeface="Bitstream Charter"/>
+                <a:ea typeface="Bitstream Charter"/>
+                <a:cs typeface="Bitstream Charter"/>
+              </a:rPr>
+              <a:t>Team responsibilities for final review</a:t>
+            </a:r>
+          </a:p>
+        </p:txBody>
+      </p:sp>
+      <p:sp>
+        <p:nvSpPr>
+          <p:cNvPr id="2" name="">
+            <a:extLst xmlns:a="http://schemas.openxmlformats.org/drawingml/2006/main">
+              <a:ext uri="{FF2B5EF4-FFF2-40B4-BE49-F238E27FC236}">
+                <a16:creationId xmlns:a16="http://schemas.microsoft.com/office/drawing/2014/main" id="{5739893F-153B-41CB-8912-1598AF60DDE2}"/>
+              </a:ext>
+            </a:extLst>
+          </p:cNvPr>
+          <p:cNvSpPr>
+            <a:spLocks xmlns:a="http://schemas.openxmlformats.org/drawingml/2006/main" noGrp="1"/>
+          </p:cNvSpPr>
+          <p:nvPr/>
+        </p:nvSpPr>
+        <p:spPr>
+          <a:xfrm xmlns:a="http://schemas.openxmlformats.org/drawingml/2006/main">
+            <a:off x="609600" y="1571625"/>
+            <a:ext cx="10972800" cy="952500"/>
+          </a:xfrm>
+          <a:prstGeom xmlns:a="http://schemas.openxmlformats.org/drawingml/2006/main" prst="rect">
+            <a:avLst/>
+          </a:prstGeom>
+          <a:noFill xmlns:a="http://schemas.openxmlformats.org/drawingml/2006/main"/>
+          <a:ln xmlns:a="http://schemas.openxmlformats.org/drawingml/2006/main" w="0">
+            <a:noFill/>
+          </a:ln>
+        </p:spPr>
+        <p:txBody>
+          <a:bodyPr xmlns:a="http://schemas.openxmlformats.org/drawingml/2006/main">
+            <a:noAutofit/>
+          </a:bodyPr>
+          <a:lstStyle xmlns:a="http://schemas.openxmlformats.org/drawingml/2006/main"/>
+          <a:p xmlns:a="http://schemas.openxmlformats.org/drawingml/2006/main">
+            <a:pPr>
+              <a:defRPr sz="2250" b="0">
+                <a:solidFill>
+                  <a:srgbClr val="213846"/>
+                </a:solidFill>
+                <a:latin typeface="Bitstream Charter"/>
+                <a:ea typeface="Bitstream Charter"/>
+                <a:cs typeface="Bitstream Charter"/>
+              </a:defRPr>
+            </a:pPr>
+            <a:r>
+              <a:rPr sz="2250" b="0">
+                <a:solidFill>
+                  <a:srgbClr val="213846"/>
+                </a:solidFill>
+                <a:latin typeface="Bitstream Charter"/>
+                <a:ea typeface="Bitstream Charter"/>
+                <a:cs typeface="Bitstream Charter"/>
+              </a:rPr>
+              <a:t>Nasser Alhuri: team lead, integration, submission and pitch.</a:t>
+            </a:r>
+          </a:p>
+        </p:txBody>
+      </p:sp>
+      <p:sp>
+        <p:nvSpPr>
+          <p:cNvPr id="3" name="">
+            <a:extLst xmlns:a="http://schemas.openxmlformats.org/drawingml/2006/main">
+              <a:ext uri="{FF2B5EF4-FFF2-40B4-BE49-F238E27FC236}">
+                <a16:creationId xmlns:a16="http://schemas.microsoft.com/office/drawing/2014/main" id="{AF34FCB2-8E26-48E5-B0C2-EEF76BEA3C6F}"/>
+              </a:ext>
+            </a:extLst>
+          </p:cNvPr>
+          <p:cNvSpPr>
+            <a:spLocks xmlns:a="http://schemas.openxmlformats.org/drawingml/2006/main" noGrp="1"/>
+          </p:cNvSpPr>
+          <p:nvPr/>
+        </p:nvSpPr>
+        <p:spPr>
+          <a:xfrm xmlns:a="http://schemas.openxmlformats.org/drawingml/2006/main">
+            <a:off x="609600" y="2381250"/>
+            <a:ext cx="10972800" cy="952500"/>
+          </a:xfrm>
+          <a:prstGeom xmlns:a="http://schemas.openxmlformats.org/drawingml/2006/main" prst="rect">
+            <a:avLst/>
+          </a:prstGeom>
+          <a:noFill xmlns:a="http://schemas.openxmlformats.org/drawingml/2006/main"/>
+          <a:ln xmlns:a="http://schemas.openxmlformats.org/drawingml/2006/main" w="0">
+            <a:noFill/>
+          </a:ln>
+        </p:spPr>
+        <p:txBody>
+          <a:bodyPr xmlns:a="http://schemas.openxmlformats.org/drawingml/2006/main">
+            <a:noAutofit/>
+          </a:bodyPr>
+          <a:lstStyle xmlns:a="http://schemas.openxmlformats.org/drawingml/2006/main"/>
+          <a:p xmlns:a="http://schemas.openxmlformats.org/drawingml/2006/main">
+            <a:pPr>
+              <a:defRPr sz="2250" b="0">
+                <a:solidFill>
+                  <a:srgbClr val="213846"/>
+                </a:solidFill>
+                <a:latin typeface="Bitstream Charter"/>
+                <a:ea typeface="Bitstream Charter"/>
+                <a:cs typeface="Bitstream Charter"/>
+              </a:defRPr>
+            </a:pPr>
+            <a:r>
+              <a:rPr sz="2250" b="0">
+                <a:solidFill>
+                  <a:srgbClr val="213846"/>
+                </a:solidFill>
+                <a:latin typeface="Bitstream Charter"/>
+                <a:ea typeface="Bitstream Charter"/>
+                <a:cs typeface="Bitstream Charter"/>
+              </a:rPr>
+              <a:t>Abdulrahman Almohannadi: data and method review.</a:t>
+            </a:r>
+          </a:p>
+        </p:txBody>
+      </p:sp>
+      <p:sp>
+        <p:nvSpPr>
+          <p:cNvPr id="4" name="">
+            <a:extLst xmlns:a="http://schemas.openxmlformats.org/drawingml/2006/main">
+              <a:ext uri="{FF2B5EF4-FFF2-40B4-BE49-F238E27FC236}">
+                <a16:creationId xmlns:a16="http://schemas.microsoft.com/office/drawing/2014/main" id="{8E28F698-793F-48F4-9F59-87D025707BC3}"/>
+              </a:ext>
+            </a:extLst>
+          </p:cNvPr>
+          <p:cNvSpPr>
+            <a:spLocks xmlns:a="http://schemas.openxmlformats.org/drawingml/2006/main" noGrp="1"/>
+          </p:cNvSpPr>
+          <p:nvPr/>
+        </p:nvSpPr>
+        <p:spPr>
+          <a:xfrm xmlns:a="http://schemas.openxmlformats.org/drawingml/2006/main">
+            <a:off x="609600" y="3190875"/>
+            <a:ext cx="10972800" cy="952500"/>
+          </a:xfrm>
+          <a:prstGeom xmlns:a="http://schemas.openxmlformats.org/drawingml/2006/main" prst="rect">
+            <a:avLst/>
+          </a:prstGeom>
+          <a:noFill xmlns:a="http://schemas.openxmlformats.org/drawingml/2006/main"/>
+          <a:ln xmlns:a="http://schemas.openxmlformats.org/drawingml/2006/main" w="0">
+            <a:noFill/>
+          </a:ln>
+        </p:spPr>
+        <p:txBody>
+          <a:bodyPr xmlns:a="http://schemas.openxmlformats.org/drawingml/2006/main">
+            <a:noAutofit/>
+          </a:bodyPr>
+          <a:lstStyle xmlns:a="http://schemas.openxmlformats.org/drawingml/2006/main"/>
+          <a:p xmlns:a="http://schemas.openxmlformats.org/drawingml/2006/main">
+            <a:pPr>
+              <a:defRPr sz="2250" b="0">
+                <a:solidFill>
+                  <a:srgbClr val="213846"/>
+                </a:solidFill>
+                <a:latin typeface="Bitstream Charter"/>
+                <a:ea typeface="Bitstream Charter"/>
+                <a:cs typeface="Bitstream Charter"/>
+              </a:defRPr>
+            </a:pPr>
+            <a:r>
+              <a:rPr sz="2250" b="0">
+                <a:solidFill>
+                  <a:srgbClr val="213846"/>
+                </a:solidFill>
+                <a:latin typeface="Bitstream Charter"/>
+                <a:ea typeface="Bitstream Charter"/>
+                <a:cs typeface="Bitstream Charter"/>
+              </a:rPr>
+              <a:t>Mohammed Almarri: map and candidate-site review.</a:t>
+            </a:r>
+          </a:p>
+        </p:txBody>
+      </p:sp>
+      <p:sp>
+        <p:nvSpPr>
+          <p:cNvPr id="5" name="">
+            <a:extLst xmlns:a="http://schemas.openxmlformats.org/drawingml/2006/main">
+              <a:ext uri="{FF2B5EF4-FFF2-40B4-BE49-F238E27FC236}">
+                <a16:creationId xmlns:a16="http://schemas.microsoft.com/office/drawing/2014/main" id="{1E3B4838-A4B9-4507-B4CD-BA8C80BE28C9}"/>
+              </a:ext>
+            </a:extLst>
+          </p:cNvPr>
+          <p:cNvSpPr>
+            <a:spLocks xmlns:a="http://schemas.openxmlformats.org/drawingml/2006/main" noGrp="1"/>
+          </p:cNvSpPr>
+          <p:nvPr/>
+        </p:nvSpPr>
+        <p:spPr>
+          <a:xfrm xmlns:a="http://schemas.openxmlformats.org/drawingml/2006/main">
+            <a:off x="609600" y="4000500"/>
+            <a:ext cx="10972800" cy="952500"/>
+          </a:xfrm>
+          <a:prstGeom xmlns:a="http://schemas.openxmlformats.org/drawingml/2006/main" prst="rect">
+            <a:avLst/>
+          </a:prstGeom>
+          <a:noFill xmlns:a="http://schemas.openxmlformats.org/drawingml/2006/main"/>
+          <a:ln xmlns:a="http://schemas.openxmlformats.org/drawingml/2006/main" w="0">
+            <a:noFill/>
+          </a:ln>
+        </p:spPr>
+        <p:txBody>
+          <a:bodyPr xmlns:a="http://schemas.openxmlformats.org/drawingml/2006/main">
+            <a:noAutofit/>
+          </a:bodyPr>
+          <a:lstStyle xmlns:a="http://schemas.openxmlformats.org/drawingml/2006/main"/>
+          <a:p xmlns:a="http://schemas.openxmlformats.org/drawingml/2006/main">
+            <a:pPr>
+              <a:defRPr sz="2250" b="0">
+                <a:solidFill>
+                  <a:srgbClr val="213846"/>
+                </a:solidFill>
+                <a:latin typeface="Bitstream Charter"/>
+                <a:ea typeface="Bitstream Charter"/>
+                <a:cs typeface="Bitstream Charter"/>
+              </a:defRPr>
+            </a:pPr>
+            <a:r>
+              <a:rPr sz="2250" b="0">
+                <a:solidFill>
+                  <a:srgbClr val="213846"/>
+                </a:solidFill>
+                <a:latin typeface="Bitstream Charter"/>
+                <a:ea typeface="Bitstream Charter"/>
+                <a:cs typeface="Bitstream Charter"/>
+              </a:rPr>
+              <a:t>Majed Alkuwari: reproducibility check and demo review.</a:t>
+            </a:r>
+          </a:p>
+        </p:txBody>
+      </p:sp>
+      <p:sp>
+        <p:nvSpPr>
+          <p:cNvPr id="6" name="">
+            <a:extLst xmlns:a="http://schemas.openxmlformats.org/drawingml/2006/main">
+              <a:ext uri="{FF2B5EF4-FFF2-40B4-BE49-F238E27FC236}">
+                <a16:creationId xmlns:a16="http://schemas.microsoft.com/office/drawing/2014/main" id="{B9BC5FB3-36EB-49EC-9EEA-B20BBBE94A19}"/>
+              </a:ext>
+            </a:extLst>
+          </p:cNvPr>
+          <p:cNvSpPr>
+            <a:spLocks xmlns:a="http://schemas.openxmlformats.org/drawingml/2006/main" noGrp="1"/>
+          </p:cNvSpPr>
+          <p:nvPr/>
+        </p:nvSpPr>
+        <p:spPr>
+          <a:xfrm xmlns:a="http://schemas.openxmlformats.org/drawingml/2006/main">
+            <a:off x="609600" y="4810125"/>
+            <a:ext cx="10972800" cy="952500"/>
+          </a:xfrm>
+          <a:prstGeom xmlns:a="http://schemas.openxmlformats.org/drawingml/2006/main" prst="rect">
+            <a:avLst/>
+          </a:prstGeom>
+          <a:noFill xmlns:a="http://schemas.openxmlformats.org/drawingml/2006/main"/>
+          <a:ln xmlns:a="http://schemas.openxmlformats.org/drawingml/2006/main" w="0">
+            <a:noFill/>
+          </a:ln>
+        </p:spPr>
+        <p:txBody>
+          <a:bodyPr xmlns:a="http://schemas.openxmlformats.org/drawingml/2006/main">
+            <a:noAutofit/>
+          </a:bodyPr>
+          <a:lstStyle xmlns:a="http://schemas.openxmlformats.org/drawingml/2006/main"/>
+          <a:p xmlns:a="http://schemas.openxmlformats.org/drawingml/2006/main">
+            <a:pPr>
+              <a:defRPr sz="2250" b="0">
+                <a:solidFill>
+                  <a:srgbClr val="213846"/>
+                </a:solidFill>
+                <a:latin typeface="Bitstream Charter"/>
+                <a:ea typeface="Bitstream Charter"/>
+                <a:cs typeface="Bitstream Charter"/>
+              </a:defRPr>
+            </a:pPr>
+            <a:r>
+              <a:rPr sz="2250" b="0">
+                <a:solidFill>
+                  <a:srgbClr val="213846"/>
+                </a:solidFill>
+                <a:latin typeface="Bitstream Charter"/>
+                <a:ea typeface="Bitstream Charter"/>
+                <a:cs typeface="Bitstream Charter"/>
+              </a:rPr>
+              <a:t>Ali Alkubaisi: presentation and package quality review.</a:t>
+            </a:r>
+          </a:p>
+        </p:txBody>
+      </p:sp>
+      <p:sp>
+        <p:nvSpPr>
+          <p:cNvPr id="7" name="">
+            <a:extLst xmlns:a="http://schemas.openxmlformats.org/drawingml/2006/main">
+              <a:ext uri="{FF2B5EF4-FFF2-40B4-BE49-F238E27FC236}">
+                <a16:creationId xmlns:a16="http://schemas.microsoft.com/office/drawing/2014/main" id="{4F46B7B3-2247-4811-9866-5DB624C6AFB0}"/>
+              </a:ext>
+            </a:extLst>
+          </p:cNvPr>
+          <p:cNvSpPr>
+            <a:spLocks xmlns:a="http://schemas.openxmlformats.org/drawingml/2006/main" noGrp="1"/>
+          </p:cNvSpPr>
+          <p:nvPr/>
+        </p:nvSpPr>
+        <p:spPr>
+          <a:xfrm xmlns:a="http://schemas.openxmlformats.org/drawingml/2006/main">
+            <a:off x="609600" y="6067425"/>
+            <a:ext cx="10668000" cy="590550"/>
+          </a:xfrm>
+          <a:prstGeom xmlns:a="http://schemas.openxmlformats.org/drawingml/2006/main" prst="rect">
+            <a:avLst/>
+          </a:prstGeom>
+          <a:noFill xmlns:a="http://schemas.openxmlformats.org/drawingml/2006/main"/>
+          <a:ln xmlns:a="http://schemas.openxmlformats.org/drawingml/2006/main" w="0">
+            <a:noFill/>
+          </a:ln>
+        </p:spPr>
+        <p:txBody>
+          <a:bodyPr xmlns:a="http://schemas.openxmlformats.org/drawingml/2006/main">
+            <a:noAutofit/>
+          </a:bodyPr>
+          <a:lstStyle xmlns:a="http://schemas.openxmlformats.org/drawingml/2006/main"/>
+          <a:p xmlns:a="http://schemas.openxmlformats.org/drawingml/2006/main">
+            <a:pPr>
+              <a:defRPr sz="1725" b="0">
+                <a:solidFill>
+                  <a:srgbClr val="526569"/>
+                </a:solidFill>
+                <a:latin typeface="Bitstream Charter"/>
+                <a:ea typeface="Bitstream Charter"/>
+                <a:cs typeface="Bitstream Charter"/>
+              </a:defRPr>
+            </a:pPr>
+            <a:r>
+              <a:rPr sz="1725" b="0">
+                <a:solidFill>
+                  <a:srgbClr val="526569"/>
+                </a:solidFill>
+                <a:latin typeface="Bitstream Charter"/>
+                <a:ea typeface="Bitstream Charter"/>
+                <a:cs typeface="Bitstream Charter"/>
+              </a:rPr>
+              <a:t>Assigned review ownership, not claims of completed contributions. Code, analysis and drafts were developed with AI assistance.</a:t>
+            </a:r>
+          </a:p>
+        </p:txBody>
+      </p:sp>
+    </p:spTree>
+    <p:extLst>
+      <p:ext uri="{BB962C8B-B14F-4D97-AF65-F5344CB8AC3E}">
+        <p14:creationId xmlns:p14="http://schemas.microsoft.com/office/powerpoint/2010/main" val="169067914"/>
+      </p:ext>
+    </p:extLst>
+  </p:cSld>
+</p:sld>
+</file>
+
+<file path=ppt/slides/slide12.xml><?xml version="1.0" encoding="utf-8"?>
+<p:sld xmlns:p="http://schemas.openxmlformats.org/presentationml/2006/main">
+  <p:cSld>
+    <p:bg>
+      <p:bgPr>
+        <a:solidFill xmlns:a="http://schemas.openxmlformats.org/drawingml/2006/main">
+          <a:srgbClr val="F7F6F1"/>
+        </a:solidFill>
+      </p:bgPr>
+    </p:bg>
+    <p:spTree>
+      <p:nvGrpSpPr>
+        <p:cNvPr id="1" name=""/>
+        <p:cNvGrpSpPr/>
+        <p:nvPr/>
+      </p:nvGrpSpPr>
+      <p:grpSpPr>
+        <a:xfrm xmlns:a="http://schemas.openxmlformats.org/drawingml/2006/main"/>
+      </p:grpSpPr>
+      <p:sp>
+        <p:nvSpPr>
+          <p:cNvPr id="7" name="">
+            <a:extLst xmlns:a="http://schemas.openxmlformats.org/drawingml/2006/main">
+              <a:ext uri="{FF2B5EF4-FFF2-40B4-BE49-F238E27FC236}">
+                <a16:creationId xmlns:a16="http://schemas.microsoft.com/office/drawing/2014/main" id="{C5950595-6EB0-44CF-9F4F-A3DC59B46145}"/>
+              </a:ext>
+            </a:extLst>
+          </p:cNvPr>
+          <p:cNvSpPr>
+            <a:spLocks xmlns:a="http://schemas.openxmlformats.org/drawingml/2006/main" noGrp="1"/>
+          </p:cNvSpPr>
+          <p:nvPr/>
+        </p:nvSpPr>
+        <p:spPr>
+          <a:xfrm xmlns:a="http://schemas.openxmlformats.org/drawingml/2006/main">
+            <a:off x="609600" y="400050"/>
+            <a:ext cx="10972800" cy="857250"/>
+          </a:xfrm>
+          <a:prstGeom xmlns:a="http://schemas.openxmlformats.org/drawingml/2006/main" prst="rect">
+            <a:avLst/>
+          </a:prstGeom>
+          <a:noFill xmlns:a="http://schemas.openxmlformats.org/drawingml/2006/main"/>
+          <a:ln xmlns:a="http://schemas.openxmlformats.org/drawingml/2006/main" w="0">
+            <a:noFill/>
+          </a:ln>
+        </p:spPr>
+        <p:txBody>
+          <a:bodyPr xmlns:a="http://schemas.openxmlformats.org/drawingml/2006/main">
+            <a:noAutofit/>
+          </a:bodyPr>
+          <a:lstStyle xmlns:a="http://schemas.openxmlformats.org/drawingml/2006/main"/>
+          <a:p xmlns:a="http://schemas.openxmlformats.org/drawingml/2006/main">
+            <a:pPr>
+              <a:defRPr sz="3300" b="1">
+                <a:solidFill>
+                  <a:srgbClr val="163D46"/>
+                </a:solidFill>
+                <a:latin typeface="Bitstream Charter"/>
+                <a:ea typeface="Bitstream Charter"/>
+                <a:cs typeface="Bitstream Charter"/>
+              </a:defRPr>
+            </a:pPr>
+            <a:r>
+              <a:rPr sz="3300" b="1">
+                <a:solidFill>
+                  <a:srgbClr val="163D46"/>
+                </a:solidFill>
+                <a:latin typeface="Bitstream Charter"/>
+                <a:ea typeface="Bitstream Charter"/>
+                <a:cs typeface="Bitstream Charter"/>
+              </a:rPr>
+              <a:t>Data attribution and sources</a:t>
+            </a:r>
+          </a:p>
+        </p:txBody>
+      </p:sp>
+      <p:sp>
+        <p:nvSpPr>
+          <p:cNvPr id="2" name="">
+            <a:extLst xmlns:a="http://schemas.openxmlformats.org/drawingml/2006/main">
+              <a:ext uri="{FF2B5EF4-FFF2-40B4-BE49-F238E27FC236}">
+                <a16:creationId xmlns:a16="http://schemas.microsoft.com/office/drawing/2014/main" id="{7C58BD8D-76E5-4269-9DDB-695D60E54BCD}"/>
+              </a:ext>
+            </a:extLst>
+          </p:cNvPr>
+          <p:cNvSpPr>
+            <a:spLocks xmlns:a="http://schemas.openxmlformats.org/drawingml/2006/main" noGrp="1"/>
+          </p:cNvSpPr>
+          <p:nvPr/>
+        </p:nvSpPr>
+        <p:spPr>
+          <a:xfrm xmlns:a="http://schemas.openxmlformats.org/drawingml/2006/main">
+            <a:off x="609600" y="1571625"/>
+            <a:ext cx="10972800" cy="952500"/>
+          </a:xfrm>
+          <a:prstGeom xmlns:a="http://schemas.openxmlformats.org/drawingml/2006/main" prst="rect">
+            <a:avLst/>
+          </a:prstGeom>
+          <a:noFill xmlns:a="http://schemas.openxmlformats.org/drawingml/2006/main"/>
+          <a:ln xmlns:a="http://schemas.openxmlformats.org/drawingml/2006/main" w="0">
+            <a:noFill/>
+          </a:ln>
+        </p:spPr>
+        <p:txBody>
+          <a:bodyPr xmlns:a="http://schemas.openxmlformats.org/drawingml/2006/main">
+            <a:noAutofit/>
+          </a:bodyPr>
+          <a:lstStyle xmlns:a="http://schemas.openxmlformats.org/drawingml/2006/main"/>
+          <a:p xmlns:a="http://schemas.openxmlformats.org/drawingml/2006/main">
+            <a:pPr>
+              <a:defRPr sz="2400" b="0">
+                <a:solidFill>
+                  <a:srgbClr val="213846"/>
+                </a:solidFill>
+                <a:latin typeface="Bitstream Charter"/>
+                <a:ea typeface="Bitstream Charter"/>
+                <a:cs typeface="Bitstream Charter"/>
+              </a:defRPr>
+            </a:pPr>
+            <a:r>
+              <a:rPr sz="2400" b="0">
+                <a:solidFill>
+                  <a:srgbClr val="213846"/>
+                </a:solidFill>
+                <a:latin typeface="Bitstream Charter"/>
+                <a:ea typeface="Bitstream Charter"/>
+                <a:cs typeface="Bitstream Charter"/>
+              </a:rPr>
+              <a:t>Contains modified Copernicus Sentinel data (2026). Optical source: Element 84 Earth Search.</a:t>
+            </a:r>
+          </a:p>
+        </p:txBody>
+      </p:sp>
+      <p:sp>
+        <p:nvSpPr>
+          <p:cNvPr id="3" name="">
+            <a:extLst xmlns:a="http://schemas.openxmlformats.org/drawingml/2006/main">
+              <a:ext uri="{FF2B5EF4-FFF2-40B4-BE49-F238E27FC236}">
+                <a16:creationId xmlns:a16="http://schemas.microsoft.com/office/drawing/2014/main" id="{4994832F-C8C4-4CDD-9E79-78BE31EA9355}"/>
+              </a:ext>
+            </a:extLst>
+          </p:cNvPr>
+          <p:cNvSpPr>
+            <a:spLocks xmlns:a="http://schemas.openxmlformats.org/drawingml/2006/main" noGrp="1"/>
+          </p:cNvSpPr>
+          <p:nvPr/>
+        </p:nvSpPr>
+        <p:spPr>
+          <a:xfrm xmlns:a="http://schemas.openxmlformats.org/drawingml/2006/main">
+            <a:off x="609600" y="2638425"/>
+            <a:ext cx="10972800" cy="952500"/>
+          </a:xfrm>
+          <a:prstGeom xmlns:a="http://schemas.openxmlformats.org/drawingml/2006/main" prst="rect">
+            <a:avLst/>
+          </a:prstGeom>
+          <a:noFill xmlns:a="http://schemas.openxmlformats.org/drawingml/2006/main"/>
+          <a:ln xmlns:a="http://schemas.openxmlformats.org/drawingml/2006/main" w="0">
+            <a:noFill/>
+          </a:ln>
+        </p:spPr>
+        <p:txBody>
+          <a:bodyPr xmlns:a="http://schemas.openxmlformats.org/drawingml/2006/main">
+            <a:noAutofit/>
+          </a:bodyPr>
+          <a:lstStyle xmlns:a="http://schemas.openxmlformats.org/drawingml/2006/main"/>
+          <a:p xmlns:a="http://schemas.openxmlformats.org/drawingml/2006/main">
+            <a:pPr>
+              <a:defRPr sz="2400" b="0">
+                <a:solidFill>
+                  <a:srgbClr val="213846"/>
+                </a:solidFill>
+                <a:latin typeface="Bitstream Charter"/>
+                <a:ea typeface="Bitstream Charter"/>
+                <a:cs typeface="Bitstream Charter"/>
+              </a:defRPr>
+            </a:pPr>
+            <a:r>
+              <a:rPr sz="2400" b="0">
+                <a:solidFill>
+                  <a:srgbClr val="213846"/>
+                </a:solidFill>
+                <a:latin typeface="Bitstream Charter"/>
+                <a:ea typeface="Bitstream Charter"/>
+                <a:cs typeface="Bitstream Charter"/>
+              </a:rPr>
+              <a:t>Landsat imagery courtesy of USGS. Collection 2 Level-2 surface temperature, doi:10.5066/P9OGBGM6.</a:t>
+            </a:r>
+          </a:p>
+        </p:txBody>
+      </p:sp>
+      <p:sp>
+        <p:nvSpPr>
+          <p:cNvPr id="4" name="">
+            <a:extLst xmlns:a="http://schemas.openxmlformats.org/drawingml/2006/main">
+              <a:ext uri="{FF2B5EF4-FFF2-40B4-BE49-F238E27FC236}">
+                <a16:creationId xmlns:a16="http://schemas.microsoft.com/office/drawing/2014/main" id="{92C14AD2-1346-466D-B397-FB9444B6BC3C}"/>
+              </a:ext>
+            </a:extLst>
+          </p:cNvPr>
+          <p:cNvSpPr>
+            <a:spLocks xmlns:a="http://schemas.openxmlformats.org/drawingml/2006/main" noGrp="1"/>
+          </p:cNvSpPr>
+          <p:nvPr/>
+        </p:nvSpPr>
+        <p:spPr>
+          <a:xfrm xmlns:a="http://schemas.openxmlformats.org/drawingml/2006/main">
+            <a:off x="609600" y="3705225"/>
+            <a:ext cx="10972800" cy="952500"/>
+          </a:xfrm>
+          <a:prstGeom xmlns:a="http://schemas.openxmlformats.org/drawingml/2006/main" prst="rect">
+            <a:avLst/>
+          </a:prstGeom>
+          <a:noFill xmlns:a="http://schemas.openxmlformats.org/drawingml/2006/main"/>
+          <a:ln xmlns:a="http://schemas.openxmlformats.org/drawingml/2006/main" w="0">
+            <a:noFill/>
+          </a:ln>
+        </p:spPr>
+        <p:txBody>
+          <a:bodyPr xmlns:a="http://schemas.openxmlformats.org/drawingml/2006/main">
+            <a:noAutofit/>
+          </a:bodyPr>
+          <a:lstStyle xmlns:a="http://schemas.openxmlformats.org/drawingml/2006/main"/>
+          <a:p xmlns:a="http://schemas.openxmlformats.org/drawingml/2006/main">
+            <a:pPr>
+              <a:defRPr sz="2400" b="0">
+                <a:solidFill>
+                  <a:srgbClr val="213846"/>
+                </a:solidFill>
+                <a:latin typeface="Bitstream Charter"/>
+                <a:ea typeface="Bitstream Charter"/>
+                <a:cs typeface="Bitstream Charter"/>
+              </a:defRPr>
+            </a:pPr>
+            <a:r>
+              <a:rPr sz="2400" b="0">
+                <a:solidFill>
+                  <a:srgbClr val="213846"/>
+                </a:solidFill>
+                <a:latin typeface="Bitstream Charter"/>
+                <a:ea typeface="Bitstream Charter"/>
+                <a:cs typeface="Bitstream Charter"/>
+              </a:rPr>
               <a:t>ESA WorldCover 2021 v200, Zanaga et al. (2022). CC BY 4.0, doi:10.5281/zenodo.7254220.</a:t>
             </a:r>
           </a:p>
@@ -3957,7 +4898,7 @@
           <p:cNvPr id="5" name="">
             <a:extLst xmlns:a="http://schemas.openxmlformats.org/drawingml/2006/main">
               <a:ext uri="{FF2B5EF4-FFF2-40B4-BE49-F238E27FC236}">
-                <a16:creationId xmlns:a16="http://schemas.microsoft.com/office/drawing/2014/main" id="{ED1B40E3-0C06-4CF7-A683-079E2FED6A1C}"/>
+                <a16:creationId xmlns:a16="http://schemas.microsoft.com/office/drawing/2014/main" id="{5BD28C1D-EA19-4C9C-B10A-4CFD16A529A5}"/>
               </a:ext>
             </a:extLst>
           </p:cNvPr>
@@ -4014,7 +4955,7 @@
           <p:cNvPr id="6" name="">
             <a:extLst xmlns:a="http://schemas.openxmlformats.org/drawingml/2006/main">
               <a:ext uri="{FF2B5EF4-FFF2-40B4-BE49-F238E27FC236}">
-                <a16:creationId xmlns:a16="http://schemas.microsoft.com/office/drawing/2014/main" id="{FF03E988-A4AF-40F0-99DD-ACB7BB44B200}"/>
+                <a16:creationId xmlns:a16="http://schemas.microsoft.com/office/drawing/2014/main" id="{73D1C18A-1729-4EC2-B72C-E0CD04074BBE}"/>
               </a:ext>
             </a:extLst>
           </p:cNvPr>
@@ -4069,7 +5010,7 @@
     </p:spTree>
     <p:extLst>
       <p:ext uri="{BB962C8B-B14F-4D97-AF65-F5344CB8AC3E}">
-        <p14:creationId xmlns:p14="http://schemas.microsoft.com/office/powerpoint/2010/main" val="499692637"/>
+        <p14:creationId xmlns:p14="http://schemas.microsoft.com/office/powerpoint/2010/main" val="706804926"/>
       </p:ext>
     </p:extLst>
   </p:cSld>
@@ -4100,7 +5041,7 @@
           <p:cNvPr id="6" name="">
             <a:extLst xmlns:a="http://schemas.openxmlformats.org/drawingml/2006/main">
               <a:ext uri="{FF2B5EF4-FFF2-40B4-BE49-F238E27FC236}">
-                <a16:creationId xmlns:a16="http://schemas.microsoft.com/office/drawing/2014/main" id="{5F6BA2CE-E5B5-4B7D-BF77-60CDD6D97739}"/>
+                <a16:creationId xmlns:a16="http://schemas.microsoft.com/office/drawing/2014/main" id="{ED959EA6-1AEF-435B-9C9F-589693E3E7A0}"/>
               </a:ext>
             </a:extLst>
           </p:cNvPr>
@@ -4147,7 +5088,7 @@
                 <a:ea typeface="Bitstream Charter"/>
                 <a:cs typeface="Bitstream Charter"/>
               </a:rPr>
-              <a:t>Planning use case</a:t>
+              <a:t>The planning problem</a:t>
             </a:r>
           </a:p>
         </p:txBody>
@@ -4157,7 +5098,7 @@
           <p:cNvPr id="2" name="">
             <a:extLst xmlns:a="http://schemas.openxmlformats.org/drawingml/2006/main">
               <a:ext uri="{FF2B5EF4-FFF2-40B4-BE49-F238E27FC236}">
-                <a16:creationId xmlns:a16="http://schemas.microsoft.com/office/drawing/2014/main" id="{9658B023-1F65-4344-B310-56E8D78FA658}"/>
+                <a16:creationId xmlns:a16="http://schemas.microsoft.com/office/drawing/2014/main" id="{0B3755F6-7288-4FD1-85BA-CE2FEB467E93}"/>
               </a:ext>
             </a:extLst>
           </p:cNvPr>
@@ -4204,7 +5145,7 @@
                 <a:ea typeface="Bitstream Charter"/>
                 <a:cs typeface="Bitstream Charter"/>
               </a:rPr>
-              <a:t>A planner needs a shortlist of places to inspect for shade or planting.</a:t>
+              <a:t>Surface heating and limited greenery can help identify places that warrant a closer look.</a:t>
             </a:r>
           </a:p>
         </p:txBody>
@@ -4214,7 +5155,7 @@
           <p:cNvPr id="3" name="">
             <a:extLst xmlns:a="http://schemas.openxmlformats.org/drawingml/2006/main">
               <a:ext uri="{FF2B5EF4-FFF2-40B4-BE49-F238E27FC236}">
-                <a16:creationId xmlns:a16="http://schemas.microsoft.com/office/drawing/2014/main" id="{4FB0D851-7F4E-4977-AA0A-DE3BD9F02632}"/>
+                <a16:creationId xmlns:a16="http://schemas.microsoft.com/office/drawing/2014/main" id="{120521AF-E359-4B96-A28A-B6C21D0C10BA}"/>
               </a:ext>
             </a:extLst>
           </p:cNvPr>
@@ -4261,7 +5202,7 @@
                 <a:ea typeface="Bitstream Charter"/>
                 <a:cs typeface="Bitstream Charter"/>
               </a:rPr>
-              <a:t>The map shows observed surface temperature, green signal and mapped buildings for each cell.</a:t>
+              <a:t>Municipal planners need traceable evidence to organise field investigation before proposing interventions.</a:t>
             </a:r>
           </a:p>
         </p:txBody>
@@ -4271,7 +5212,7 @@
           <p:cNvPr id="4" name="">
             <a:extLst xmlns:a="http://schemas.openxmlformats.org/drawingml/2006/main">
               <a:ext uri="{FF2B5EF4-FFF2-40B4-BE49-F238E27FC236}">
-                <a16:creationId xmlns:a16="http://schemas.microsoft.com/office/drawing/2014/main" id="{F7EBA082-4E19-41A3-A272-46DEFFB8EB3D}"/>
+                <a16:creationId xmlns:a16="http://schemas.microsoft.com/office/drawing/2014/main" id="{09B3B39E-2C22-4AAE-A2CB-34EEA78A7C79}"/>
               </a:ext>
             </a:extLst>
           </p:cNvPr>
@@ -4318,7 +5259,7 @@
                 <a:ea typeface="Bitstream Charter"/>
                 <a:cs typeface="Bitstream Charter"/>
               </a:rPr>
-              <a:t>A site visit must establish pedestrian activity, existing shade, ownership and feasibility.</a:t>
+              <a:t>Pedestrians and outdoor users are the intended beneficiaries. Their exposure and needs have not been measured.</a:t>
             </a:r>
           </a:p>
         </p:txBody>
@@ -4328,7 +5269,7 @@
           <p:cNvPr id="5" name="">
             <a:extLst xmlns:a="http://schemas.openxmlformats.org/drawingml/2006/main">
               <a:ext uri="{FF2B5EF4-FFF2-40B4-BE49-F238E27FC236}">
-                <a16:creationId xmlns:a16="http://schemas.microsoft.com/office/drawing/2014/main" id="{70F0F58E-D5F0-4F27-9D7D-ADDD417F92A5}"/>
+                <a16:creationId xmlns:a16="http://schemas.microsoft.com/office/drawing/2014/main" id="{B9B4ACEC-2743-4AA1-B031-94871ACA1E22}"/>
               </a:ext>
             </a:extLst>
           </p:cNvPr>
@@ -4375,7 +5316,7 @@
                 <a:ea typeface="Bitstream Charter"/>
                 <a:cs typeface="Bitstream Charter"/>
               </a:rPr>
-              <a:t>No user interview, measured time saving or cooling benefit is claimed.</a:t>
+              <a:t>The prototype supports investigation; it does not establish heat-health risk.</a:t>
             </a:r>
           </a:p>
         </p:txBody>
@@ -4383,7 +5324,7 @@
     </p:spTree>
     <p:extLst>
       <p:ext uri="{BB962C8B-B14F-4D97-AF65-F5344CB8AC3E}">
-        <p14:creationId xmlns:p14="http://schemas.microsoft.com/office/powerpoint/2010/main" val="1075667241"/>
+        <p14:creationId xmlns:p14="http://schemas.microsoft.com/office/powerpoint/2010/main" val="123264393"/>
       </p:ext>
     </p:extLst>
   </p:cSld>
@@ -4414,7 +5355,7 @@
           <p:cNvPr id="6" name="">
             <a:extLst xmlns:a="http://schemas.openxmlformats.org/drawingml/2006/main">
               <a:ext uri="{FF2B5EF4-FFF2-40B4-BE49-F238E27FC236}">
-                <a16:creationId xmlns:a16="http://schemas.microsoft.com/office/drawing/2014/main" id="{CC63E1A1-0A6E-4A56-B116-140CD5B5F182}"/>
+                <a16:creationId xmlns:a16="http://schemas.microsoft.com/office/drawing/2014/main" id="{4085BC49-9969-40E9-808D-5D6FD016AFFE}"/>
               </a:ext>
             </a:extLst>
           </p:cNvPr>
@@ -4461,7 +5402,7 @@
                 <a:ea typeface="Bitstream Charter"/>
                 <a:cs typeface="Bitstream Charter"/>
               </a:rPr>
-              <a:t>Open satellite data and mapped context</a:t>
+              <a:t>Planning use case</a:t>
             </a:r>
           </a:p>
         </p:txBody>
@@ -4471,7 +5412,7 @@
           <p:cNvPr id="2" name="">
             <a:extLst xmlns:a="http://schemas.openxmlformats.org/drawingml/2006/main">
               <a:ext uri="{FF2B5EF4-FFF2-40B4-BE49-F238E27FC236}">
-                <a16:creationId xmlns:a16="http://schemas.microsoft.com/office/drawing/2014/main" id="{6C550A39-4F36-4A92-AA20-BFD50CCD2EAD}"/>
+                <a16:creationId xmlns:a16="http://schemas.microsoft.com/office/drawing/2014/main" id="{3A359118-92AF-4B22-904B-CAA169F9D0B3}"/>
               </a:ext>
             </a:extLst>
           </p:cNvPr>
@@ -4518,7 +5459,7 @@
                 <a:ea typeface="Bitstream Charter"/>
                 <a:cs typeface="Bitstream Charter"/>
               </a:rPr>
-              <a:t>Sentinel-2: green-pixel indicators from 5, 15 and 30 September 2026.</a:t>
+              <a:t>A planner needs a shortlist of places to inspect for shade or planting.</a:t>
             </a:r>
           </a:p>
         </p:txBody>
@@ -4528,7 +5469,7 @@
           <p:cNvPr id="3" name="">
             <a:extLst xmlns:a="http://schemas.openxmlformats.org/drawingml/2006/main">
               <a:ext uri="{FF2B5EF4-FFF2-40B4-BE49-F238E27FC236}">
-                <a16:creationId xmlns:a16="http://schemas.microsoft.com/office/drawing/2014/main" id="{93B50D6A-ABC6-4A93-8DCB-679B84E7C8BC}"/>
+                <a16:creationId xmlns:a16="http://schemas.microsoft.com/office/drawing/2014/main" id="{AF64C600-6FC4-45F8-814E-363FFAAB99CB}"/>
               </a:ext>
             </a:extLst>
           </p:cNvPr>
@@ -4575,7 +5516,7 @@
                 <a:ea typeface="Bitstream Charter"/>
                 <a:cs typeface="Bitstream Charter"/>
               </a:rPr>
-              <a:t>Landsat: surface temperature from 14 and 30 September. The 6 September scene fails coverage QA.</a:t>
+              <a:t>The map shows observed surface temperature, green signal and mapped buildings for each cell.</a:t>
             </a:r>
           </a:p>
         </p:txBody>
@@ -4585,7 +5526,7 @@
           <p:cNvPr id="4" name="">
             <a:extLst xmlns:a="http://schemas.openxmlformats.org/drawingml/2006/main">
               <a:ext uri="{FF2B5EF4-FFF2-40B4-BE49-F238E27FC236}">
-                <a16:creationId xmlns:a16="http://schemas.microsoft.com/office/drawing/2014/main" id="{CE4D4D6E-0069-4345-8475-FAF7184B5FE4}"/>
+                <a16:creationId xmlns:a16="http://schemas.microsoft.com/office/drawing/2014/main" id="{04536095-54F1-4BE3-BD8A-DEC1BD27E3BB}"/>
               </a:ext>
             </a:extLst>
           </p:cNvPr>
@@ -4632,7 +5573,7 @@
                 <a:ea typeface="Bitstream Charter"/>
                 <a:cs typeface="Bitstream Charter"/>
               </a:rPr>
-              <a:t>WorldCover 2021: historical land-cover context. OpenStreetMap: contributed building footprints downloaded 5 October.</a:t>
+              <a:t>A site visit must establish pedestrian activity, existing shade, ownership and feasibility.</a:t>
             </a:r>
           </a:p>
         </p:txBody>
@@ -4642,7 +5583,7 @@
           <p:cNvPr id="5" name="">
             <a:extLst xmlns:a="http://schemas.openxmlformats.org/drawingml/2006/main">
               <a:ext uri="{FF2B5EF4-FFF2-40B4-BE49-F238E27FC236}">
-                <a16:creationId xmlns:a16="http://schemas.microsoft.com/office/drawing/2014/main" id="{7B846B23-251F-4F6F-8E18-A80700350755}"/>
+                <a16:creationId xmlns:a16="http://schemas.microsoft.com/office/drawing/2014/main" id="{873F3366-73FA-4B63-990C-8214100101AA}"/>
               </a:ext>
             </a:extLst>
           </p:cNvPr>
@@ -4689,7 +5630,7 @@
                 <a:ea typeface="Bitstream Charter"/>
                 <a:cs typeface="Bitstream Charter"/>
               </a:rPr>
-              <a:t>Thermal native detail is about 100 m, delivered on a 30 m grid. We report 300 m cells.</a:t>
+              <a:t>No user interview, measured time saving or cooling benefit is claimed.</a:t>
             </a:r>
           </a:p>
         </p:txBody>
@@ -4697,7 +5638,7 @@
     </p:spTree>
     <p:extLst>
       <p:ext uri="{BB962C8B-B14F-4D97-AF65-F5344CB8AC3E}">
-        <p14:creationId xmlns:p14="http://schemas.microsoft.com/office/powerpoint/2010/main" val="1176789693"/>
+        <p14:creationId xmlns:p14="http://schemas.microsoft.com/office/powerpoint/2010/main" val="1707656201"/>
       </p:ext>
     </p:extLst>
   </p:cSld>
@@ -4725,10 +5666,10 @@
       </p:grpSpPr>
       <p:sp>
         <p:nvSpPr>
-          <p:cNvPr id="4" name="">
+          <p:cNvPr id="7" name="">
             <a:extLst xmlns:a="http://schemas.openxmlformats.org/drawingml/2006/main">
               <a:ext uri="{FF2B5EF4-FFF2-40B4-BE49-F238E27FC236}">
-                <a16:creationId xmlns:a16="http://schemas.microsoft.com/office/drawing/2014/main" id="{1F3701E0-1170-4032-B1CA-E88A1FA97AF6}"/>
+                <a16:creationId xmlns:a16="http://schemas.microsoft.com/office/drawing/2014/main" id="{A826FE1B-01C8-4C80-98AF-F98D46C6E2A1}"/>
               </a:ext>
             </a:extLst>
           </p:cNvPr>
@@ -4775,39 +5716,245 @@
                 <a:ea typeface="Bitstream Charter"/>
                 <a:cs typeface="Bitstream Charter"/>
               </a:rPr>
-              <a:t>Al Khor study window and shortlist</a:t>
+              <a:t>Open satellite data and mapped context</a:t>
             </a:r>
           </a:p>
         </p:txBody>
       </p:sp>
-      <p:pic>
-        <p:nvPicPr>
-          <p:cNvPr id="5" name=""/>
-          <p:cNvPicPr>
-            <a:picLocks xmlns:a="http://schemas.openxmlformats.org/drawingml/2006/main" noChangeAspect="1"/>
-          </p:cNvPicPr>
+      <p:sp>
+        <p:nvSpPr>
+          <p:cNvPr id="2" name="">
+            <a:extLst xmlns:a="http://schemas.openxmlformats.org/drawingml/2006/main">
+              <a:ext uri="{FF2B5EF4-FFF2-40B4-BE49-F238E27FC236}">
+                <a16:creationId xmlns:a16="http://schemas.microsoft.com/office/drawing/2014/main" id="{87DBE71C-7D94-406D-983A-2167AA4925A5}"/>
+              </a:ext>
+            </a:extLst>
+          </p:cNvPr>
+          <p:cNvSpPr>
+            <a:spLocks xmlns:a="http://schemas.openxmlformats.org/drawingml/2006/main" noGrp="1"/>
+          </p:cNvSpPr>
           <p:nvPr/>
-        </p:nvPicPr>
-        <p:blipFill>
-          <a:blip xmlns:r="http://schemas.openxmlformats.org/officeDocument/2006/relationships" xmlns:a="http://schemas.openxmlformats.org/drawingml/2006/main" r:embed="Rb6e9f70348fb4fe0"/>
-          <a:stretch xmlns:a="http://schemas.openxmlformats.org/drawingml/2006/main"/>
-        </p:blipFill>
+        </p:nvSpPr>
         <p:spPr>
           <a:xfrm xmlns:a="http://schemas.openxmlformats.org/drawingml/2006/main">
-            <a:off x="609600" y="1415415"/>
-            <a:ext cx="10972800" cy="4389120"/>
+            <a:off x="609600" y="1571625"/>
+            <a:ext cx="10972800" cy="952500"/>
           </a:xfrm>
           <a:prstGeom xmlns:a="http://schemas.openxmlformats.org/drawingml/2006/main" prst="rect">
             <a:avLst/>
           </a:prstGeom>
-        </p:spPr>
-      </p:pic>
+          <a:noFill xmlns:a="http://schemas.openxmlformats.org/drawingml/2006/main"/>
+          <a:ln xmlns:a="http://schemas.openxmlformats.org/drawingml/2006/main" w="0">
+            <a:noFill/>
+          </a:ln>
+        </p:spPr>
+        <p:txBody>
+          <a:bodyPr xmlns:a="http://schemas.openxmlformats.org/drawingml/2006/main">
+            <a:noAutofit/>
+          </a:bodyPr>
+          <a:lstStyle xmlns:a="http://schemas.openxmlformats.org/drawingml/2006/main"/>
+          <a:p xmlns:a="http://schemas.openxmlformats.org/drawingml/2006/main">
+            <a:pPr>
+              <a:defRPr sz="2250" b="0">
+                <a:solidFill>
+                  <a:srgbClr val="213846"/>
+                </a:solidFill>
+                <a:latin typeface="Bitstream Charter"/>
+                <a:ea typeface="Bitstream Charter"/>
+                <a:cs typeface="Bitstream Charter"/>
+              </a:defRPr>
+            </a:pPr>
+            <a:r>
+              <a:rPr sz="2250" b="0">
+                <a:solidFill>
+                  <a:srgbClr val="213846"/>
+                </a:solidFill>
+                <a:latin typeface="Bitstream Charter"/>
+                <a:ea typeface="Bitstream Charter"/>
+                <a:cs typeface="Bitstream Charter"/>
+              </a:rPr>
+              <a:t>Sentinel-2: green-pixel indicators from 5, 15 and 30 September 2026.</a:t>
+            </a:r>
+          </a:p>
+        </p:txBody>
+      </p:sp>
       <p:sp>
         <p:nvSpPr>
           <p:cNvPr id="3" name="">
             <a:extLst xmlns:a="http://schemas.openxmlformats.org/drawingml/2006/main">
               <a:ext uri="{FF2B5EF4-FFF2-40B4-BE49-F238E27FC236}">
-                <a16:creationId xmlns:a16="http://schemas.microsoft.com/office/drawing/2014/main" id="{DA9A37DA-DAC3-461D-AE5A-4B2310718DE7}"/>
+                <a16:creationId xmlns:a16="http://schemas.microsoft.com/office/drawing/2014/main" id="{48F6338E-F95B-49D3-BC70-9425600718D3}"/>
+              </a:ext>
+            </a:extLst>
+          </p:cNvPr>
+          <p:cNvSpPr>
+            <a:spLocks xmlns:a="http://schemas.openxmlformats.org/drawingml/2006/main" noGrp="1"/>
+          </p:cNvSpPr>
+          <p:nvPr/>
+        </p:nvSpPr>
+        <p:spPr>
+          <a:xfrm xmlns:a="http://schemas.openxmlformats.org/drawingml/2006/main">
+            <a:off x="609600" y="2524125"/>
+            <a:ext cx="10972800" cy="952500"/>
+          </a:xfrm>
+          <a:prstGeom xmlns:a="http://schemas.openxmlformats.org/drawingml/2006/main" prst="rect">
+            <a:avLst/>
+          </a:prstGeom>
+          <a:noFill xmlns:a="http://schemas.openxmlformats.org/drawingml/2006/main"/>
+          <a:ln xmlns:a="http://schemas.openxmlformats.org/drawingml/2006/main" w="0">
+            <a:noFill/>
+          </a:ln>
+        </p:spPr>
+        <p:txBody>
+          <a:bodyPr xmlns:a="http://schemas.openxmlformats.org/drawingml/2006/main">
+            <a:noAutofit/>
+          </a:bodyPr>
+          <a:lstStyle xmlns:a="http://schemas.openxmlformats.org/drawingml/2006/main"/>
+          <a:p xmlns:a="http://schemas.openxmlformats.org/drawingml/2006/main">
+            <a:pPr>
+              <a:defRPr sz="2250" b="0">
+                <a:solidFill>
+                  <a:srgbClr val="213846"/>
+                </a:solidFill>
+                <a:latin typeface="Bitstream Charter"/>
+                <a:ea typeface="Bitstream Charter"/>
+                <a:cs typeface="Bitstream Charter"/>
+              </a:defRPr>
+            </a:pPr>
+            <a:r>
+              <a:rPr sz="2250" b="0">
+                <a:solidFill>
+                  <a:srgbClr val="213846"/>
+                </a:solidFill>
+                <a:latin typeface="Bitstream Charter"/>
+                <a:ea typeface="Bitstream Charter"/>
+                <a:cs typeface="Bitstream Charter"/>
+              </a:rPr>
+              <a:t>Landsat: surface temperature from 14 and 30 September. The 6 September scene fails coverage QA.</a:t>
+            </a:r>
+          </a:p>
+        </p:txBody>
+      </p:sp>
+      <p:sp>
+        <p:nvSpPr>
+          <p:cNvPr id="4" name="">
+            <a:extLst xmlns:a="http://schemas.openxmlformats.org/drawingml/2006/main">
+              <a:ext uri="{FF2B5EF4-FFF2-40B4-BE49-F238E27FC236}">
+                <a16:creationId xmlns:a16="http://schemas.microsoft.com/office/drawing/2014/main" id="{1F193183-5C77-40D3-AE5F-EBA87BBBD4F0}"/>
+              </a:ext>
+            </a:extLst>
+          </p:cNvPr>
+          <p:cNvSpPr>
+            <a:spLocks xmlns:a="http://schemas.openxmlformats.org/drawingml/2006/main" noGrp="1"/>
+          </p:cNvSpPr>
+          <p:nvPr/>
+        </p:nvSpPr>
+        <p:spPr>
+          <a:xfrm xmlns:a="http://schemas.openxmlformats.org/drawingml/2006/main">
+            <a:off x="609600" y="3476625"/>
+            <a:ext cx="10972800" cy="952500"/>
+          </a:xfrm>
+          <a:prstGeom xmlns:a="http://schemas.openxmlformats.org/drawingml/2006/main" prst="rect">
+            <a:avLst/>
+          </a:prstGeom>
+          <a:noFill xmlns:a="http://schemas.openxmlformats.org/drawingml/2006/main"/>
+          <a:ln xmlns:a="http://schemas.openxmlformats.org/drawingml/2006/main" w="0">
+            <a:noFill/>
+          </a:ln>
+        </p:spPr>
+        <p:txBody>
+          <a:bodyPr xmlns:a="http://schemas.openxmlformats.org/drawingml/2006/main">
+            <a:noAutofit/>
+          </a:bodyPr>
+          <a:lstStyle xmlns:a="http://schemas.openxmlformats.org/drawingml/2006/main"/>
+          <a:p xmlns:a="http://schemas.openxmlformats.org/drawingml/2006/main">
+            <a:pPr>
+              <a:defRPr sz="2250" b="0">
+                <a:solidFill>
+                  <a:srgbClr val="213846"/>
+                </a:solidFill>
+                <a:latin typeface="Bitstream Charter"/>
+                <a:ea typeface="Bitstream Charter"/>
+                <a:cs typeface="Bitstream Charter"/>
+              </a:defRPr>
+            </a:pPr>
+            <a:r>
+              <a:rPr sz="2250" b="0">
+                <a:solidFill>
+                  <a:srgbClr val="213846"/>
+                </a:solidFill>
+                <a:latin typeface="Bitstream Charter"/>
+                <a:ea typeface="Bitstream Charter"/>
+                <a:cs typeface="Bitstream Charter"/>
+              </a:rPr>
+              <a:t>WorldCover 2021: historical land-cover context. OpenStreetMap: contributed building footprints downloaded 5 October.</a:t>
+            </a:r>
+          </a:p>
+        </p:txBody>
+      </p:sp>
+      <p:sp>
+        <p:nvSpPr>
+          <p:cNvPr id="5" name="">
+            <a:extLst xmlns:a="http://schemas.openxmlformats.org/drawingml/2006/main">
+              <a:ext uri="{FF2B5EF4-FFF2-40B4-BE49-F238E27FC236}">
+                <a16:creationId xmlns:a16="http://schemas.microsoft.com/office/drawing/2014/main" id="{F28C86CB-5354-4C67-AB73-A49EF3F151FA}"/>
+              </a:ext>
+            </a:extLst>
+          </p:cNvPr>
+          <p:cNvSpPr>
+            <a:spLocks xmlns:a="http://schemas.openxmlformats.org/drawingml/2006/main" noGrp="1"/>
+          </p:cNvSpPr>
+          <p:nvPr/>
+        </p:nvSpPr>
+        <p:spPr>
+          <a:xfrm xmlns:a="http://schemas.openxmlformats.org/drawingml/2006/main">
+            <a:off x="609600" y="4429125"/>
+            <a:ext cx="10972800" cy="952500"/>
+          </a:xfrm>
+          <a:prstGeom xmlns:a="http://schemas.openxmlformats.org/drawingml/2006/main" prst="rect">
+            <a:avLst/>
+          </a:prstGeom>
+          <a:noFill xmlns:a="http://schemas.openxmlformats.org/drawingml/2006/main"/>
+          <a:ln xmlns:a="http://schemas.openxmlformats.org/drawingml/2006/main" w="0">
+            <a:noFill/>
+          </a:ln>
+        </p:spPr>
+        <p:txBody>
+          <a:bodyPr xmlns:a="http://schemas.openxmlformats.org/drawingml/2006/main">
+            <a:noAutofit/>
+          </a:bodyPr>
+          <a:lstStyle xmlns:a="http://schemas.openxmlformats.org/drawingml/2006/main"/>
+          <a:p xmlns:a="http://schemas.openxmlformats.org/drawingml/2006/main">
+            <a:pPr>
+              <a:defRPr sz="2250" b="0">
+                <a:solidFill>
+                  <a:srgbClr val="213846"/>
+                </a:solidFill>
+                <a:latin typeface="Bitstream Charter"/>
+                <a:ea typeface="Bitstream Charter"/>
+                <a:cs typeface="Bitstream Charter"/>
+              </a:defRPr>
+            </a:pPr>
+            <a:r>
+              <a:rPr sz="2250" b="0">
+                <a:solidFill>
+                  <a:srgbClr val="213846"/>
+                </a:solidFill>
+                <a:latin typeface="Bitstream Charter"/>
+                <a:ea typeface="Bitstream Charter"/>
+                <a:cs typeface="Bitstream Charter"/>
+              </a:rPr>
+              <a:t>No hyperspectral, 813 or proprietary VHR data are used.</a:t>
+            </a:r>
+          </a:p>
+        </p:txBody>
+      </p:sp>
+      <p:sp>
+        <p:nvSpPr>
+          <p:cNvPr id="6" name="">
+            <a:extLst xmlns:a="http://schemas.openxmlformats.org/drawingml/2006/main">
+              <a:ext uri="{FF2B5EF4-FFF2-40B4-BE49-F238E27FC236}">
+                <a16:creationId xmlns:a16="http://schemas.microsoft.com/office/drawing/2014/main" id="{DD965E40-13F2-4856-AFE5-7BD5F5E64E5A}"/>
               </a:ext>
             </a:extLst>
           </p:cNvPr>
@@ -4854,7 +6001,7 @@
                 <a:ea typeface="Bitstream Charter"/>
                 <a:cs typeface="Bitstream Charter"/>
               </a:rPr>
-              <a:t>1,111 observed cells and 373 screened urban candidates. Analyst-defined window, approximately 116 km².</a:t>
+              <a:t>Thermal native detail is about 100 m, delivered on a 30 m grid. We report 300 m cells.</a:t>
             </a:r>
           </a:p>
         </p:txBody>
@@ -4862,7 +6009,7 @@
     </p:spTree>
     <p:extLst>
       <p:ext uri="{BB962C8B-B14F-4D97-AF65-F5344CB8AC3E}">
-        <p14:creationId xmlns:p14="http://schemas.microsoft.com/office/powerpoint/2010/main" val="711346008"/>
+        <p14:creationId xmlns:p14="http://schemas.microsoft.com/office/powerpoint/2010/main" val="1485229939"/>
       </p:ext>
     </p:extLst>
   </p:cSld>
@@ -4888,12 +6035,112 @@
       <p:grpSpPr>
         <a:xfrm xmlns:a="http://schemas.openxmlformats.org/drawingml/2006/main"/>
       </p:grpSpPr>
-      <p:sp>
-        <p:nvSpPr>
-          <p:cNvPr id="4" name="">
+      <p:cxnSp>
+        <p:nvCxnSpPr>
+          <p:cNvPr id="17" name=""/>
+          <p:cNvCxnSpPr>
+            <a:stCxn xmlns:a="http://schemas.openxmlformats.org/drawingml/2006/main" id="8" idx="1"/>
+            <a:endCxn xmlns:a="http://schemas.openxmlformats.org/drawingml/2006/main" id="10" idx="3"/>
+          </p:cNvCxnSpPr>
+          <p:nvPr/>
+        </p:nvCxnSpPr>
+        <p:spPr>
+          <a:xfrm xmlns:a="http://schemas.openxmlformats.org/drawingml/2006/main" flipH="1">
+            <a:off x="7667625" y="4714875"/>
+            <a:ext cx="771525" cy="0"/>
+          </a:xfrm>
+          <a:prstGeom xmlns:a="http://schemas.openxmlformats.org/drawingml/2006/main" prst="straightConnector1">
+            <a:avLst/>
+          </a:prstGeom>
+          <a:ln xmlns:a="http://schemas.openxmlformats.org/drawingml/2006/main" w="28575">
+            <a:solidFill>
+              <a:srgbClr val="163D46"/>
+            </a:solidFill>
+            <a:tailEnd type="arrow" w="med" len="med"/>
+          </a:ln>
+        </p:spPr>
+      </p:cxnSp>
+      <p:cxnSp>
+        <p:nvCxnSpPr>
+          <p:cNvPr id="18" name=""/>
+          <p:cNvCxnSpPr>
+            <a:stCxn xmlns:a="http://schemas.openxmlformats.org/drawingml/2006/main" id="6" idx="2"/>
+            <a:endCxn xmlns:a="http://schemas.openxmlformats.org/drawingml/2006/main" id="8" idx="0"/>
+          </p:cNvCxnSpPr>
+          <p:nvPr/>
+        </p:nvCxnSpPr>
+        <p:spPr>
+          <a:xfrm xmlns:a="http://schemas.openxmlformats.org/drawingml/2006/main">
+            <a:off x="10010775" y="3238500"/>
+            <a:ext cx="0" cy="714375"/>
+          </a:xfrm>
+          <a:prstGeom xmlns:a="http://schemas.openxmlformats.org/drawingml/2006/main" prst="straightConnector1">
+            <a:avLst/>
+          </a:prstGeom>
+          <a:ln xmlns:a="http://schemas.openxmlformats.org/drawingml/2006/main" w="28575">
+            <a:solidFill>
+              <a:srgbClr val="163D46"/>
+            </a:solidFill>
+            <a:tailEnd type="arrow" w="med" len="med"/>
+          </a:ln>
+        </p:spPr>
+      </p:cxnSp>
+      <p:cxnSp>
+        <p:nvCxnSpPr>
+          <p:cNvPr id="19" name=""/>
+          <p:cNvCxnSpPr>
+            <a:stCxn xmlns:a="http://schemas.openxmlformats.org/drawingml/2006/main" id="4" idx="3"/>
+            <a:endCxn xmlns:a="http://schemas.openxmlformats.org/drawingml/2006/main" id="6" idx="1"/>
+          </p:cNvCxnSpPr>
+          <p:nvPr/>
+        </p:nvCxnSpPr>
+        <p:spPr>
+          <a:xfrm xmlns:a="http://schemas.openxmlformats.org/drawingml/2006/main">
+            <a:off x="7667625" y="2476500"/>
+            <a:ext cx="771525" cy="0"/>
+          </a:xfrm>
+          <a:prstGeom xmlns:a="http://schemas.openxmlformats.org/drawingml/2006/main" prst="straightConnector1">
+            <a:avLst/>
+          </a:prstGeom>
+          <a:ln xmlns:a="http://schemas.openxmlformats.org/drawingml/2006/main" w="28575">
+            <a:solidFill>
+              <a:srgbClr val="163D46"/>
+            </a:solidFill>
+            <a:tailEnd type="arrow" w="med" len="med"/>
+          </a:ln>
+        </p:spPr>
+      </p:cxnSp>
+      <p:cxnSp>
+        <p:nvCxnSpPr>
+          <p:cNvPr id="20" name=""/>
+          <p:cNvCxnSpPr>
+            <a:stCxn xmlns:a="http://schemas.openxmlformats.org/drawingml/2006/main" id="2" idx="3"/>
+            <a:endCxn xmlns:a="http://schemas.openxmlformats.org/drawingml/2006/main" id="4" idx="1"/>
+          </p:cNvCxnSpPr>
+          <p:nvPr/>
+        </p:nvCxnSpPr>
+        <p:spPr>
+          <a:xfrm xmlns:a="http://schemas.openxmlformats.org/drawingml/2006/main">
+            <a:off x="3752850" y="2476500"/>
+            <a:ext cx="771525" cy="0"/>
+          </a:xfrm>
+          <a:prstGeom xmlns:a="http://schemas.openxmlformats.org/drawingml/2006/main" prst="straightConnector1">
+            <a:avLst/>
+          </a:prstGeom>
+          <a:ln xmlns:a="http://schemas.openxmlformats.org/drawingml/2006/main" w="28575">
+            <a:solidFill>
+              <a:srgbClr val="163D46"/>
+            </a:solidFill>
+            <a:tailEnd type="arrow" w="med" len="med"/>
+          </a:ln>
+        </p:spPr>
+      </p:cxnSp>
+      <p:sp>
+        <p:nvSpPr>
+          <p:cNvPr id="21" name="">
             <a:extLst xmlns:a="http://schemas.openxmlformats.org/drawingml/2006/main">
               <a:ext uri="{FF2B5EF4-FFF2-40B4-BE49-F238E27FC236}">
-                <a16:creationId xmlns:a16="http://schemas.microsoft.com/office/drawing/2014/main" id="{E5A48779-BD3D-47C8-BEEB-E49AA7704264}"/>
+                <a16:creationId xmlns:a16="http://schemas.microsoft.com/office/drawing/2014/main" id="{0A65A408-0BBB-4C91-84E4-ABC9D3FE0367}"/>
               </a:ext>
             </a:extLst>
           </p:cNvPr>
@@ -4940,39 +6187,692 @@
                 <a:ea typeface="Bitstream Charter"/>
                 <a:cs typeface="Bitstream Charter"/>
               </a:rPr>
-              <a:t>Matched surface-temperature observations</a:t>
+              <a:t>From source crops to an inspectable shortlist</a:t>
             </a:r>
           </a:p>
         </p:txBody>
       </p:sp>
-      <p:pic>
-        <p:nvPicPr>
-          <p:cNvPr id="5" name=""/>
-          <p:cNvPicPr>
-            <a:picLocks xmlns:a="http://schemas.openxmlformats.org/drawingml/2006/main" noChangeAspect="1"/>
-          </p:cNvPicPr>
+      <p:sp>
+        <p:nvSpPr>
+          <p:cNvPr id="2" name="">
+            <a:extLst xmlns:a="http://schemas.openxmlformats.org/drawingml/2006/main">
+              <a:ext uri="{FF2B5EF4-FFF2-40B4-BE49-F238E27FC236}">
+                <a16:creationId xmlns:a16="http://schemas.microsoft.com/office/drawing/2014/main" id="{180635FB-A80F-47DA-9A6D-393D872F26DC}"/>
+              </a:ext>
+            </a:extLst>
+          </p:cNvPr>
+          <p:cNvSpPr>
+            <a:spLocks xmlns:a="http://schemas.openxmlformats.org/drawingml/2006/main" noGrp="1"/>
+          </p:cNvSpPr>
           <p:nvPr/>
-        </p:nvPicPr>
-        <p:blipFill>
-          <a:blip xmlns:r="http://schemas.openxmlformats.org/officeDocument/2006/relationships" xmlns:a="http://schemas.openxmlformats.org/drawingml/2006/main" r:embed="Rf0f02daa4e764e38"/>
-          <a:stretch xmlns:a="http://schemas.openxmlformats.org/drawingml/2006/main"/>
-        </p:blipFill>
+        </p:nvSpPr>
         <p:spPr>
           <a:xfrm xmlns:a="http://schemas.openxmlformats.org/drawingml/2006/main">
-            <a:off x="695325" y="1295400"/>
-            <a:ext cx="10801350" cy="4629150"/>
+            <a:off x="609600" y="1714500"/>
+            <a:ext cx="3143250" cy="1524000"/>
           </a:xfrm>
           <a:prstGeom xmlns:a="http://schemas.openxmlformats.org/drawingml/2006/main" prst="rect">
             <a:avLst/>
           </a:prstGeom>
-        </p:spPr>
-      </p:pic>
+          <a:solidFill xmlns:a="http://schemas.openxmlformats.org/drawingml/2006/main">
+            <a:srgbClr val="E4EBE8"/>
+          </a:solidFill>
+          <a:ln xmlns:a="http://schemas.openxmlformats.org/drawingml/2006/main" w="9525">
+            <a:solidFill>
+              <a:srgbClr val="75908A"/>
+            </a:solidFill>
+          </a:ln>
+        </p:spPr>
+      </p:sp>
       <p:sp>
         <p:nvSpPr>
           <p:cNvPr id="3" name="">
             <a:extLst xmlns:a="http://schemas.openxmlformats.org/drawingml/2006/main">
               <a:ext uri="{FF2B5EF4-FFF2-40B4-BE49-F238E27FC236}">
-                <a16:creationId xmlns:a16="http://schemas.microsoft.com/office/drawing/2014/main" id="{81816CD5-1B5A-4181-B7BD-36038F6A4D88}"/>
+                <a16:creationId xmlns:a16="http://schemas.microsoft.com/office/drawing/2014/main" id="{7C3703D1-F3BD-4BFD-BB90-0BABA9EF669D}"/>
+              </a:ext>
+            </a:extLst>
+          </p:cNvPr>
+          <p:cNvSpPr>
+            <a:spLocks xmlns:a="http://schemas.openxmlformats.org/drawingml/2006/main" noGrp="1"/>
+          </p:cNvSpPr>
+          <p:nvPr/>
+        </p:nvSpPr>
+        <p:spPr>
+          <a:xfrm xmlns:a="http://schemas.openxmlformats.org/drawingml/2006/main">
+            <a:off x="781050" y="1914525"/>
+            <a:ext cx="2800350" cy="1200150"/>
+          </a:xfrm>
+          <a:prstGeom xmlns:a="http://schemas.openxmlformats.org/drawingml/2006/main" prst="rect">
+            <a:avLst/>
+          </a:prstGeom>
+          <a:noFill xmlns:a="http://schemas.openxmlformats.org/drawingml/2006/main"/>
+          <a:ln xmlns:a="http://schemas.openxmlformats.org/drawingml/2006/main" w="0">
+            <a:noFill/>
+          </a:ln>
+        </p:spPr>
+        <p:txBody>
+          <a:bodyPr xmlns:a="http://schemas.openxmlformats.org/drawingml/2006/main">
+            <a:noAutofit/>
+          </a:bodyPr>
+          <a:lstStyle xmlns:a="http://schemas.openxmlformats.org/drawingml/2006/main"/>
+          <a:p xmlns:a="http://schemas.openxmlformats.org/drawingml/2006/main">
+            <a:pPr>
+              <a:defRPr sz="2175" b="0">
+                <a:solidFill>
+                  <a:srgbClr val="163D46"/>
+                </a:solidFill>
+                <a:latin typeface="Bitstream Charter"/>
+                <a:ea typeface="Bitstream Charter"/>
+                <a:cs typeface="Bitstream Charter"/>
+              </a:defRPr>
+            </a:pPr>
+            <a:r>
+              <a:rPr sz="2175" b="0">
+                <a:solidFill>
+                  <a:srgbClr val="163D46"/>
+                </a:solidFill>
+                <a:latin typeface="Bitstream Charter"/>
+                <a:ea typeface="Bitstream Charter"/>
+                <a:cs typeface="Bitstream Charter"/>
+              </a:rPr>
+              <a:t>Packaged inputs</a:t>
+            </a:r>
+          </a:p>
+          <a:p xmlns:a="http://schemas.openxmlformats.org/drawingml/2006/main">
+            <a:pPr>
+              <a:defRPr sz="2175" b="0">
+                <a:solidFill>
+                  <a:srgbClr val="163D46"/>
+                </a:solidFill>
+                <a:latin typeface="Bitstream Charter"/>
+                <a:ea typeface="Bitstream Charter"/>
+                <a:cs typeface="Bitstream Charter"/>
+              </a:defRPr>
+            </a:pPr>
+            <a:r>
+              <a:rPr sz="2175" b="0">
+                <a:solidFill>
+                  <a:srgbClr val="163D46"/>
+                </a:solidFill>
+                <a:latin typeface="Bitstream Charter"/>
+                <a:ea typeface="Bitstream Charter"/>
+                <a:cs typeface="Bitstream Charter"/>
+              </a:rPr>
+              <a:t>Satellite crops</a:t>
+            </a:r>
+          </a:p>
+          <a:p xmlns:a="http://schemas.openxmlformats.org/drawingml/2006/main">
+            <a:pPr>
+              <a:defRPr sz="2175" b="0">
+                <a:solidFill>
+                  <a:srgbClr val="163D46"/>
+                </a:solidFill>
+                <a:latin typeface="Bitstream Charter"/>
+                <a:ea typeface="Bitstream Charter"/>
+                <a:cs typeface="Bitstream Charter"/>
+              </a:defRPr>
+            </a:pPr>
+            <a:r>
+              <a:rPr sz="2175" b="0">
+                <a:solidFill>
+                  <a:srgbClr val="163D46"/>
+                </a:solidFill>
+                <a:latin typeface="Bitstream Charter"/>
+                <a:ea typeface="Bitstream Charter"/>
+                <a:cs typeface="Bitstream Charter"/>
+              </a:rPr>
+              <a:t>+ mapped context</a:t>
+            </a:r>
+          </a:p>
+        </p:txBody>
+      </p:sp>
+      <p:sp>
+        <p:nvSpPr>
+          <p:cNvPr id="4" name="">
+            <a:extLst xmlns:a="http://schemas.openxmlformats.org/drawingml/2006/main">
+              <a:ext uri="{FF2B5EF4-FFF2-40B4-BE49-F238E27FC236}">
+                <a16:creationId xmlns:a16="http://schemas.microsoft.com/office/drawing/2014/main" id="{E7486547-BB62-462A-889B-AC9DCE791F6A}"/>
+              </a:ext>
+            </a:extLst>
+          </p:cNvPr>
+          <p:cNvSpPr>
+            <a:spLocks xmlns:a="http://schemas.openxmlformats.org/drawingml/2006/main" noGrp="1"/>
+          </p:cNvSpPr>
+          <p:nvPr/>
+        </p:nvSpPr>
+        <p:spPr>
+          <a:xfrm xmlns:a="http://schemas.openxmlformats.org/drawingml/2006/main">
+            <a:off x="4524375" y="1714500"/>
+            <a:ext cx="3143250" cy="1524000"/>
+          </a:xfrm>
+          <a:prstGeom xmlns:a="http://schemas.openxmlformats.org/drawingml/2006/main" prst="rect">
+            <a:avLst/>
+          </a:prstGeom>
+          <a:solidFill xmlns:a="http://schemas.openxmlformats.org/drawingml/2006/main">
+            <a:srgbClr val="E4EBE8"/>
+          </a:solidFill>
+          <a:ln xmlns:a="http://schemas.openxmlformats.org/drawingml/2006/main" w="9525">
+            <a:solidFill>
+              <a:srgbClr val="75908A"/>
+            </a:solidFill>
+          </a:ln>
+        </p:spPr>
+      </p:sp>
+      <p:sp>
+        <p:nvSpPr>
+          <p:cNvPr id="5" name="">
+            <a:extLst xmlns:a="http://schemas.openxmlformats.org/drawingml/2006/main">
+              <a:ext uri="{FF2B5EF4-FFF2-40B4-BE49-F238E27FC236}">
+                <a16:creationId xmlns:a16="http://schemas.microsoft.com/office/drawing/2014/main" id="{D08900FD-40F0-457F-9B3C-AFCEA944BBC7}"/>
+              </a:ext>
+            </a:extLst>
+          </p:cNvPr>
+          <p:cNvSpPr>
+            <a:spLocks xmlns:a="http://schemas.openxmlformats.org/drawingml/2006/main" noGrp="1"/>
+          </p:cNvSpPr>
+          <p:nvPr/>
+        </p:nvSpPr>
+        <p:spPr>
+          <a:xfrm xmlns:a="http://schemas.openxmlformats.org/drawingml/2006/main">
+            <a:off x="4695825" y="1914525"/>
+            <a:ext cx="2800350" cy="1200150"/>
+          </a:xfrm>
+          <a:prstGeom xmlns:a="http://schemas.openxmlformats.org/drawingml/2006/main" prst="rect">
+            <a:avLst/>
+          </a:prstGeom>
+          <a:noFill xmlns:a="http://schemas.openxmlformats.org/drawingml/2006/main"/>
+          <a:ln xmlns:a="http://schemas.openxmlformats.org/drawingml/2006/main" w="0">
+            <a:noFill/>
+          </a:ln>
+        </p:spPr>
+        <p:txBody>
+          <a:bodyPr xmlns:a="http://schemas.openxmlformats.org/drawingml/2006/main">
+            <a:noAutofit/>
+          </a:bodyPr>
+          <a:lstStyle xmlns:a="http://schemas.openxmlformats.org/drawingml/2006/main"/>
+          <a:p xmlns:a="http://schemas.openxmlformats.org/drawingml/2006/main">
+            <a:pPr>
+              <a:defRPr sz="2175" b="0">
+                <a:solidFill>
+                  <a:srgbClr val="163D46"/>
+                </a:solidFill>
+                <a:latin typeface="Bitstream Charter"/>
+                <a:ea typeface="Bitstream Charter"/>
+                <a:cs typeface="Bitstream Charter"/>
+              </a:defRPr>
+            </a:pPr>
+            <a:r>
+              <a:rPr sz="2175" b="0">
+                <a:solidFill>
+                  <a:srgbClr val="163D46"/>
+                </a:solidFill>
+                <a:latin typeface="Bitstream Charter"/>
+                <a:ea typeface="Bitstream Charter"/>
+                <a:cs typeface="Bitstream Charter"/>
+              </a:rPr>
+              <a:t>Quality screening</a:t>
+            </a:r>
+          </a:p>
+          <a:p xmlns:a="http://schemas.openxmlformats.org/drawingml/2006/main">
+            <a:pPr>
+              <a:defRPr sz="2175" b="0">
+                <a:solidFill>
+                  <a:srgbClr val="163D46"/>
+                </a:solidFill>
+                <a:latin typeface="Bitstream Charter"/>
+                <a:ea typeface="Bitstream Charter"/>
+                <a:cs typeface="Bitstream Charter"/>
+              </a:defRPr>
+            </a:pPr>
+            <a:r>
+              <a:rPr sz="2175" b="0">
+                <a:solidFill>
+                  <a:srgbClr val="163D46"/>
+                </a:solidFill>
+                <a:latin typeface="Bitstream Charter"/>
+                <a:ea typeface="Bitstream Charter"/>
+                <a:cs typeface="Bitstream Charter"/>
+              </a:rPr>
+              <a:t>Cloud, coast and</a:t>
+            </a:r>
+          </a:p>
+          <a:p xmlns:a="http://schemas.openxmlformats.org/drawingml/2006/main">
+            <a:pPr>
+              <a:defRPr sz="2175" b="0">
+                <a:solidFill>
+                  <a:srgbClr val="163D46"/>
+                </a:solidFill>
+                <a:latin typeface="Bitstream Charter"/>
+                <a:ea typeface="Bitstream Charter"/>
+                <a:cs typeface="Bitstream Charter"/>
+              </a:defRPr>
+            </a:pPr>
+            <a:r>
+              <a:rPr sz="2175" b="0">
+                <a:solidFill>
+                  <a:srgbClr val="163D46"/>
+                </a:solidFill>
+                <a:latin typeface="Bitstream Charter"/>
+                <a:ea typeface="Bitstream Charter"/>
+                <a:cs typeface="Bitstream Charter"/>
+              </a:rPr>
+              <a:t>common support</a:t>
+            </a:r>
+          </a:p>
+        </p:txBody>
+      </p:sp>
+      <p:sp>
+        <p:nvSpPr>
+          <p:cNvPr id="6" name="">
+            <a:extLst xmlns:a="http://schemas.openxmlformats.org/drawingml/2006/main">
+              <a:ext uri="{FF2B5EF4-FFF2-40B4-BE49-F238E27FC236}">
+                <a16:creationId xmlns:a16="http://schemas.microsoft.com/office/drawing/2014/main" id="{B0892A10-4D83-43E1-AF1D-8FF269C4C9B3}"/>
+              </a:ext>
+            </a:extLst>
+          </p:cNvPr>
+          <p:cNvSpPr>
+            <a:spLocks xmlns:a="http://schemas.openxmlformats.org/drawingml/2006/main" noGrp="1"/>
+          </p:cNvSpPr>
+          <p:nvPr/>
+        </p:nvSpPr>
+        <p:spPr>
+          <a:xfrm xmlns:a="http://schemas.openxmlformats.org/drawingml/2006/main">
+            <a:off x="8439150" y="1714500"/>
+            <a:ext cx="3143250" cy="1524000"/>
+          </a:xfrm>
+          <a:prstGeom xmlns:a="http://schemas.openxmlformats.org/drawingml/2006/main" prst="rect">
+            <a:avLst/>
+          </a:prstGeom>
+          <a:solidFill xmlns:a="http://schemas.openxmlformats.org/drawingml/2006/main">
+            <a:srgbClr val="E4EBE8"/>
+          </a:solidFill>
+          <a:ln xmlns:a="http://schemas.openxmlformats.org/drawingml/2006/main" w="9525">
+            <a:solidFill>
+              <a:srgbClr val="75908A"/>
+            </a:solidFill>
+          </a:ln>
+        </p:spPr>
+      </p:sp>
+      <p:sp>
+        <p:nvSpPr>
+          <p:cNvPr id="7" name="">
+            <a:extLst xmlns:a="http://schemas.openxmlformats.org/drawingml/2006/main">
+              <a:ext uri="{FF2B5EF4-FFF2-40B4-BE49-F238E27FC236}">
+                <a16:creationId xmlns:a16="http://schemas.microsoft.com/office/drawing/2014/main" id="{40FEC3A7-31BF-4642-8D2B-C888F0DBF05A}"/>
+              </a:ext>
+            </a:extLst>
+          </p:cNvPr>
+          <p:cNvSpPr>
+            <a:spLocks xmlns:a="http://schemas.openxmlformats.org/drawingml/2006/main" noGrp="1"/>
+          </p:cNvSpPr>
+          <p:nvPr/>
+        </p:nvSpPr>
+        <p:spPr>
+          <a:xfrm xmlns:a="http://schemas.openxmlformats.org/drawingml/2006/main">
+            <a:off x="8610600" y="1914525"/>
+            <a:ext cx="2800350" cy="1200150"/>
+          </a:xfrm>
+          <a:prstGeom xmlns:a="http://schemas.openxmlformats.org/drawingml/2006/main" prst="rect">
+            <a:avLst/>
+          </a:prstGeom>
+          <a:noFill xmlns:a="http://schemas.openxmlformats.org/drawingml/2006/main"/>
+          <a:ln xmlns:a="http://schemas.openxmlformats.org/drawingml/2006/main" w="0">
+            <a:noFill/>
+          </a:ln>
+        </p:spPr>
+        <p:txBody>
+          <a:bodyPr xmlns:a="http://schemas.openxmlformats.org/drawingml/2006/main">
+            <a:noAutofit/>
+          </a:bodyPr>
+          <a:lstStyle xmlns:a="http://schemas.openxmlformats.org/drawingml/2006/main"/>
+          <a:p xmlns:a="http://schemas.openxmlformats.org/drawingml/2006/main">
+            <a:pPr>
+              <a:defRPr sz="2175" b="0">
+                <a:solidFill>
+                  <a:srgbClr val="163D46"/>
+                </a:solidFill>
+                <a:latin typeface="Bitstream Charter"/>
+                <a:ea typeface="Bitstream Charter"/>
+                <a:cs typeface="Bitstream Charter"/>
+              </a:defRPr>
+            </a:pPr>
+            <a:r>
+              <a:rPr sz="2175" b="0">
+                <a:solidFill>
+                  <a:srgbClr val="163D46"/>
+                </a:solidFill>
+                <a:latin typeface="Bitstream Charter"/>
+                <a:ea typeface="Bitstream Charter"/>
+                <a:cs typeface="Bitstream Charter"/>
+              </a:rPr>
+              <a:t>300 m indicators</a:t>
+            </a:r>
+          </a:p>
+          <a:p xmlns:a="http://schemas.openxmlformats.org/drawingml/2006/main">
+            <a:pPr>
+              <a:defRPr sz="2175" b="0">
+                <a:solidFill>
+                  <a:srgbClr val="163D46"/>
+                </a:solidFill>
+                <a:latin typeface="Bitstream Charter"/>
+                <a:ea typeface="Bitstream Charter"/>
+                <a:cs typeface="Bitstream Charter"/>
+              </a:defRPr>
+            </a:pPr>
+            <a:r>
+              <a:rPr sz="2175" b="0">
+                <a:solidFill>
+                  <a:srgbClr val="163D46"/>
+                </a:solidFill>
+                <a:latin typeface="Bitstream Charter"/>
+                <a:ea typeface="Bitstream Charter"/>
+                <a:cs typeface="Bitstream Charter"/>
+              </a:rPr>
+              <a:t>Temperature, green</a:t>
+            </a:r>
+          </a:p>
+          <a:p xmlns:a="http://schemas.openxmlformats.org/drawingml/2006/main">
+            <a:pPr>
+              <a:defRPr sz="2175" b="0">
+                <a:solidFill>
+                  <a:srgbClr val="163D46"/>
+                </a:solidFill>
+                <a:latin typeface="Bitstream Charter"/>
+                <a:ea typeface="Bitstream Charter"/>
+                <a:cs typeface="Bitstream Charter"/>
+              </a:defRPr>
+            </a:pPr>
+            <a:r>
+              <a:rPr sz="2175" b="0">
+                <a:solidFill>
+                  <a:srgbClr val="163D46"/>
+                </a:solidFill>
+                <a:latin typeface="Bitstream Charter"/>
+                <a:ea typeface="Bitstream Charter"/>
+                <a:cs typeface="Bitstream Charter"/>
+              </a:rPr>
+              <a:t>and buildings</a:t>
+            </a:r>
+          </a:p>
+        </p:txBody>
+      </p:sp>
+      <p:sp>
+        <p:nvSpPr>
+          <p:cNvPr id="8" name="">
+            <a:extLst xmlns:a="http://schemas.openxmlformats.org/drawingml/2006/main">
+              <a:ext uri="{FF2B5EF4-FFF2-40B4-BE49-F238E27FC236}">
+                <a16:creationId xmlns:a16="http://schemas.microsoft.com/office/drawing/2014/main" id="{2ECB88AD-7C3F-426B-84E8-73B370314E61}"/>
+              </a:ext>
+            </a:extLst>
+          </p:cNvPr>
+          <p:cNvSpPr>
+            <a:spLocks xmlns:a="http://schemas.openxmlformats.org/drawingml/2006/main" noGrp="1"/>
+          </p:cNvSpPr>
+          <p:nvPr/>
+        </p:nvSpPr>
+        <p:spPr>
+          <a:xfrm xmlns:a="http://schemas.openxmlformats.org/drawingml/2006/main">
+            <a:off x="8439150" y="3952875"/>
+            <a:ext cx="3143250" cy="1524000"/>
+          </a:xfrm>
+          <a:prstGeom xmlns:a="http://schemas.openxmlformats.org/drawingml/2006/main" prst="rect">
+            <a:avLst/>
+          </a:prstGeom>
+          <a:solidFill xmlns:a="http://schemas.openxmlformats.org/drawingml/2006/main">
+            <a:srgbClr val="E4EBE8"/>
+          </a:solidFill>
+          <a:ln xmlns:a="http://schemas.openxmlformats.org/drawingml/2006/main" w="9525">
+            <a:solidFill>
+              <a:srgbClr val="75908A"/>
+            </a:solidFill>
+          </a:ln>
+        </p:spPr>
+      </p:sp>
+      <p:sp>
+        <p:nvSpPr>
+          <p:cNvPr id="9" name="">
+            <a:extLst xmlns:a="http://schemas.openxmlformats.org/drawingml/2006/main">
+              <a:ext uri="{FF2B5EF4-FFF2-40B4-BE49-F238E27FC236}">
+                <a16:creationId xmlns:a16="http://schemas.microsoft.com/office/drawing/2014/main" id="{E2EA65C8-4035-429A-ADF3-86B7930742F3}"/>
+              </a:ext>
+            </a:extLst>
+          </p:cNvPr>
+          <p:cNvSpPr>
+            <a:spLocks xmlns:a="http://schemas.openxmlformats.org/drawingml/2006/main" noGrp="1"/>
+          </p:cNvSpPr>
+          <p:nvPr/>
+        </p:nvSpPr>
+        <p:spPr>
+          <a:xfrm xmlns:a="http://schemas.openxmlformats.org/drawingml/2006/main">
+            <a:off x="8610600" y="4152900"/>
+            <a:ext cx="2800350" cy="1200150"/>
+          </a:xfrm>
+          <a:prstGeom xmlns:a="http://schemas.openxmlformats.org/drawingml/2006/main" prst="rect">
+            <a:avLst/>
+          </a:prstGeom>
+          <a:noFill xmlns:a="http://schemas.openxmlformats.org/drawingml/2006/main"/>
+          <a:ln xmlns:a="http://schemas.openxmlformats.org/drawingml/2006/main" w="0">
+            <a:noFill/>
+          </a:ln>
+        </p:spPr>
+        <p:txBody>
+          <a:bodyPr xmlns:a="http://schemas.openxmlformats.org/drawingml/2006/main">
+            <a:noAutofit/>
+          </a:bodyPr>
+          <a:lstStyle xmlns:a="http://schemas.openxmlformats.org/drawingml/2006/main"/>
+          <a:p xmlns:a="http://schemas.openxmlformats.org/drawingml/2006/main">
+            <a:pPr>
+              <a:defRPr sz="2175" b="0">
+                <a:solidFill>
+                  <a:srgbClr val="163D46"/>
+                </a:solidFill>
+                <a:latin typeface="Bitstream Charter"/>
+                <a:ea typeface="Bitstream Charter"/>
+                <a:cs typeface="Bitstream Charter"/>
+              </a:defRPr>
+            </a:pPr>
+            <a:r>
+              <a:rPr sz="2175" b="0">
+                <a:solidFill>
+                  <a:srgbClr val="163D46"/>
+                </a:solidFill>
+                <a:latin typeface="Bitstream Charter"/>
+                <a:ea typeface="Bitstream Charter"/>
+                <a:cs typeface="Bitstream Charter"/>
+              </a:rPr>
+              <a:t>Relative ranking</a:t>
+            </a:r>
+          </a:p>
+          <a:p xmlns:a="http://schemas.openxmlformats.org/drawingml/2006/main">
+            <a:pPr>
+              <a:defRPr sz="2175" b="0">
+                <a:solidFill>
+                  <a:srgbClr val="163D46"/>
+                </a:solidFill>
+                <a:latin typeface="Bitstream Charter"/>
+                <a:ea typeface="Bitstream Charter"/>
+                <a:cs typeface="Bitstream Charter"/>
+              </a:defRPr>
+            </a:pPr>
+            <a:r>
+              <a:rPr sz="2175" b="0">
+                <a:solidFill>
+                  <a:srgbClr val="163D46"/>
+                </a:solidFill>
+                <a:latin typeface="Bitstream Charter"/>
+                <a:ea typeface="Bitstream Charter"/>
+                <a:cs typeface="Bitstream Charter"/>
+              </a:rPr>
+              <a:t>Candidate rules</a:t>
+            </a:r>
+          </a:p>
+          <a:p xmlns:a="http://schemas.openxmlformats.org/drawingml/2006/main">
+            <a:pPr>
+              <a:defRPr sz="2175" b="0">
+                <a:solidFill>
+                  <a:srgbClr val="163D46"/>
+                </a:solidFill>
+                <a:latin typeface="Bitstream Charter"/>
+                <a:ea typeface="Bitstream Charter"/>
+                <a:cs typeface="Bitstream Charter"/>
+              </a:defRPr>
+            </a:pPr>
+            <a:r>
+              <a:rPr sz="2175" b="0">
+                <a:solidFill>
+                  <a:srgbClr val="163D46"/>
+                </a:solidFill>
+                <a:latin typeface="Bitstream Charter"/>
+                <a:ea typeface="Bitstream Charter"/>
+                <a:cs typeface="Bitstream Charter"/>
+              </a:rPr>
+              <a:t>+ 13 scenarios</a:t>
+            </a:r>
+          </a:p>
+        </p:txBody>
+      </p:sp>
+      <p:sp>
+        <p:nvSpPr>
+          <p:cNvPr id="10" name="">
+            <a:extLst xmlns:a="http://schemas.openxmlformats.org/drawingml/2006/main">
+              <a:ext uri="{FF2B5EF4-FFF2-40B4-BE49-F238E27FC236}">
+                <a16:creationId xmlns:a16="http://schemas.microsoft.com/office/drawing/2014/main" id="{B890E0C1-80C5-495F-8ACD-083D03CDFD9D}"/>
+              </a:ext>
+            </a:extLst>
+          </p:cNvPr>
+          <p:cNvSpPr>
+            <a:spLocks xmlns:a="http://schemas.openxmlformats.org/drawingml/2006/main" noGrp="1"/>
+          </p:cNvSpPr>
+          <p:nvPr/>
+        </p:nvSpPr>
+        <p:spPr>
+          <a:xfrm xmlns:a="http://schemas.openxmlformats.org/drawingml/2006/main">
+            <a:off x="4524375" y="3952875"/>
+            <a:ext cx="3143250" cy="1524000"/>
+          </a:xfrm>
+          <a:prstGeom xmlns:a="http://schemas.openxmlformats.org/drawingml/2006/main" prst="rect">
+            <a:avLst/>
+          </a:prstGeom>
+          <a:solidFill xmlns:a="http://schemas.openxmlformats.org/drawingml/2006/main">
+            <a:srgbClr val="DCE9E1"/>
+          </a:solidFill>
+          <a:ln xmlns:a="http://schemas.openxmlformats.org/drawingml/2006/main" w="9525">
+            <a:solidFill>
+              <a:srgbClr val="75908A"/>
+            </a:solidFill>
+          </a:ln>
+        </p:spPr>
+      </p:sp>
+      <p:sp>
+        <p:nvSpPr>
+          <p:cNvPr id="11" name="">
+            <a:extLst xmlns:a="http://schemas.openxmlformats.org/drawingml/2006/main">
+              <a:ext uri="{FF2B5EF4-FFF2-40B4-BE49-F238E27FC236}">
+                <a16:creationId xmlns:a16="http://schemas.microsoft.com/office/drawing/2014/main" id="{D0411175-BF19-4E30-A6FB-A77041F00084}"/>
+              </a:ext>
+            </a:extLst>
+          </p:cNvPr>
+          <p:cNvSpPr>
+            <a:spLocks xmlns:a="http://schemas.openxmlformats.org/drawingml/2006/main" noGrp="1"/>
+          </p:cNvSpPr>
+          <p:nvPr/>
+        </p:nvSpPr>
+        <p:spPr>
+          <a:xfrm xmlns:a="http://schemas.openxmlformats.org/drawingml/2006/main">
+            <a:off x="4695825" y="4152900"/>
+            <a:ext cx="2800350" cy="1200150"/>
+          </a:xfrm>
+          <a:prstGeom xmlns:a="http://schemas.openxmlformats.org/drawingml/2006/main" prst="rect">
+            <a:avLst/>
+          </a:prstGeom>
+          <a:noFill xmlns:a="http://schemas.openxmlformats.org/drawingml/2006/main"/>
+          <a:ln xmlns:a="http://schemas.openxmlformats.org/drawingml/2006/main" w="0">
+            <a:noFill/>
+          </a:ln>
+        </p:spPr>
+        <p:txBody>
+          <a:bodyPr xmlns:a="http://schemas.openxmlformats.org/drawingml/2006/main">
+            <a:noAutofit/>
+          </a:bodyPr>
+          <a:lstStyle xmlns:a="http://schemas.openxmlformats.org/drawingml/2006/main"/>
+          <a:p xmlns:a="http://schemas.openxmlformats.org/drawingml/2006/main">
+            <a:pPr>
+              <a:defRPr sz="2175" b="1">
+                <a:solidFill>
+                  <a:srgbClr val="163D46"/>
+                </a:solidFill>
+                <a:latin typeface="Bitstream Charter"/>
+                <a:ea typeface="Bitstream Charter"/>
+                <a:cs typeface="Bitstream Charter"/>
+              </a:defRPr>
+            </a:pPr>
+            <a:r>
+              <a:rPr sz="2175" b="1">
+                <a:solidFill>
+                  <a:srgbClr val="163D46"/>
+                </a:solidFill>
+                <a:latin typeface="Bitstream Charter"/>
+                <a:ea typeface="Bitstream Charter"/>
+                <a:cs typeface="Bitstream Charter"/>
+              </a:rPr>
+              <a:t>Portable map</a:t>
+            </a:r>
+          </a:p>
+          <a:p xmlns:a="http://schemas.openxmlformats.org/drawingml/2006/main">
+            <a:pPr>
+              <a:defRPr sz="2175" b="1">
+                <a:solidFill>
+                  <a:srgbClr val="163D46"/>
+                </a:solidFill>
+                <a:latin typeface="Bitstream Charter"/>
+                <a:ea typeface="Bitstream Charter"/>
+                <a:cs typeface="Bitstream Charter"/>
+              </a:defRPr>
+            </a:pPr>
+            <a:r>
+              <a:rPr sz="2175" b="1">
+                <a:solidFill>
+                  <a:srgbClr val="163D46"/>
+                </a:solidFill>
+                <a:latin typeface="Bitstream Charter"/>
+                <a:ea typeface="Bitstream Charter"/>
+                <a:cs typeface="Bitstream Charter"/>
+              </a:rPr>
+              <a:t>Inspect indicators</a:t>
+            </a:r>
+          </a:p>
+          <a:p xmlns:a="http://schemas.openxmlformats.org/drawingml/2006/main">
+            <a:pPr>
+              <a:defRPr sz="2175" b="1">
+                <a:solidFill>
+                  <a:srgbClr val="163D46"/>
+                </a:solidFill>
+                <a:latin typeface="Bitstream Charter"/>
+                <a:ea typeface="Bitstream Charter"/>
+                <a:cs typeface="Bitstream Charter"/>
+              </a:defRPr>
+            </a:pPr>
+            <a:r>
+              <a:rPr sz="2175" b="1">
+                <a:solidFill>
+                  <a:srgbClr val="163D46"/>
+                </a:solidFill>
+                <a:latin typeface="Bitstream Charter"/>
+                <a:ea typeface="Bitstream Charter"/>
+                <a:cs typeface="Bitstream Charter"/>
+              </a:rPr>
+              <a:t>and visit candidates</a:t>
+            </a:r>
+          </a:p>
+        </p:txBody>
+      </p:sp>
+      <p:sp>
+        <p:nvSpPr>
+          <p:cNvPr id="16" name="">
+            <a:extLst xmlns:a="http://schemas.openxmlformats.org/drawingml/2006/main">
+              <a:ext uri="{FF2B5EF4-FFF2-40B4-BE49-F238E27FC236}">
+                <a16:creationId xmlns:a16="http://schemas.microsoft.com/office/drawing/2014/main" id="{92CC83BC-FD77-44C4-84D6-DA8B3C94F404}"/>
               </a:ext>
             </a:extLst>
           </p:cNvPr>
@@ -5019,7 +6919,7 @@
                 <a:ea typeface="Bitstream Charter"/>
                 <a:cs typeface="Bitstream Charter"/>
               </a:rPr>
-              <a:t>94.4379 km² of common inland sample footprints across the broad study window.</a:t>
+              <a:t>Deterministic processing; upstream WorldCover uses ML. Our own segmentation model is future work.</a:t>
             </a:r>
           </a:p>
         </p:txBody>
@@ -5027,7 +6927,7 @@
     </p:spTree>
     <p:extLst>
       <p:ext uri="{BB962C8B-B14F-4D97-AF65-F5344CB8AC3E}">
-        <p14:creationId xmlns:p14="http://schemas.microsoft.com/office/powerpoint/2010/main" val="249686725"/>
+        <p14:creationId xmlns:p14="http://schemas.microsoft.com/office/powerpoint/2010/main" val="1986723221"/>
       </p:ext>
     </p:extLst>
   </p:cSld>
@@ -5055,10 +6955,340 @@
       </p:grpSpPr>
       <p:sp>
         <p:nvSpPr>
+          <p:cNvPr id="4" name="">
+            <a:extLst xmlns:a="http://schemas.openxmlformats.org/drawingml/2006/main">
+              <a:ext uri="{FF2B5EF4-FFF2-40B4-BE49-F238E27FC236}">
+                <a16:creationId xmlns:a16="http://schemas.microsoft.com/office/drawing/2014/main" id="{E87E6321-8638-4D7C-953B-7F941BB1F070}"/>
+              </a:ext>
+            </a:extLst>
+          </p:cNvPr>
+          <p:cNvSpPr>
+            <a:spLocks xmlns:a="http://schemas.openxmlformats.org/drawingml/2006/main" noGrp="1"/>
+          </p:cNvSpPr>
+          <p:nvPr/>
+        </p:nvSpPr>
+        <p:spPr>
+          <a:xfrm xmlns:a="http://schemas.openxmlformats.org/drawingml/2006/main">
+            <a:off x="609600" y="400050"/>
+            <a:ext cx="10972800" cy="857250"/>
+          </a:xfrm>
+          <a:prstGeom xmlns:a="http://schemas.openxmlformats.org/drawingml/2006/main" prst="rect">
+            <a:avLst/>
+          </a:prstGeom>
+          <a:noFill xmlns:a="http://schemas.openxmlformats.org/drawingml/2006/main"/>
+          <a:ln xmlns:a="http://schemas.openxmlformats.org/drawingml/2006/main" w="0">
+            <a:noFill/>
+          </a:ln>
+        </p:spPr>
+        <p:txBody>
+          <a:bodyPr xmlns:a="http://schemas.openxmlformats.org/drawingml/2006/main">
+            <a:noAutofit/>
+          </a:bodyPr>
+          <a:lstStyle xmlns:a="http://schemas.openxmlformats.org/drawingml/2006/main"/>
+          <a:p xmlns:a="http://schemas.openxmlformats.org/drawingml/2006/main">
+            <a:pPr>
+              <a:defRPr sz="3300" b="1">
+                <a:solidFill>
+                  <a:srgbClr val="163D46"/>
+                </a:solidFill>
+                <a:latin typeface="Bitstream Charter"/>
+                <a:ea typeface="Bitstream Charter"/>
+                <a:cs typeface="Bitstream Charter"/>
+              </a:defRPr>
+            </a:pPr>
+            <a:r>
+              <a:rPr sz="3300" b="1">
+                <a:solidFill>
+                  <a:srgbClr val="163D46"/>
+                </a:solidFill>
+                <a:latin typeface="Bitstream Charter"/>
+                <a:ea typeface="Bitstream Charter"/>
+                <a:cs typeface="Bitstream Charter"/>
+              </a:rPr>
+              <a:t>Al Khor study window and shortlist</a:t>
+            </a:r>
+          </a:p>
+        </p:txBody>
+      </p:sp>
+      <p:pic>
+        <p:nvPicPr>
+          <p:cNvPr id="5" name=""/>
+          <p:cNvPicPr>
+            <a:picLocks xmlns:a="http://schemas.openxmlformats.org/drawingml/2006/main" noChangeAspect="1"/>
+          </p:cNvPicPr>
+          <p:nvPr/>
+        </p:nvPicPr>
+        <p:blipFill>
+          <a:blip xmlns:r="http://schemas.openxmlformats.org/officeDocument/2006/relationships" xmlns:a="http://schemas.openxmlformats.org/drawingml/2006/main" r:embed="R7d4ad72d3ee4464c"/>
+          <a:stretch xmlns:a="http://schemas.openxmlformats.org/drawingml/2006/main"/>
+        </p:blipFill>
+        <p:spPr>
+          <a:xfrm xmlns:a="http://schemas.openxmlformats.org/drawingml/2006/main">
+            <a:off x="609600" y="1415415"/>
+            <a:ext cx="10972800" cy="4389120"/>
+          </a:xfrm>
+          <a:prstGeom xmlns:a="http://schemas.openxmlformats.org/drawingml/2006/main" prst="rect">
+            <a:avLst/>
+          </a:prstGeom>
+        </p:spPr>
+      </p:pic>
+      <p:sp>
+        <p:nvSpPr>
+          <p:cNvPr id="3" name="">
+            <a:extLst xmlns:a="http://schemas.openxmlformats.org/drawingml/2006/main">
+              <a:ext uri="{FF2B5EF4-FFF2-40B4-BE49-F238E27FC236}">
+                <a16:creationId xmlns:a16="http://schemas.microsoft.com/office/drawing/2014/main" id="{E3FAD36E-A403-4A2E-BE31-F58574A68947}"/>
+              </a:ext>
+            </a:extLst>
+          </p:cNvPr>
+          <p:cNvSpPr>
+            <a:spLocks xmlns:a="http://schemas.openxmlformats.org/drawingml/2006/main" noGrp="1"/>
+          </p:cNvSpPr>
+          <p:nvPr/>
+        </p:nvSpPr>
+        <p:spPr>
+          <a:xfrm xmlns:a="http://schemas.openxmlformats.org/drawingml/2006/main">
+            <a:off x="609600" y="6067425"/>
+            <a:ext cx="10668000" cy="590550"/>
+          </a:xfrm>
+          <a:prstGeom xmlns:a="http://schemas.openxmlformats.org/drawingml/2006/main" prst="rect">
+            <a:avLst/>
+          </a:prstGeom>
+          <a:noFill xmlns:a="http://schemas.openxmlformats.org/drawingml/2006/main"/>
+          <a:ln xmlns:a="http://schemas.openxmlformats.org/drawingml/2006/main" w="0">
+            <a:noFill/>
+          </a:ln>
+        </p:spPr>
+        <p:txBody>
+          <a:bodyPr xmlns:a="http://schemas.openxmlformats.org/drawingml/2006/main">
+            <a:noAutofit/>
+          </a:bodyPr>
+          <a:lstStyle xmlns:a="http://schemas.openxmlformats.org/drawingml/2006/main"/>
+          <a:p xmlns:a="http://schemas.openxmlformats.org/drawingml/2006/main">
+            <a:pPr>
+              <a:defRPr sz="1725" b="0">
+                <a:solidFill>
+                  <a:srgbClr val="526569"/>
+                </a:solidFill>
+                <a:latin typeface="Bitstream Charter"/>
+                <a:ea typeface="Bitstream Charter"/>
+                <a:cs typeface="Bitstream Charter"/>
+              </a:defRPr>
+            </a:pPr>
+            <a:r>
+              <a:rPr sz="1725" b="0">
+                <a:solidFill>
+                  <a:srgbClr val="526569"/>
+                </a:solidFill>
+                <a:latin typeface="Bitstream Charter"/>
+                <a:ea typeface="Bitstream Charter"/>
+                <a:cs typeface="Bitstream Charter"/>
+              </a:rPr>
+              <a:t>1,111 observed cells and 373 screened urban candidates. Analyst-defined window, approximately 116 km².</a:t>
+            </a:r>
+          </a:p>
+        </p:txBody>
+      </p:sp>
+    </p:spTree>
+    <p:extLst>
+      <p:ext uri="{BB962C8B-B14F-4D97-AF65-F5344CB8AC3E}">
+        <p14:creationId xmlns:p14="http://schemas.microsoft.com/office/powerpoint/2010/main" val="1902352318"/>
+      </p:ext>
+    </p:extLst>
+  </p:cSld>
+</p:sld>
+</file>
+
+<file path=ppt/slides/slide7.xml><?xml version="1.0" encoding="utf-8"?>
+<p:sld xmlns:p="http://schemas.openxmlformats.org/presentationml/2006/main">
+  <p:cSld>
+    <p:bg>
+      <p:bgPr>
+        <a:solidFill xmlns:a="http://schemas.openxmlformats.org/drawingml/2006/main">
+          <a:srgbClr val="F7F6F1"/>
+        </a:solidFill>
+      </p:bgPr>
+    </p:bg>
+    <p:spTree>
+      <p:nvGrpSpPr>
+        <p:cNvPr id="1" name=""/>
+        <p:cNvGrpSpPr/>
+        <p:nvPr/>
+      </p:nvGrpSpPr>
+      <p:grpSpPr>
+        <a:xfrm xmlns:a="http://schemas.openxmlformats.org/drawingml/2006/main"/>
+      </p:grpSpPr>
+      <p:sp>
+        <p:nvSpPr>
+          <p:cNvPr id="4" name="">
+            <a:extLst xmlns:a="http://schemas.openxmlformats.org/drawingml/2006/main">
+              <a:ext uri="{FF2B5EF4-FFF2-40B4-BE49-F238E27FC236}">
+                <a16:creationId xmlns:a16="http://schemas.microsoft.com/office/drawing/2014/main" id="{D9A82381-3225-4921-AE1B-79BAA4D7359F}"/>
+              </a:ext>
+            </a:extLst>
+          </p:cNvPr>
+          <p:cNvSpPr>
+            <a:spLocks xmlns:a="http://schemas.openxmlformats.org/drawingml/2006/main" noGrp="1"/>
+          </p:cNvSpPr>
+          <p:nvPr/>
+        </p:nvSpPr>
+        <p:spPr>
+          <a:xfrm xmlns:a="http://schemas.openxmlformats.org/drawingml/2006/main">
+            <a:off x="609600" y="400050"/>
+            <a:ext cx="10972800" cy="857250"/>
+          </a:xfrm>
+          <a:prstGeom xmlns:a="http://schemas.openxmlformats.org/drawingml/2006/main" prst="rect">
+            <a:avLst/>
+          </a:prstGeom>
+          <a:noFill xmlns:a="http://schemas.openxmlformats.org/drawingml/2006/main"/>
+          <a:ln xmlns:a="http://schemas.openxmlformats.org/drawingml/2006/main" w="0">
+            <a:noFill/>
+          </a:ln>
+        </p:spPr>
+        <p:txBody>
+          <a:bodyPr xmlns:a="http://schemas.openxmlformats.org/drawingml/2006/main">
+            <a:noAutofit/>
+          </a:bodyPr>
+          <a:lstStyle xmlns:a="http://schemas.openxmlformats.org/drawingml/2006/main"/>
+          <a:p xmlns:a="http://schemas.openxmlformats.org/drawingml/2006/main">
+            <a:pPr>
+              <a:defRPr sz="3300" b="1">
+                <a:solidFill>
+                  <a:srgbClr val="163D46"/>
+                </a:solidFill>
+                <a:latin typeface="Bitstream Charter"/>
+                <a:ea typeface="Bitstream Charter"/>
+                <a:cs typeface="Bitstream Charter"/>
+              </a:defRPr>
+            </a:pPr>
+            <a:r>
+              <a:rPr sz="3300" b="1">
+                <a:solidFill>
+                  <a:srgbClr val="163D46"/>
+                </a:solidFill>
+                <a:latin typeface="Bitstream Charter"/>
+                <a:ea typeface="Bitstream Charter"/>
+                <a:cs typeface="Bitstream Charter"/>
+              </a:rPr>
+              <a:t>Matched surface-temperature observations</a:t>
+            </a:r>
+          </a:p>
+        </p:txBody>
+      </p:sp>
+      <p:pic>
+        <p:nvPicPr>
+          <p:cNvPr id="5" name=""/>
+          <p:cNvPicPr>
+            <a:picLocks xmlns:a="http://schemas.openxmlformats.org/drawingml/2006/main" noChangeAspect="1"/>
+          </p:cNvPicPr>
+          <p:nvPr/>
+        </p:nvPicPr>
+        <p:blipFill>
+          <a:blip xmlns:r="http://schemas.openxmlformats.org/officeDocument/2006/relationships" xmlns:a="http://schemas.openxmlformats.org/drawingml/2006/main" r:embed="Rd7fb2328741e4002"/>
+          <a:stretch xmlns:a="http://schemas.openxmlformats.org/drawingml/2006/main"/>
+        </p:blipFill>
+        <p:spPr>
+          <a:xfrm xmlns:a="http://schemas.openxmlformats.org/drawingml/2006/main">
+            <a:off x="695325" y="1295400"/>
+            <a:ext cx="10801350" cy="4629150"/>
+          </a:xfrm>
+          <a:prstGeom xmlns:a="http://schemas.openxmlformats.org/drawingml/2006/main" prst="rect">
+            <a:avLst/>
+          </a:prstGeom>
+        </p:spPr>
+      </p:pic>
+      <p:sp>
+        <p:nvSpPr>
+          <p:cNvPr id="3" name="">
+            <a:extLst xmlns:a="http://schemas.openxmlformats.org/drawingml/2006/main">
+              <a:ext uri="{FF2B5EF4-FFF2-40B4-BE49-F238E27FC236}">
+                <a16:creationId xmlns:a16="http://schemas.microsoft.com/office/drawing/2014/main" id="{98132EB1-2FEA-4BE9-9E16-076DA8992475}"/>
+              </a:ext>
+            </a:extLst>
+          </p:cNvPr>
+          <p:cNvSpPr>
+            <a:spLocks xmlns:a="http://schemas.openxmlformats.org/drawingml/2006/main" noGrp="1"/>
+          </p:cNvSpPr>
+          <p:nvPr/>
+        </p:nvSpPr>
+        <p:spPr>
+          <a:xfrm xmlns:a="http://schemas.openxmlformats.org/drawingml/2006/main">
+            <a:off x="609600" y="6067425"/>
+            <a:ext cx="10668000" cy="590550"/>
+          </a:xfrm>
+          <a:prstGeom xmlns:a="http://schemas.openxmlformats.org/drawingml/2006/main" prst="rect">
+            <a:avLst/>
+          </a:prstGeom>
+          <a:noFill xmlns:a="http://schemas.openxmlformats.org/drawingml/2006/main"/>
+          <a:ln xmlns:a="http://schemas.openxmlformats.org/drawingml/2006/main" w="0">
+            <a:noFill/>
+          </a:ln>
+        </p:spPr>
+        <p:txBody>
+          <a:bodyPr xmlns:a="http://schemas.openxmlformats.org/drawingml/2006/main">
+            <a:noAutofit/>
+          </a:bodyPr>
+          <a:lstStyle xmlns:a="http://schemas.openxmlformats.org/drawingml/2006/main"/>
+          <a:p xmlns:a="http://schemas.openxmlformats.org/drawingml/2006/main">
+            <a:pPr>
+              <a:defRPr sz="1725" b="0">
+                <a:solidFill>
+                  <a:srgbClr val="526569"/>
+                </a:solidFill>
+                <a:latin typeface="Bitstream Charter"/>
+                <a:ea typeface="Bitstream Charter"/>
+                <a:cs typeface="Bitstream Charter"/>
+              </a:defRPr>
+            </a:pPr>
+            <a:r>
+              <a:rPr sz="1725" b="0">
+                <a:solidFill>
+                  <a:srgbClr val="526569"/>
+                </a:solidFill>
+                <a:latin typeface="Bitstream Charter"/>
+                <a:ea typeface="Bitstream Charter"/>
+                <a:cs typeface="Bitstream Charter"/>
+              </a:rPr>
+              <a:t>94.4379 km² of common inland sample footprints across the broad study window.</a:t>
+            </a:r>
+          </a:p>
+        </p:txBody>
+      </p:sp>
+    </p:spTree>
+    <p:extLst>
+      <p:ext uri="{BB962C8B-B14F-4D97-AF65-F5344CB8AC3E}">
+        <p14:creationId xmlns:p14="http://schemas.microsoft.com/office/powerpoint/2010/main" val="620023111"/>
+      </p:ext>
+    </p:extLst>
+  </p:cSld>
+</p:sld>
+</file>
+
+<file path=ppt/slides/slide8.xml><?xml version="1.0" encoding="utf-8"?>
+<p:sld xmlns:p="http://schemas.openxmlformats.org/presentationml/2006/main">
+  <p:cSld>
+    <p:bg>
+      <p:bgPr>
+        <a:solidFill xmlns:a="http://schemas.openxmlformats.org/drawingml/2006/main">
+          <a:srgbClr val="F7F6F1"/>
+        </a:solidFill>
+      </p:bgPr>
+    </p:bg>
+    <p:spTree>
+      <p:nvGrpSpPr>
+        <p:cNvPr id="1" name=""/>
+        <p:cNvGrpSpPr/>
+        <p:nvPr/>
+      </p:nvGrpSpPr>
+      <p:grpSpPr>
+        <a:xfrm xmlns:a="http://schemas.openxmlformats.org/drawingml/2006/main"/>
+      </p:grpSpPr>
+      <p:sp>
+        <p:nvSpPr>
           <p:cNvPr id="6" name="">
             <a:extLst xmlns:a="http://schemas.openxmlformats.org/drawingml/2006/main">
               <a:ext uri="{FF2B5EF4-FFF2-40B4-BE49-F238E27FC236}">
-                <a16:creationId xmlns:a16="http://schemas.microsoft.com/office/drawing/2014/main" id="{57A8689F-AD49-4D28-A23D-420BE81C26AB}"/>
+                <a16:creationId xmlns:a16="http://schemas.microsoft.com/office/drawing/2014/main" id="{574DF5F2-6F18-4CFA-95D3-29DA618477EF}"/>
               </a:ext>
             </a:extLst>
           </p:cNvPr>
@@ -5568,7 +7798,7 @@
           <p:cNvPr id="3" name="">
             <a:extLst xmlns:a="http://schemas.openxmlformats.org/drawingml/2006/main">
               <a:ext uri="{FF2B5EF4-FFF2-40B4-BE49-F238E27FC236}">
-                <a16:creationId xmlns:a16="http://schemas.microsoft.com/office/drawing/2014/main" id="{8FDAA67F-2C90-46FF-9620-C5D4031BC97D}"/>
+                <a16:creationId xmlns:a16="http://schemas.microsoft.com/office/drawing/2014/main" id="{B6057B3F-4425-4249-9B09-C7C0AA9CC48A}"/>
               </a:ext>
             </a:extLst>
           </p:cNvPr>
@@ -5625,7 +7855,7 @@
           <p:cNvPr id="4" name="">
             <a:extLst xmlns:a="http://schemas.openxmlformats.org/drawingml/2006/main">
               <a:ext uri="{FF2B5EF4-FFF2-40B4-BE49-F238E27FC236}">
-                <a16:creationId xmlns:a16="http://schemas.microsoft.com/office/drawing/2014/main" id="{500D7E2D-850E-4790-8176-BEEFBE80A689}"/>
+                <a16:creationId xmlns:a16="http://schemas.microsoft.com/office/drawing/2014/main" id="{7BF433C5-572A-45FD-AAA4-FA98985B78FA}"/>
               </a:ext>
             </a:extLst>
           </p:cNvPr>
@@ -5682,7 +7912,7 @@
           <p:cNvPr id="5" name="">
             <a:extLst xmlns:a="http://schemas.openxmlformats.org/drawingml/2006/main">
               <a:ext uri="{FF2B5EF4-FFF2-40B4-BE49-F238E27FC236}">
-                <a16:creationId xmlns:a16="http://schemas.microsoft.com/office/drawing/2014/main" id="{C789B88A-E19B-4637-B4D3-D74E372451F7}"/>
+                <a16:creationId xmlns:a16="http://schemas.microsoft.com/office/drawing/2014/main" id="{2687F463-98D7-4CB7-BC43-BA3858AD5E87}"/>
               </a:ext>
             </a:extLst>
           </p:cNvPr>
@@ -5737,635 +7967,7 @@
     </p:spTree>
     <p:extLst>
       <p:ext uri="{BB962C8B-B14F-4D97-AF65-F5344CB8AC3E}">
-        <p14:creationId xmlns:p14="http://schemas.microsoft.com/office/powerpoint/2010/main" val="824666922"/>
-      </p:ext>
-    </p:extLst>
-  </p:cSld>
-</p:sld>
-</file>
-
-<file path=ppt/slides/slide7.xml><?xml version="1.0" encoding="utf-8"?>
-<p:sld xmlns:p="http://schemas.openxmlformats.org/presentationml/2006/main">
-  <p:cSld>
-    <p:bg>
-      <p:bgPr>
-        <a:solidFill xmlns:a="http://schemas.openxmlformats.org/drawingml/2006/main">
-          <a:srgbClr val="F7F6F1"/>
-        </a:solidFill>
-      </p:bgPr>
-    </p:bg>
-    <p:spTree>
-      <p:nvGrpSpPr>
-        <p:cNvPr id="1" name=""/>
-        <p:cNvGrpSpPr/>
-        <p:nvPr/>
-      </p:nvGrpSpPr>
-      <p:grpSpPr>
-        <a:xfrm xmlns:a="http://schemas.openxmlformats.org/drawingml/2006/main"/>
-      </p:grpSpPr>
-      <p:sp>
-        <p:nvSpPr>
-          <p:cNvPr id="6" name="">
-            <a:extLst xmlns:a="http://schemas.openxmlformats.org/drawingml/2006/main">
-              <a:ext uri="{FF2B5EF4-FFF2-40B4-BE49-F238E27FC236}">
-                <a16:creationId xmlns:a16="http://schemas.microsoft.com/office/drawing/2014/main" id="{39171F42-82C0-4E5B-B6DA-4629E8FAF6A1}"/>
-              </a:ext>
-            </a:extLst>
-          </p:cNvPr>
-          <p:cNvSpPr>
-            <a:spLocks xmlns:a="http://schemas.openxmlformats.org/drawingml/2006/main" noGrp="1"/>
-          </p:cNvSpPr>
-          <p:nvPr/>
-        </p:nvSpPr>
-        <p:spPr>
-          <a:xfrm xmlns:a="http://schemas.openxmlformats.org/drawingml/2006/main">
-            <a:off x="609600" y="400050"/>
-            <a:ext cx="10972800" cy="857250"/>
-          </a:xfrm>
-          <a:prstGeom xmlns:a="http://schemas.openxmlformats.org/drawingml/2006/main" prst="rect">
-            <a:avLst/>
-          </a:prstGeom>
-          <a:noFill xmlns:a="http://schemas.openxmlformats.org/drawingml/2006/main"/>
-          <a:ln xmlns:a="http://schemas.openxmlformats.org/drawingml/2006/main" w="0">
-            <a:noFill/>
-          </a:ln>
-        </p:spPr>
-        <p:txBody>
-          <a:bodyPr xmlns:a="http://schemas.openxmlformats.org/drawingml/2006/main">
-            <a:noAutofit/>
-          </a:bodyPr>
-          <a:lstStyle xmlns:a="http://schemas.openxmlformats.org/drawingml/2006/main"/>
-          <a:p xmlns:a="http://schemas.openxmlformats.org/drawingml/2006/main">
-            <a:pPr>
-              <a:defRPr sz="3300" b="1">
-                <a:solidFill>
-                  <a:srgbClr val="163D46"/>
-                </a:solidFill>
-                <a:latin typeface="Bitstream Charter"/>
-                <a:ea typeface="Bitstream Charter"/>
-                <a:cs typeface="Bitstream Charter"/>
-              </a:defRPr>
-            </a:pPr>
-            <a:r>
-              <a:rPr sz="3300" b="1">
-                <a:solidFill>
-                  <a:srgbClr val="163D46"/>
-                </a:solidFill>
-                <a:latin typeface="Bitstream Charter"/>
-                <a:ea typeface="Bitstream Charter"/>
-                <a:cs typeface="Bitstream Charter"/>
-              </a:rPr>
-              <a:t>Reproducibility and reference checks</a:t>
-            </a:r>
-          </a:p>
-        </p:txBody>
-      </p:sp>
-      <p:sp>
-        <p:nvSpPr>
-          <p:cNvPr id="2" name="">
-            <a:extLst xmlns:a="http://schemas.openxmlformats.org/drawingml/2006/main">
-              <a:ext uri="{FF2B5EF4-FFF2-40B4-BE49-F238E27FC236}">
-                <a16:creationId xmlns:a16="http://schemas.microsoft.com/office/drawing/2014/main" id="{6CCD7EAF-2CAA-44CF-ACAE-E0F35A5D2E0B}"/>
-              </a:ext>
-            </a:extLst>
-          </p:cNvPr>
-          <p:cNvSpPr>
-            <a:spLocks xmlns:a="http://schemas.openxmlformats.org/drawingml/2006/main" noGrp="1"/>
-          </p:cNvSpPr>
-          <p:nvPr/>
-        </p:nvSpPr>
-        <p:spPr>
-          <a:xfrm xmlns:a="http://schemas.openxmlformats.org/drawingml/2006/main">
-            <a:off x="609600" y="1571625"/>
-            <a:ext cx="10972800" cy="952500"/>
-          </a:xfrm>
-          <a:prstGeom xmlns:a="http://schemas.openxmlformats.org/drawingml/2006/main" prst="rect">
-            <a:avLst/>
-          </a:prstGeom>
-          <a:noFill xmlns:a="http://schemas.openxmlformats.org/drawingml/2006/main"/>
-          <a:ln xmlns:a="http://schemas.openxmlformats.org/drawingml/2006/main" w="0">
-            <a:noFill/>
-          </a:ln>
-        </p:spPr>
-        <p:txBody>
-          <a:bodyPr xmlns:a="http://schemas.openxmlformats.org/drawingml/2006/main">
-            <a:noAutofit/>
-          </a:bodyPr>
-          <a:lstStyle xmlns:a="http://schemas.openxmlformats.org/drawingml/2006/main"/>
-          <a:p xmlns:a="http://schemas.openxmlformats.org/drawingml/2006/main">
-            <a:pPr>
-              <a:defRPr sz="2400" b="0">
-                <a:solidFill>
-                  <a:srgbClr val="213846"/>
-                </a:solidFill>
-                <a:latin typeface="Bitstream Charter"/>
-                <a:ea typeface="Bitstream Charter"/>
-                <a:cs typeface="Bitstream Charter"/>
-              </a:defRPr>
-            </a:pPr>
-            <a:r>
-              <a:rPr sz="2400" b="0">
-                <a:solidFill>
-                  <a:srgbClr val="213846"/>
-                </a:solidFill>
-                <a:latin typeface="Bitstream Charter"/>
-                <a:ea typeface="Bitstream Charter"/>
-                <a:cs typeface="Bitstream Charter"/>
-              </a:rPr>
-              <a:t>The package includes 35 hashed input files, source metadata and pinned Python 3.12 dependencies.</a:t>
-            </a:r>
-          </a:p>
-        </p:txBody>
-      </p:sp>
-      <p:sp>
-        <p:nvSpPr>
-          <p:cNvPr id="3" name="">
-            <a:extLst xmlns:a="http://schemas.openxmlformats.org/drawingml/2006/main">
-              <a:ext uri="{FF2B5EF4-FFF2-40B4-BE49-F238E27FC236}">
-                <a16:creationId xmlns:a16="http://schemas.microsoft.com/office/drawing/2014/main" id="{E512F65E-6D9F-4DFA-A340-7F65FBC6EACF}"/>
-              </a:ext>
-            </a:extLst>
-          </p:cNvPr>
-          <p:cNvSpPr>
-            <a:spLocks xmlns:a="http://schemas.openxmlformats.org/drawingml/2006/main" noGrp="1"/>
-          </p:cNvSpPr>
-          <p:nvPr/>
-        </p:nvSpPr>
-        <p:spPr>
-          <a:xfrm xmlns:a="http://schemas.openxmlformats.org/drawingml/2006/main">
-            <a:off x="609600" y="2638425"/>
-            <a:ext cx="10972800" cy="952500"/>
-          </a:xfrm>
-          <a:prstGeom xmlns:a="http://schemas.openxmlformats.org/drawingml/2006/main" prst="rect">
-            <a:avLst/>
-          </a:prstGeom>
-          <a:noFill xmlns:a="http://schemas.openxmlformats.org/drawingml/2006/main"/>
-          <a:ln xmlns:a="http://schemas.openxmlformats.org/drawingml/2006/main" w="0">
-            <a:noFill/>
-          </a:ln>
-        </p:spPr>
-        <p:txBody>
-          <a:bodyPr xmlns:a="http://schemas.openxmlformats.org/drawingml/2006/main">
-            <a:noAutofit/>
-          </a:bodyPr>
-          <a:lstStyle xmlns:a="http://schemas.openxmlformats.org/drawingml/2006/main"/>
-          <a:p xmlns:a="http://schemas.openxmlformats.org/drawingml/2006/main">
-            <a:pPr>
-              <a:defRPr sz="2400" b="0">
-                <a:solidFill>
-                  <a:srgbClr val="213846"/>
-                </a:solidFill>
-                <a:latin typeface="Bitstream Charter"/>
-                <a:ea typeface="Bitstream Charter"/>
-                <a:cs typeface="Bitstream Charter"/>
-              </a:defRPr>
-            </a:pPr>
-            <a:r>
-              <a:rPr sz="2400" b="0">
-                <a:solidFill>
-                  <a:srgbClr val="213846"/>
-                </a:solidFill>
-                <a:latin typeface="Bitstream Charter"/>
-                <a:ea typeface="Bitstream Charter"/>
-                <a:cs typeface="Bitstream Charter"/>
-              </a:rPr>
-              <a:t>Clean GitHub execution passed through a normal Jupyter kernel: five cells, zero errors and all 35 input hashes verified.</a:t>
-            </a:r>
-          </a:p>
-        </p:txBody>
-      </p:sp>
-      <p:sp>
-        <p:nvSpPr>
-          <p:cNvPr id="4" name="">
-            <a:extLst xmlns:a="http://schemas.openxmlformats.org/drawingml/2006/main">
-              <a:ext uri="{FF2B5EF4-FFF2-40B4-BE49-F238E27FC236}">
-                <a16:creationId xmlns:a16="http://schemas.microsoft.com/office/drawing/2014/main" id="{24A4D64E-9494-4A78-B3D7-89CA95977FBF}"/>
-              </a:ext>
-            </a:extLst>
-          </p:cNvPr>
-          <p:cNvSpPr>
-            <a:spLocks xmlns:a="http://schemas.openxmlformats.org/drawingml/2006/main" noGrp="1"/>
-          </p:cNvSpPr>
-          <p:nvPr/>
-        </p:nvSpPr>
-        <p:spPr>
-          <a:xfrm xmlns:a="http://schemas.openxmlformats.org/drawingml/2006/main">
-            <a:off x="609600" y="3705225"/>
-            <a:ext cx="10972800" cy="952500"/>
-          </a:xfrm>
-          <a:prstGeom xmlns:a="http://schemas.openxmlformats.org/drawingml/2006/main" prst="rect">
-            <a:avLst/>
-          </a:prstGeom>
-          <a:noFill xmlns:a="http://schemas.openxmlformats.org/drawingml/2006/main"/>
-          <a:ln xmlns:a="http://schemas.openxmlformats.org/drawingml/2006/main" w="0">
-            <a:noFill/>
-          </a:ln>
-        </p:spPr>
-        <p:txBody>
-          <a:bodyPr xmlns:a="http://schemas.openxmlformats.org/drawingml/2006/main">
-            <a:noAutofit/>
-          </a:bodyPr>
-          <a:lstStyle xmlns:a="http://schemas.openxmlformats.org/drawingml/2006/main"/>
-          <a:p xmlns:a="http://schemas.openxmlformats.org/drawingml/2006/main">
-            <a:pPr>
-              <a:defRPr sz="2400" b="0">
-                <a:solidFill>
-                  <a:srgbClr val="213846"/>
-                </a:solidFill>
-                <a:latin typeface="Bitstream Charter"/>
-                <a:ea typeface="Bitstream Charter"/>
-                <a:cs typeface="Bitstream Charter"/>
-              </a:defRPr>
-            </a:pPr>
-            <a:r>
-              <a:rPr sz="2400" b="0">
-                <a:solidFill>
-                  <a:srgbClr val="213846"/>
-                </a:solidFill>
-                <a:latin typeface="Bitstream Charter"/>
-                <a:ea typeface="Bitstream Charter"/>
-                <a:cs typeface="Bitstream Charter"/>
-              </a:rPr>
-              <a:t>Grass reference agreement: 24/25. Building green-rule agreement: 0/30. Coastal points retained in thermal support: 0/30.</a:t>
-            </a:r>
-          </a:p>
-        </p:txBody>
-      </p:sp>
-      <p:sp>
-        <p:nvSpPr>
-          <p:cNvPr id="5" name="">
-            <a:extLst xmlns:a="http://schemas.openxmlformats.org/drawingml/2006/main">
-              <a:ext uri="{FF2B5EF4-FFF2-40B4-BE49-F238E27FC236}">
-                <a16:creationId xmlns:a16="http://schemas.microsoft.com/office/drawing/2014/main" id="{AFB85701-F656-49F9-93D2-D80A0F1D4D07}"/>
-              </a:ext>
-            </a:extLst>
-          </p:cNvPr>
-          <p:cNvSpPr>
-            <a:spLocks xmlns:a="http://schemas.openxmlformats.org/drawingml/2006/main" noGrp="1"/>
-          </p:cNvSpPr>
-          <p:nvPr/>
-        </p:nvSpPr>
-        <p:spPr>
-          <a:xfrm xmlns:a="http://schemas.openxmlformats.org/drawingml/2006/main">
-            <a:off x="609600" y="6067425"/>
-            <a:ext cx="10668000" cy="590550"/>
-          </a:xfrm>
-          <a:prstGeom xmlns:a="http://schemas.openxmlformats.org/drawingml/2006/main" prst="rect">
-            <a:avLst/>
-          </a:prstGeom>
-          <a:noFill xmlns:a="http://schemas.openxmlformats.org/drawingml/2006/main"/>
-          <a:ln xmlns:a="http://schemas.openxmlformats.org/drawingml/2006/main" w="0">
-            <a:noFill/>
-          </a:ln>
-        </p:spPr>
-        <p:txBody>
-          <a:bodyPr xmlns:a="http://schemas.openxmlformats.org/drawingml/2006/main">
-            <a:noAutofit/>
-          </a:bodyPr>
-          <a:lstStyle xmlns:a="http://schemas.openxmlformats.org/drawingml/2006/main"/>
-          <a:p xmlns:a="http://schemas.openxmlformats.org/drawingml/2006/main">
-            <a:pPr>
-              <a:defRPr sz="1725" b="0">
-                <a:solidFill>
-                  <a:srgbClr val="526569"/>
-                </a:solidFill>
-                <a:latin typeface="Bitstream Charter"/>
-                <a:ea typeface="Bitstream Charter"/>
-                <a:cs typeface="Bitstream Charter"/>
-              </a:defRPr>
-            </a:pPr>
-            <a:r>
-              <a:rPr sz="1725" b="0">
-                <a:solidFill>
-                  <a:srgbClr val="526569"/>
-                </a:solidFill>
-                <a:latin typeface="Bitstream Charter"/>
-                <a:ea typeface="Bitstream Charter"/>
-                <a:cs typeface="Bitstream Charter"/>
-              </a:rPr>
-              <a:t>Contributed reference labels have conflicts. Human confirmation and independent thermal validation remain pending.</a:t>
-            </a:r>
-          </a:p>
-        </p:txBody>
-      </p:sp>
-    </p:spTree>
-    <p:extLst>
-      <p:ext uri="{BB962C8B-B14F-4D97-AF65-F5344CB8AC3E}">
-        <p14:creationId xmlns:p14="http://schemas.microsoft.com/office/powerpoint/2010/main" val="1385586393"/>
-      </p:ext>
-    </p:extLst>
-  </p:cSld>
-</p:sld>
-</file>
-
-<file path=ppt/slides/slide8.xml><?xml version="1.0" encoding="utf-8"?>
-<p:sld xmlns:p="http://schemas.openxmlformats.org/presentationml/2006/main">
-  <p:cSld>
-    <p:bg>
-      <p:bgPr>
-        <a:solidFill xmlns:a="http://schemas.openxmlformats.org/drawingml/2006/main">
-          <a:srgbClr val="F7F6F1"/>
-        </a:solidFill>
-      </p:bgPr>
-    </p:bg>
-    <p:spTree>
-      <p:nvGrpSpPr>
-        <p:cNvPr id="1" name=""/>
-        <p:cNvGrpSpPr/>
-        <p:nvPr/>
-      </p:nvGrpSpPr>
-      <p:grpSpPr>
-        <a:xfrm xmlns:a="http://schemas.openxmlformats.org/drawingml/2006/main"/>
-      </p:grpSpPr>
-      <p:sp>
-        <p:nvSpPr>
-          <p:cNvPr id="6" name="">
-            <a:extLst xmlns:a="http://schemas.openxmlformats.org/drawingml/2006/main">
-              <a:ext uri="{FF2B5EF4-FFF2-40B4-BE49-F238E27FC236}">
-                <a16:creationId xmlns:a16="http://schemas.microsoft.com/office/drawing/2014/main" id="{8AA25826-8DE6-4392-A427-831EC4467333}"/>
-              </a:ext>
-            </a:extLst>
-          </p:cNvPr>
-          <p:cNvSpPr>
-            <a:spLocks xmlns:a="http://schemas.openxmlformats.org/drawingml/2006/main" noGrp="1"/>
-          </p:cNvSpPr>
-          <p:nvPr/>
-        </p:nvSpPr>
-        <p:spPr>
-          <a:xfrm xmlns:a="http://schemas.openxmlformats.org/drawingml/2006/main">
-            <a:off x="609600" y="400050"/>
-            <a:ext cx="10972800" cy="857250"/>
-          </a:xfrm>
-          <a:prstGeom xmlns:a="http://schemas.openxmlformats.org/drawingml/2006/main" prst="rect">
-            <a:avLst/>
-          </a:prstGeom>
-          <a:noFill xmlns:a="http://schemas.openxmlformats.org/drawingml/2006/main"/>
-          <a:ln xmlns:a="http://schemas.openxmlformats.org/drawingml/2006/main" w="0">
-            <a:noFill/>
-          </a:ln>
-        </p:spPr>
-        <p:txBody>
-          <a:bodyPr xmlns:a="http://schemas.openxmlformats.org/drawingml/2006/main">
-            <a:noAutofit/>
-          </a:bodyPr>
-          <a:lstStyle xmlns:a="http://schemas.openxmlformats.org/drawingml/2006/main"/>
-          <a:p xmlns:a="http://schemas.openxmlformats.org/drawingml/2006/main">
-            <a:pPr>
-              <a:defRPr sz="3300" b="1">
-                <a:solidFill>
-                  <a:srgbClr val="163D46"/>
-                </a:solidFill>
-                <a:latin typeface="Bitstream Charter"/>
-                <a:ea typeface="Bitstream Charter"/>
-                <a:cs typeface="Bitstream Charter"/>
-              </a:defRPr>
-            </a:pPr>
-            <a:r>
-              <a:rPr sz="3300" b="1">
-                <a:solidFill>
-                  <a:srgbClr val="163D46"/>
-                </a:solidFill>
-                <a:latin typeface="Bitstream Charter"/>
-                <a:ea typeface="Bitstream Charter"/>
-                <a:cs typeface="Bitstream Charter"/>
-              </a:rPr>
-              <a:t>Prototype scope and next validation</a:t>
-            </a:r>
-          </a:p>
-        </p:txBody>
-      </p:sp>
-      <p:sp>
-        <p:nvSpPr>
-          <p:cNvPr id="2" name="">
-            <a:extLst xmlns:a="http://schemas.openxmlformats.org/drawingml/2006/main">
-              <a:ext uri="{FF2B5EF4-FFF2-40B4-BE49-F238E27FC236}">
-                <a16:creationId xmlns:a16="http://schemas.microsoft.com/office/drawing/2014/main" id="{8C90E8E5-13AA-47E5-8FEA-5462B4B37179}"/>
-              </a:ext>
-            </a:extLst>
-          </p:cNvPr>
-          <p:cNvSpPr>
-            <a:spLocks xmlns:a="http://schemas.openxmlformats.org/drawingml/2006/main" noGrp="1"/>
-          </p:cNvSpPr>
-          <p:nvPr/>
-        </p:nvSpPr>
-        <p:spPr>
-          <a:xfrm xmlns:a="http://schemas.openxmlformats.org/drawingml/2006/main">
-            <a:off x="609600" y="1571625"/>
-            <a:ext cx="10972800" cy="952500"/>
-          </a:xfrm>
-          <a:prstGeom xmlns:a="http://schemas.openxmlformats.org/drawingml/2006/main" prst="rect">
-            <a:avLst/>
-          </a:prstGeom>
-          <a:noFill xmlns:a="http://schemas.openxmlformats.org/drawingml/2006/main"/>
-          <a:ln xmlns:a="http://schemas.openxmlformats.org/drawingml/2006/main" w="0">
-            <a:noFill/>
-          </a:ln>
-        </p:spPr>
-        <p:txBody>
-          <a:bodyPr xmlns:a="http://schemas.openxmlformats.org/drawingml/2006/main">
-            <a:noAutofit/>
-          </a:bodyPr>
-          <a:lstStyle xmlns:a="http://schemas.openxmlformats.org/drawingml/2006/main"/>
-          <a:p xmlns:a="http://schemas.openxmlformats.org/drawingml/2006/main">
-            <a:pPr>
-              <a:defRPr sz="2400" b="0">
-                <a:solidFill>
-                  <a:srgbClr val="213846"/>
-                </a:solidFill>
-                <a:latin typeface="Bitstream Charter"/>
-                <a:ea typeface="Bitstream Charter"/>
-                <a:cs typeface="Bitstream Charter"/>
-              </a:defRPr>
-            </a:pPr>
-            <a:r>
-              <a:rPr sz="2400" b="0">
-                <a:solidFill>
-                  <a:srgbClr val="213846"/>
-                </a:solidFill>
-                <a:latin typeface="Bitstream Charter"/>
-                <a:ea typeface="Bitstream Charter"/>
-                <a:cs typeface="Bitstream Charter"/>
-              </a:rPr>
-              <a:t>The current prototype combines satellite indicators with contributed geometry and an upstream ML-derived land-cover product.</a:t>
-            </a:r>
-          </a:p>
-        </p:txBody>
-      </p:sp>
-      <p:sp>
-        <p:nvSpPr>
-          <p:cNvPr id="3" name="">
-            <a:extLst xmlns:a="http://schemas.openxmlformats.org/drawingml/2006/main">
-              <a:ext uri="{FF2B5EF4-FFF2-40B4-BE49-F238E27FC236}">
-                <a16:creationId xmlns:a16="http://schemas.microsoft.com/office/drawing/2014/main" id="{ACC1F6C0-A516-459A-AF99-78110774E814}"/>
-              </a:ext>
-            </a:extLst>
-          </p:cNvPr>
-          <p:cNvSpPr>
-            <a:spLocks xmlns:a="http://schemas.openxmlformats.org/drawingml/2006/main" noGrp="1"/>
-          </p:cNvSpPr>
-          <p:nvPr/>
-        </p:nvSpPr>
-        <p:spPr>
-          <a:xfrm xmlns:a="http://schemas.openxmlformats.org/drawingml/2006/main">
-            <a:off x="609600" y="2638425"/>
-            <a:ext cx="10972800" cy="952500"/>
-          </a:xfrm>
-          <a:prstGeom xmlns:a="http://schemas.openxmlformats.org/drawingml/2006/main" prst="rect">
-            <a:avLst/>
-          </a:prstGeom>
-          <a:noFill xmlns:a="http://schemas.openxmlformats.org/drawingml/2006/main"/>
-          <a:ln xmlns:a="http://schemas.openxmlformats.org/drawingml/2006/main" w="0">
-            <a:noFill/>
-          </a:ln>
-        </p:spPr>
-        <p:txBody>
-          <a:bodyPr xmlns:a="http://schemas.openxmlformats.org/drawingml/2006/main">
-            <a:noAutofit/>
-          </a:bodyPr>
-          <a:lstStyle xmlns:a="http://schemas.openxmlformats.org/drawingml/2006/main"/>
-          <a:p xmlns:a="http://schemas.openxmlformats.org/drawingml/2006/main">
-            <a:pPr>
-              <a:defRPr sz="2400" b="0">
-                <a:solidFill>
-                  <a:srgbClr val="213846"/>
-                </a:solidFill>
-                <a:latin typeface="Bitstream Charter"/>
-                <a:ea typeface="Bitstream Charter"/>
-                <a:cs typeface="Bitstream Charter"/>
-              </a:defRPr>
-            </a:pPr>
-            <a:r>
-              <a:rPr sz="2400" b="0">
-                <a:solidFill>
-                  <a:srgbClr val="213846"/>
-                </a:solidFill>
-                <a:latin typeface="Bitstream Charter"/>
-                <a:ea typeface="Bitstream Charter"/>
-                <a:cs typeface="Bitstream Charter"/>
-              </a:rPr>
-              <a:t>Our proposed VHR AI segmentation, paved-surface mapping and urban-expansion measurement remain future work.</a:t>
-            </a:r>
-          </a:p>
-        </p:txBody>
-      </p:sp>
-      <p:sp>
-        <p:nvSpPr>
-          <p:cNvPr id="4" name="">
-            <a:extLst xmlns:a="http://schemas.openxmlformats.org/drawingml/2006/main">
-              <a:ext uri="{FF2B5EF4-FFF2-40B4-BE49-F238E27FC236}">
-                <a16:creationId xmlns:a16="http://schemas.microsoft.com/office/drawing/2014/main" id="{FCB42D8C-1116-4BE9-93CC-F516F07953DA}"/>
-              </a:ext>
-            </a:extLst>
-          </p:cNvPr>
-          <p:cNvSpPr>
-            <a:spLocks xmlns:a="http://schemas.openxmlformats.org/drawingml/2006/main" noGrp="1"/>
-          </p:cNvSpPr>
-          <p:nvPr/>
-        </p:nvSpPr>
-        <p:spPr>
-          <a:xfrm xmlns:a="http://schemas.openxmlformats.org/drawingml/2006/main">
-            <a:off x="609600" y="3705225"/>
-            <a:ext cx="10972800" cy="952500"/>
-          </a:xfrm>
-          <a:prstGeom xmlns:a="http://schemas.openxmlformats.org/drawingml/2006/main" prst="rect">
-            <a:avLst/>
-          </a:prstGeom>
-          <a:noFill xmlns:a="http://schemas.openxmlformats.org/drawingml/2006/main"/>
-          <a:ln xmlns:a="http://schemas.openxmlformats.org/drawingml/2006/main" w="0">
-            <a:noFill/>
-          </a:ln>
-        </p:spPr>
-        <p:txBody>
-          <a:bodyPr xmlns:a="http://schemas.openxmlformats.org/drawingml/2006/main">
-            <a:noAutofit/>
-          </a:bodyPr>
-          <a:lstStyle xmlns:a="http://schemas.openxmlformats.org/drawingml/2006/main"/>
-          <a:p xmlns:a="http://schemas.openxmlformats.org/drawingml/2006/main">
-            <a:pPr>
-              <a:defRPr sz="2400" b="0">
-                <a:solidFill>
-                  <a:srgbClr val="213846"/>
-                </a:solidFill>
-                <a:latin typeface="Bitstream Charter"/>
-                <a:ea typeface="Bitstream Charter"/>
-                <a:cs typeface="Bitstream Charter"/>
-              </a:defRPr>
-            </a:pPr>
-            <a:r>
-              <a:rPr sz="2400" b="0">
-                <a:solidFill>
-                  <a:srgbClr val="213846"/>
-                </a:solidFill>
-                <a:latin typeface="Bitstream Charter"/>
-                <a:ea typeface="Bitstream Charter"/>
-                <a:cs typeface="Bitstream Charter"/>
-              </a:rPr>
-              <a:t>Next: confirm the boundary and references, inspect candidate sites and assess suitable VHR data.</a:t>
-            </a:r>
-          </a:p>
-        </p:txBody>
-      </p:sp>
-      <p:sp>
-        <p:nvSpPr>
-          <p:cNvPr id="5" name="">
-            <a:extLst xmlns:a="http://schemas.openxmlformats.org/drawingml/2006/main">
-              <a:ext uri="{FF2B5EF4-FFF2-40B4-BE49-F238E27FC236}">
-                <a16:creationId xmlns:a16="http://schemas.microsoft.com/office/drawing/2014/main" id="{F82F9214-FA0C-44F1-9041-1EE78A4D98E0}"/>
-              </a:ext>
-            </a:extLst>
-          </p:cNvPr>
-          <p:cNvSpPr>
-            <a:spLocks xmlns:a="http://schemas.openxmlformats.org/drawingml/2006/main" noGrp="1"/>
-          </p:cNvSpPr>
-          <p:nvPr/>
-        </p:nvSpPr>
-        <p:spPr>
-          <a:xfrm xmlns:a="http://schemas.openxmlformats.org/drawingml/2006/main">
-            <a:off x="609600" y="6067425"/>
-            <a:ext cx="10668000" cy="590550"/>
-          </a:xfrm>
-          <a:prstGeom xmlns:a="http://schemas.openxmlformats.org/drawingml/2006/main" prst="rect">
-            <a:avLst/>
-          </a:prstGeom>
-          <a:noFill xmlns:a="http://schemas.openxmlformats.org/drawingml/2006/main"/>
-          <a:ln xmlns:a="http://schemas.openxmlformats.org/drawingml/2006/main" w="0">
-            <a:noFill/>
-          </a:ln>
-        </p:spPr>
-        <p:txBody>
-          <a:bodyPr xmlns:a="http://schemas.openxmlformats.org/drawingml/2006/main">
-            <a:noAutofit/>
-          </a:bodyPr>
-          <a:lstStyle xmlns:a="http://schemas.openxmlformats.org/drawingml/2006/main"/>
-          <a:p xmlns:a="http://schemas.openxmlformats.org/drawingml/2006/main">
-            <a:pPr>
-              <a:defRPr sz="1725" b="0">
-                <a:solidFill>
-                  <a:srgbClr val="526569"/>
-                </a:solidFill>
-                <a:latin typeface="Bitstream Charter"/>
-                <a:ea typeface="Bitstream Charter"/>
-                <a:cs typeface="Bitstream Charter"/>
-              </a:defRPr>
-            </a:pPr>
-            <a:r>
-              <a:rPr sz="1725" b="0">
-                <a:solidFill>
-                  <a:srgbClr val="526569"/>
-                </a:solidFill>
-                <a:latin typeface="Bitstream Charter"/>
-                <a:ea typeface="Bitstream Charter"/>
-                <a:cs typeface="Bitstream Charter"/>
-              </a:rPr>
-              <a:t>We have not established health risk, causal cooling, current shade coverage or long-term warming.</a:t>
-            </a:r>
-          </a:p>
-        </p:txBody>
-      </p:sp>
-    </p:spTree>
-    <p:extLst>
-      <p:ext uri="{BB962C8B-B14F-4D97-AF65-F5344CB8AC3E}">
-        <p14:creationId xmlns:p14="http://schemas.microsoft.com/office/powerpoint/2010/main" val="1051972793"/>
+        <p14:creationId xmlns:p14="http://schemas.microsoft.com/office/powerpoint/2010/main" val="815878602"/>
       </p:ext>
     </p:extLst>
   </p:cSld>
@@ -6393,10 +7995,10 @@
       </p:grpSpPr>
       <p:sp>
         <p:nvSpPr>
-          <p:cNvPr id="7" name="">
+          <p:cNvPr id="6" name="">
             <a:extLst xmlns:a="http://schemas.openxmlformats.org/drawingml/2006/main">
               <a:ext uri="{FF2B5EF4-FFF2-40B4-BE49-F238E27FC236}">
-                <a16:creationId xmlns:a16="http://schemas.microsoft.com/office/drawing/2014/main" id="{AD19CB73-0CF1-4EB8-876E-78EB09EDF48D}"/>
+                <a16:creationId xmlns:a16="http://schemas.microsoft.com/office/drawing/2014/main" id="{CF454FBA-B156-4D6E-B023-63C76DC42E64}"/>
               </a:ext>
             </a:extLst>
           </p:cNvPr>
@@ -6443,7 +8045,7 @@
                 <a:ea typeface="Bitstream Charter"/>
                 <a:cs typeface="Bitstream Charter"/>
               </a:rPr>
-              <a:t>Team and review</a:t>
+              <a:t>Reproducibility and reference checks</a:t>
             </a:r>
           </a:p>
         </p:txBody>
@@ -6453,7 +8055,7 @@
           <p:cNvPr id="2" name="">
             <a:extLst xmlns:a="http://schemas.openxmlformats.org/drawingml/2006/main">
               <a:ext uri="{FF2B5EF4-FFF2-40B4-BE49-F238E27FC236}">
-                <a16:creationId xmlns:a16="http://schemas.microsoft.com/office/drawing/2014/main" id="{6F220B10-8D1D-448C-B451-13E9245FCD5B}"/>
+                <a16:creationId xmlns:a16="http://schemas.microsoft.com/office/drawing/2014/main" id="{64B0D461-CB68-4FE8-9441-C8C06A8CCAF1}"/>
               </a:ext>
             </a:extLst>
           </p:cNvPr>
@@ -6500,7 +8102,7 @@
                 <a:ea typeface="Bitstream Charter"/>
                 <a:cs typeface="Bitstream Charter"/>
               </a:rPr>
-              <a:t>Nasser Alhuri: registered team leader</a:t>
+              <a:t>The package includes 35 hashed input files, source metadata and pinned Python 3.12 dependencies.</a:t>
             </a:r>
           </a:p>
         </p:txBody>
@@ -6510,7 +8112,7 @@
           <p:cNvPr id="3" name="">
             <a:extLst xmlns:a="http://schemas.openxmlformats.org/drawingml/2006/main">
               <a:ext uri="{FF2B5EF4-FFF2-40B4-BE49-F238E27FC236}">
-                <a16:creationId xmlns:a16="http://schemas.microsoft.com/office/drawing/2014/main" id="{05A38501-AF9D-40F8-A2F3-973052AC6FE0}"/>
+                <a16:creationId xmlns:a16="http://schemas.microsoft.com/office/drawing/2014/main" id="{3C8B1392-2B47-4FCF-B014-7994DAD9533B}"/>
               </a:ext>
             </a:extLst>
           </p:cNvPr>
@@ -6557,7 +8159,7 @@
                 <a:ea typeface="Bitstream Charter"/>
                 <a:cs typeface="Bitstream Charter"/>
               </a:rPr>
-              <a:t>Abdulrahman Almohannadi, Mohammed Almarri, Majed Alkuwari and Ali Alkubaisi</a:t>
+              <a:t>Clean GitHub execution passed through a normal Jupyter kernel: five cells, zero errors and all 35 input hashes verified.</a:t>
             </a:r>
           </a:p>
         </p:txBody>
@@ -6567,7 +8169,7 @@
           <p:cNvPr id="4" name="">
             <a:extLst xmlns:a="http://schemas.openxmlformats.org/drawingml/2006/main">
               <a:ext uri="{FF2B5EF4-FFF2-40B4-BE49-F238E27FC236}">
-                <a16:creationId xmlns:a16="http://schemas.microsoft.com/office/drawing/2014/main" id="{C5E93F38-C7A1-46E4-867B-73B47DEB74EE}"/>
+                <a16:creationId xmlns:a16="http://schemas.microsoft.com/office/drawing/2014/main" id="{E6D145BE-26B7-433B-A5EC-B2B2C7A364A1}"/>
               </a:ext>
             </a:extLst>
           </p:cNvPr>
@@ -6614,7 +8216,7 @@
                 <a:ea typeface="Bitstream Charter"/>
                 <a:cs typeface="Bitstream Charter"/>
               </a:rPr>
-              <a:t>Actual contributions and other roles await team confirmation.</a:t>
+              <a:t>Grass reference agreement: 24/25. Building green-rule agreement: 0/30. Coastal points retained in thermal support: 0/30.</a:t>
             </a:r>
           </a:p>
         </p:txBody>
@@ -6624,7 +8226,7 @@
           <p:cNvPr id="5" name="">
             <a:extLst xmlns:a="http://schemas.openxmlformats.org/drawingml/2006/main">
               <a:ext uri="{FF2B5EF4-FFF2-40B4-BE49-F238E27FC236}">
-                <a16:creationId xmlns:a16="http://schemas.microsoft.com/office/drawing/2014/main" id="{72C4D1B9-B4C0-4437-9277-E9456EE42B0C}"/>
+                <a16:creationId xmlns:a16="http://schemas.microsoft.com/office/drawing/2014/main" id="{C47291B8-3908-4A14-AA84-4F13094DD3B3}"/>
               </a:ext>
             </a:extLst>
           </p:cNvPr>
@@ -6635,8 +8237,8 @@
         </p:nvSpPr>
         <p:spPr>
           <a:xfrm xmlns:a="http://schemas.openxmlformats.org/drawingml/2006/main">
-            <a:off x="609600" y="4772025"/>
-            <a:ext cx="10972800" cy="952500"/>
+            <a:off x="609600" y="6067425"/>
+            <a:ext cx="10668000" cy="590550"/>
           </a:xfrm>
           <a:prstGeom xmlns:a="http://schemas.openxmlformats.org/drawingml/2006/main" prst="rect">
             <a:avLst/>
@@ -6653,63 +8255,6 @@
           <a:lstStyle xmlns:a="http://schemas.openxmlformats.org/drawingml/2006/main"/>
           <a:p xmlns:a="http://schemas.openxmlformats.org/drawingml/2006/main">
             <a:pPr>
-              <a:defRPr sz="2400" b="0">
-                <a:solidFill>
-                  <a:srgbClr val="213846"/>
-                </a:solidFill>
-                <a:latin typeface="Bitstream Charter"/>
-                <a:ea typeface="Bitstream Charter"/>
-                <a:cs typeface="Bitstream Charter"/>
-              </a:defRPr>
-            </a:pPr>
-            <a:r>
-              <a:rPr sz="2400" b="0">
-                <a:solidFill>
-                  <a:srgbClr val="213846"/>
-                </a:solidFill>
-                <a:latin typeface="Bitstream Charter"/>
-                <a:ea typeface="Bitstream Charter"/>
-                <a:cs typeface="Bitstream Charter"/>
-              </a:rPr>
-              <a:t>Before submission: complete registrations, confirm judge access and deadline, then approve the final package.</a:t>
-            </a:r>
-          </a:p>
-        </p:txBody>
-      </p:sp>
-      <p:sp>
-        <p:nvSpPr>
-          <p:cNvPr id="6" name="">
-            <a:extLst xmlns:a="http://schemas.openxmlformats.org/drawingml/2006/main">
-              <a:ext uri="{FF2B5EF4-FFF2-40B4-BE49-F238E27FC236}">
-                <a16:creationId xmlns:a16="http://schemas.microsoft.com/office/drawing/2014/main" id="{48E3B712-EF18-4D3A-8D99-1ED49EEF8C14}"/>
-              </a:ext>
-            </a:extLst>
-          </p:cNvPr>
-          <p:cNvSpPr>
-            <a:spLocks xmlns:a="http://schemas.openxmlformats.org/drawingml/2006/main" noGrp="1"/>
-          </p:cNvSpPr>
-          <p:nvPr/>
-        </p:nvSpPr>
-        <p:spPr>
-          <a:xfrm xmlns:a="http://schemas.openxmlformats.org/drawingml/2006/main">
-            <a:off x="609600" y="6067425"/>
-            <a:ext cx="10668000" cy="590550"/>
-          </a:xfrm>
-          <a:prstGeom xmlns:a="http://schemas.openxmlformats.org/drawingml/2006/main" prst="rect">
-            <a:avLst/>
-          </a:prstGeom>
-          <a:noFill xmlns:a="http://schemas.openxmlformats.org/drawingml/2006/main"/>
-          <a:ln xmlns:a="http://schemas.openxmlformats.org/drawingml/2006/main" w="0">
-            <a:noFill/>
-          </a:ln>
-        </p:spPr>
-        <p:txBody>
-          <a:bodyPr xmlns:a="http://schemas.openxmlformats.org/drawingml/2006/main">
-            <a:noAutofit/>
-          </a:bodyPr>
-          <a:lstStyle xmlns:a="http://schemas.openxmlformats.org/drawingml/2006/main"/>
-          <a:p xmlns:a="http://schemas.openxmlformats.org/drawingml/2006/main">
-            <a:pPr>
               <a:defRPr sz="1725" b="0">
                 <a:solidFill>
                   <a:srgbClr val="526569"/>
@@ -6728,7 +8273,7 @@
                 <a:ea typeface="Bitstream Charter"/>
                 <a:cs typeface="Bitstream Charter"/>
               </a:rPr>
-              <a:t>Code and writing were developed with AI assistance and require team review and ownership.</a:t>
+              <a:t>Contributed reference labels have conflicts. Human confirmation and independent thermal validation remain pending.</a:t>
             </a:r>
           </a:p>
         </p:txBody>
@@ -6736,7 +8281,7 @@
     </p:spTree>
     <p:extLst>
       <p:ext uri="{BB962C8B-B14F-4D97-AF65-F5344CB8AC3E}">
-        <p14:creationId xmlns:p14="http://schemas.microsoft.com/office/powerpoint/2010/main" val="226650563"/>
+        <p14:creationId xmlns:p14="http://schemas.microsoft.com/office/powerpoint/2010/main" val="820933449"/>
       </p:ext>
     </p:extLst>
   </p:cSld>

--- a/docs/UrbanHeat-AlKhor-Pitch.pptx
+++ b/docs/UrbanHeat-AlKhor-Pitch.pptx
@@ -2,24 +2,24 @@
 <file path=ppt/presentation.xml><?xml version="1.0" encoding="utf-8"?>
 <p:presentation xmlns:p="http://schemas.openxmlformats.org/presentationml/2006/main">
   <p:sldMasterIdLst>
-    <p:sldMasterId xmlns:r="http://schemas.openxmlformats.org/officeDocument/2006/relationships" id="2147483648" r:id="R34a720634f884fa6"/>
+    <p:sldMasterId xmlns:r="http://schemas.openxmlformats.org/officeDocument/2006/relationships" id="2147483648" r:id="Re80ca79e434e4ded"/>
   </p:sldMasterIdLst>
   <p:notesMasterIdLst>
-    <p:notesMasterId xmlns:r="http://schemas.openxmlformats.org/officeDocument/2006/relationships" r:id="R7acdba10d2714941"/>
+    <p:notesMasterId xmlns:r="http://schemas.openxmlformats.org/officeDocument/2006/relationships" r:id="Rc583a4e9a70440a7"/>
   </p:notesMasterIdLst>
   <p:sldIdLst>
-    <p:sldId xmlns:r="http://schemas.openxmlformats.org/officeDocument/2006/relationships" id="256" r:id="R98937b3c76934bc4"/>
-    <p:sldId xmlns:r="http://schemas.openxmlformats.org/officeDocument/2006/relationships" id="257" r:id="Rf28dc4b617c7440b"/>
-    <p:sldId xmlns:r="http://schemas.openxmlformats.org/officeDocument/2006/relationships" id="258" r:id="R0c88756a305f4ec2"/>
-    <p:sldId xmlns:r="http://schemas.openxmlformats.org/officeDocument/2006/relationships" id="259" r:id="R82837979b3a04773"/>
-    <p:sldId xmlns:r="http://schemas.openxmlformats.org/officeDocument/2006/relationships" id="260" r:id="R0542771bda4a4441"/>
-    <p:sldId xmlns:r="http://schemas.openxmlformats.org/officeDocument/2006/relationships" id="261" r:id="Rea121bcc02dd4701"/>
-    <p:sldId xmlns:r="http://schemas.openxmlformats.org/officeDocument/2006/relationships" id="262" r:id="Ra74c5046c83e4649"/>
-    <p:sldId xmlns:r="http://schemas.openxmlformats.org/officeDocument/2006/relationships" id="263" r:id="R58bcfc7cf28648a8"/>
-    <p:sldId xmlns:r="http://schemas.openxmlformats.org/officeDocument/2006/relationships" id="264" r:id="R4bbacd5e86654ace"/>
-    <p:sldId xmlns:r="http://schemas.openxmlformats.org/officeDocument/2006/relationships" id="265" r:id="R7303b011f8b84302"/>
-    <p:sldId xmlns:r="http://schemas.openxmlformats.org/officeDocument/2006/relationships" id="266" r:id="R5c22cfe2298c4f09"/>
-    <p:sldId xmlns:r="http://schemas.openxmlformats.org/officeDocument/2006/relationships" id="267" r:id="Rc01bd0308261467e"/>
+    <p:sldId xmlns:r="http://schemas.openxmlformats.org/officeDocument/2006/relationships" id="256" r:id="R1f526fcc3cf040cf"/>
+    <p:sldId xmlns:r="http://schemas.openxmlformats.org/officeDocument/2006/relationships" id="257" r:id="R19354e73806c4dac"/>
+    <p:sldId xmlns:r="http://schemas.openxmlformats.org/officeDocument/2006/relationships" id="258" r:id="Rd05897d5d56f4035"/>
+    <p:sldId xmlns:r="http://schemas.openxmlformats.org/officeDocument/2006/relationships" id="259" r:id="R3519f3cdacb246c5"/>
+    <p:sldId xmlns:r="http://schemas.openxmlformats.org/officeDocument/2006/relationships" id="260" r:id="R98657c5e61414512"/>
+    <p:sldId xmlns:r="http://schemas.openxmlformats.org/officeDocument/2006/relationships" id="261" r:id="R0f82b68dea1b4033"/>
+    <p:sldId xmlns:r="http://schemas.openxmlformats.org/officeDocument/2006/relationships" id="262" r:id="R7ad0e5a3ac8543d0"/>
+    <p:sldId xmlns:r="http://schemas.openxmlformats.org/officeDocument/2006/relationships" id="263" r:id="R810dfe4007ef4b32"/>
+    <p:sldId xmlns:r="http://schemas.openxmlformats.org/officeDocument/2006/relationships" id="264" r:id="R87dcd1c41bfa4214"/>
+    <p:sldId xmlns:r="http://schemas.openxmlformats.org/officeDocument/2006/relationships" id="265" r:id="R5149f4673a724f6b"/>
+    <p:sldId xmlns:r="http://schemas.openxmlformats.org/officeDocument/2006/relationships" id="266" r:id="Rd17822387aff468f"/>
+    <p:sldId xmlns:r="http://schemas.openxmlformats.org/officeDocument/2006/relationships" id="267" r:id="R0641597b74464282"/>
   </p:sldIdLst>
   <p:sldSz cx="12192000" cy="6858000"/>
   <p:notesSz cx="6858000" cy="9144000"/>
@@ -593,7 +593,7 @@
           <a:lstStyle xmlns:a="http://schemas.openxmlformats.org/drawingml/2006/main"/>
           <a:p xmlns:a="http://schemas.openxmlformats.org/drawingml/2006/main">
             <a:r>
-              <a:t>Roles assigned at the team leader’s request on 5 October 2026. Nasser is registered leader. Other responsibilities are proposed review ownership and actual member review remains pending. All five platform registrations showed Signed in during the live check. Submission still requires final approval; evaluator access is pending.</a:t>
+              <a:t>Team responsibilities selected by Nasser on 5 October 2026. Nasser is the registered team leader. Assigned member checks remain pending; this slide does not record completed work. Submission requires final approval and evaluator access remains pending.</a:t>
             </a:r>
           </a:p>
         </p:txBody>
@@ -1270,7 +1270,7 @@
           <p:cNvPr id="4" name="Accent rule">
             <a:extLst xmlns:a="http://schemas.openxmlformats.org/drawingml/2006/main">
               <a:ext uri="{FF2B5EF4-FFF2-40B4-BE49-F238E27FC236}">
-                <a16:creationId xmlns:a16="http://schemas.microsoft.com/office/drawing/2014/main" id="{2CC0BA0D-58FF-45AF-B5D5-74814FE1532F}"/>
+                <a16:creationId xmlns:a16="http://schemas.microsoft.com/office/drawing/2014/main" id="{6C83F314-1A4D-4D02-81D5-634D16BD6D41}"/>
               </a:ext>
             </a:extLst>
           </p:cNvPr>
@@ -1301,7 +1301,7 @@
           <p:cNvPr id="2" name="Title">
             <a:extLst xmlns:a="http://schemas.openxmlformats.org/drawingml/2006/main">
               <a:ext uri="{FF2B5EF4-FFF2-40B4-BE49-F238E27FC236}">
-                <a16:creationId xmlns:a16="http://schemas.microsoft.com/office/drawing/2014/main" id="{B5DBD609-09E9-4D1D-90D1-0D424A343F3B}"/>
+                <a16:creationId xmlns:a16="http://schemas.microsoft.com/office/drawing/2014/main" id="{67FBADD6-4158-4C74-9C39-C254FC5A1615}"/>
               </a:ext>
             </a:extLst>
           </p:cNvPr>
@@ -1448,7 +1448,7 @@
           <p:cNvPr id="3" name="Subtitle">
             <a:extLst xmlns:a="http://schemas.openxmlformats.org/drawingml/2006/main">
               <a:ext uri="{FF2B5EF4-FFF2-40B4-BE49-F238E27FC236}">
-                <a16:creationId xmlns:a16="http://schemas.microsoft.com/office/drawing/2014/main" id="{63500446-4C60-417A-B129-2505FD2C4D9E}"/>
+                <a16:creationId xmlns:a16="http://schemas.microsoft.com/office/drawing/2014/main" id="{061276EA-FB27-45B1-B775-39EF7089A7D7}"/>
               </a:ext>
             </a:extLst>
           </p:cNvPr>
@@ -1612,7 +1612,7 @@
           <p:cNvPr id="3" name="Accent rule">
             <a:extLst xmlns:a="http://schemas.openxmlformats.org/drawingml/2006/main">
               <a:ext uri="{FF2B5EF4-FFF2-40B4-BE49-F238E27FC236}">
-                <a16:creationId xmlns:a16="http://schemas.microsoft.com/office/drawing/2014/main" id="{F60C8584-7584-4899-87AF-0419F0F9E8FF}"/>
+                <a16:creationId xmlns:a16="http://schemas.microsoft.com/office/drawing/2014/main" id="{E1F0DC04-F2CB-4734-A176-BB21756384C7}"/>
               </a:ext>
             </a:extLst>
           </p:cNvPr>
@@ -1643,7 +1643,7 @@
           <p:cNvPr id="2" name="Section title">
             <a:extLst xmlns:a="http://schemas.openxmlformats.org/drawingml/2006/main">
               <a:ext uri="{FF2B5EF4-FFF2-40B4-BE49-F238E27FC236}">
-                <a16:creationId xmlns:a16="http://schemas.microsoft.com/office/drawing/2014/main" id="{B10D4715-6B12-4FE4-B6DC-5CEE7240168F}"/>
+                <a16:creationId xmlns:a16="http://schemas.microsoft.com/office/drawing/2014/main" id="{8FD6440A-F37E-4EC8-AA5C-6E476358D8B1}"/>
               </a:ext>
             </a:extLst>
           </p:cNvPr>
@@ -1807,7 +1807,7 @@
           <p:cNvPr id="4" name="Accent rule">
             <a:extLst xmlns:a="http://schemas.openxmlformats.org/drawingml/2006/main">
               <a:ext uri="{FF2B5EF4-FFF2-40B4-BE49-F238E27FC236}">
-                <a16:creationId xmlns:a16="http://schemas.microsoft.com/office/drawing/2014/main" id="{91A73822-E186-4F1D-9135-D30B575063FA}"/>
+                <a16:creationId xmlns:a16="http://schemas.microsoft.com/office/drawing/2014/main" id="{90E94DCD-C850-4A7C-B2E7-6AE576E32F85}"/>
               </a:ext>
             </a:extLst>
           </p:cNvPr>
@@ -1838,7 +1838,7 @@
           <p:cNvPr id="2" name="Title">
             <a:extLst xmlns:a="http://schemas.openxmlformats.org/drawingml/2006/main">
               <a:ext uri="{FF2B5EF4-FFF2-40B4-BE49-F238E27FC236}">
-                <a16:creationId xmlns:a16="http://schemas.microsoft.com/office/drawing/2014/main" id="{8A0BBFBA-DD29-4A4F-9A85-BB154B4CC003}"/>
+                <a16:creationId xmlns:a16="http://schemas.microsoft.com/office/drawing/2014/main" id="{0C43145C-0981-4FD0-8A44-F7B236CD5EDD}"/>
               </a:ext>
             </a:extLst>
           </p:cNvPr>
@@ -1985,7 +1985,7 @@
           <p:cNvPr id="3" name="Body">
             <a:extLst xmlns:a="http://schemas.openxmlformats.org/drawingml/2006/main">
               <a:ext uri="{FF2B5EF4-FFF2-40B4-BE49-F238E27FC236}">
-                <a16:creationId xmlns:a16="http://schemas.microsoft.com/office/drawing/2014/main" id="{F06C5F58-0A1E-46E5-9A3A-89396AE0CDA9}"/>
+                <a16:creationId xmlns:a16="http://schemas.microsoft.com/office/drawing/2014/main" id="{77CD96CD-2700-41B5-9342-5C3368F5EF7E}"/>
               </a:ext>
             </a:extLst>
           </p:cNvPr>
@@ -2149,7 +2149,7 @@
           <p:cNvPr id="5" name="Accent rule">
             <a:extLst xmlns:a="http://schemas.openxmlformats.org/drawingml/2006/main">
               <a:ext uri="{FF2B5EF4-FFF2-40B4-BE49-F238E27FC236}">
-                <a16:creationId xmlns:a16="http://schemas.microsoft.com/office/drawing/2014/main" id="{0A9CE12C-77C2-442D-947C-3DFA997FB606}"/>
+                <a16:creationId xmlns:a16="http://schemas.microsoft.com/office/drawing/2014/main" id="{095AF0E9-3E76-4747-A37E-497F5BFEF3A6}"/>
               </a:ext>
             </a:extLst>
           </p:cNvPr>
@@ -2180,7 +2180,7 @@
           <p:cNvPr id="2" name="Title">
             <a:extLst xmlns:a="http://schemas.openxmlformats.org/drawingml/2006/main">
               <a:ext uri="{FF2B5EF4-FFF2-40B4-BE49-F238E27FC236}">
-                <a16:creationId xmlns:a16="http://schemas.microsoft.com/office/drawing/2014/main" id="{8E6C702E-B61E-4581-A1A5-21A2EE7C6E6B}"/>
+                <a16:creationId xmlns:a16="http://schemas.microsoft.com/office/drawing/2014/main" id="{984698F6-EB5A-45DF-BC72-D0529A8F3DF2}"/>
               </a:ext>
             </a:extLst>
           </p:cNvPr>
@@ -2327,7 +2327,7 @@
           <p:cNvPr id="3" name="Left column">
             <a:extLst xmlns:a="http://schemas.openxmlformats.org/drawingml/2006/main">
               <a:ext uri="{FF2B5EF4-FFF2-40B4-BE49-F238E27FC236}">
-                <a16:creationId xmlns:a16="http://schemas.microsoft.com/office/drawing/2014/main" id="{61D141DB-9F8B-4642-9385-217FAA901804}"/>
+                <a16:creationId xmlns:a16="http://schemas.microsoft.com/office/drawing/2014/main" id="{E66D3FC5-3CAD-4983-A8DD-A48B2F2527D5}"/>
               </a:ext>
             </a:extLst>
           </p:cNvPr>
@@ -2474,7 +2474,7 @@
           <p:cNvPr id="4" name="Right column">
             <a:extLst xmlns:a="http://schemas.openxmlformats.org/drawingml/2006/main">
               <a:ext uri="{FF2B5EF4-FFF2-40B4-BE49-F238E27FC236}">
-                <a16:creationId xmlns:a16="http://schemas.microsoft.com/office/drawing/2014/main" id="{79D8DD63-91FC-418F-94C4-B808F6D761ED}"/>
+                <a16:creationId xmlns:a16="http://schemas.microsoft.com/office/drawing/2014/main" id="{8903D2FB-CEFB-43B3-9999-05D98C628079}"/>
               </a:ext>
             </a:extLst>
           </p:cNvPr>
@@ -2638,7 +2638,7 @@
           <p:cNvPr id="4" name="Accent rule">
             <a:extLst xmlns:a="http://schemas.openxmlformats.org/drawingml/2006/main">
               <a:ext uri="{FF2B5EF4-FFF2-40B4-BE49-F238E27FC236}">
-                <a16:creationId xmlns:a16="http://schemas.microsoft.com/office/drawing/2014/main" id="{48D8D450-9A04-4FF8-BAA7-C4678D9C3664}"/>
+                <a16:creationId xmlns:a16="http://schemas.microsoft.com/office/drawing/2014/main" id="{3316CF2F-12AF-48DA-BDC8-1005520CF48C}"/>
               </a:ext>
             </a:extLst>
           </p:cNvPr>
@@ -2669,7 +2669,7 @@
           <p:cNvPr id="2" name="Title">
             <a:extLst xmlns:a="http://schemas.openxmlformats.org/drawingml/2006/main">
               <a:ext uri="{FF2B5EF4-FFF2-40B4-BE49-F238E27FC236}">
-                <a16:creationId xmlns:a16="http://schemas.microsoft.com/office/drawing/2014/main" id="{32A6439C-DF7D-431F-B4D8-467542E59851}"/>
+                <a16:creationId xmlns:a16="http://schemas.microsoft.com/office/drawing/2014/main" id="{C721DA3B-08E8-462E-9B13-1D151012701E}"/>
               </a:ext>
             </a:extLst>
           </p:cNvPr>
@@ -2816,7 +2816,7 @@
           <p:cNvPr id="3" name="Left column">
             <a:extLst xmlns:a="http://schemas.openxmlformats.org/drawingml/2006/main">
               <a:ext uri="{FF2B5EF4-FFF2-40B4-BE49-F238E27FC236}">
-                <a16:creationId xmlns:a16="http://schemas.microsoft.com/office/drawing/2014/main" id="{14F02E7C-D220-49F8-8410-0367F719A652}"/>
+                <a16:creationId xmlns:a16="http://schemas.microsoft.com/office/drawing/2014/main" id="{CC11C8A0-67AB-4348-9EE0-755B8CDC7947}"/>
               </a:ext>
             </a:extLst>
           </p:cNvPr>
@@ -3001,12 +3001,12 @@
   </p:cSld>
   <p:clrMap bg1="lt1" tx1="dk1" bg2="lt2" tx2="dk2" accent1="accent1" accent2="accent2" accent3="accent3" accent4="accent4" accent5="accent5" accent6="accent6" hlink="hlink" folHlink="folHlink"/>
   <p:sldLayoutIdLst>
-    <p:sldLayoutId xmlns:r="http://schemas.openxmlformats.org/officeDocument/2006/relationships" id="2147483649" r:id="Ra6a2c7ae9ec4407e"/>
-    <p:sldLayoutId xmlns:r="http://schemas.openxmlformats.org/officeDocument/2006/relationships" id="2147483650" r:id="R55b20516cf0c478a"/>
-    <p:sldLayoutId xmlns:r="http://schemas.openxmlformats.org/officeDocument/2006/relationships" id="2147483651" r:id="Ree1322e59e1842c6"/>
-    <p:sldLayoutId xmlns:r="http://schemas.openxmlformats.org/officeDocument/2006/relationships" id="2147483652" r:id="R97c41d82a8ac4422"/>
-    <p:sldLayoutId xmlns:r="http://schemas.openxmlformats.org/officeDocument/2006/relationships" id="2147483653" r:id="Rb1972bbd9b894c4d"/>
-    <p:sldLayoutId xmlns:r="http://schemas.openxmlformats.org/officeDocument/2006/relationships" id="2147483654" r:id="R13e4b030124c4ce5"/>
+    <p:sldLayoutId xmlns:r="http://schemas.openxmlformats.org/officeDocument/2006/relationships" id="2147483649" r:id="R6fa0ba1da8e74b4f"/>
+    <p:sldLayoutId xmlns:r="http://schemas.openxmlformats.org/officeDocument/2006/relationships" id="2147483650" r:id="R290a17db494c42c4"/>
+    <p:sldLayoutId xmlns:r="http://schemas.openxmlformats.org/officeDocument/2006/relationships" id="2147483651" r:id="Re1671ec289cf4bbc"/>
+    <p:sldLayoutId xmlns:r="http://schemas.openxmlformats.org/officeDocument/2006/relationships" id="2147483652" r:id="Ree9590e89ea84bea"/>
+    <p:sldLayoutId xmlns:r="http://schemas.openxmlformats.org/officeDocument/2006/relationships" id="2147483653" r:id="R05cf4cc4e4404ac3"/>
+    <p:sldLayoutId xmlns:r="http://schemas.openxmlformats.org/officeDocument/2006/relationships" id="2147483654" r:id="R2f0d121ca90b423e"/>
   </p:sldLayoutIdLst>
   <p:txStyles>
     <p:titleStyle>
@@ -3557,7 +3557,7 @@
           <p:cNvPr id="7" name="">
             <a:extLst xmlns:a="http://schemas.openxmlformats.org/drawingml/2006/main">
               <a:ext uri="{FF2B5EF4-FFF2-40B4-BE49-F238E27FC236}">
-                <a16:creationId xmlns:a16="http://schemas.microsoft.com/office/drawing/2014/main" id="{8ED49F76-FF23-4EF2-88F4-D39403A26550}"/>
+                <a16:creationId xmlns:a16="http://schemas.microsoft.com/office/drawing/2014/main" id="{ECC4380B-2D3C-429C-A4B3-3874A37F08FB}"/>
               </a:ext>
             </a:extLst>
           </p:cNvPr>
@@ -3614,7 +3614,7 @@
           <p:cNvPr id="2" name="">
             <a:extLst xmlns:a="http://schemas.openxmlformats.org/drawingml/2006/main">
               <a:ext uri="{FF2B5EF4-FFF2-40B4-BE49-F238E27FC236}">
-                <a16:creationId xmlns:a16="http://schemas.microsoft.com/office/drawing/2014/main" id="{AC234046-9686-467C-AAD0-A02520D8C18B}"/>
+                <a16:creationId xmlns:a16="http://schemas.microsoft.com/office/drawing/2014/main" id="{DEC6C8FD-4D97-4EBB-BCFE-4E09545C8972}"/>
               </a:ext>
             </a:extLst>
           </p:cNvPr>
@@ -3671,7 +3671,7 @@
           <p:cNvPr id="3" name="">
             <a:extLst xmlns:a="http://schemas.openxmlformats.org/drawingml/2006/main">
               <a:ext uri="{FF2B5EF4-FFF2-40B4-BE49-F238E27FC236}">
-                <a16:creationId xmlns:a16="http://schemas.microsoft.com/office/drawing/2014/main" id="{A4BB9E9E-06DF-4C6E-A316-1CE9A4429251}"/>
+                <a16:creationId xmlns:a16="http://schemas.microsoft.com/office/drawing/2014/main" id="{730F48B9-803B-4273-8B02-E46EA5F141DF}"/>
               </a:ext>
             </a:extLst>
           </p:cNvPr>
@@ -3728,7 +3728,7 @@
           <p:cNvPr id="4" name="">
             <a:extLst xmlns:a="http://schemas.openxmlformats.org/drawingml/2006/main">
               <a:ext uri="{FF2B5EF4-FFF2-40B4-BE49-F238E27FC236}">
-                <a16:creationId xmlns:a16="http://schemas.microsoft.com/office/drawing/2014/main" id="{1025BA85-3DEB-42EA-BCFC-93CE1C88BEB6}"/>
+                <a16:creationId xmlns:a16="http://schemas.microsoft.com/office/drawing/2014/main" id="{4F147DD0-754F-4466-8431-843893E72671}"/>
               </a:ext>
             </a:extLst>
           </p:cNvPr>
@@ -3785,7 +3785,7 @@
           <p:cNvPr id="5" name="">
             <a:extLst xmlns:a="http://schemas.openxmlformats.org/drawingml/2006/main">
               <a:ext uri="{FF2B5EF4-FFF2-40B4-BE49-F238E27FC236}">
-                <a16:creationId xmlns:a16="http://schemas.microsoft.com/office/drawing/2014/main" id="{AF9B2683-A908-4367-90AA-FF17F8D7EDCE}"/>
+                <a16:creationId xmlns:a16="http://schemas.microsoft.com/office/drawing/2014/main" id="{0BB06FF0-E678-47D6-85FD-56BA6D9464C3}"/>
               </a:ext>
             </a:extLst>
           </p:cNvPr>
@@ -3842,7 +3842,7 @@
           <p:cNvPr id="6" name="">
             <a:extLst xmlns:a="http://schemas.openxmlformats.org/drawingml/2006/main">
               <a:ext uri="{FF2B5EF4-FFF2-40B4-BE49-F238E27FC236}">
-                <a16:creationId xmlns:a16="http://schemas.microsoft.com/office/drawing/2014/main" id="{225913F7-AE88-4FAB-ADE0-722F438AFB7F}"/>
+                <a16:creationId xmlns:a16="http://schemas.microsoft.com/office/drawing/2014/main" id="{538A5F29-45B6-4B22-9B04-7BC814A528AD}"/>
               </a:ext>
             </a:extLst>
           </p:cNvPr>
@@ -3897,7 +3897,7 @@
     </p:spTree>
     <p:extLst>
       <p:ext uri="{BB962C8B-B14F-4D97-AF65-F5344CB8AC3E}">
-        <p14:creationId xmlns:p14="http://schemas.microsoft.com/office/powerpoint/2010/main" val="1741564981"/>
+        <p14:creationId xmlns:p14="http://schemas.microsoft.com/office/powerpoint/2010/main" val="918971655"/>
       </p:ext>
     </p:extLst>
   </p:cSld>
@@ -3928,7 +3928,7 @@
           <p:cNvPr id="6" name="">
             <a:extLst xmlns:a="http://schemas.openxmlformats.org/drawingml/2006/main">
               <a:ext uri="{FF2B5EF4-FFF2-40B4-BE49-F238E27FC236}">
-                <a16:creationId xmlns:a16="http://schemas.microsoft.com/office/drawing/2014/main" id="{A004AE9B-97BA-4660-8607-1D7703C3A285}"/>
+                <a16:creationId xmlns:a16="http://schemas.microsoft.com/office/drawing/2014/main" id="{0DAC5575-8B47-4837-BCE1-5360E83833AD}"/>
               </a:ext>
             </a:extLst>
           </p:cNvPr>
@@ -3985,7 +3985,7 @@
           <p:cNvPr id="2" name="">
             <a:extLst xmlns:a="http://schemas.openxmlformats.org/drawingml/2006/main">
               <a:ext uri="{FF2B5EF4-FFF2-40B4-BE49-F238E27FC236}">
-                <a16:creationId xmlns:a16="http://schemas.microsoft.com/office/drawing/2014/main" id="{72348A98-59C9-43F3-84F1-D3937B8BF02F}"/>
+                <a16:creationId xmlns:a16="http://schemas.microsoft.com/office/drawing/2014/main" id="{BA9A283D-E81A-4C27-8383-EE26465B6852}"/>
               </a:ext>
             </a:extLst>
           </p:cNvPr>
@@ -4042,7 +4042,7 @@
           <p:cNvPr id="3" name="">
             <a:extLst xmlns:a="http://schemas.openxmlformats.org/drawingml/2006/main">
               <a:ext uri="{FF2B5EF4-FFF2-40B4-BE49-F238E27FC236}">
-                <a16:creationId xmlns:a16="http://schemas.microsoft.com/office/drawing/2014/main" id="{62C24E4E-B80B-417A-BAB8-A7D74B72E778}"/>
+                <a16:creationId xmlns:a16="http://schemas.microsoft.com/office/drawing/2014/main" id="{3BB4AE13-A5EA-4A95-AE7D-8B6818FD400D}"/>
               </a:ext>
             </a:extLst>
           </p:cNvPr>
@@ -4099,7 +4099,7 @@
           <p:cNvPr id="4" name="">
             <a:extLst xmlns:a="http://schemas.openxmlformats.org/drawingml/2006/main">
               <a:ext uri="{FF2B5EF4-FFF2-40B4-BE49-F238E27FC236}">
-                <a16:creationId xmlns:a16="http://schemas.microsoft.com/office/drawing/2014/main" id="{B8A87169-882E-44F3-84FD-F69C96E93693}"/>
+                <a16:creationId xmlns:a16="http://schemas.microsoft.com/office/drawing/2014/main" id="{F81F9B66-2849-46D1-9C7A-427BD6C854A9}"/>
               </a:ext>
             </a:extLst>
           </p:cNvPr>
@@ -4156,7 +4156,7 @@
           <p:cNvPr id="5" name="">
             <a:extLst xmlns:a="http://schemas.openxmlformats.org/drawingml/2006/main">
               <a:ext uri="{FF2B5EF4-FFF2-40B4-BE49-F238E27FC236}">
-                <a16:creationId xmlns:a16="http://schemas.microsoft.com/office/drawing/2014/main" id="{54492EF2-9A1A-4E88-A3F8-54091CD78E57}"/>
+                <a16:creationId xmlns:a16="http://schemas.microsoft.com/office/drawing/2014/main" id="{0377F620-4262-4520-A674-2CE4EA055DCF}"/>
               </a:ext>
             </a:extLst>
           </p:cNvPr>
@@ -4211,7 +4211,7 @@
     </p:spTree>
     <p:extLst>
       <p:ext uri="{BB962C8B-B14F-4D97-AF65-F5344CB8AC3E}">
-        <p14:creationId xmlns:p14="http://schemas.microsoft.com/office/powerpoint/2010/main" val="2142216958"/>
+        <p14:creationId xmlns:p14="http://schemas.microsoft.com/office/powerpoint/2010/main" val="1462153155"/>
       </p:ext>
     </p:extLst>
   </p:cSld>
@@ -4242,7 +4242,7 @@
           <p:cNvPr id="8" name="">
             <a:extLst xmlns:a="http://schemas.openxmlformats.org/drawingml/2006/main">
               <a:ext uri="{FF2B5EF4-FFF2-40B4-BE49-F238E27FC236}">
-                <a16:creationId xmlns:a16="http://schemas.microsoft.com/office/drawing/2014/main" id="{CE2C9003-D0A4-4253-8717-B0AE51444300}"/>
+                <a16:creationId xmlns:a16="http://schemas.microsoft.com/office/drawing/2014/main" id="{982EFDBB-5A2B-4CA8-95D9-580DEF39AEBC}"/>
               </a:ext>
             </a:extLst>
           </p:cNvPr>
@@ -4289,7 +4289,7 @@
                 <a:ea typeface="Bitstream Charter"/>
                 <a:cs typeface="Bitstream Charter"/>
               </a:rPr>
-              <a:t>Team responsibilities for final review</a:t>
+              <a:t>Team responsibilities</a:t>
             </a:r>
           </a:p>
         </p:txBody>
@@ -4299,7 +4299,7 @@
           <p:cNvPr id="2" name="">
             <a:extLst xmlns:a="http://schemas.openxmlformats.org/drawingml/2006/main">
               <a:ext uri="{FF2B5EF4-FFF2-40B4-BE49-F238E27FC236}">
-                <a16:creationId xmlns:a16="http://schemas.microsoft.com/office/drawing/2014/main" id="{5739893F-153B-41CB-8912-1598AF60DDE2}"/>
+                <a16:creationId xmlns:a16="http://schemas.microsoft.com/office/drawing/2014/main" id="{E663DE18-1EB9-4484-B2AF-939703EE5CC9}"/>
               </a:ext>
             </a:extLst>
           </p:cNvPr>
@@ -4346,7 +4346,7 @@
                 <a:ea typeface="Bitstream Charter"/>
                 <a:cs typeface="Bitstream Charter"/>
               </a:rPr>
-              <a:t>Nasser Alhuri: team lead, integration, submission and pitch.</a:t>
+              <a:t>Nasser Alhuri: team coordination and submission.</a:t>
             </a:r>
           </a:p>
         </p:txBody>
@@ -4356,7 +4356,7 @@
           <p:cNvPr id="3" name="">
             <a:extLst xmlns:a="http://schemas.openxmlformats.org/drawingml/2006/main">
               <a:ext uri="{FF2B5EF4-FFF2-40B4-BE49-F238E27FC236}">
-                <a16:creationId xmlns:a16="http://schemas.microsoft.com/office/drawing/2014/main" id="{AF34FCB2-8E26-48E5-B0C2-EEF76BEA3C6F}"/>
+                <a16:creationId xmlns:a16="http://schemas.microsoft.com/office/drawing/2014/main" id="{CF33405E-9F84-4AAB-BFBC-D83B9270912B}"/>
               </a:ext>
             </a:extLst>
           </p:cNvPr>
@@ -4403,7 +4403,7 @@
                 <a:ea typeface="Bitstream Charter"/>
                 <a:cs typeface="Bitstream Charter"/>
               </a:rPr>
-              <a:t>Abdulrahman Almohannadi: data and method review.</a:t>
+              <a:t>Abdulrahman Almohannadi: check Al Khor locations against local knowledge.</a:t>
             </a:r>
           </a:p>
         </p:txBody>
@@ -4413,7 +4413,7 @@
           <p:cNvPr id="4" name="">
             <a:extLst xmlns:a="http://schemas.openxmlformats.org/drawingml/2006/main">
               <a:ext uri="{FF2B5EF4-FFF2-40B4-BE49-F238E27FC236}">
-                <a16:creationId xmlns:a16="http://schemas.microsoft.com/office/drawing/2014/main" id="{8E28F698-793F-48F4-9F59-87D025707BC3}"/>
+                <a16:creationId xmlns:a16="http://schemas.microsoft.com/office/drawing/2014/main" id="{3C4E8821-664A-4B46-B4D3-000DC8FB7965}"/>
               </a:ext>
             </a:extLst>
           </p:cNvPr>
@@ -4460,7 +4460,7 @@
                 <a:ea typeface="Bitstream Charter"/>
                 <a:cs typeface="Bitstream Charter"/>
               </a:rPr>
-              <a:t>Mohammed Almarri: map and candidate-site review.</a:t>
+              <a:t>Mohammed Almarri: test the map and document issues.</a:t>
             </a:r>
           </a:p>
         </p:txBody>
@@ -4470,7 +4470,7 @@
           <p:cNvPr id="5" name="">
             <a:extLst xmlns:a="http://schemas.openxmlformats.org/drawingml/2006/main">
               <a:ext uri="{FF2B5EF4-FFF2-40B4-BE49-F238E27FC236}">
-                <a16:creationId xmlns:a16="http://schemas.microsoft.com/office/drawing/2014/main" id="{1E3B4838-A4B9-4507-B4CD-BA8C80BE28C9}"/>
+                <a16:creationId xmlns:a16="http://schemas.microsoft.com/office/drawing/2014/main" id="{B18481E6-9679-437D-8E9B-93CDA5D7FB81}"/>
               </a:ext>
             </a:extLst>
           </p:cNvPr>
@@ -4517,7 +4517,7 @@
                 <a:ea typeface="Bitstream Charter"/>
                 <a:cs typeface="Bitstream Charter"/>
               </a:rPr>
-              <a:t>Majed Alkuwari: reproducibility check and demo review.</a:t>
+              <a:t>Majed Alkuwari: review slides and explain the limitations.</a:t>
             </a:r>
           </a:p>
         </p:txBody>
@@ -4527,7 +4527,7 @@
           <p:cNvPr id="6" name="">
             <a:extLst xmlns:a="http://schemas.openxmlformats.org/drawingml/2006/main">
               <a:ext uri="{FF2B5EF4-FFF2-40B4-BE49-F238E27FC236}">
-                <a16:creationId xmlns:a16="http://schemas.microsoft.com/office/drawing/2014/main" id="{B9BC5FB3-36EB-49EC-9EEA-B20BBBE94A19}"/>
+                <a16:creationId xmlns:a16="http://schemas.microsoft.com/office/drawing/2014/main" id="{7448F61C-907E-4050-90D4-949FF229BD3B}"/>
               </a:ext>
             </a:extLst>
           </p:cNvPr>
@@ -4574,7 +4574,7 @@
                 <a:ea typeface="Bitstream Charter"/>
                 <a:cs typeface="Bitstream Charter"/>
               </a:rPr>
-              <a:t>Ali Alkubaisi: presentation and package quality review.</a:t>
+              <a:t>Ali Alkubaisi: demonstrate the project and prepare judge questions.</a:t>
             </a:r>
           </a:p>
         </p:txBody>
@@ -4584,7 +4584,7 @@
           <p:cNvPr id="7" name="">
             <a:extLst xmlns:a="http://schemas.openxmlformats.org/drawingml/2006/main">
               <a:ext uri="{FF2B5EF4-FFF2-40B4-BE49-F238E27FC236}">
-                <a16:creationId xmlns:a16="http://schemas.microsoft.com/office/drawing/2014/main" id="{4F46B7B3-2247-4811-9866-5DB624C6AFB0}"/>
+                <a16:creationId xmlns:a16="http://schemas.microsoft.com/office/drawing/2014/main" id="{4237B568-62A5-4CFD-9BAC-18D5945A254A}"/>
               </a:ext>
             </a:extLst>
           </p:cNvPr>
@@ -4631,7 +4631,7 @@
                 <a:ea typeface="Bitstream Charter"/>
                 <a:cs typeface="Bitstream Charter"/>
               </a:rPr>
-              <a:t>Assigned review ownership, not claims of completed contributions. Code, analysis and drafts were developed with AI assistance.</a:t>
+              <a:t>Members will complete their assigned checks before submission.</a:t>
             </a:r>
           </a:p>
         </p:txBody>
@@ -4639,7 +4639,7 @@
     </p:spTree>
     <p:extLst>
       <p:ext uri="{BB962C8B-B14F-4D97-AF65-F5344CB8AC3E}">
-        <p14:creationId xmlns:p14="http://schemas.microsoft.com/office/powerpoint/2010/main" val="169067914"/>
+        <p14:creationId xmlns:p14="http://schemas.microsoft.com/office/powerpoint/2010/main" val="326947995"/>
       </p:ext>
     </p:extLst>
   </p:cSld>
@@ -4670,7 +4670,7 @@
           <p:cNvPr id="7" name="">
             <a:extLst xmlns:a="http://schemas.openxmlformats.org/drawingml/2006/main">
               <a:ext uri="{FF2B5EF4-FFF2-40B4-BE49-F238E27FC236}">
-                <a16:creationId xmlns:a16="http://schemas.microsoft.com/office/drawing/2014/main" id="{C5950595-6EB0-44CF-9F4F-A3DC59B46145}"/>
+                <a16:creationId xmlns:a16="http://schemas.microsoft.com/office/drawing/2014/main" id="{B6FC678B-F68F-466D-A9BC-51447DD08D3C}"/>
               </a:ext>
             </a:extLst>
           </p:cNvPr>
@@ -4727,7 +4727,7 @@
           <p:cNvPr id="2" name="">
             <a:extLst xmlns:a="http://schemas.openxmlformats.org/drawingml/2006/main">
               <a:ext uri="{FF2B5EF4-FFF2-40B4-BE49-F238E27FC236}">
-                <a16:creationId xmlns:a16="http://schemas.microsoft.com/office/drawing/2014/main" id="{7C58BD8D-76E5-4269-9DDB-695D60E54BCD}"/>
+                <a16:creationId xmlns:a16="http://schemas.microsoft.com/office/drawing/2014/main" id="{66204AB2-7D13-4BF7-B647-B2AEF52DB330}"/>
               </a:ext>
             </a:extLst>
           </p:cNvPr>
@@ -4784,7 +4784,7 @@
           <p:cNvPr id="3" name="">
             <a:extLst xmlns:a="http://schemas.openxmlformats.org/drawingml/2006/main">
               <a:ext uri="{FF2B5EF4-FFF2-40B4-BE49-F238E27FC236}">
-                <a16:creationId xmlns:a16="http://schemas.microsoft.com/office/drawing/2014/main" id="{4994832F-C8C4-4CDD-9E79-78BE31EA9355}"/>
+                <a16:creationId xmlns:a16="http://schemas.microsoft.com/office/drawing/2014/main" id="{ED307E2E-D67D-4810-A26A-63DFE0534665}"/>
               </a:ext>
             </a:extLst>
           </p:cNvPr>
@@ -4841,7 +4841,7 @@
           <p:cNvPr id="4" name="">
             <a:extLst xmlns:a="http://schemas.openxmlformats.org/drawingml/2006/main">
               <a:ext uri="{FF2B5EF4-FFF2-40B4-BE49-F238E27FC236}">
-                <a16:creationId xmlns:a16="http://schemas.microsoft.com/office/drawing/2014/main" id="{92C14AD2-1346-466D-B397-FB9444B6BC3C}"/>
+                <a16:creationId xmlns:a16="http://schemas.microsoft.com/office/drawing/2014/main" id="{F3C51922-108A-4686-A8D0-CA022884E1CE}"/>
               </a:ext>
             </a:extLst>
           </p:cNvPr>
@@ -4898,7 +4898,7 @@
           <p:cNvPr id="5" name="">
             <a:extLst xmlns:a="http://schemas.openxmlformats.org/drawingml/2006/main">
               <a:ext uri="{FF2B5EF4-FFF2-40B4-BE49-F238E27FC236}">
-                <a16:creationId xmlns:a16="http://schemas.microsoft.com/office/drawing/2014/main" id="{5BD28C1D-EA19-4C9C-B10A-4CFD16A529A5}"/>
+                <a16:creationId xmlns:a16="http://schemas.microsoft.com/office/drawing/2014/main" id="{75969E63-5643-4E4C-A957-BC08157FD5A5}"/>
               </a:ext>
             </a:extLst>
           </p:cNvPr>
@@ -4955,7 +4955,7 @@
           <p:cNvPr id="6" name="">
             <a:extLst xmlns:a="http://schemas.openxmlformats.org/drawingml/2006/main">
               <a:ext uri="{FF2B5EF4-FFF2-40B4-BE49-F238E27FC236}">
-                <a16:creationId xmlns:a16="http://schemas.microsoft.com/office/drawing/2014/main" id="{73D1C18A-1729-4EC2-B72C-E0CD04074BBE}"/>
+                <a16:creationId xmlns:a16="http://schemas.microsoft.com/office/drawing/2014/main" id="{76CDBD7B-0DB2-482F-9AF1-8CCE50BE7DA3}"/>
               </a:ext>
             </a:extLst>
           </p:cNvPr>
@@ -5010,7 +5010,7 @@
     </p:spTree>
     <p:extLst>
       <p:ext uri="{BB962C8B-B14F-4D97-AF65-F5344CB8AC3E}">
-        <p14:creationId xmlns:p14="http://schemas.microsoft.com/office/powerpoint/2010/main" val="706804926"/>
+        <p14:creationId xmlns:p14="http://schemas.microsoft.com/office/powerpoint/2010/main" val="1819648591"/>
       </p:ext>
     </p:extLst>
   </p:cSld>
@@ -5041,7 +5041,7 @@
           <p:cNvPr id="6" name="">
             <a:extLst xmlns:a="http://schemas.openxmlformats.org/drawingml/2006/main">
               <a:ext uri="{FF2B5EF4-FFF2-40B4-BE49-F238E27FC236}">
-                <a16:creationId xmlns:a16="http://schemas.microsoft.com/office/drawing/2014/main" id="{ED959EA6-1AEF-435B-9C9F-589693E3E7A0}"/>
+                <a16:creationId xmlns:a16="http://schemas.microsoft.com/office/drawing/2014/main" id="{042E9A6E-1BFC-4A6F-BA9B-7DA7B4756DF8}"/>
               </a:ext>
             </a:extLst>
           </p:cNvPr>
@@ -5098,7 +5098,7 @@
           <p:cNvPr id="2" name="">
             <a:extLst xmlns:a="http://schemas.openxmlformats.org/drawingml/2006/main">
               <a:ext uri="{FF2B5EF4-FFF2-40B4-BE49-F238E27FC236}">
-                <a16:creationId xmlns:a16="http://schemas.microsoft.com/office/drawing/2014/main" id="{0B3755F6-7288-4FD1-85BA-CE2FEB467E93}"/>
+                <a16:creationId xmlns:a16="http://schemas.microsoft.com/office/drawing/2014/main" id="{B222E879-0DF5-40EF-8CB9-BC1167E10EF1}"/>
               </a:ext>
             </a:extLst>
           </p:cNvPr>
@@ -5155,7 +5155,7 @@
           <p:cNvPr id="3" name="">
             <a:extLst xmlns:a="http://schemas.openxmlformats.org/drawingml/2006/main">
               <a:ext uri="{FF2B5EF4-FFF2-40B4-BE49-F238E27FC236}">
-                <a16:creationId xmlns:a16="http://schemas.microsoft.com/office/drawing/2014/main" id="{120521AF-E359-4B96-A28A-B6C21D0C10BA}"/>
+                <a16:creationId xmlns:a16="http://schemas.microsoft.com/office/drawing/2014/main" id="{9356DB36-8746-4414-89D2-8FEE2AB1C1E5}"/>
               </a:ext>
             </a:extLst>
           </p:cNvPr>
@@ -5212,7 +5212,7 @@
           <p:cNvPr id="4" name="">
             <a:extLst xmlns:a="http://schemas.openxmlformats.org/drawingml/2006/main">
               <a:ext uri="{FF2B5EF4-FFF2-40B4-BE49-F238E27FC236}">
-                <a16:creationId xmlns:a16="http://schemas.microsoft.com/office/drawing/2014/main" id="{09B3B39E-2C22-4AAE-A2CB-34EEA78A7C79}"/>
+                <a16:creationId xmlns:a16="http://schemas.microsoft.com/office/drawing/2014/main" id="{5133C73F-E240-47C7-A4A5-4FEFC54E356B}"/>
               </a:ext>
             </a:extLst>
           </p:cNvPr>
@@ -5269,7 +5269,7 @@
           <p:cNvPr id="5" name="">
             <a:extLst xmlns:a="http://schemas.openxmlformats.org/drawingml/2006/main">
               <a:ext uri="{FF2B5EF4-FFF2-40B4-BE49-F238E27FC236}">
-                <a16:creationId xmlns:a16="http://schemas.microsoft.com/office/drawing/2014/main" id="{B9B4ACEC-2743-4AA1-B031-94871ACA1E22}"/>
+                <a16:creationId xmlns:a16="http://schemas.microsoft.com/office/drawing/2014/main" id="{9FD92454-73BB-4C6F-BD2F-BB4B0F020D23}"/>
               </a:ext>
             </a:extLst>
           </p:cNvPr>
@@ -5324,7 +5324,7 @@
     </p:spTree>
     <p:extLst>
       <p:ext uri="{BB962C8B-B14F-4D97-AF65-F5344CB8AC3E}">
-        <p14:creationId xmlns:p14="http://schemas.microsoft.com/office/powerpoint/2010/main" val="123264393"/>
+        <p14:creationId xmlns:p14="http://schemas.microsoft.com/office/powerpoint/2010/main" val="1138529212"/>
       </p:ext>
     </p:extLst>
   </p:cSld>
@@ -5355,7 +5355,7 @@
           <p:cNvPr id="6" name="">
             <a:extLst xmlns:a="http://schemas.openxmlformats.org/drawingml/2006/main">
               <a:ext uri="{FF2B5EF4-FFF2-40B4-BE49-F238E27FC236}">
-                <a16:creationId xmlns:a16="http://schemas.microsoft.com/office/drawing/2014/main" id="{4085BC49-9969-40E9-808D-5D6FD016AFFE}"/>
+                <a16:creationId xmlns:a16="http://schemas.microsoft.com/office/drawing/2014/main" id="{E6CB4741-726A-431A-B8BE-0DE6CE6ED145}"/>
               </a:ext>
             </a:extLst>
           </p:cNvPr>
@@ -5412,7 +5412,7 @@
           <p:cNvPr id="2" name="">
             <a:extLst xmlns:a="http://schemas.openxmlformats.org/drawingml/2006/main">
               <a:ext uri="{FF2B5EF4-FFF2-40B4-BE49-F238E27FC236}">
-                <a16:creationId xmlns:a16="http://schemas.microsoft.com/office/drawing/2014/main" id="{3A359118-92AF-4B22-904B-CAA169F9D0B3}"/>
+                <a16:creationId xmlns:a16="http://schemas.microsoft.com/office/drawing/2014/main" id="{F34C4DD0-4FBC-42FC-8E7A-B167CF7555C2}"/>
               </a:ext>
             </a:extLst>
           </p:cNvPr>
@@ -5469,7 +5469,7 @@
           <p:cNvPr id="3" name="">
             <a:extLst xmlns:a="http://schemas.openxmlformats.org/drawingml/2006/main">
               <a:ext uri="{FF2B5EF4-FFF2-40B4-BE49-F238E27FC236}">
-                <a16:creationId xmlns:a16="http://schemas.microsoft.com/office/drawing/2014/main" id="{AF64C600-6FC4-45F8-814E-363FFAAB99CB}"/>
+                <a16:creationId xmlns:a16="http://schemas.microsoft.com/office/drawing/2014/main" id="{DEE9A8AB-F412-45ED-ACAF-66808CEAE494}"/>
               </a:ext>
             </a:extLst>
           </p:cNvPr>
@@ -5526,7 +5526,7 @@
           <p:cNvPr id="4" name="">
             <a:extLst xmlns:a="http://schemas.openxmlformats.org/drawingml/2006/main">
               <a:ext uri="{FF2B5EF4-FFF2-40B4-BE49-F238E27FC236}">
-                <a16:creationId xmlns:a16="http://schemas.microsoft.com/office/drawing/2014/main" id="{04536095-54F1-4BE3-BD8A-DEC1BD27E3BB}"/>
+                <a16:creationId xmlns:a16="http://schemas.microsoft.com/office/drawing/2014/main" id="{B107BB14-1B93-4FE4-B4A6-7850C84DE0FD}"/>
               </a:ext>
             </a:extLst>
           </p:cNvPr>
@@ -5583,7 +5583,7 @@
           <p:cNvPr id="5" name="">
             <a:extLst xmlns:a="http://schemas.openxmlformats.org/drawingml/2006/main">
               <a:ext uri="{FF2B5EF4-FFF2-40B4-BE49-F238E27FC236}">
-                <a16:creationId xmlns:a16="http://schemas.microsoft.com/office/drawing/2014/main" id="{873F3366-73FA-4B63-990C-8214100101AA}"/>
+                <a16:creationId xmlns:a16="http://schemas.microsoft.com/office/drawing/2014/main" id="{0AC53E3A-9476-4F85-A1E8-E675CCDDC830}"/>
               </a:ext>
             </a:extLst>
           </p:cNvPr>
@@ -5638,7 +5638,7 @@
     </p:spTree>
     <p:extLst>
       <p:ext uri="{BB962C8B-B14F-4D97-AF65-F5344CB8AC3E}">
-        <p14:creationId xmlns:p14="http://schemas.microsoft.com/office/powerpoint/2010/main" val="1707656201"/>
+        <p14:creationId xmlns:p14="http://schemas.microsoft.com/office/powerpoint/2010/main" val="1884030217"/>
       </p:ext>
     </p:extLst>
   </p:cSld>
@@ -5669,7 +5669,7 @@
           <p:cNvPr id="7" name="">
             <a:extLst xmlns:a="http://schemas.openxmlformats.org/drawingml/2006/main">
               <a:ext uri="{FF2B5EF4-FFF2-40B4-BE49-F238E27FC236}">
-                <a16:creationId xmlns:a16="http://schemas.microsoft.com/office/drawing/2014/main" id="{A826FE1B-01C8-4C80-98AF-F98D46C6E2A1}"/>
+                <a16:creationId xmlns:a16="http://schemas.microsoft.com/office/drawing/2014/main" id="{29185394-0381-4E84-A1BC-31C66FA308B2}"/>
               </a:ext>
             </a:extLst>
           </p:cNvPr>
@@ -5726,7 +5726,7 @@
           <p:cNvPr id="2" name="">
             <a:extLst xmlns:a="http://schemas.openxmlformats.org/drawingml/2006/main">
               <a:ext uri="{FF2B5EF4-FFF2-40B4-BE49-F238E27FC236}">
-                <a16:creationId xmlns:a16="http://schemas.microsoft.com/office/drawing/2014/main" id="{87DBE71C-7D94-406D-983A-2167AA4925A5}"/>
+                <a16:creationId xmlns:a16="http://schemas.microsoft.com/office/drawing/2014/main" id="{EB787BBD-C9C0-439E-8013-25422BFA7B2A}"/>
               </a:ext>
             </a:extLst>
           </p:cNvPr>
@@ -5783,7 +5783,7 @@
           <p:cNvPr id="3" name="">
             <a:extLst xmlns:a="http://schemas.openxmlformats.org/drawingml/2006/main">
               <a:ext uri="{FF2B5EF4-FFF2-40B4-BE49-F238E27FC236}">
-                <a16:creationId xmlns:a16="http://schemas.microsoft.com/office/drawing/2014/main" id="{48F6338E-F95B-49D3-BC70-9425600718D3}"/>
+                <a16:creationId xmlns:a16="http://schemas.microsoft.com/office/drawing/2014/main" id="{DB8B1E9F-CAB5-401A-8B40-5421C993D9D9}"/>
               </a:ext>
             </a:extLst>
           </p:cNvPr>
@@ -5840,7 +5840,7 @@
           <p:cNvPr id="4" name="">
             <a:extLst xmlns:a="http://schemas.openxmlformats.org/drawingml/2006/main">
               <a:ext uri="{FF2B5EF4-FFF2-40B4-BE49-F238E27FC236}">
-                <a16:creationId xmlns:a16="http://schemas.microsoft.com/office/drawing/2014/main" id="{1F193183-5C77-40D3-AE5F-EBA87BBBD4F0}"/>
+                <a16:creationId xmlns:a16="http://schemas.microsoft.com/office/drawing/2014/main" id="{E17FDA68-B5F2-4407-8B2C-A57F0764E164}"/>
               </a:ext>
             </a:extLst>
           </p:cNvPr>
@@ -5897,7 +5897,7 @@
           <p:cNvPr id="5" name="">
             <a:extLst xmlns:a="http://schemas.openxmlformats.org/drawingml/2006/main">
               <a:ext uri="{FF2B5EF4-FFF2-40B4-BE49-F238E27FC236}">
-                <a16:creationId xmlns:a16="http://schemas.microsoft.com/office/drawing/2014/main" id="{F28C86CB-5354-4C67-AB73-A49EF3F151FA}"/>
+                <a16:creationId xmlns:a16="http://schemas.microsoft.com/office/drawing/2014/main" id="{B551F024-6130-4189-BA6B-37964BCA3C6C}"/>
               </a:ext>
             </a:extLst>
           </p:cNvPr>
@@ -5954,7 +5954,7 @@
           <p:cNvPr id="6" name="">
             <a:extLst xmlns:a="http://schemas.openxmlformats.org/drawingml/2006/main">
               <a:ext uri="{FF2B5EF4-FFF2-40B4-BE49-F238E27FC236}">
-                <a16:creationId xmlns:a16="http://schemas.microsoft.com/office/drawing/2014/main" id="{DD965E40-13F2-4856-AFE5-7BD5F5E64E5A}"/>
+                <a16:creationId xmlns:a16="http://schemas.microsoft.com/office/drawing/2014/main" id="{F882663A-BCDB-45A6-B0FA-8A4ECCC8BF1F}"/>
               </a:ext>
             </a:extLst>
           </p:cNvPr>
@@ -6009,7 +6009,7 @@
     </p:spTree>
     <p:extLst>
       <p:ext uri="{BB962C8B-B14F-4D97-AF65-F5344CB8AC3E}">
-        <p14:creationId xmlns:p14="http://schemas.microsoft.com/office/powerpoint/2010/main" val="1485229939"/>
+        <p14:creationId xmlns:p14="http://schemas.microsoft.com/office/powerpoint/2010/main" val="1620130725"/>
       </p:ext>
     </p:extLst>
   </p:cSld>
@@ -6140,7 +6140,7 @@
           <p:cNvPr id="21" name="">
             <a:extLst xmlns:a="http://schemas.openxmlformats.org/drawingml/2006/main">
               <a:ext uri="{FF2B5EF4-FFF2-40B4-BE49-F238E27FC236}">
-                <a16:creationId xmlns:a16="http://schemas.microsoft.com/office/drawing/2014/main" id="{0A65A408-0BBB-4C91-84E4-ABC9D3FE0367}"/>
+                <a16:creationId xmlns:a16="http://schemas.microsoft.com/office/drawing/2014/main" id="{E4375B69-4F18-4E4D-89A2-7DB527A5C92D}"/>
               </a:ext>
             </a:extLst>
           </p:cNvPr>
@@ -6197,7 +6197,7 @@
           <p:cNvPr id="2" name="">
             <a:extLst xmlns:a="http://schemas.openxmlformats.org/drawingml/2006/main">
               <a:ext uri="{FF2B5EF4-FFF2-40B4-BE49-F238E27FC236}">
-                <a16:creationId xmlns:a16="http://schemas.microsoft.com/office/drawing/2014/main" id="{180635FB-A80F-47DA-9A6D-393D872F26DC}"/>
+                <a16:creationId xmlns:a16="http://schemas.microsoft.com/office/drawing/2014/main" id="{6087E326-D507-47DF-BDFE-AD92737B940F}"/>
               </a:ext>
             </a:extLst>
           </p:cNvPr>
@@ -6229,7 +6229,7 @@
           <p:cNvPr id="3" name="">
             <a:extLst xmlns:a="http://schemas.openxmlformats.org/drawingml/2006/main">
               <a:ext uri="{FF2B5EF4-FFF2-40B4-BE49-F238E27FC236}">
-                <a16:creationId xmlns:a16="http://schemas.microsoft.com/office/drawing/2014/main" id="{7C3703D1-F3BD-4BFD-BB90-0BABA9EF669D}"/>
+                <a16:creationId xmlns:a16="http://schemas.microsoft.com/office/drawing/2014/main" id="{48A88E80-7AF5-444E-82C1-751EA33687D6}"/>
               </a:ext>
             </a:extLst>
           </p:cNvPr>
@@ -6332,7 +6332,7 @@
           <p:cNvPr id="4" name="">
             <a:extLst xmlns:a="http://schemas.openxmlformats.org/drawingml/2006/main">
               <a:ext uri="{FF2B5EF4-FFF2-40B4-BE49-F238E27FC236}">
-                <a16:creationId xmlns:a16="http://schemas.microsoft.com/office/drawing/2014/main" id="{E7486547-BB62-462A-889B-AC9DCE791F6A}"/>
+                <a16:creationId xmlns:a16="http://schemas.microsoft.com/office/drawing/2014/main" id="{E3A7F2AF-DD1A-4910-9A5C-EDD316566E4F}"/>
               </a:ext>
             </a:extLst>
           </p:cNvPr>
@@ -6364,7 +6364,7 @@
           <p:cNvPr id="5" name="">
             <a:extLst xmlns:a="http://schemas.openxmlformats.org/drawingml/2006/main">
               <a:ext uri="{FF2B5EF4-FFF2-40B4-BE49-F238E27FC236}">
-                <a16:creationId xmlns:a16="http://schemas.microsoft.com/office/drawing/2014/main" id="{D08900FD-40F0-457F-9B3C-AFCEA944BBC7}"/>
+                <a16:creationId xmlns:a16="http://schemas.microsoft.com/office/drawing/2014/main" id="{E8797D63-6BB0-46C6-9B5C-3173C9E723EB}"/>
               </a:ext>
             </a:extLst>
           </p:cNvPr>
@@ -6467,7 +6467,7 @@
           <p:cNvPr id="6" name="">
             <a:extLst xmlns:a="http://schemas.openxmlformats.org/drawingml/2006/main">
               <a:ext uri="{FF2B5EF4-FFF2-40B4-BE49-F238E27FC236}">
-                <a16:creationId xmlns:a16="http://schemas.microsoft.com/office/drawing/2014/main" id="{B0892A10-4D83-43E1-AF1D-8FF269C4C9B3}"/>
+                <a16:creationId xmlns:a16="http://schemas.microsoft.com/office/drawing/2014/main" id="{1AB3953B-3BE7-4280-83CD-D0E31229CED8}"/>
               </a:ext>
             </a:extLst>
           </p:cNvPr>
@@ -6499,7 +6499,7 @@
           <p:cNvPr id="7" name="">
             <a:extLst xmlns:a="http://schemas.openxmlformats.org/drawingml/2006/main">
               <a:ext uri="{FF2B5EF4-FFF2-40B4-BE49-F238E27FC236}">
-                <a16:creationId xmlns:a16="http://schemas.microsoft.com/office/drawing/2014/main" id="{40FEC3A7-31BF-4642-8D2B-C888F0DBF05A}"/>
+                <a16:creationId xmlns:a16="http://schemas.microsoft.com/office/drawing/2014/main" id="{38ABB012-1D88-455D-B863-6BDE76677DB4}"/>
               </a:ext>
             </a:extLst>
           </p:cNvPr>
@@ -6602,7 +6602,7 @@
           <p:cNvPr id="8" name="">
             <a:extLst xmlns:a="http://schemas.openxmlformats.org/drawingml/2006/main">
               <a:ext uri="{FF2B5EF4-FFF2-40B4-BE49-F238E27FC236}">
-                <a16:creationId xmlns:a16="http://schemas.microsoft.com/office/drawing/2014/main" id="{2ECB88AD-7C3F-426B-84E8-73B370314E61}"/>
+                <a16:creationId xmlns:a16="http://schemas.microsoft.com/office/drawing/2014/main" id="{2805C9AC-A423-4BEE-A12F-6C450D857FB2}"/>
               </a:ext>
             </a:extLst>
           </p:cNvPr>
@@ -6634,7 +6634,7 @@
           <p:cNvPr id="9" name="">
             <a:extLst xmlns:a="http://schemas.openxmlformats.org/drawingml/2006/main">
               <a:ext uri="{FF2B5EF4-FFF2-40B4-BE49-F238E27FC236}">
-                <a16:creationId xmlns:a16="http://schemas.microsoft.com/office/drawing/2014/main" id="{E2EA65C8-4035-429A-ADF3-86B7930742F3}"/>
+                <a16:creationId xmlns:a16="http://schemas.microsoft.com/office/drawing/2014/main" id="{707136AB-A26C-40A7-A3AE-31706D60A767}"/>
               </a:ext>
             </a:extLst>
           </p:cNvPr>
@@ -6737,7 +6737,7 @@
           <p:cNvPr id="10" name="">
             <a:extLst xmlns:a="http://schemas.openxmlformats.org/drawingml/2006/main">
               <a:ext uri="{FF2B5EF4-FFF2-40B4-BE49-F238E27FC236}">
-                <a16:creationId xmlns:a16="http://schemas.microsoft.com/office/drawing/2014/main" id="{B890E0C1-80C5-495F-8ACD-083D03CDFD9D}"/>
+                <a16:creationId xmlns:a16="http://schemas.microsoft.com/office/drawing/2014/main" id="{9A7641B5-FF23-41F4-89C0-89CD8780AC63}"/>
               </a:ext>
             </a:extLst>
           </p:cNvPr>
@@ -6769,7 +6769,7 @@
           <p:cNvPr id="11" name="">
             <a:extLst xmlns:a="http://schemas.openxmlformats.org/drawingml/2006/main">
               <a:ext uri="{FF2B5EF4-FFF2-40B4-BE49-F238E27FC236}">
-                <a16:creationId xmlns:a16="http://schemas.microsoft.com/office/drawing/2014/main" id="{D0411175-BF19-4E30-A6FB-A77041F00084}"/>
+                <a16:creationId xmlns:a16="http://schemas.microsoft.com/office/drawing/2014/main" id="{D8C27629-2523-40CB-8A87-E4ED447B4F4C}"/>
               </a:ext>
             </a:extLst>
           </p:cNvPr>
@@ -6872,7 +6872,7 @@
           <p:cNvPr id="16" name="">
             <a:extLst xmlns:a="http://schemas.openxmlformats.org/drawingml/2006/main">
               <a:ext uri="{FF2B5EF4-FFF2-40B4-BE49-F238E27FC236}">
-                <a16:creationId xmlns:a16="http://schemas.microsoft.com/office/drawing/2014/main" id="{92CC83BC-FD77-44C4-84D6-DA8B3C94F404}"/>
+                <a16:creationId xmlns:a16="http://schemas.microsoft.com/office/drawing/2014/main" id="{7BF9A4EA-640C-445F-88C2-A729442F48B4}"/>
               </a:ext>
             </a:extLst>
           </p:cNvPr>
@@ -6927,7 +6927,7 @@
     </p:spTree>
     <p:extLst>
       <p:ext uri="{BB962C8B-B14F-4D97-AF65-F5344CB8AC3E}">
-        <p14:creationId xmlns:p14="http://schemas.microsoft.com/office/powerpoint/2010/main" val="1986723221"/>
+        <p14:creationId xmlns:p14="http://schemas.microsoft.com/office/powerpoint/2010/main" val="1986820812"/>
       </p:ext>
     </p:extLst>
   </p:cSld>
@@ -6958,7 +6958,7 @@
           <p:cNvPr id="4" name="">
             <a:extLst xmlns:a="http://schemas.openxmlformats.org/drawingml/2006/main">
               <a:ext uri="{FF2B5EF4-FFF2-40B4-BE49-F238E27FC236}">
-                <a16:creationId xmlns:a16="http://schemas.microsoft.com/office/drawing/2014/main" id="{E87E6321-8638-4D7C-953B-7F941BB1F070}"/>
+                <a16:creationId xmlns:a16="http://schemas.microsoft.com/office/drawing/2014/main" id="{E7D5B82B-6175-48B7-8B53-BE6FEDC9D127}"/>
               </a:ext>
             </a:extLst>
           </p:cNvPr>
@@ -7019,7 +7019,7 @@
           <p:nvPr/>
         </p:nvPicPr>
         <p:blipFill>
-          <a:blip xmlns:r="http://schemas.openxmlformats.org/officeDocument/2006/relationships" xmlns:a="http://schemas.openxmlformats.org/drawingml/2006/main" r:embed="R7d4ad72d3ee4464c"/>
+          <a:blip xmlns:r="http://schemas.openxmlformats.org/officeDocument/2006/relationships" xmlns:a="http://schemas.openxmlformats.org/drawingml/2006/main" r:embed="Rea9ba0e8114e44ed"/>
           <a:stretch xmlns:a="http://schemas.openxmlformats.org/drawingml/2006/main"/>
         </p:blipFill>
         <p:spPr>
@@ -7037,7 +7037,7 @@
           <p:cNvPr id="3" name="">
             <a:extLst xmlns:a="http://schemas.openxmlformats.org/drawingml/2006/main">
               <a:ext uri="{FF2B5EF4-FFF2-40B4-BE49-F238E27FC236}">
-                <a16:creationId xmlns:a16="http://schemas.microsoft.com/office/drawing/2014/main" id="{E3FAD36E-A403-4A2E-BE31-F58574A68947}"/>
+                <a16:creationId xmlns:a16="http://schemas.microsoft.com/office/drawing/2014/main" id="{0165C82E-F42A-4AFF-9F0C-6BB2D3550F7E}"/>
               </a:ext>
             </a:extLst>
           </p:cNvPr>
@@ -7092,7 +7092,7 @@
     </p:spTree>
     <p:extLst>
       <p:ext uri="{BB962C8B-B14F-4D97-AF65-F5344CB8AC3E}">
-        <p14:creationId xmlns:p14="http://schemas.microsoft.com/office/powerpoint/2010/main" val="1902352318"/>
+        <p14:creationId xmlns:p14="http://schemas.microsoft.com/office/powerpoint/2010/main" val="1551155092"/>
       </p:ext>
     </p:extLst>
   </p:cSld>
@@ -7123,7 +7123,7 @@
           <p:cNvPr id="4" name="">
             <a:extLst xmlns:a="http://schemas.openxmlformats.org/drawingml/2006/main">
               <a:ext uri="{FF2B5EF4-FFF2-40B4-BE49-F238E27FC236}">
-                <a16:creationId xmlns:a16="http://schemas.microsoft.com/office/drawing/2014/main" id="{D9A82381-3225-4921-AE1B-79BAA4D7359F}"/>
+                <a16:creationId xmlns:a16="http://schemas.microsoft.com/office/drawing/2014/main" id="{68780E31-7C66-4C12-AD25-487E40B3B1CF}"/>
               </a:ext>
             </a:extLst>
           </p:cNvPr>
@@ -7184,7 +7184,7 @@
           <p:nvPr/>
         </p:nvPicPr>
         <p:blipFill>
-          <a:blip xmlns:r="http://schemas.openxmlformats.org/officeDocument/2006/relationships" xmlns:a="http://schemas.openxmlformats.org/drawingml/2006/main" r:embed="Rd7fb2328741e4002"/>
+          <a:blip xmlns:r="http://schemas.openxmlformats.org/officeDocument/2006/relationships" xmlns:a="http://schemas.openxmlformats.org/drawingml/2006/main" r:embed="Rd0e2a96bb88e4083"/>
           <a:stretch xmlns:a="http://schemas.openxmlformats.org/drawingml/2006/main"/>
         </p:blipFill>
         <p:spPr>
@@ -7202,7 +7202,7 @@
           <p:cNvPr id="3" name="">
             <a:extLst xmlns:a="http://schemas.openxmlformats.org/drawingml/2006/main">
               <a:ext uri="{FF2B5EF4-FFF2-40B4-BE49-F238E27FC236}">
-                <a16:creationId xmlns:a16="http://schemas.microsoft.com/office/drawing/2014/main" id="{98132EB1-2FEA-4BE9-9E16-076DA8992475}"/>
+                <a16:creationId xmlns:a16="http://schemas.microsoft.com/office/drawing/2014/main" id="{00FF3F46-B56D-4C61-B38B-ECB629743672}"/>
               </a:ext>
             </a:extLst>
           </p:cNvPr>
@@ -7257,7 +7257,7 @@
     </p:spTree>
     <p:extLst>
       <p:ext uri="{BB962C8B-B14F-4D97-AF65-F5344CB8AC3E}">
-        <p14:creationId xmlns:p14="http://schemas.microsoft.com/office/powerpoint/2010/main" val="620023111"/>
+        <p14:creationId xmlns:p14="http://schemas.microsoft.com/office/powerpoint/2010/main" val="1465634553"/>
       </p:ext>
     </p:extLst>
   </p:cSld>
@@ -7288,7 +7288,7 @@
           <p:cNvPr id="6" name="">
             <a:extLst xmlns:a="http://schemas.openxmlformats.org/drawingml/2006/main">
               <a:ext uri="{FF2B5EF4-FFF2-40B4-BE49-F238E27FC236}">
-                <a16:creationId xmlns:a16="http://schemas.microsoft.com/office/drawing/2014/main" id="{574DF5F2-6F18-4CFA-95D3-29DA618477EF}"/>
+                <a16:creationId xmlns:a16="http://schemas.microsoft.com/office/drawing/2014/main" id="{C2870632-A757-478B-9FA5-10FAF34217B8}"/>
               </a:ext>
             </a:extLst>
           </p:cNvPr>
@@ -7798,7 +7798,7 @@
           <p:cNvPr id="3" name="">
             <a:extLst xmlns:a="http://schemas.openxmlformats.org/drawingml/2006/main">
               <a:ext uri="{FF2B5EF4-FFF2-40B4-BE49-F238E27FC236}">
-                <a16:creationId xmlns:a16="http://schemas.microsoft.com/office/drawing/2014/main" id="{B6057B3F-4425-4249-9B09-C7C0AA9CC48A}"/>
+                <a16:creationId xmlns:a16="http://schemas.microsoft.com/office/drawing/2014/main" id="{D2122468-CE84-4790-86F4-0242EDA2CC8A}"/>
               </a:ext>
             </a:extLst>
           </p:cNvPr>
@@ -7855,7 +7855,7 @@
           <p:cNvPr id="4" name="">
             <a:extLst xmlns:a="http://schemas.openxmlformats.org/drawingml/2006/main">
               <a:ext uri="{FF2B5EF4-FFF2-40B4-BE49-F238E27FC236}">
-                <a16:creationId xmlns:a16="http://schemas.microsoft.com/office/drawing/2014/main" id="{7BF433C5-572A-45FD-AAA4-FA98985B78FA}"/>
+                <a16:creationId xmlns:a16="http://schemas.microsoft.com/office/drawing/2014/main" id="{8931D8EA-4759-43AB-BE24-45E00D51E6E8}"/>
               </a:ext>
             </a:extLst>
           </p:cNvPr>
@@ -7912,7 +7912,7 @@
           <p:cNvPr id="5" name="">
             <a:extLst xmlns:a="http://schemas.openxmlformats.org/drawingml/2006/main">
               <a:ext uri="{FF2B5EF4-FFF2-40B4-BE49-F238E27FC236}">
-                <a16:creationId xmlns:a16="http://schemas.microsoft.com/office/drawing/2014/main" id="{2687F463-98D7-4CB7-BC43-BA3858AD5E87}"/>
+                <a16:creationId xmlns:a16="http://schemas.microsoft.com/office/drawing/2014/main" id="{BE87962C-22AA-4D03-8694-B545C0613DA7}"/>
               </a:ext>
             </a:extLst>
           </p:cNvPr>
@@ -7967,7 +7967,7 @@
     </p:spTree>
     <p:extLst>
       <p:ext uri="{BB962C8B-B14F-4D97-AF65-F5344CB8AC3E}">
-        <p14:creationId xmlns:p14="http://schemas.microsoft.com/office/powerpoint/2010/main" val="815878602"/>
+        <p14:creationId xmlns:p14="http://schemas.microsoft.com/office/powerpoint/2010/main" val="1060568423"/>
       </p:ext>
     </p:extLst>
   </p:cSld>
@@ -7998,7 +7998,7 @@
           <p:cNvPr id="6" name="">
             <a:extLst xmlns:a="http://schemas.openxmlformats.org/drawingml/2006/main">
               <a:ext uri="{FF2B5EF4-FFF2-40B4-BE49-F238E27FC236}">
-                <a16:creationId xmlns:a16="http://schemas.microsoft.com/office/drawing/2014/main" id="{CF454FBA-B156-4D6E-B023-63C76DC42E64}"/>
+                <a16:creationId xmlns:a16="http://schemas.microsoft.com/office/drawing/2014/main" id="{0EA8C7E8-47E6-4A26-AB97-0A2CBC337E22}"/>
               </a:ext>
             </a:extLst>
           </p:cNvPr>
@@ -8055,7 +8055,7 @@
           <p:cNvPr id="2" name="">
             <a:extLst xmlns:a="http://schemas.openxmlformats.org/drawingml/2006/main">
               <a:ext uri="{FF2B5EF4-FFF2-40B4-BE49-F238E27FC236}">
-                <a16:creationId xmlns:a16="http://schemas.microsoft.com/office/drawing/2014/main" id="{64B0D461-CB68-4FE8-9441-C8C06A8CCAF1}"/>
+                <a16:creationId xmlns:a16="http://schemas.microsoft.com/office/drawing/2014/main" id="{19DEF39B-E617-4792-9118-3836701CD0BB}"/>
               </a:ext>
             </a:extLst>
           </p:cNvPr>
@@ -8112,7 +8112,7 @@
           <p:cNvPr id="3" name="">
             <a:extLst xmlns:a="http://schemas.openxmlformats.org/drawingml/2006/main">
               <a:ext uri="{FF2B5EF4-FFF2-40B4-BE49-F238E27FC236}">
-                <a16:creationId xmlns:a16="http://schemas.microsoft.com/office/drawing/2014/main" id="{3C8B1392-2B47-4FCF-B014-7994DAD9533B}"/>
+                <a16:creationId xmlns:a16="http://schemas.microsoft.com/office/drawing/2014/main" id="{0CE2F0AC-5ABE-4EE3-BC0F-750F1F8C4B23}"/>
               </a:ext>
             </a:extLst>
           </p:cNvPr>
@@ -8169,7 +8169,7 @@
           <p:cNvPr id="4" name="">
             <a:extLst xmlns:a="http://schemas.openxmlformats.org/drawingml/2006/main">
               <a:ext uri="{FF2B5EF4-FFF2-40B4-BE49-F238E27FC236}">
-                <a16:creationId xmlns:a16="http://schemas.microsoft.com/office/drawing/2014/main" id="{E6D145BE-26B7-433B-A5EC-B2B2C7A364A1}"/>
+                <a16:creationId xmlns:a16="http://schemas.microsoft.com/office/drawing/2014/main" id="{DC7FC9E2-62F9-4E62-BB95-CA48FA92E631}"/>
               </a:ext>
             </a:extLst>
           </p:cNvPr>
@@ -8226,7 +8226,7 @@
           <p:cNvPr id="5" name="">
             <a:extLst xmlns:a="http://schemas.openxmlformats.org/drawingml/2006/main">
               <a:ext uri="{FF2B5EF4-FFF2-40B4-BE49-F238E27FC236}">
-                <a16:creationId xmlns:a16="http://schemas.microsoft.com/office/drawing/2014/main" id="{C47291B8-3908-4A14-AA84-4F13094DD3B3}"/>
+                <a16:creationId xmlns:a16="http://schemas.microsoft.com/office/drawing/2014/main" id="{A1C631DC-6431-4F1F-88F1-01F01C5482AE}"/>
               </a:ext>
             </a:extLst>
           </p:cNvPr>
@@ -8281,7 +8281,7 @@
     </p:spTree>
     <p:extLst>
       <p:ext uri="{BB962C8B-B14F-4D97-AF65-F5344CB8AC3E}">
-        <p14:creationId xmlns:p14="http://schemas.microsoft.com/office/powerpoint/2010/main" val="820933449"/>
+        <p14:creationId xmlns:p14="http://schemas.microsoft.com/office/powerpoint/2010/main" val="173999556"/>
       </p:ext>
     </p:extLst>
   </p:cSld>

--- a/docs/UrbanHeat-AlKhor-Pitch.pptx
+++ b/docs/UrbanHeat-AlKhor-Pitch.pptx
@@ -2,24 +2,24 @@
 <file path=ppt/presentation.xml><?xml version="1.0" encoding="utf-8"?>
 <p:presentation xmlns:p="http://schemas.openxmlformats.org/presentationml/2006/main">
   <p:sldMasterIdLst>
-    <p:sldMasterId xmlns:r="http://schemas.openxmlformats.org/officeDocument/2006/relationships" id="2147483648" r:id="Re80ca79e434e4ded"/>
+    <p:sldMasterId xmlns:r="http://schemas.openxmlformats.org/officeDocument/2006/relationships" id="2147483648" r:id="Rc437e29670fc4762"/>
   </p:sldMasterIdLst>
   <p:notesMasterIdLst>
-    <p:notesMasterId xmlns:r="http://schemas.openxmlformats.org/officeDocument/2006/relationships" r:id="Rc583a4e9a70440a7"/>
+    <p:notesMasterId xmlns:r="http://schemas.openxmlformats.org/officeDocument/2006/relationships" r:id="R28d2207b92b74de5"/>
   </p:notesMasterIdLst>
   <p:sldIdLst>
-    <p:sldId xmlns:r="http://schemas.openxmlformats.org/officeDocument/2006/relationships" id="256" r:id="R1f526fcc3cf040cf"/>
-    <p:sldId xmlns:r="http://schemas.openxmlformats.org/officeDocument/2006/relationships" id="257" r:id="R19354e73806c4dac"/>
-    <p:sldId xmlns:r="http://schemas.openxmlformats.org/officeDocument/2006/relationships" id="258" r:id="Rd05897d5d56f4035"/>
-    <p:sldId xmlns:r="http://schemas.openxmlformats.org/officeDocument/2006/relationships" id="259" r:id="R3519f3cdacb246c5"/>
-    <p:sldId xmlns:r="http://schemas.openxmlformats.org/officeDocument/2006/relationships" id="260" r:id="R98657c5e61414512"/>
-    <p:sldId xmlns:r="http://schemas.openxmlformats.org/officeDocument/2006/relationships" id="261" r:id="R0f82b68dea1b4033"/>
-    <p:sldId xmlns:r="http://schemas.openxmlformats.org/officeDocument/2006/relationships" id="262" r:id="R7ad0e5a3ac8543d0"/>
-    <p:sldId xmlns:r="http://schemas.openxmlformats.org/officeDocument/2006/relationships" id="263" r:id="R810dfe4007ef4b32"/>
-    <p:sldId xmlns:r="http://schemas.openxmlformats.org/officeDocument/2006/relationships" id="264" r:id="R87dcd1c41bfa4214"/>
-    <p:sldId xmlns:r="http://schemas.openxmlformats.org/officeDocument/2006/relationships" id="265" r:id="R5149f4673a724f6b"/>
-    <p:sldId xmlns:r="http://schemas.openxmlformats.org/officeDocument/2006/relationships" id="266" r:id="Rd17822387aff468f"/>
-    <p:sldId xmlns:r="http://schemas.openxmlformats.org/officeDocument/2006/relationships" id="267" r:id="R0641597b74464282"/>
+    <p:sldId xmlns:r="http://schemas.openxmlformats.org/officeDocument/2006/relationships" id="256" r:id="Rf4dfa02a48924dcf"/>
+    <p:sldId xmlns:r="http://schemas.openxmlformats.org/officeDocument/2006/relationships" id="257" r:id="R0250ceb3d43b4cc6"/>
+    <p:sldId xmlns:r="http://schemas.openxmlformats.org/officeDocument/2006/relationships" id="258" r:id="Rc4430c007319428f"/>
+    <p:sldId xmlns:r="http://schemas.openxmlformats.org/officeDocument/2006/relationships" id="259" r:id="Rb75867a560004dce"/>
+    <p:sldId xmlns:r="http://schemas.openxmlformats.org/officeDocument/2006/relationships" id="260" r:id="Ra6ab6ed3f820402b"/>
+    <p:sldId xmlns:r="http://schemas.openxmlformats.org/officeDocument/2006/relationships" id="261" r:id="Rccdadf42f21b4c97"/>
+    <p:sldId xmlns:r="http://schemas.openxmlformats.org/officeDocument/2006/relationships" id="262" r:id="R3b750980735b4ee1"/>
+    <p:sldId xmlns:r="http://schemas.openxmlformats.org/officeDocument/2006/relationships" id="263" r:id="R5c132eb2fd26463b"/>
+    <p:sldId xmlns:r="http://schemas.openxmlformats.org/officeDocument/2006/relationships" id="264" r:id="R1e6dfe076abe496f"/>
+    <p:sldId xmlns:r="http://schemas.openxmlformats.org/officeDocument/2006/relationships" id="265" r:id="R7dcee3cb8d6f4bc1"/>
+    <p:sldId xmlns:r="http://schemas.openxmlformats.org/officeDocument/2006/relationships" id="266" r:id="Rb133d68c9d5a4136"/>
+    <p:sldId xmlns:r="http://schemas.openxmlformats.org/officeDocument/2006/relationships" id="267" r:id="R9916258caeda435b"/>
   </p:sldIdLst>
   <p:sldSz cx="12192000" cy="6858000"/>
   <p:notesSz cx="6858000" cy="9144000"/>
@@ -523,7 +523,7 @@
           <a:lstStyle xmlns:a="http://schemas.openxmlformats.org/drawingml/2006/main"/>
           <a:p xmlns:a="http://schemas.openxmlformats.org/drawingml/2006/main">
             <a:r>
-              <a:t>Proposed next-stage activities, not completed work. See README sections 1, 2 and 8. A planner partnership, field validation and suitable imagery are dependencies; no partner agreement or funded incubation is claimed.</a:t>
+              <a:t>Proposed next-stage activities, not completed work. See README sections 1, 2 and 8. A planner partnership, field validation and suitable imagery are dependencies; no partner agreement or funded incubation is claimed. No additional thermal date or historical change measurement was added in this local-review revision.</a:t>
             </a:r>
           </a:p>
         </p:txBody>
@@ -593,7 +593,7 @@
           <a:lstStyle xmlns:a="http://schemas.openxmlformats.org/drawingml/2006/main"/>
           <a:p xmlns:a="http://schemas.openxmlformats.org/drawingml/2006/main">
             <a:r>
-              <a:t>Team responsibilities selected by Nasser on 5 October 2026. Nasser is the registered team leader. Assigned member checks remain pending; this slide does not record completed work. Submission requires final approval and evaluator access remains pending.</a:t>
+              <a:t>Nasser selected responsibilities on 5 October 2026. Abdulrahman supplied the observations in the teammate notes, recorded 6 October 2026. Nasser reports visiting the sites and confirms the described physical situation is the same as in September 2026. Exact visit dates were not supplied; detailed measurements remain pending. Other members retain the assigned responsibilities, without claimed completion. Repository visibility verified public; submission requires final approval.</a:t>
             </a:r>
           </a:p>
         </p:txBody>
@@ -663,7 +663,7 @@
           <a:lstStyle xmlns:a="http://schemas.openxmlformats.org/drawingml/2006/main"/>
           <a:p xmlns:a="http://schemas.openxmlformats.org/drawingml/2006/main">
             <a:r>
-              <a:t>Sources: README sections 3 and 10, DATA-LICENSES.md, scene.json, landsat-scene.json and metadata. These are dataset attributions, not claims of field validation.</a:t>
+              <a:t>Sources: README sections 3 and 10, DATA-LICENSES.md, scene.json, landsat-scene.json and metadata. These are dataset attributions, not claims of field validation. Instructor recommended Copernicus Browser (https://browser.dataspace.copernicus.eu/ ; official documentation checked: https://documentation.dataspace.copernicus.eu/Applications/Browser.html), NASA Earthdata supplied dashboard link (https://earthdata.nasa.gov/dashboard ; exact destination unconfirmed), Bellingcat geolocation toolkit (https://bellingcat.gitbook.io/toolkit/categories/geolocation ; checked). NASA Worldview was an additional suggestion, not the instructor exact link. No data provenance was changed to these portals. Full supplied instructor links and verification status are in docs/Discovery-Resources.md. Earth Search remains optical download provenance and Planetary Computer thermal provenance. WorldCover DOI and OSM licence above are retained. Street View reference is linked, capture March 2023; no Google imagery redistributed.</a:t>
             </a:r>
           </a:p>
         </p:txBody>
@@ -803,7 +803,7 @@
           <a:lstStyle xmlns:a="http://schemas.openxmlformats.org/drawingml/2006/main"/>
           <a:p xmlns:a="http://schemas.openxmlformats.org/drawingml/2006/main">
             <a:r>
-              <a:t>Source: README sections 1, 2 and 8. The use case is proposed, not validated with users.</a:t>
+              <a:t>Source: docs/Local-Review.md, results/local-greenery-audit.json and unchanged planning-cells.csv. Local observer: Abdulrahman Almohannadi; reports recorded 6 October 2026, observation date unspecified. Street View link supplied by Nasser: https://maps.app.goo.gl/gPEzxW3NFqErPWNP8 . Panorama McFzT23rIzQ4UJTSgSHFCQ, capture March 2023. Camera 25.7175476, 51.5145504 is inside V04-23, about 84 m from its centre, not a surveyed sign coordinate. It provides historical context, historical imagery, supplemented by Nasser's firsthand report. Some tree shadow is visible; shade varies. Nasser reports visiting the sites and confirms the described physical situation is the same as in September 2026; exact visit dates were not supplied. No passenger counts, cooling benefits or design recommendations are established. Street View imagery is linked, not redistributed. Google guidance: https://about.google/brand-resource-center/products-and-services/geo-guidelines/ .</a:t>
             </a:r>
           </a:p>
         </p:txBody>
@@ -943,7 +943,7 @@
           <a:lstStyle xmlns:a="http://schemas.openxmlformats.org/drawingml/2006/main"/>
           <a:p xmlns:a="http://schemas.openxmlformats.org/drawingml/2006/main">
             <a:r>
-              <a:t>Editable workflow diagram. Methods are detailed in README section 4. Inputs are 35 hashed files; matching support is required for the two accepted thermal dates. Ranking is an investigation heuristic.</a:t>
+              <a:t>Editable workflow diagram. Methods are detailed in README section 4. Inputs are 35 hashed files; matching support is required for the two accepted thermal dates. Ranking is an investigation heuristic. Local review is a separate evidence stage. It does not alter the satellite ranking or create a human-use score.</a:t>
             </a:r>
           </a:p>
         </p:txBody>
@@ -1013,7 +1013,7 @@
           <a:lstStyle xmlns:a="http://schemas.openxmlformats.org/drawingml/2006/main"/>
           <a:p xmlns:a="http://schemas.openxmlformats.org/drawingml/2006/main">
             <a:r>
-              <a:t>Source: results/planning-map.png, results/planning-summary.json and aoi.geojson. WGS84 window 51.445-51.555 E, 25.635-25.730 N. Includes city, northern edge, Al Bayt Stadium and surrounding context. It is not an official administrative boundary. All source-image labels must remain visible.</a:t>
+              <a:t>Source: results/local-review-map.png, packaged Sentinel-2 RGB 30 September 2026, app/local-review.json, aoi.geojson and unchanged planning-cells.geojson. Labels identify the full 300 m polygons. Teal dashed line is the analyst-defined study boundary. Local location names and uses are from Abdulrahman; Nasser confirms site visits and unchanged physical conditions relative to September 2026; exact visit dates unspecified, detailed assessment pending. V04-23 and V04-24 are adjacent; a nearby farmers market has not been assigned to a cell. Street View marker is the historical camera, not an exact stop point. Contains modified Copernicus Sentinel data (2026).</a:t>
             </a:r>
           </a:p>
         </p:txBody>
@@ -1083,7 +1083,7 @@
           <a:lstStyle xmlns:a="http://schemas.openxmlformats.org/drawingml/2006/main"/>
           <a:p xmlns:a="http://schemas.openxmlformats.org/drawingml/2006/main">
             <a:r>
-              <a:t>Source: results/multidate-temperature.png and coastal-multidate-summary.json. The two accepted dates share screened support. Footprint is observed sample area, not total built-up city area. Surface temperature is not air temperature or heat-health risk.</a:t>
+              <a:t>Source: results/multidate-temperature.png and coastal-multidate-summary.json. The two accepted dates share screened support. Footprint is observed sample area, not total built-up city area. Surface temperature is not air temperature or heat-health risk. Updated display uses the two unchanged common-temp rasters with a common 30–60 °C scale. The rejected 6 September date is explained in text instead of an empty map; its exclusion record is preserved.</a:t>
             </a:r>
           </a:p>
         </p:txBody>
@@ -1153,7 +1153,7 @@
           <a:lstStyle xmlns:a="http://schemas.openxmlformats.org/drawingml/2006/main"/>
           <a:p xmlns:a="http://schemas.openxmlformats.org/drawingml/2006/main">
             <a:r>
-              <a:t>Source: results/planning-summary.json, planning-sensitivity.csv and README section 8. Green-pixel share is thresholded NDVI, not subpixel vegetation fraction. Building coverage is contributed and incomplete. Candidate retained sample footprint totals 31.8195 km².</a:t>
+              <a:t>Source: results/planning-summary.json, planning-sensitivity.csv and README section 8. Green-pixel share is thresholded NDVI, not subpixel vegetation fraction. Building coverage is contributed and incomplete. Candidate retained sample footprint totals 31.8195 km². Local observations: docs/Local-Review.md; Nasser confirms site visits; detailed assessment pending. V04-23 maxima are 0.26262 and 0.24985; matched-support shares at diagnostic threshold 0.20 are 2.7222% and 0.3889%. Nasser confirms roadside trees and unchanged physical conditions relative to September 2026 from site visits; exact visit dates were not supplied. This does not validate the optical threshold or vegetation health. Scenario ranks remain unchanged; no unique certified intervention site. The fixed score weights remain 50% heat, 30% inverse green, 20% mapped buildings.</a:t>
             </a:r>
           </a:p>
         </p:txBody>
@@ -1223,7 +1223,7 @@
           <a:lstStyle xmlns:a="http://schemas.openxmlformats.org/drawingml/2006/main"/>
           <a:p xmlns:a="http://schemas.openxmlformats.org/drawingml/2006/main">
             <a:r>
-              <a:t>Source: README sections 6 and 8, reference-samples.csv, notebook-verification.json when available. 20/30 coastal references agree with the spectral/QA screen. All 30 OSM water-polygon references disagree, with some contributed polygons spanning dry land. These positive-only agreement tests do not establish overall accuracy. Reproducibility does not establish scientific accuracy. Normal-kernel verification: https://github.com/NasserAlhuri/spaceHacathon/actions/runs/37269889977. Source commit 9781b95a46d86eb858ae9714ee53198ad22cfb6c. The executed notebook was retrieved from artifact 11328001190. All seven regenerated CSV tables match the supplied baseline byte for byte.</a:t>
+              <a:t>Source: README sections 6 and 8, reference-samples.csv, notebook-verification.json when available. 20/30 coastal references agree with the spectral/QA screen. All 30 OSM water-polygon references disagree, with some contributed polygons spanning dry land. These positive-only agreement tests do not establish overall accuracy. Reproducibility does not establish scientific accuracy. Normal-kernel verification: https://github.com/NasserAlhuri/spaceHacathon/actions/runs/37269889977. Source commit 9781b95a46d86eb858ae9714ee53198ad22cfb6c. The executed notebook was retrieved from artifact 11328001190. All seven regenerated CSV tables match the supplied baseline byte for byte. These are rule-agreement checks on contributed positive reference points, not overall accuracy. The separate local pixel audit reproduces the baseline V04-23 result; it is not independent thermal or vegetation calibration.</a:t>
             </a:r>
           </a:p>
         </p:txBody>
@@ -1342,6 +1342,7 @@
                 <a:spcPts val="0"/>
               </a:spcAft>
               <a:buNone/>
+              <a:defRPr/>
             </a:lvl1pPr>
             <a:lvl2pPr marL="0" indent="0">
               <a:lnSpc>
@@ -1354,6 +1355,7 @@
                 <a:spcPts val="0"/>
               </a:spcAft>
               <a:buNone/>
+              <a:defRPr/>
             </a:lvl2pPr>
             <a:lvl3pPr marL="0" indent="0">
               <a:lnSpc>
@@ -1366,6 +1368,7 @@
                 <a:spcPts val="0"/>
               </a:spcAft>
               <a:buNone/>
+              <a:defRPr/>
             </a:lvl3pPr>
             <a:lvl4pPr marL="0" indent="0">
               <a:lnSpc>
@@ -1378,6 +1381,7 @@
                 <a:spcPts val="0"/>
               </a:spcAft>
               <a:buNone/>
+              <a:defRPr/>
             </a:lvl4pPr>
             <a:lvl5pPr marL="0" indent="0">
               <a:lnSpc>
@@ -1390,6 +1394,7 @@
                 <a:spcPts val="0"/>
               </a:spcAft>
               <a:buNone/>
+              <a:defRPr/>
             </a:lvl5pPr>
             <a:lvl6pPr marL="0" indent="0">
               <a:lnSpc>
@@ -1402,6 +1407,7 @@
                 <a:spcPts val="0"/>
               </a:spcAft>
               <a:buNone/>
+              <a:defRPr/>
             </a:lvl6pPr>
             <a:lvl7pPr marL="0" indent="0">
               <a:lnSpc>
@@ -1414,6 +1420,7 @@
                 <a:spcPts val="0"/>
               </a:spcAft>
               <a:buNone/>
+              <a:defRPr/>
             </a:lvl7pPr>
             <a:lvl8pPr marL="0" indent="0">
               <a:lnSpc>
@@ -1426,6 +1433,7 @@
                 <a:spcPts val="0"/>
               </a:spcAft>
               <a:buNone/>
+              <a:defRPr/>
             </a:lvl8pPr>
             <a:lvl9pPr marL="0" indent="0">
               <a:lnSpc>
@@ -1438,6 +1446,7 @@
                 <a:spcPts val="0"/>
               </a:spcAft>
               <a:buNone/>
+              <a:defRPr/>
             </a:lvl9pPr>
           </a:lstStyle>
           <a:p xmlns:a="http://schemas.openxmlformats.org/drawingml/2006/main"/>
@@ -1489,6 +1498,7 @@
                 <a:spcPts val="0"/>
               </a:spcAft>
               <a:buNone/>
+              <a:defRPr/>
             </a:lvl1pPr>
             <a:lvl2pPr marL="0" indent="0">
               <a:lnSpc>
@@ -1501,6 +1511,7 @@
                 <a:spcPts val="0"/>
               </a:spcAft>
               <a:buNone/>
+              <a:defRPr/>
             </a:lvl2pPr>
             <a:lvl3pPr marL="0" indent="0">
               <a:lnSpc>
@@ -1513,6 +1524,7 @@
                 <a:spcPts val="0"/>
               </a:spcAft>
               <a:buNone/>
+              <a:defRPr/>
             </a:lvl3pPr>
             <a:lvl4pPr marL="0" indent="0">
               <a:lnSpc>
@@ -1525,6 +1537,7 @@
                 <a:spcPts val="0"/>
               </a:spcAft>
               <a:buNone/>
+              <a:defRPr/>
             </a:lvl4pPr>
             <a:lvl5pPr marL="0" indent="0">
               <a:lnSpc>
@@ -1537,6 +1550,7 @@
                 <a:spcPts val="0"/>
               </a:spcAft>
               <a:buNone/>
+              <a:defRPr/>
             </a:lvl5pPr>
             <a:lvl6pPr marL="0" indent="0">
               <a:lnSpc>
@@ -1549,6 +1563,7 @@
                 <a:spcPts val="0"/>
               </a:spcAft>
               <a:buNone/>
+              <a:defRPr/>
             </a:lvl6pPr>
             <a:lvl7pPr marL="0" indent="0">
               <a:lnSpc>
@@ -1561,6 +1576,7 @@
                 <a:spcPts val="0"/>
               </a:spcAft>
               <a:buNone/>
+              <a:defRPr/>
             </a:lvl7pPr>
             <a:lvl8pPr marL="0" indent="0">
               <a:lnSpc>
@@ -1573,6 +1589,7 @@
                 <a:spcPts val="0"/>
               </a:spcAft>
               <a:buNone/>
+              <a:defRPr/>
             </a:lvl8pPr>
             <a:lvl9pPr marL="0" indent="0">
               <a:lnSpc>
@@ -1585,6 +1602,7 @@
                 <a:spcPts val="0"/>
               </a:spcAft>
               <a:buNone/>
+              <a:defRPr/>
             </a:lvl9pPr>
           </a:lstStyle>
           <a:p xmlns:a="http://schemas.openxmlformats.org/drawingml/2006/main"/>
@@ -1684,6 +1702,7 @@
                 <a:spcPts val="0"/>
               </a:spcAft>
               <a:buNone/>
+              <a:defRPr/>
             </a:lvl1pPr>
             <a:lvl2pPr marL="0" indent="0">
               <a:lnSpc>
@@ -1696,6 +1715,7 @@
                 <a:spcPts val="0"/>
               </a:spcAft>
               <a:buNone/>
+              <a:defRPr/>
             </a:lvl2pPr>
             <a:lvl3pPr marL="0" indent="0">
               <a:lnSpc>
@@ -1708,6 +1728,7 @@
                 <a:spcPts val="0"/>
               </a:spcAft>
               <a:buNone/>
+              <a:defRPr/>
             </a:lvl3pPr>
             <a:lvl4pPr marL="0" indent="0">
               <a:lnSpc>
@@ -1720,6 +1741,7 @@
                 <a:spcPts val="0"/>
               </a:spcAft>
               <a:buNone/>
+              <a:defRPr/>
             </a:lvl4pPr>
             <a:lvl5pPr marL="0" indent="0">
               <a:lnSpc>
@@ -1732,6 +1754,7 @@
                 <a:spcPts val="0"/>
               </a:spcAft>
               <a:buNone/>
+              <a:defRPr/>
             </a:lvl5pPr>
             <a:lvl6pPr marL="0" indent="0">
               <a:lnSpc>
@@ -1744,6 +1767,7 @@
                 <a:spcPts val="0"/>
               </a:spcAft>
               <a:buNone/>
+              <a:defRPr/>
             </a:lvl6pPr>
             <a:lvl7pPr marL="0" indent="0">
               <a:lnSpc>
@@ -1756,6 +1780,7 @@
                 <a:spcPts val="0"/>
               </a:spcAft>
               <a:buNone/>
+              <a:defRPr/>
             </a:lvl7pPr>
             <a:lvl8pPr marL="0" indent="0">
               <a:lnSpc>
@@ -1768,6 +1793,7 @@
                 <a:spcPts val="0"/>
               </a:spcAft>
               <a:buNone/>
+              <a:defRPr/>
             </a:lvl8pPr>
             <a:lvl9pPr marL="0" indent="0">
               <a:lnSpc>
@@ -1780,6 +1806,7 @@
                 <a:spcPts val="0"/>
               </a:spcAft>
               <a:buNone/>
+              <a:defRPr/>
             </a:lvl9pPr>
           </a:lstStyle>
           <a:p xmlns:a="http://schemas.openxmlformats.org/drawingml/2006/main"/>
@@ -1879,6 +1906,7 @@
                 <a:spcPts val="0"/>
               </a:spcAft>
               <a:buNone/>
+              <a:defRPr/>
             </a:lvl1pPr>
             <a:lvl2pPr marL="0" indent="0">
               <a:lnSpc>
@@ -1891,6 +1919,7 @@
                 <a:spcPts val="0"/>
               </a:spcAft>
               <a:buNone/>
+              <a:defRPr/>
             </a:lvl2pPr>
             <a:lvl3pPr marL="0" indent="0">
               <a:lnSpc>
@@ -1903,6 +1932,7 @@
                 <a:spcPts val="0"/>
               </a:spcAft>
               <a:buNone/>
+              <a:defRPr/>
             </a:lvl3pPr>
             <a:lvl4pPr marL="0" indent="0">
               <a:lnSpc>
@@ -1915,6 +1945,7 @@
                 <a:spcPts val="0"/>
               </a:spcAft>
               <a:buNone/>
+              <a:defRPr/>
             </a:lvl4pPr>
             <a:lvl5pPr marL="0" indent="0">
               <a:lnSpc>
@@ -1927,6 +1958,7 @@
                 <a:spcPts val="0"/>
               </a:spcAft>
               <a:buNone/>
+              <a:defRPr/>
             </a:lvl5pPr>
             <a:lvl6pPr marL="0" indent="0">
               <a:lnSpc>
@@ -1939,6 +1971,7 @@
                 <a:spcPts val="0"/>
               </a:spcAft>
               <a:buNone/>
+              <a:defRPr/>
             </a:lvl6pPr>
             <a:lvl7pPr marL="0" indent="0">
               <a:lnSpc>
@@ -1951,6 +1984,7 @@
                 <a:spcPts val="0"/>
               </a:spcAft>
               <a:buNone/>
+              <a:defRPr/>
             </a:lvl7pPr>
             <a:lvl8pPr marL="0" indent="0">
               <a:lnSpc>
@@ -1963,6 +1997,7 @@
                 <a:spcPts val="0"/>
               </a:spcAft>
               <a:buNone/>
+              <a:defRPr/>
             </a:lvl8pPr>
             <a:lvl9pPr marL="0" indent="0">
               <a:lnSpc>
@@ -1975,6 +2010,7 @@
                 <a:spcPts val="0"/>
               </a:spcAft>
               <a:buNone/>
+              <a:defRPr/>
             </a:lvl9pPr>
           </a:lstStyle>
           <a:p xmlns:a="http://schemas.openxmlformats.org/drawingml/2006/main"/>
@@ -2026,6 +2062,7 @@
                 <a:spcPts val="1200"/>
               </a:spcAft>
               <a:buChar char="•"/>
+              <a:defRPr/>
             </a:lvl1pPr>
             <a:lvl2pPr marL="533400" indent="-228600">
               <a:lnSpc>
@@ -2038,6 +2075,7 @@
                 <a:spcPts val="1200"/>
               </a:spcAft>
               <a:buChar char="•"/>
+              <a:defRPr/>
             </a:lvl2pPr>
             <a:lvl3pPr marL="838200" indent="-228600">
               <a:lnSpc>
@@ -2050,6 +2088,7 @@
                 <a:spcPts val="1200"/>
               </a:spcAft>
               <a:buChar char="•"/>
+              <a:defRPr/>
             </a:lvl3pPr>
             <a:lvl4pPr marL="1143000" indent="-228600">
               <a:lnSpc>
@@ -2062,6 +2101,7 @@
                 <a:spcPts val="1200"/>
               </a:spcAft>
               <a:buChar char="•"/>
+              <a:defRPr/>
             </a:lvl4pPr>
             <a:lvl5pPr marL="1447800" indent="-228600">
               <a:lnSpc>
@@ -2074,6 +2114,7 @@
                 <a:spcPts val="1200"/>
               </a:spcAft>
               <a:buChar char="•"/>
+              <a:defRPr/>
             </a:lvl5pPr>
             <a:lvl6pPr marL="1752600" indent="-228600">
               <a:lnSpc>
@@ -2086,6 +2127,7 @@
                 <a:spcPts val="1200"/>
               </a:spcAft>
               <a:buChar char="•"/>
+              <a:defRPr/>
             </a:lvl6pPr>
             <a:lvl7pPr marL="2057400" indent="-228600">
               <a:lnSpc>
@@ -2098,6 +2140,7 @@
                 <a:spcPts val="1200"/>
               </a:spcAft>
               <a:buChar char="•"/>
+              <a:defRPr/>
             </a:lvl7pPr>
             <a:lvl8pPr marL="2362200" indent="-228600">
               <a:lnSpc>
@@ -2110,6 +2153,7 @@
                 <a:spcPts val="1200"/>
               </a:spcAft>
               <a:buChar char="•"/>
+              <a:defRPr/>
             </a:lvl8pPr>
             <a:lvl9pPr marL="2667000" indent="-228600">
               <a:lnSpc>
@@ -2122,6 +2166,7 @@
                 <a:spcPts val="1200"/>
               </a:spcAft>
               <a:buChar char="•"/>
+              <a:defRPr/>
             </a:lvl9pPr>
           </a:lstStyle>
           <a:p xmlns:a="http://schemas.openxmlformats.org/drawingml/2006/main"/>
@@ -2221,6 +2266,7 @@
                 <a:spcPts val="0"/>
               </a:spcAft>
               <a:buNone/>
+              <a:defRPr/>
             </a:lvl1pPr>
             <a:lvl2pPr marL="0" indent="0">
               <a:lnSpc>
@@ -2233,6 +2279,7 @@
                 <a:spcPts val="0"/>
               </a:spcAft>
               <a:buNone/>
+              <a:defRPr/>
             </a:lvl2pPr>
             <a:lvl3pPr marL="0" indent="0">
               <a:lnSpc>
@@ -2245,6 +2292,7 @@
                 <a:spcPts val="0"/>
               </a:spcAft>
               <a:buNone/>
+              <a:defRPr/>
             </a:lvl3pPr>
             <a:lvl4pPr marL="0" indent="0">
               <a:lnSpc>
@@ -2257,6 +2305,7 @@
                 <a:spcPts val="0"/>
               </a:spcAft>
               <a:buNone/>
+              <a:defRPr/>
             </a:lvl4pPr>
             <a:lvl5pPr marL="0" indent="0">
               <a:lnSpc>
@@ -2269,6 +2318,7 @@
                 <a:spcPts val="0"/>
               </a:spcAft>
               <a:buNone/>
+              <a:defRPr/>
             </a:lvl5pPr>
             <a:lvl6pPr marL="0" indent="0">
               <a:lnSpc>
@@ -2281,6 +2331,7 @@
                 <a:spcPts val="0"/>
               </a:spcAft>
               <a:buNone/>
+              <a:defRPr/>
             </a:lvl6pPr>
             <a:lvl7pPr marL="0" indent="0">
               <a:lnSpc>
@@ -2293,6 +2344,7 @@
                 <a:spcPts val="0"/>
               </a:spcAft>
               <a:buNone/>
+              <a:defRPr/>
             </a:lvl7pPr>
             <a:lvl8pPr marL="0" indent="0">
               <a:lnSpc>
@@ -2305,6 +2357,7 @@
                 <a:spcPts val="0"/>
               </a:spcAft>
               <a:buNone/>
+              <a:defRPr/>
             </a:lvl8pPr>
             <a:lvl9pPr marL="0" indent="0">
               <a:lnSpc>
@@ -2317,6 +2370,7 @@
                 <a:spcPts val="0"/>
               </a:spcAft>
               <a:buNone/>
+              <a:defRPr/>
             </a:lvl9pPr>
           </a:lstStyle>
           <a:p xmlns:a="http://schemas.openxmlformats.org/drawingml/2006/main"/>
@@ -2368,6 +2422,7 @@
                 <a:spcPts val="1200"/>
               </a:spcAft>
               <a:buChar char="•"/>
+              <a:defRPr/>
             </a:lvl1pPr>
             <a:lvl2pPr marL="533400" indent="-228600">
               <a:lnSpc>
@@ -2380,6 +2435,7 @@
                 <a:spcPts val="1200"/>
               </a:spcAft>
               <a:buChar char="•"/>
+              <a:defRPr/>
             </a:lvl2pPr>
             <a:lvl3pPr marL="838200" indent="-228600">
               <a:lnSpc>
@@ -2392,6 +2448,7 @@
                 <a:spcPts val="1200"/>
               </a:spcAft>
               <a:buChar char="•"/>
+              <a:defRPr/>
             </a:lvl3pPr>
             <a:lvl4pPr marL="1143000" indent="-228600">
               <a:lnSpc>
@@ -2404,6 +2461,7 @@
                 <a:spcPts val="1200"/>
               </a:spcAft>
               <a:buChar char="•"/>
+              <a:defRPr/>
             </a:lvl4pPr>
             <a:lvl5pPr marL="1447800" indent="-228600">
               <a:lnSpc>
@@ -2416,6 +2474,7 @@
                 <a:spcPts val="1200"/>
               </a:spcAft>
               <a:buChar char="•"/>
+              <a:defRPr/>
             </a:lvl5pPr>
             <a:lvl6pPr marL="1752600" indent="-228600">
               <a:lnSpc>
@@ -2428,6 +2487,7 @@
                 <a:spcPts val="1200"/>
               </a:spcAft>
               <a:buChar char="•"/>
+              <a:defRPr/>
             </a:lvl6pPr>
             <a:lvl7pPr marL="2057400" indent="-228600">
               <a:lnSpc>
@@ -2440,6 +2500,7 @@
                 <a:spcPts val="1200"/>
               </a:spcAft>
               <a:buChar char="•"/>
+              <a:defRPr/>
             </a:lvl7pPr>
             <a:lvl8pPr marL="2362200" indent="-228600">
               <a:lnSpc>
@@ -2452,6 +2513,7 @@
                 <a:spcPts val="1200"/>
               </a:spcAft>
               <a:buChar char="•"/>
+              <a:defRPr/>
             </a:lvl8pPr>
             <a:lvl9pPr marL="2667000" indent="-228600">
               <a:lnSpc>
@@ -2464,6 +2526,7 @@
                 <a:spcPts val="1200"/>
               </a:spcAft>
               <a:buChar char="•"/>
+              <a:defRPr/>
             </a:lvl9pPr>
           </a:lstStyle>
           <a:p xmlns:a="http://schemas.openxmlformats.org/drawingml/2006/main"/>
@@ -2515,6 +2578,7 @@
                 <a:spcPts val="1200"/>
               </a:spcAft>
               <a:buChar char="•"/>
+              <a:defRPr/>
             </a:lvl1pPr>
             <a:lvl2pPr marL="533400" indent="-228600">
               <a:lnSpc>
@@ -2527,6 +2591,7 @@
                 <a:spcPts val="1200"/>
               </a:spcAft>
               <a:buChar char="•"/>
+              <a:defRPr/>
             </a:lvl2pPr>
             <a:lvl3pPr marL="838200" indent="-228600">
               <a:lnSpc>
@@ -2539,6 +2604,7 @@
                 <a:spcPts val="1200"/>
               </a:spcAft>
               <a:buChar char="•"/>
+              <a:defRPr/>
             </a:lvl3pPr>
             <a:lvl4pPr marL="1143000" indent="-228600">
               <a:lnSpc>
@@ -2551,6 +2617,7 @@
                 <a:spcPts val="1200"/>
               </a:spcAft>
               <a:buChar char="•"/>
+              <a:defRPr/>
             </a:lvl4pPr>
             <a:lvl5pPr marL="1447800" indent="-228600">
               <a:lnSpc>
@@ -2563,6 +2630,7 @@
                 <a:spcPts val="1200"/>
               </a:spcAft>
               <a:buChar char="•"/>
+              <a:defRPr/>
             </a:lvl5pPr>
             <a:lvl6pPr marL="1752600" indent="-228600">
               <a:lnSpc>
@@ -2575,6 +2643,7 @@
                 <a:spcPts val="1200"/>
               </a:spcAft>
               <a:buChar char="•"/>
+              <a:defRPr/>
             </a:lvl6pPr>
             <a:lvl7pPr marL="2057400" indent="-228600">
               <a:lnSpc>
@@ -2587,6 +2656,7 @@
                 <a:spcPts val="1200"/>
               </a:spcAft>
               <a:buChar char="•"/>
+              <a:defRPr/>
             </a:lvl7pPr>
             <a:lvl8pPr marL="2362200" indent="-228600">
               <a:lnSpc>
@@ -2599,6 +2669,7 @@
                 <a:spcPts val="1200"/>
               </a:spcAft>
               <a:buChar char="•"/>
+              <a:defRPr/>
             </a:lvl8pPr>
             <a:lvl9pPr marL="2667000" indent="-228600">
               <a:lnSpc>
@@ -2611,6 +2682,7 @@
                 <a:spcPts val="1200"/>
               </a:spcAft>
               <a:buChar char="•"/>
+              <a:defRPr/>
             </a:lvl9pPr>
           </a:lstStyle>
           <a:p xmlns:a="http://schemas.openxmlformats.org/drawingml/2006/main"/>
@@ -2710,6 +2782,7 @@
                 <a:spcPts val="0"/>
               </a:spcAft>
               <a:buNone/>
+              <a:defRPr/>
             </a:lvl1pPr>
             <a:lvl2pPr marL="0" indent="0">
               <a:lnSpc>
@@ -2722,6 +2795,7 @@
                 <a:spcPts val="0"/>
               </a:spcAft>
               <a:buNone/>
+              <a:defRPr/>
             </a:lvl2pPr>
             <a:lvl3pPr marL="0" indent="0">
               <a:lnSpc>
@@ -2734,6 +2808,7 @@
                 <a:spcPts val="0"/>
               </a:spcAft>
               <a:buNone/>
+              <a:defRPr/>
             </a:lvl3pPr>
             <a:lvl4pPr marL="0" indent="0">
               <a:lnSpc>
@@ -2746,6 +2821,7 @@
                 <a:spcPts val="0"/>
               </a:spcAft>
               <a:buNone/>
+              <a:defRPr/>
             </a:lvl4pPr>
             <a:lvl5pPr marL="0" indent="0">
               <a:lnSpc>
@@ -2758,6 +2834,7 @@
                 <a:spcPts val="0"/>
               </a:spcAft>
               <a:buNone/>
+              <a:defRPr/>
             </a:lvl5pPr>
             <a:lvl6pPr marL="0" indent="0">
               <a:lnSpc>
@@ -2770,6 +2847,7 @@
                 <a:spcPts val="0"/>
               </a:spcAft>
               <a:buNone/>
+              <a:defRPr/>
             </a:lvl6pPr>
             <a:lvl7pPr marL="0" indent="0">
               <a:lnSpc>
@@ -2782,6 +2860,7 @@
                 <a:spcPts val="0"/>
               </a:spcAft>
               <a:buNone/>
+              <a:defRPr/>
             </a:lvl7pPr>
             <a:lvl8pPr marL="0" indent="0">
               <a:lnSpc>
@@ -2794,6 +2873,7 @@
                 <a:spcPts val="0"/>
               </a:spcAft>
               <a:buNone/>
+              <a:defRPr/>
             </a:lvl8pPr>
             <a:lvl9pPr marL="0" indent="0">
               <a:lnSpc>
@@ -2806,6 +2886,7 @@
                 <a:spcPts val="0"/>
               </a:spcAft>
               <a:buNone/>
+              <a:defRPr/>
             </a:lvl9pPr>
           </a:lstStyle>
           <a:p xmlns:a="http://schemas.openxmlformats.org/drawingml/2006/main"/>
@@ -2857,6 +2938,7 @@
                 <a:spcPts val="1200"/>
               </a:spcAft>
               <a:buChar char="•"/>
+              <a:defRPr/>
             </a:lvl1pPr>
             <a:lvl2pPr marL="533400" indent="-228600">
               <a:lnSpc>
@@ -2869,6 +2951,7 @@
                 <a:spcPts val="1200"/>
               </a:spcAft>
               <a:buChar char="•"/>
+              <a:defRPr/>
             </a:lvl2pPr>
             <a:lvl3pPr marL="838200" indent="-228600">
               <a:lnSpc>
@@ -2881,6 +2964,7 @@
                 <a:spcPts val="1200"/>
               </a:spcAft>
               <a:buChar char="•"/>
+              <a:defRPr/>
             </a:lvl3pPr>
             <a:lvl4pPr marL="1143000" indent="-228600">
               <a:lnSpc>
@@ -2893,6 +2977,7 @@
                 <a:spcPts val="1200"/>
               </a:spcAft>
               <a:buChar char="•"/>
+              <a:defRPr/>
             </a:lvl4pPr>
             <a:lvl5pPr marL="1447800" indent="-228600">
               <a:lnSpc>
@@ -2905,6 +2990,7 @@
                 <a:spcPts val="1200"/>
               </a:spcAft>
               <a:buChar char="•"/>
+              <a:defRPr/>
             </a:lvl5pPr>
             <a:lvl6pPr marL="1752600" indent="-228600">
               <a:lnSpc>
@@ -2917,6 +3003,7 @@
                 <a:spcPts val="1200"/>
               </a:spcAft>
               <a:buChar char="•"/>
+              <a:defRPr/>
             </a:lvl6pPr>
             <a:lvl7pPr marL="2057400" indent="-228600">
               <a:lnSpc>
@@ -2929,6 +3016,7 @@
                 <a:spcPts val="1200"/>
               </a:spcAft>
               <a:buChar char="•"/>
+              <a:defRPr/>
             </a:lvl7pPr>
             <a:lvl8pPr marL="2362200" indent="-228600">
               <a:lnSpc>
@@ -2941,6 +3029,7 @@
                 <a:spcPts val="1200"/>
               </a:spcAft>
               <a:buChar char="•"/>
+              <a:defRPr/>
             </a:lvl8pPr>
             <a:lvl9pPr marL="2667000" indent="-228600">
               <a:lnSpc>
@@ -2953,6 +3042,7 @@
                 <a:spcPts val="1200"/>
               </a:spcAft>
               <a:buChar char="•"/>
+              <a:defRPr/>
             </a:lvl9pPr>
           </a:lstStyle>
           <a:p xmlns:a="http://schemas.openxmlformats.org/drawingml/2006/main"/>
@@ -3001,12 +3091,12 @@
   </p:cSld>
   <p:clrMap bg1="lt1" tx1="dk1" bg2="lt2" tx2="dk2" accent1="accent1" accent2="accent2" accent3="accent3" accent4="accent4" accent5="accent5" accent6="accent6" hlink="hlink" folHlink="folHlink"/>
   <p:sldLayoutIdLst>
-    <p:sldLayoutId xmlns:r="http://schemas.openxmlformats.org/officeDocument/2006/relationships" id="2147483649" r:id="R6fa0ba1da8e74b4f"/>
-    <p:sldLayoutId xmlns:r="http://schemas.openxmlformats.org/officeDocument/2006/relationships" id="2147483650" r:id="R290a17db494c42c4"/>
-    <p:sldLayoutId xmlns:r="http://schemas.openxmlformats.org/officeDocument/2006/relationships" id="2147483651" r:id="Re1671ec289cf4bbc"/>
-    <p:sldLayoutId xmlns:r="http://schemas.openxmlformats.org/officeDocument/2006/relationships" id="2147483652" r:id="Ree9590e89ea84bea"/>
-    <p:sldLayoutId xmlns:r="http://schemas.openxmlformats.org/officeDocument/2006/relationships" id="2147483653" r:id="R05cf4cc4e4404ac3"/>
-    <p:sldLayoutId xmlns:r="http://schemas.openxmlformats.org/officeDocument/2006/relationships" id="2147483654" r:id="R2f0d121ca90b423e"/>
+    <p:sldLayoutId xmlns:r="http://schemas.openxmlformats.org/officeDocument/2006/relationships" id="2147483649" r:id="R04a2e35cbca445b6"/>
+    <p:sldLayoutId xmlns:r="http://schemas.openxmlformats.org/officeDocument/2006/relationships" id="2147483650" r:id="Ra5cbe0d6cd41483f"/>
+    <p:sldLayoutId xmlns:r="http://schemas.openxmlformats.org/officeDocument/2006/relationships" id="2147483651" r:id="R4babc2ac96dd42ea"/>
+    <p:sldLayoutId xmlns:r="http://schemas.openxmlformats.org/officeDocument/2006/relationships" id="2147483652" r:id="Rab3c85198230416a"/>
+    <p:sldLayoutId xmlns:r="http://schemas.openxmlformats.org/officeDocument/2006/relationships" id="2147483653" r:id="Rab95646195c74f4a"/>
+    <p:sldLayoutId xmlns:r="http://schemas.openxmlformats.org/officeDocument/2006/relationships" id="2147483654" r:id="R1efd1f59c2ea4a76"/>
   </p:sldLayoutIdLst>
   <p:txStyles>
     <p:titleStyle>
@@ -3586,6 +3676,7 @@
           <a:lstStyle xmlns:a="http://schemas.openxmlformats.org/drawingml/2006/main"/>
           <a:p xmlns:a="http://schemas.openxmlformats.org/drawingml/2006/main">
             <a:pPr>
+              <a:buNone/>
               <a:defRPr sz="5400" b="1">
                 <a:solidFill>
                   <a:srgbClr val="163D46"/>
@@ -3643,6 +3734,7 @@
           <a:lstStyle xmlns:a="http://schemas.openxmlformats.org/drawingml/2006/main"/>
           <a:p xmlns:a="http://schemas.openxmlformats.org/drawingml/2006/main">
             <a:pPr>
+              <a:buNone/>
               <a:defRPr sz="3000" b="0">
                 <a:solidFill>
                   <a:srgbClr val="213846"/>
@@ -3700,6 +3792,7 @@
           <a:lstStyle xmlns:a="http://schemas.openxmlformats.org/drawingml/2006/main"/>
           <a:p xmlns:a="http://schemas.openxmlformats.org/drawingml/2006/main">
             <a:pPr>
+              <a:buNone/>
               <a:defRPr sz="2250" b="0">
                 <a:solidFill>
                   <a:srgbClr val="213846"/>
@@ -3757,6 +3850,7 @@
           <a:lstStyle xmlns:a="http://schemas.openxmlformats.org/drawingml/2006/main"/>
           <a:p xmlns:a="http://schemas.openxmlformats.org/drawingml/2006/main">
             <a:pPr>
+              <a:buNone/>
               <a:defRPr sz="2250" b="0">
                 <a:solidFill>
                   <a:srgbClr val="213846"/>
@@ -3775,7 +3869,7 @@
                 <a:ea typeface="Bitstream Charter"/>
                 <a:cs typeface="Bitstream Charter"/>
               </a:rPr>
-              <a:t>Satellite indicators for urban-planning site visits</a:t>
+              <a:t>Satellite and local evidence for heat-protection site assessments</a:t>
             </a:r>
           </a:p>
         </p:txBody>
@@ -3814,6 +3908,7 @@
           <a:lstStyle xmlns:a="http://schemas.openxmlformats.org/drawingml/2006/main"/>
           <a:p xmlns:a="http://schemas.openxmlformats.org/drawingml/2006/main">
             <a:pPr>
+              <a:buNone/>
               <a:defRPr sz="2250" b="0">
                 <a:solidFill>
                   <a:srgbClr val="213846"/>
@@ -3871,6 +3966,7 @@
           <a:lstStyle xmlns:a="http://schemas.openxmlformats.org/drawingml/2006/main"/>
           <a:p xmlns:a="http://schemas.openxmlformats.org/drawingml/2006/main">
             <a:pPr>
+              <a:buNone/>
               <a:defRPr sz="2250" b="0">
                 <a:solidFill>
                   <a:srgbClr val="213846"/>
@@ -3957,6 +4053,7 @@
           <a:lstStyle xmlns:a="http://schemas.openxmlformats.org/drawingml/2006/main"/>
           <a:p xmlns:a="http://schemas.openxmlformats.org/drawingml/2006/main">
             <a:pPr>
+              <a:buNone/>
               <a:defRPr sz="3300" b="1">
                 <a:solidFill>
                   <a:srgbClr val="163D46"/>
@@ -4014,6 +4111,7 @@
           <a:lstStyle xmlns:a="http://schemas.openxmlformats.org/drawingml/2006/main"/>
           <a:p xmlns:a="http://schemas.openxmlformats.org/drawingml/2006/main">
             <a:pPr>
+              <a:buNone/>
               <a:defRPr sz="2400" b="0">
                 <a:solidFill>
                   <a:srgbClr val="213846"/>
@@ -4032,7 +4130,7 @@
                 <a:ea typeface="Bitstream Charter"/>
                 <a:cs typeface="Bitstream Charter"/>
               </a:rPr>
-              <a:t>Proposed benefit: help planners inspect the evidence behind a shortlist before arranging field visits. No time saving or cooling benefit has been measured.</a:t>
+              <a:t>Completed: reproducible satellite screening, sensitivity checks and local-review examples for site assessment.</a:t>
             </a:r>
           </a:p>
         </p:txBody>
@@ -4071,6 +4169,7 @@
           <a:lstStyle xmlns:a="http://schemas.openxmlformats.org/drawingml/2006/main"/>
           <a:p xmlns:a="http://schemas.openxmlformats.org/drawingml/2006/main">
             <a:pPr>
+              <a:buNone/>
               <a:defRPr sz="2400" b="0">
                 <a:solidFill>
                   <a:srgbClr val="213846"/>
@@ -4089,7 +4188,7 @@
                 <a:ea typeface="Bitstream Charter"/>
                 <a:cs typeface="Bitstream Charter"/>
               </a:rPr>
-              <a:t>Next pilot: confirm boundaries and reference labels, visit candidate sites and collect planner feedback.</a:t>
+              <a:t>Next: detailed shade, use and access checks plus planner feedback; evaluate inspection decisions.</a:t>
             </a:r>
           </a:p>
         </p:txBody>
@@ -4128,6 +4227,7 @@
           <a:lstStyle xmlns:a="http://schemas.openxmlformats.org/drawingml/2006/main"/>
           <a:p xmlns:a="http://schemas.openxmlformats.org/drawingml/2006/main">
             <a:pPr>
+              <a:buNone/>
               <a:defRPr sz="2400" b="0">
                 <a:solidFill>
                   <a:srgbClr val="213846"/>
@@ -4146,7 +4246,7 @@
                 <a:ea typeface="Bitstream Charter"/>
                 <a:cs typeface="Bitstream Charter"/>
               </a:rPr>
-              <a:t>Incubation: assess suitable VHR data, implement and validate segmentation, then test shade and paving indicators.</a:t>
+              <a:t>Future: comparable imagery across years, suitable VHR segmentation and verified shade, paving and human-use data.</a:t>
             </a:r>
           </a:p>
         </p:txBody>
@@ -4185,6 +4285,7 @@
           <a:lstStyle xmlns:a="http://schemas.openxmlformats.org/drawingml/2006/main"/>
           <a:p xmlns:a="http://schemas.openxmlformats.org/drawingml/2006/main">
             <a:pPr>
+              <a:buNone/>
               <a:defRPr sz="1725" b="0">
                 <a:solidFill>
                   <a:srgbClr val="526569"/>
@@ -4271,6 +4372,7 @@
           <a:lstStyle xmlns:a="http://schemas.openxmlformats.org/drawingml/2006/main"/>
           <a:p xmlns:a="http://schemas.openxmlformats.org/drawingml/2006/main">
             <a:pPr>
+              <a:buNone/>
               <a:defRPr sz="3300" b="1">
                 <a:solidFill>
                   <a:srgbClr val="163D46"/>
@@ -4328,6 +4430,7 @@
           <a:lstStyle xmlns:a="http://schemas.openxmlformats.org/drawingml/2006/main"/>
           <a:p xmlns:a="http://schemas.openxmlformats.org/drawingml/2006/main">
             <a:pPr>
+              <a:buNone/>
               <a:defRPr sz="2250" b="0">
                 <a:solidFill>
                   <a:srgbClr val="213846"/>
@@ -4346,7 +4449,7 @@
                 <a:ea typeface="Bitstream Charter"/>
                 <a:cs typeface="Bitstream Charter"/>
               </a:rPr>
-              <a:t>Nasser Alhuri: team coordination and submission.</a:t>
+              <a:t>Nasser Alhuri: team coordination, site-visit confirmation and submission.</a:t>
             </a:r>
           </a:p>
         </p:txBody>
@@ -4385,6 +4488,7 @@
           <a:lstStyle xmlns:a="http://schemas.openxmlformats.org/drawingml/2006/main"/>
           <a:p xmlns:a="http://schemas.openxmlformats.org/drawingml/2006/main">
             <a:pPr>
+              <a:buNone/>
               <a:defRPr sz="2250" b="0">
                 <a:solidFill>
                   <a:srgbClr val="213846"/>
@@ -4403,7 +4507,7 @@
                 <a:ea typeface="Bitstream Charter"/>
                 <a:cs typeface="Bitstream Charter"/>
               </a:rPr>
-              <a:t>Abdulrahman Almohannadi: check Al Khor locations against local knowledge.</a:t>
+              <a:t>Abdulrahman Almohannadi: supplied local observations for three cells.</a:t>
             </a:r>
           </a:p>
         </p:txBody>
@@ -4442,6 +4546,7 @@
           <a:lstStyle xmlns:a="http://schemas.openxmlformats.org/drawingml/2006/main"/>
           <a:p xmlns:a="http://schemas.openxmlformats.org/drawingml/2006/main">
             <a:pPr>
+              <a:buNone/>
               <a:defRPr sz="2250" b="0">
                 <a:solidFill>
                   <a:srgbClr val="213846"/>
@@ -4499,6 +4604,7 @@
           <a:lstStyle xmlns:a="http://schemas.openxmlformats.org/drawingml/2006/main"/>
           <a:p xmlns:a="http://schemas.openxmlformats.org/drawingml/2006/main">
             <a:pPr>
+              <a:buNone/>
               <a:defRPr sz="2250" b="0">
                 <a:solidFill>
                   <a:srgbClr val="213846"/>
@@ -4556,6 +4662,7 @@
           <a:lstStyle xmlns:a="http://schemas.openxmlformats.org/drawingml/2006/main"/>
           <a:p xmlns:a="http://schemas.openxmlformats.org/drawingml/2006/main">
             <a:pPr>
+              <a:buNone/>
               <a:defRPr sz="2250" b="0">
                 <a:solidFill>
                   <a:srgbClr val="213846"/>
@@ -4613,6 +4720,7 @@
           <a:lstStyle xmlns:a="http://schemas.openxmlformats.org/drawingml/2006/main"/>
           <a:p xmlns:a="http://schemas.openxmlformats.org/drawingml/2006/main">
             <a:pPr>
+              <a:buNone/>
               <a:defRPr sz="1725" b="0">
                 <a:solidFill>
                   <a:srgbClr val="526569"/>
@@ -4631,7 +4739,7 @@
                 <a:ea typeface="Bitstream Charter"/>
                 <a:cs typeface="Bitstream Charter"/>
               </a:rPr>
-              <a:t>Members will complete their assigned checks before submission.</a:t>
+              <a:t>Nasser confirms site visits; detailed assessment and other assigned reviews remain pending.</a:t>
             </a:r>
           </a:p>
         </p:txBody>
@@ -4699,6 +4807,7 @@
           <a:lstStyle xmlns:a="http://schemas.openxmlformats.org/drawingml/2006/main"/>
           <a:p xmlns:a="http://schemas.openxmlformats.org/drawingml/2006/main">
             <a:pPr>
+              <a:buNone/>
               <a:defRPr sz="3300" b="1">
                 <a:solidFill>
                   <a:srgbClr val="163D46"/>
@@ -4756,6 +4865,7 @@
           <a:lstStyle xmlns:a="http://schemas.openxmlformats.org/drawingml/2006/main"/>
           <a:p xmlns:a="http://schemas.openxmlformats.org/drawingml/2006/main">
             <a:pPr>
+              <a:buNone/>
               <a:defRPr sz="2400" b="0">
                 <a:solidFill>
                   <a:srgbClr val="213846"/>
@@ -4774,7 +4884,7 @@
                 <a:ea typeface="Bitstream Charter"/>
                 <a:cs typeface="Bitstream Charter"/>
               </a:rPr>
-              <a:t>Contains modified Copernicus Sentinel data (2026). Optical source: Element 84 Earth Search.</a:t>
+              <a:t>Actual data: Copernicus Sentinel via Earth Search; Landsat via Planetary Computer (USGS); WorldCover 2021; OSM.</a:t>
             </a:r>
           </a:p>
         </p:txBody>
@@ -4813,6 +4923,7 @@
           <a:lstStyle xmlns:a="http://schemas.openxmlformats.org/drawingml/2006/main"/>
           <a:p xmlns:a="http://schemas.openxmlformats.org/drawingml/2006/main">
             <a:pPr>
+              <a:buNone/>
               <a:defRPr sz="2400" b="0">
                 <a:solidFill>
                   <a:srgbClr val="213846"/>
@@ -4831,7 +4942,7 @@
                 <a:ea typeface="Bitstream Charter"/>
                 <a:cs typeface="Bitstream Charter"/>
               </a:rPr>
-              <a:t>Landsat imagery courtesy of USGS. Collection 2 Level-2 surface temperature, doi:10.5066/P9OGBGM6.</a:t>
+              <a:t>Credits: modified Copernicus Sentinel data (2026); Landsat courtesy USGS; WorldCover CC BY 4.0; OSM ODbL.</a:t>
             </a:r>
           </a:p>
         </p:txBody>
@@ -4870,6 +4981,7 @@
           <a:lstStyle xmlns:a="http://schemas.openxmlformats.org/drawingml/2006/main"/>
           <a:p xmlns:a="http://schemas.openxmlformats.org/drawingml/2006/main">
             <a:pPr>
+              <a:buNone/>
               <a:defRPr sz="2400" b="0">
                 <a:solidFill>
                   <a:srgbClr val="213846"/>
@@ -4888,7 +5000,7 @@
                 <a:ea typeface="Bitstream Charter"/>
                 <a:cs typeface="Bitstream Charter"/>
               </a:rPr>
-              <a:t>ESA WorldCover 2021 v200, Zanaga et al. (2022). CC BY 4.0, doi:10.5281/zenodo.7254220.</a:t>
+              <a:t>Discovery and verification resources: Copernicus Browser, NASA Earthdata and Bellingcat toolkit. These are not new analysis sources.</a:t>
             </a:r>
           </a:p>
         </p:txBody>
@@ -4927,6 +5039,7 @@
           <a:lstStyle xmlns:a="http://schemas.openxmlformats.org/drawingml/2006/main"/>
           <a:p xmlns:a="http://schemas.openxmlformats.org/drawingml/2006/main">
             <a:pPr>
+              <a:buNone/>
               <a:defRPr sz="2400" b="0">
                 <a:solidFill>
                   <a:srgbClr val="213846"/>
@@ -4945,7 +5058,7 @@
                 <a:ea typeface="Bitstream Charter"/>
                 <a:cs typeface="Bitstream Charter"/>
               </a:rPr>
-              <a:t>© OpenStreetMap contributors. Building/reference geometry: ODbL 1.0. openstreetmap.org/copyright</a:t>
+              <a:t/>
             </a:r>
           </a:p>
         </p:txBody>
@@ -4984,6 +5097,7 @@
           <a:lstStyle xmlns:a="http://schemas.openxmlformats.org/drawingml/2006/main"/>
           <a:p xmlns:a="http://schemas.openxmlformats.org/drawingml/2006/main">
             <a:pPr>
+              <a:buNone/>
               <a:defRPr sz="1725" b="0">
                 <a:solidFill>
                   <a:srgbClr val="526569"/>
@@ -5002,7 +5116,7 @@
                 <a:ea typeface="Bitstream Charter"/>
                 <a:cs typeface="Bitstream Charter"/>
               </a:rPr>
-              <a:t>Full scene IDs, exact provenance, processing rules and limitations accompany the package. Original code: MIT.</a:t>
+              <a:t>Exact scene provenance and full licences accompany the package. Original code: MIT.</a:t>
             </a:r>
           </a:p>
         </p:txBody>
@@ -5070,6 +5184,7 @@
           <a:lstStyle xmlns:a="http://schemas.openxmlformats.org/drawingml/2006/main"/>
           <a:p xmlns:a="http://schemas.openxmlformats.org/drawingml/2006/main">
             <a:pPr>
+              <a:buNone/>
               <a:defRPr sz="3300" b="1">
                 <a:solidFill>
                   <a:srgbClr val="163D46"/>
@@ -5127,6 +5242,7 @@
           <a:lstStyle xmlns:a="http://schemas.openxmlformats.org/drawingml/2006/main"/>
           <a:p xmlns:a="http://schemas.openxmlformats.org/drawingml/2006/main">
             <a:pPr>
+              <a:buNone/>
               <a:defRPr sz="2400" b="0">
                 <a:solidFill>
                   <a:srgbClr val="213846"/>
@@ -5145,7 +5261,7 @@
                 <a:ea typeface="Bitstream Charter"/>
                 <a:cs typeface="Bitstream Charter"/>
               </a:rPr>
-              <a:t>Surface heating and limited greenery can help identify places that warrant a closer look.</a:t>
+              <a:t>Find hot cells, then check who uses them and when.</a:t>
             </a:r>
           </a:p>
         </p:txBody>
@@ -5184,6 +5300,7 @@
           <a:lstStyle xmlns:a="http://schemas.openxmlformats.org/drawingml/2006/main"/>
           <a:p xmlns:a="http://schemas.openxmlformats.org/drawingml/2006/main">
             <a:pPr>
+              <a:buNone/>
               <a:defRPr sz="2400" b="0">
                 <a:solidFill>
                   <a:srgbClr val="213846"/>
@@ -5202,7 +5319,7 @@
                 <a:ea typeface="Bitstream Charter"/>
                 <a:cs typeface="Bitstream Charter"/>
               </a:rPr>
-              <a:t>Municipal planners need traceable evidence to organise field investigation before proposing interventions.</a:t>
+              <a:t>Satellite screening helps organise visits; local review adds context about shade, access and planned use.</a:t>
             </a:r>
           </a:p>
         </p:txBody>
@@ -5241,6 +5358,7 @@
           <a:lstStyle xmlns:a="http://schemas.openxmlformats.org/drawingml/2006/main"/>
           <a:p xmlns:a="http://schemas.openxmlformats.org/drawingml/2006/main">
             <a:pPr>
+              <a:buNone/>
               <a:defRPr sz="2400" b="0">
                 <a:solidFill>
                   <a:srgbClr val="213846"/>
@@ -5259,7 +5377,7 @@
                 <a:ea typeface="Bitstream Charter"/>
                 <a:cs typeface="Bitstream Charter"/>
               </a:rPr>
-              <a:t>Pedestrians and outdoor users are the intended beneficiaries. Their exposure and needs have not been measured.</a:t>
+              <a:t>Human exposure has not been measured. Trees, shelters and safer routes are options to assess.</a:t>
             </a:r>
           </a:p>
         </p:txBody>
@@ -5298,6 +5416,7 @@
           <a:lstStyle xmlns:a="http://schemas.openxmlformats.org/drawingml/2006/main"/>
           <a:p xmlns:a="http://schemas.openxmlformats.org/drawingml/2006/main">
             <a:pPr>
+              <a:buNone/>
               <a:defRPr sz="1725" b="0">
                 <a:solidFill>
                   <a:srgbClr val="526569"/>
@@ -5384,6 +5503,7 @@
           <a:lstStyle xmlns:a="http://schemas.openxmlformats.org/drawingml/2006/main"/>
           <a:p xmlns:a="http://schemas.openxmlformats.org/drawingml/2006/main">
             <a:pPr>
+              <a:buNone/>
               <a:defRPr sz="3300" b="1">
                 <a:solidFill>
                   <a:srgbClr val="163D46"/>
@@ -5402,7 +5522,7 @@
                 <a:ea typeface="Bitstream Charter"/>
                 <a:cs typeface="Bitstream Charter"/>
               </a:rPr>
-              <a:t>Planning use case</a:t>
+              <a:t>Bus-stop site assessment: V04-23</a:t>
             </a:r>
           </a:p>
         </p:txBody>
@@ -5441,6 +5561,7 @@
           <a:lstStyle xmlns:a="http://schemas.openxmlformats.org/drawingml/2006/main"/>
           <a:p xmlns:a="http://schemas.openxmlformats.org/drawingml/2006/main">
             <a:pPr>
+              <a:buNone/>
               <a:defRPr sz="2400" b="0">
                 <a:solidFill>
                   <a:srgbClr val="213846"/>
@@ -5459,7 +5580,7 @@
                 <a:ea typeface="Bitstream Charter"/>
                 <a:cs typeface="Bitstream Charter"/>
               </a:rPr>
-              <a:t>A planner needs a shortlist of places to inspect for shade or planting.</a:t>
+              <a:t>Satellite: 50.4 °C mean of two cell medians; 0% detected green pixels at the current threshold.</a:t>
             </a:r>
           </a:p>
         </p:txBody>
@@ -5498,6 +5619,7 @@
           <a:lstStyle xmlns:a="http://schemas.openxmlformats.org/drawingml/2006/main"/>
           <a:p xmlns:a="http://schemas.openxmlformats.org/drawingml/2006/main">
             <a:pPr>
+              <a:buNone/>
               <a:defRPr sz="2400" b="0">
                 <a:solidFill>
                   <a:srgbClr val="213846"/>
@@ -5516,7 +5638,7 @@
                 <a:ea typeface="Bitstream Charter"/>
                 <a:cs typeface="Bitstream Charter"/>
               </a:rPr>
-              <a:t>The map shows observed surface temperature, green signal and mapped buildings for each cell.</a:t>
+              <a:t>Local evidence: roadside trees, no shelter and limited walking access; Nasser confirms site visits.</a:t>
             </a:r>
           </a:p>
         </p:txBody>
@@ -5555,6 +5677,7 @@
           <a:lstStyle xmlns:a="http://schemas.openxmlformats.org/drawingml/2006/main"/>
           <a:p xmlns:a="http://schemas.openxmlformats.org/drawingml/2006/main">
             <a:pPr>
+              <a:buNone/>
               <a:defRPr sz="2400" b="0">
                 <a:solidFill>
                   <a:srgbClr val="213846"/>
@@ -5573,7 +5696,7 @@
                 <a:ea typeface="Bitstream Charter"/>
                 <a:cs typeface="Bitstream Charter"/>
               </a:rPr>
-              <a:t>A site visit must establish pedestrian activity, existing shade, ownership and feasibility.</a:t>
+              <a:t>Next check: waiting-time shade, passenger use, route safety, ownership and feasibility.</a:t>
             </a:r>
           </a:p>
         </p:txBody>
@@ -5612,6 +5735,7 @@
           <a:lstStyle xmlns:a="http://schemas.openxmlformats.org/drawingml/2006/main"/>
           <a:p xmlns:a="http://schemas.openxmlformats.org/drawingml/2006/main">
             <a:pPr>
+              <a:buNone/>
               <a:defRPr sz="1725" b="0">
                 <a:solidFill>
                   <a:srgbClr val="526569"/>
@@ -5630,7 +5754,7 @@
                 <a:ea typeface="Bitstream Charter"/>
                 <a:cs typeface="Bitstream Charter"/>
               </a:rPr>
-              <a:t>No user interview, measured time saving or cooling benefit is claimed.</a:t>
+              <a:t>300 m values are not stop measurements. Nasser confirms unchanged physical conditions; visit dates unspecified.</a:t>
             </a:r>
           </a:p>
         </p:txBody>
@@ -5698,6 +5822,7 @@
           <a:lstStyle xmlns:a="http://schemas.openxmlformats.org/drawingml/2006/main"/>
           <a:p xmlns:a="http://schemas.openxmlformats.org/drawingml/2006/main">
             <a:pPr>
+              <a:buNone/>
               <a:defRPr sz="3300" b="1">
                 <a:solidFill>
                   <a:srgbClr val="163D46"/>
@@ -5755,6 +5880,7 @@
           <a:lstStyle xmlns:a="http://schemas.openxmlformats.org/drawingml/2006/main"/>
           <a:p xmlns:a="http://schemas.openxmlformats.org/drawingml/2006/main">
             <a:pPr>
+              <a:buNone/>
               <a:defRPr sz="2250" b="0">
                 <a:solidFill>
                   <a:srgbClr val="213846"/>
@@ -5812,6 +5938,7 @@
           <a:lstStyle xmlns:a="http://schemas.openxmlformats.org/drawingml/2006/main"/>
           <a:p xmlns:a="http://schemas.openxmlformats.org/drawingml/2006/main">
             <a:pPr>
+              <a:buNone/>
               <a:defRPr sz="2250" b="0">
                 <a:solidFill>
                   <a:srgbClr val="213846"/>
@@ -5869,6 +5996,7 @@
           <a:lstStyle xmlns:a="http://schemas.openxmlformats.org/drawingml/2006/main"/>
           <a:p xmlns:a="http://schemas.openxmlformats.org/drawingml/2006/main">
             <a:pPr>
+              <a:buNone/>
               <a:defRPr sz="2250" b="0">
                 <a:solidFill>
                   <a:srgbClr val="213846"/>
@@ -5926,6 +6054,7 @@
           <a:lstStyle xmlns:a="http://schemas.openxmlformats.org/drawingml/2006/main"/>
           <a:p xmlns:a="http://schemas.openxmlformats.org/drawingml/2006/main">
             <a:pPr>
+              <a:buNone/>
               <a:defRPr sz="2250" b="0">
                 <a:solidFill>
                   <a:srgbClr val="213846"/>
@@ -5983,6 +6112,7 @@
           <a:lstStyle xmlns:a="http://schemas.openxmlformats.org/drawingml/2006/main"/>
           <a:p xmlns:a="http://schemas.openxmlformats.org/drawingml/2006/main">
             <a:pPr>
+              <a:buNone/>
               <a:defRPr sz="1725" b="0">
                 <a:solidFill>
                   <a:srgbClr val="526569"/>
@@ -6037,7 +6167,7 @@
       </p:grpSpPr>
       <p:cxnSp>
         <p:nvCxnSpPr>
-          <p:cNvPr id="17" name=""/>
+          <p:cNvPr id="26" name=""/>
           <p:cNvCxnSpPr>
             <a:stCxn xmlns:a="http://schemas.openxmlformats.org/drawingml/2006/main" id="8" idx="1"/>
             <a:endCxn xmlns:a="http://schemas.openxmlformats.org/drawingml/2006/main" id="10" idx="3"/>
@@ -6062,7 +6192,7 @@
       </p:cxnSp>
       <p:cxnSp>
         <p:nvCxnSpPr>
-          <p:cNvPr id="18" name=""/>
+          <p:cNvPr id="27" name=""/>
           <p:cNvCxnSpPr>
             <a:stCxn xmlns:a="http://schemas.openxmlformats.org/drawingml/2006/main" id="6" idx="2"/>
             <a:endCxn xmlns:a="http://schemas.openxmlformats.org/drawingml/2006/main" id="8" idx="0"/>
@@ -6087,7 +6217,7 @@
       </p:cxnSp>
       <p:cxnSp>
         <p:nvCxnSpPr>
-          <p:cNvPr id="19" name=""/>
+          <p:cNvPr id="28" name=""/>
           <p:cNvCxnSpPr>
             <a:stCxn xmlns:a="http://schemas.openxmlformats.org/drawingml/2006/main" id="4" idx="3"/>
             <a:endCxn xmlns:a="http://schemas.openxmlformats.org/drawingml/2006/main" id="6" idx="1"/>
@@ -6112,7 +6242,7 @@
       </p:cxnSp>
       <p:cxnSp>
         <p:nvCxnSpPr>
-          <p:cNvPr id="20" name=""/>
+          <p:cNvPr id="29" name=""/>
           <p:cNvCxnSpPr>
             <a:stCxn xmlns:a="http://schemas.openxmlformats.org/drawingml/2006/main" id="2" idx="3"/>
             <a:endCxn xmlns:a="http://schemas.openxmlformats.org/drawingml/2006/main" id="4" idx="1"/>
@@ -6169,6 +6299,7 @@
           <a:lstStyle xmlns:a="http://schemas.openxmlformats.org/drawingml/2006/main"/>
           <a:p xmlns:a="http://schemas.openxmlformats.org/drawingml/2006/main">
             <a:pPr>
+              <a:buNone/>
               <a:defRPr sz="3300" b="1">
                 <a:solidFill>
                   <a:srgbClr val="163D46"/>
@@ -6258,6 +6389,7 @@
           <a:lstStyle xmlns:a="http://schemas.openxmlformats.org/drawingml/2006/main"/>
           <a:p xmlns:a="http://schemas.openxmlformats.org/drawingml/2006/main">
             <a:pPr>
+              <a:buNone/>
               <a:defRPr sz="2175" b="0">
                 <a:solidFill>
                   <a:srgbClr val="163D46"/>
@@ -6281,6 +6413,7 @@
           </a:p>
           <a:p xmlns:a="http://schemas.openxmlformats.org/drawingml/2006/main">
             <a:pPr>
+              <a:buNone/>
               <a:defRPr sz="2175" b="0">
                 <a:solidFill>
                   <a:srgbClr val="163D46"/>
@@ -6304,6 +6437,7 @@
           </a:p>
           <a:p xmlns:a="http://schemas.openxmlformats.org/drawingml/2006/main">
             <a:pPr>
+              <a:buNone/>
               <a:defRPr sz="2175" b="0">
                 <a:solidFill>
                   <a:srgbClr val="163D46"/>
@@ -6393,6 +6527,7 @@
           <a:lstStyle xmlns:a="http://schemas.openxmlformats.org/drawingml/2006/main"/>
           <a:p xmlns:a="http://schemas.openxmlformats.org/drawingml/2006/main">
             <a:pPr>
+              <a:buNone/>
               <a:defRPr sz="2175" b="0">
                 <a:solidFill>
                   <a:srgbClr val="163D46"/>
@@ -6416,6 +6551,7 @@
           </a:p>
           <a:p xmlns:a="http://schemas.openxmlformats.org/drawingml/2006/main">
             <a:pPr>
+              <a:buNone/>
               <a:defRPr sz="2175" b="0">
                 <a:solidFill>
                   <a:srgbClr val="163D46"/>
@@ -6439,6 +6575,7 @@
           </a:p>
           <a:p xmlns:a="http://schemas.openxmlformats.org/drawingml/2006/main">
             <a:pPr>
+              <a:buNone/>
               <a:defRPr sz="2175" b="0">
                 <a:solidFill>
                   <a:srgbClr val="163D46"/>
@@ -6528,6 +6665,7 @@
           <a:lstStyle xmlns:a="http://schemas.openxmlformats.org/drawingml/2006/main"/>
           <a:p xmlns:a="http://schemas.openxmlformats.org/drawingml/2006/main">
             <a:pPr>
+              <a:buNone/>
               <a:defRPr sz="2175" b="0">
                 <a:solidFill>
                   <a:srgbClr val="163D46"/>
@@ -6551,6 +6689,7 @@
           </a:p>
           <a:p xmlns:a="http://schemas.openxmlformats.org/drawingml/2006/main">
             <a:pPr>
+              <a:buNone/>
               <a:defRPr sz="2175" b="0">
                 <a:solidFill>
                   <a:srgbClr val="163D46"/>
@@ -6574,6 +6713,7 @@
           </a:p>
           <a:p xmlns:a="http://schemas.openxmlformats.org/drawingml/2006/main">
             <a:pPr>
+              <a:buNone/>
               <a:defRPr sz="2175" b="0">
                 <a:solidFill>
                   <a:srgbClr val="163D46"/>
@@ -6663,6 +6803,7 @@
           <a:lstStyle xmlns:a="http://schemas.openxmlformats.org/drawingml/2006/main"/>
           <a:p xmlns:a="http://schemas.openxmlformats.org/drawingml/2006/main">
             <a:pPr>
+              <a:buNone/>
               <a:defRPr sz="2175" b="0">
                 <a:solidFill>
                   <a:srgbClr val="163D46"/>
@@ -6686,6 +6827,7 @@
           </a:p>
           <a:p xmlns:a="http://schemas.openxmlformats.org/drawingml/2006/main">
             <a:pPr>
+              <a:buNone/>
               <a:defRPr sz="2175" b="0">
                 <a:solidFill>
                   <a:srgbClr val="163D46"/>
@@ -6709,6 +6851,7 @@
           </a:p>
           <a:p xmlns:a="http://schemas.openxmlformats.org/drawingml/2006/main">
             <a:pPr>
+              <a:buNone/>
               <a:defRPr sz="2175" b="0">
                 <a:solidFill>
                   <a:srgbClr val="163D46"/>
@@ -6798,6 +6941,7 @@
           <a:lstStyle xmlns:a="http://schemas.openxmlformats.org/drawingml/2006/main"/>
           <a:p xmlns:a="http://schemas.openxmlformats.org/drawingml/2006/main">
             <a:pPr>
+              <a:buNone/>
               <a:defRPr sz="2175" b="1">
                 <a:solidFill>
                   <a:srgbClr val="163D46"/>
@@ -6816,11 +6960,12 @@
                 <a:ea typeface="Bitstream Charter"/>
                 <a:cs typeface="Bitstream Charter"/>
               </a:rPr>
-              <a:t>Portable map</a:t>
+              <a:t>Local review + map</a:t>
             </a:r>
           </a:p>
           <a:p xmlns:a="http://schemas.openxmlformats.org/drawingml/2006/main">
             <a:pPr>
+              <a:buNone/>
               <a:defRPr sz="2175" b="1">
                 <a:solidFill>
                   <a:srgbClr val="163D46"/>
@@ -6839,11 +6984,12 @@
                 <a:ea typeface="Bitstream Charter"/>
                 <a:cs typeface="Bitstream Charter"/>
               </a:rPr>
-              <a:t>Inspect indicators</a:t>
+              <a:t>Use and shade</a:t>
             </a:r>
           </a:p>
           <a:p xmlns:a="http://schemas.openxmlformats.org/drawingml/2006/main">
             <a:pPr>
+              <a:buNone/>
               <a:defRPr sz="2175" b="1">
                 <a:solidFill>
                   <a:srgbClr val="163D46"/>
@@ -6862,7 +7008,7 @@
                 <a:ea typeface="Bitstream Charter"/>
                 <a:cs typeface="Bitstream Charter"/>
               </a:rPr>
-              <a:t>and visit candidates</a:t>
+              <a:t>Site assessment</a:t>
             </a:r>
           </a:p>
         </p:txBody>
@@ -6901,6 +7047,7 @@
           <a:lstStyle xmlns:a="http://schemas.openxmlformats.org/drawingml/2006/main"/>
           <a:p xmlns:a="http://schemas.openxmlformats.org/drawingml/2006/main">
             <a:pPr>
+              <a:buNone/>
               <a:defRPr sz="1725" b="0">
                 <a:solidFill>
                   <a:srgbClr val="526569"/>
@@ -6987,6 +7134,7 @@
           <a:lstStyle xmlns:a="http://schemas.openxmlformats.org/drawingml/2006/main"/>
           <a:p xmlns:a="http://schemas.openxmlformats.org/drawingml/2006/main">
             <a:pPr>
+              <a:buNone/>
               <a:defRPr sz="3300" b="1">
                 <a:solidFill>
                   <a:srgbClr val="163D46"/>
@@ -7012,20 +7160,20 @@
       </p:sp>
       <p:pic>
         <p:nvPicPr>
-          <p:cNvPr id="5" name=""/>
+          <p:cNvPr id="7" name=""/>
           <p:cNvPicPr>
             <a:picLocks xmlns:a="http://schemas.openxmlformats.org/drawingml/2006/main" noChangeAspect="1"/>
           </p:cNvPicPr>
           <p:nvPr/>
         </p:nvPicPr>
         <p:blipFill>
-          <a:blip xmlns:r="http://schemas.openxmlformats.org/officeDocument/2006/relationships" xmlns:a="http://schemas.openxmlformats.org/drawingml/2006/main" r:embed="Rea9ba0e8114e44ed"/>
+          <a:blip xmlns:r="http://schemas.openxmlformats.org/officeDocument/2006/relationships" xmlns:a="http://schemas.openxmlformats.org/drawingml/2006/main" r:embed="Re0168ebde06e4c1b"/>
           <a:stretch xmlns:a="http://schemas.openxmlformats.org/drawingml/2006/main"/>
         </p:blipFill>
         <p:spPr>
           <a:xfrm xmlns:a="http://schemas.openxmlformats.org/drawingml/2006/main">
-            <a:off x="609600" y="1415415"/>
-            <a:ext cx="10972800" cy="4389120"/>
+            <a:off x="1706880" y="1415415"/>
+            <a:ext cx="8778240" cy="4389120"/>
           </a:xfrm>
           <a:prstGeom xmlns:a="http://schemas.openxmlformats.org/drawingml/2006/main" prst="rect">
             <a:avLst/>
@@ -7066,6 +7214,7 @@
           <a:lstStyle xmlns:a="http://schemas.openxmlformats.org/drawingml/2006/main"/>
           <a:p xmlns:a="http://schemas.openxmlformats.org/drawingml/2006/main">
             <a:pPr>
+              <a:buNone/>
               <a:defRPr sz="1725" b="0">
                 <a:solidFill>
                   <a:srgbClr val="526569"/>
@@ -7152,6 +7301,7 @@
           <a:lstStyle xmlns:a="http://schemas.openxmlformats.org/drawingml/2006/main"/>
           <a:p xmlns:a="http://schemas.openxmlformats.org/drawingml/2006/main">
             <a:pPr>
+              <a:buNone/>
               <a:defRPr sz="3300" b="1">
                 <a:solidFill>
                   <a:srgbClr val="163D46"/>
@@ -7177,20 +7327,20 @@
       </p:sp>
       <p:pic>
         <p:nvPicPr>
-          <p:cNvPr id="5" name=""/>
+          <p:cNvPr id="7" name=""/>
           <p:cNvPicPr>
             <a:picLocks xmlns:a="http://schemas.openxmlformats.org/drawingml/2006/main" noChangeAspect="1"/>
           </p:cNvPicPr>
           <p:nvPr/>
         </p:nvPicPr>
         <p:blipFill>
-          <a:blip xmlns:r="http://schemas.openxmlformats.org/officeDocument/2006/relationships" xmlns:a="http://schemas.openxmlformats.org/drawingml/2006/main" r:embed="Rd0e2a96bb88e4083"/>
+          <a:blip xmlns:r="http://schemas.openxmlformats.org/officeDocument/2006/relationships" xmlns:a="http://schemas.openxmlformats.org/drawingml/2006/main" r:embed="R8f42fadd3d094151"/>
           <a:stretch xmlns:a="http://schemas.openxmlformats.org/drawingml/2006/main"/>
         </p:blipFill>
         <p:spPr>
           <a:xfrm xmlns:a="http://schemas.openxmlformats.org/drawingml/2006/main">
-            <a:off x="695325" y="1295400"/>
-            <a:ext cx="10801350" cy="4629150"/>
+            <a:off x="1081088" y="1295400"/>
+            <a:ext cx="10029825" cy="4629150"/>
           </a:xfrm>
           <a:prstGeom xmlns:a="http://schemas.openxmlformats.org/drawingml/2006/main" prst="rect">
             <a:avLst/>
@@ -7231,6 +7381,7 @@
           <a:lstStyle xmlns:a="http://schemas.openxmlformats.org/drawingml/2006/main"/>
           <a:p xmlns:a="http://schemas.openxmlformats.org/drawingml/2006/main">
             <a:pPr>
+              <a:buNone/>
               <a:defRPr sz="1725" b="0">
                 <a:solidFill>
                   <a:srgbClr val="526569"/>
@@ -7317,6 +7468,7 @@
           <a:lstStyle xmlns:a="http://schemas.openxmlformats.org/drawingml/2006/main"/>
           <a:p xmlns:a="http://schemas.openxmlformats.org/drawingml/2006/main">
             <a:pPr>
+              <a:buNone/>
               <a:defRPr sz="3300" b="1">
                 <a:solidFill>
                   <a:srgbClr val="163D46"/>
@@ -7342,7 +7494,7 @@
       </p:sp>
       <p:graphicFrame>
         <p:nvGraphicFramePr>
-          <p:cNvPr id="7" name=""/>
+          <p:cNvPr id="9" name=""/>
           <p:cNvGraphicFramePr/>
           <p:nvPr/>
         </p:nvGraphicFramePr>
@@ -7827,6 +7979,7 @@
           <a:lstStyle xmlns:a="http://schemas.openxmlformats.org/drawingml/2006/main"/>
           <a:p xmlns:a="http://schemas.openxmlformats.org/drawingml/2006/main">
             <a:pPr>
+              <a:buNone/>
               <a:defRPr sz="2400" b="0">
                 <a:solidFill>
                   <a:srgbClr val="213846"/>
@@ -7845,7 +7998,7 @@
                 <a:ea typeface="Bitstream Charter"/>
                 <a:cs typeface="Bitstream Charter"/>
               </a:rPr>
-              <a:t>Score: 50% temperature percentile, 30% inverse green percentile, 20% mapped-building percentile.</a:t>
+              <a:t>Bus-stop road: inspect waiting-time shade and access. Parking: check event use. Hospital land: confirm planned use.</a:t>
             </a:r>
           </a:p>
         </p:txBody>
@@ -7884,6 +8037,7 @@
           <a:lstStyle xmlns:a="http://schemas.openxmlformats.org/drawingml/2006/main"/>
           <a:p xmlns:a="http://schemas.openxmlformats.org/drawingml/2006/main">
             <a:pPr>
+              <a:buNone/>
               <a:defRPr sz="2400" b="0">
                 <a:solidFill>
                   <a:srgbClr val="213846"/>
@@ -7902,7 +8056,7 @@
                 <a:ea typeface="Bitstream Charter"/>
                 <a:cs typeface="Bitstream Charter"/>
               </a:rPr>
-              <a:t>Thirteen sensitivity settings show no uniquely verified best intervention site.</a:t>
+              <a:t>0% detected greenery does not mean no trees. V04-23's NDVI maxima are below 0.30; its ranking stays unchanged.</a:t>
             </a:r>
           </a:p>
         </p:txBody>
@@ -7941,6 +8095,7 @@
           <a:lstStyle xmlns:a="http://schemas.openxmlformats.org/drawingml/2006/main"/>
           <a:p xmlns:a="http://schemas.openxmlformats.org/drawingml/2006/main">
             <a:pPr>
+              <a:buNone/>
               <a:defRPr sz="1725" b="0">
                 <a:solidFill>
                   <a:srgbClr val="526569"/>
@@ -8027,6 +8182,7 @@
           <a:lstStyle xmlns:a="http://schemas.openxmlformats.org/drawingml/2006/main"/>
           <a:p xmlns:a="http://schemas.openxmlformats.org/drawingml/2006/main">
             <a:pPr>
+              <a:buNone/>
               <a:defRPr sz="3300" b="1">
                 <a:solidFill>
                   <a:srgbClr val="163D46"/>
@@ -8084,6 +8240,7 @@
           <a:lstStyle xmlns:a="http://schemas.openxmlformats.org/drawingml/2006/main"/>
           <a:p xmlns:a="http://schemas.openxmlformats.org/drawingml/2006/main">
             <a:pPr>
+              <a:buNone/>
               <a:defRPr sz="2400" b="0">
                 <a:solidFill>
                   <a:srgbClr val="213846"/>
@@ -8141,6 +8298,7 @@
           <a:lstStyle xmlns:a="http://schemas.openxmlformats.org/drawingml/2006/main"/>
           <a:p xmlns:a="http://schemas.openxmlformats.org/drawingml/2006/main">
             <a:pPr>
+              <a:buNone/>
               <a:defRPr sz="2400" b="0">
                 <a:solidFill>
                   <a:srgbClr val="213846"/>
@@ -8198,6 +8356,7 @@
           <a:lstStyle xmlns:a="http://schemas.openxmlformats.org/drawingml/2006/main"/>
           <a:p xmlns:a="http://schemas.openxmlformats.org/drawingml/2006/main">
             <a:pPr>
+              <a:buNone/>
               <a:defRPr sz="2400" b="0">
                 <a:solidFill>
                   <a:srgbClr val="213846"/>
@@ -8216,7 +8375,7 @@
                 <a:ea typeface="Bitstream Charter"/>
                 <a:cs typeface="Bitstream Charter"/>
               </a:rPr>
-              <a:t>Grass reference agreement: 24/25. Building green-rule agreement: 0/30. Coastal points retained in thermal support: 0/30.</a:t>
+              <a:t>Optical rule checks: 24/25 grass points pass; 0/30 building points pass. All 30 coastal points are excluded from thermal support.</a:t>
             </a:r>
           </a:p>
         </p:txBody>
@@ -8255,6 +8414,7 @@
           <a:lstStyle xmlns:a="http://schemas.openxmlformats.org/drawingml/2006/main"/>
           <a:p xmlns:a="http://schemas.openxmlformats.org/drawingml/2006/main">
             <a:pPr>
+              <a:buNone/>
               <a:defRPr sz="1725" b="0">
                 <a:solidFill>
                   <a:srgbClr val="526569"/>

--- a/docs/UrbanHeat-AlKhor-Pitch.pptx
+++ b/docs/UrbanHeat-AlKhor-Pitch.pptx
@@ -4238,7 +4238,7 @@
               </a:defRPr>
             </a:pPr>
             <a:r>
-              <a:rPr sz="2400" b="0">
+              <a:rPr sz="2200" b="0">
                 <a:solidFill>
                   <a:srgbClr val="213846"/>
                 </a:solidFill>
@@ -4246,7 +4246,7 @@
                 <a:ea typeface="Bitstream Charter"/>
                 <a:cs typeface="Bitstream Charter"/>
               </a:rPr>
-              <a:t>Future: comparable imagery across years, suitable VHR segmentation and verified shade, paving and human-use data.</a:t>
+              <a:t>Prepared: September 2021/2026 Dynamic World comparison code. Earth Engine access, local coverage and validation are blocked; 2023 is deferred.</a:t>
             </a:r>
           </a:p>
         </p:txBody>
@@ -4499,7 +4499,7 @@
               </a:defRPr>
             </a:pPr>
             <a:r>
-              <a:rPr sz="2250" b="0">
+              <a:rPr sz="2100" b="0">
                 <a:solidFill>
                   <a:srgbClr val="213846"/>
                 </a:solidFill>
@@ -4507,7 +4507,7 @@
                 <a:ea typeface="Bitstream Charter"/>
                 <a:cs typeface="Bitstream Charter"/>
               </a:rPr>
-              <a:t>Abdulrahman Almohannadi: supplied local observations for three cells.</a:t>
+              <a:t>Abdulrahman Almohannadi: review the project; collect dated photographs and local observations.</a:t>
             </a:r>
           </a:p>
         </p:txBody>
@@ -4557,7 +4557,7 @@
               </a:defRPr>
             </a:pPr>
             <a:r>
-              <a:rPr sz="2250" b="0">
+              <a:rPr sz="2200" b="0">
                 <a:solidFill>
                   <a:srgbClr val="213846"/>
                 </a:solidFill>
@@ -4565,7 +4565,7 @@
                 <a:ea typeface="Bitstream Charter"/>
                 <a:cs typeface="Bitstream Charter"/>
               </a:rPr>
-              <a:t>Mohammed Almarri: test the map and document issues.</a:t>
+              <a:t>Mohammed Almarri: practise the presentation and explain the project.</a:t>
             </a:r>
           </a:p>
         </p:txBody>
@@ -4731,7 +4731,7 @@
               </a:defRPr>
             </a:pPr>
             <a:r>
-              <a:rPr sz="1725" b="0">
+              <a:rPr sz="1700" b="0">
                 <a:solidFill>
                   <a:srgbClr val="526569"/>
                 </a:solidFill>
@@ -4739,7 +4739,7 @@
                 <a:ea typeface="Bitstream Charter"/>
                 <a:cs typeface="Bitstream Charter"/>
               </a:rPr>
-              <a:t>Nasser confirms site visits; detailed assessment and other assigned reviews remain pending.</a:t>
+              <a:t>Original site visits confirmed; photographs, detailed assessment and member reviews/rehearsals remain pending.</a:t>
             </a:r>
           </a:p>
         </p:txBody>
@@ -4992,7 +4992,7 @@
               </a:defRPr>
             </a:pPr>
             <a:r>
-              <a:rPr sz="2400" b="0">
+              <a:rPr sz="2000" b="0">
                 <a:solidFill>
                   <a:srgbClr val="213846"/>
                 </a:solidFill>
@@ -5000,7 +5000,7 @@
                 <a:ea typeface="Bitstream Charter"/>
                 <a:cs typeface="Bitstream Charter"/>
               </a:rPr>
-              <a:t>Discovery and verification resources: Copernicus Browser, NASA Earthdata and Bellingcat toolkit. These are not new analysis sources.</a:t>
+              <a:t>Consulted/planned: Dynamic World documentation (data not retrieved), Copernicus Browser, NASA Earthdata and Bellingcat. These are separate from actual analysis sources.</a:t>
             </a:r>
           </a:p>
         </p:txBody>
@@ -7153,33 +7153,11 @@
                 <a:ea typeface="Bitstream Charter"/>
                 <a:cs typeface="Bitstream Charter"/>
               </a:rPr>
-              <a:t>Al Khor study window and shortlist</a:t>
+              <a:t>Al Khor presentation examples</a:t>
             </a:r>
           </a:p>
         </p:txBody>
       </p:sp>
-      <p:pic>
-        <p:nvPicPr>
-          <p:cNvPr id="7" name=""/>
-          <p:cNvPicPr>
-            <a:picLocks xmlns:a="http://schemas.openxmlformats.org/drawingml/2006/main" noChangeAspect="1"/>
-          </p:cNvPicPr>
-          <p:nvPr/>
-        </p:nvPicPr>
-        <p:blipFill>
-          <a:blip xmlns:r="http://schemas.openxmlformats.org/officeDocument/2006/relationships" xmlns:a="http://schemas.openxmlformats.org/drawingml/2006/main" r:embed="Re0168ebde06e4c1b"/>
-          <a:stretch xmlns:a="http://schemas.openxmlformats.org/drawingml/2006/main"/>
-        </p:blipFill>
-        <p:spPr>
-          <a:xfrm xmlns:a="http://schemas.openxmlformats.org/drawingml/2006/main">
-            <a:off x="1706880" y="1415415"/>
-            <a:ext cx="8778240" cy="4389120"/>
-          </a:xfrm>
-          <a:prstGeom xmlns:a="http://schemas.openxmlformats.org/drawingml/2006/main" prst="rect">
-            <a:avLst/>
-          </a:prstGeom>
-        </p:spPr>
-      </p:pic>
       <p:sp>
         <p:nvSpPr>
           <p:cNvPr id="3" name="">
@@ -7225,7 +7203,7 @@
               </a:defRPr>
             </a:pPr>
             <a:r>
-              <a:rPr sz="1725" b="0">
+              <a:rPr sz="1700" b="0">
                 <a:solidFill>
                   <a:srgbClr val="526569"/>
                 </a:solidFill>
@@ -7233,11 +7211,35 @@
                 <a:ea typeface="Bitstream Charter"/>
                 <a:cs typeface="Bitstream Charter"/>
               </a:rPr>
-              <a:t>1,111 observed cells and 373 screened urban candidates. Analyst-defined window, approximately 116 km².</a:t>
+              <a:t>Team-selected examples; all 1,111 observed cells and 373 candidates remain. The satellite top three are unchanged.</a:t>
             </a:r>
           </a:p>
         </p:txBody>
       </p:sp>
+      <p:pic xmlns:a="http://schemas.openxmlformats.org/drawingml/2006/main" xmlns:r="http://schemas.openxmlformats.org/officeDocument/2006/relationships">
+        <p:nvPicPr>
+          <p:cNvPr id="5" name="Picture 4" descr="presentation-case-map.png"/>
+          <p:cNvPicPr>
+            <a:picLocks noChangeAspect="1"/>
+          </p:cNvPicPr>
+          <p:nvPr/>
+        </p:nvPicPr>
+        <p:blipFill>
+          <a:blip r:embed="rId4"/>
+          <a:stretch>
+            <a:fillRect/>
+          </a:stretch>
+        </p:blipFill>
+        <p:spPr>
+          <a:xfrm>
+            <a:off x="612648" y="1415415"/>
+            <a:ext cx="10972800" cy="3683726"/>
+          </a:xfrm>
+          <a:prstGeom prst="rect">
+            <a:avLst/>
+          </a:prstGeom>
+        </p:spPr>
+      </p:pic>
     </p:spTree>
     <p:extLst>
       <p:ext uri="{BB962C8B-B14F-4D97-AF65-F5344CB8AC3E}">
@@ -7487,7 +7489,7 @@
                 <a:ea typeface="Bitstream Charter"/>
                 <a:cs typeface="Bitstream Charter"/>
               </a:rPr>
-              <a:t>Leading candidates change with the settings</a:t>
+              <a:t>Three examples for site investigation</a:t>
             </a:r>
           </a:p>
         </p:txBody>
@@ -7528,7 +7530,7 @@
                           <a:ea typeface="Bitstream Charter"/>
                           <a:cs typeface="Bitstream Charter"/>
                         </a:rPr>
-                        <a:t>Candidate</a:t>
+                        <a:t>Case study</a:t>
                       </a:r>
                     </a:p>
                   </a:txBody>
@@ -7854,7 +7856,7 @@
                           <a:ea typeface="Bitstream Charter"/>
                           <a:cs typeface="Bitstream Charter"/>
                         </a:rPr>
-                        <a:t>V04-24</a:t>
+                        <a:t>V18-26</a:t>
                       </a:r>
                     </a:p>
                   </a:txBody>
@@ -7874,7 +7876,7 @@
                           <a:ea typeface="Bitstream Charter"/>
                           <a:cs typeface="Bitstream Charter"/>
                         </a:rPr>
-                        <a:t>50.2</a:t>
+                        <a:t>47.47</a:t>
                       </a:r>
                     </a:p>
                   </a:txBody>
@@ -7894,7 +7896,7 @@
                           <a:ea typeface="Bitstream Charter"/>
                           <a:cs typeface="Bitstream Charter"/>
                         </a:rPr>
-                        <a:t>0.1</a:t>
+                        <a:t>0.0386</a:t>
                       </a:r>
                     </a:p>
                   </a:txBody>
@@ -7914,7 +7916,7 @@
                           <a:ea typeface="Bitstream Charter"/>
                           <a:cs typeface="Bitstream Charter"/>
                         </a:rPr>
-                        <a:t>2.9</a:t>
+                        <a:t>0.0</a:t>
                       </a:r>
                     </a:p>
                   </a:txBody>
@@ -7934,7 +7936,7 @@
                           <a:ea typeface="Bitstream Charter"/>
                           <a:cs typeface="Bitstream Charter"/>
                         </a:rPr>
-                        <a:t>2-34</a:t>
+                        <a:t>203–336</a:t>
                       </a:r>
                     </a:p>
                   </a:txBody>
@@ -7990,7 +7992,7 @@
               </a:defRPr>
             </a:pPr>
             <a:r>
-              <a:rPr sz="2400" b="0">
+              <a:rPr sz="2200" b="0">
                 <a:solidFill>
                   <a:srgbClr val="213846"/>
                 </a:solidFill>
@@ -7998,7 +8000,7 @@
                 <a:ea typeface="Bitstream Charter"/>
                 <a:cs typeface="Bitstream Charter"/>
               </a:rPr>
-              <a:t>Bus-stop road: inspect waiting-time shade and access. Parking: check event use. Hospital land: confirm planned use.</a:t>
+              <a:t>Bus stop: waiting-area shade. Stadium: event use. Jogging route: reported lack of path shade; dated evidence pending.</a:t>
             </a:r>
           </a:p>
         </p:txBody>
@@ -8048,7 +8050,7 @@
               </a:defRPr>
             </a:pPr>
             <a:r>
-              <a:rPr sz="2400" b="0">
+              <a:rPr sz="2100" b="0">
                 <a:solidFill>
                   <a:srgbClr val="213846"/>
                 </a:solidFill>
@@ -8056,7 +8058,7 @@
                 <a:ea typeface="Bitstream Charter"/>
                 <a:cs typeface="Bitstream Charter"/>
               </a:rPr>
-              <a:t>0% detected greenery does not mean no trees. V04-23's NDVI maxima are below 0.30; its ranking stays unchanged.</a:t>
+              <a:t>Team-selected examples, not the top three ranks. V18-26 ranks 275/373; hospital land stays in the full results. Visits do not measure use or shade.</a:t>
             </a:r>
           </a:p>
         </p:txBody>
@@ -8106,7 +8108,7 @@
               </a:defRPr>
             </a:pPr>
             <a:r>
-              <a:rPr sz="1725" b="0">
+              <a:rPr sz="1550" b="0">
                 <a:solidFill>
                   <a:srgbClr val="526569"/>
                 </a:solidFill>
@@ -8114,7 +8116,7 @@
                 <a:ea typeface="Bitstream Charter"/>
                 <a:cs typeface="Bitstream Charter"/>
               </a:rPr>
-              <a:t>*Means of date-level cell summaries. Rank ranges are scenario ranges, not confidence intervals.</a:t>
+              <a:t>*Means of date-level cell summaries. V18-26: 48.02/46.92°C; 72% coverage. Scenario ranges are not confidence intervals.</a:t>
             </a:r>
           </a:p>
         </p:txBody>

--- a/docs/UrbanHeat-AlKhor-Pitch.pptx
+++ b/docs/UrbanHeat-AlKhor-Pitch.pptx
@@ -4246,7 +4246,7 @@
                 <a:ea typeface="Bitstream Charter"/>
                 <a:cs typeface="Bitstream Charter"/>
               </a:rPr>
-              <a:t>Prepared: September 2021/2026 Dynamic World comparison code. Earth Engine access, local coverage and validation are blocked; 2023 is deferred.</a:t>
+              <a:t>Exported: September 2021/2026 Dynamic World. Primary matched coverage: 30.94% (50% required). Dated-imagery scientific review is pending; 2023 is deferred.</a:t>
             </a:r>
           </a:p>
         </p:txBody>
@@ -4884,7 +4884,7 @@
                 <a:ea typeface="Bitstream Charter"/>
                 <a:cs typeface="Bitstream Charter"/>
               </a:rPr>
-              <a:t>Actual data: Copernicus Sentinel via Earth Search; Landsat via Planetary Computer (USGS); WorldCover 2021; OSM.</a:t>
+              <a:t>Actual sources: Copernicus Sentinel, Landsat (USGS), WorldCover 2021, OSM; separate experimental Dynamic World exports (2021, 2026).</a:t>
             </a:r>
           </a:p>
         </p:txBody>
@@ -5000,7 +5000,7 @@
                 <a:ea typeface="Bitstream Charter"/>
                 <a:cs typeface="Bitstream Charter"/>
               </a:rPr>
-              <a:t>Consulted/planned: Dynamic World documentation (data not retrieved), Copernicus Browser, NASA Earthdata and Bellingcat. These are separate from actual analysis sources.</a:t>
+              <a:t>Dynamic World, CC BY 4.0: This dataset is produced for the Dynamic World Project by Google in partnership with National Geographic Society and the World Resources Institute.</a:t>
             </a:r>
           </a:p>
         </p:txBody>
@@ -5116,7 +5116,7 @@
                 <a:ea typeface="Bitstream Charter"/>
                 <a:cs typeface="Bitstream Charter"/>
               </a:rPr>
-              <a:t>Exact scene provenance and full licences accompany the package. Original code: MIT.</a:t>
+              <a:t>Modified Copernicus Sentinel data (2021, 2026). Full sources, licences and experimental limits accompany the package. Code: MIT.</a:t>
             </a:r>
           </a:p>
         </p:txBody>

--- a/docs/UrbanHeat-AlKhor-Pitch.pptx
+++ b/docs/UrbanHeat-AlKhor-Pitch.pptx
@@ -4130,7 +4130,7 @@
                 <a:ea typeface="Bitstream Charter"/>
                 <a:cs typeface="Bitstream Charter"/>
               </a:rPr>
-              <a:t>Completed: reproducible satellite screening, sensitivity checks and local-review examples for site assessment.</a:t>
+              <a:t>Completed: satellite screening, sensitivity checks, local examples and assistant review of 18 sites across four dates.</a:t>
             </a:r>
           </a:p>
         </p:txBody>
@@ -4246,7 +4246,7 @@
                 <a:ea typeface="Bitstream Charter"/>
                 <a:cs typeface="Bitstream Charter"/>
               </a:rPr>
-              <a:t>Exported: September 2021/2026 Dynamic World. Primary matched coverage: 30.94% (50% required). Dated-imagery scientific review is pending; 2023 is deferred.</a:t>
+              <a:t>Limited Dynamic World experiment: common coverage 30.94% (50% gate). Independent scientific validation pending; 2023 deferred.</a:t>
             </a:r>
           </a:p>
         </p:txBody>
@@ -7066,7 +7066,7 @@
                 <a:ea typeface="Bitstream Charter"/>
                 <a:cs typeface="Bitstream Charter"/>
               </a:rPr>
-              <a:t>Deterministic processing; upstream WorldCover uses ML. Our own segmentation model is future work.</a:t>
+              <a:t>External AI land cover: WorldCover for heat screening; Dynamic World in a separate experiment. QA/ranking are rule based. No new model trained.</a:t>
             </a:r>
           </a:p>
         </p:txBody>
@@ -8377,7 +8377,7 @@
                 <a:ea typeface="Bitstream Charter"/>
                 <a:cs typeface="Bitstream Charter"/>
               </a:rPr>
-              <a:t>Optical rule checks: 24/25 grass points pass; 0/30 building points pass. All 30 coastal points are excluded from thermal support.</a:t>
+              <a:t>NDVI &gt;=0.30 at 24/25 grass references and 0/30 building references. All 30 coastal references are excluded from retained thermal support.</a:t>
             </a:r>
           </a:p>
         </p:txBody>

--- a/docs/UrbanHeat-AlKhor-Pitch.pptx
+++ b/docs/UrbanHeat-AlKhor-Pitch.pptx
@@ -4507,7 +4507,7 @@
                 <a:ea typeface="Bitstream Charter"/>
                 <a:cs typeface="Bitstream Charter"/>
               </a:rPr>
-              <a:t>Abdulrahman Almohannadi: review the project; collect dated photographs and local observations.</a:t>
+              <a:t>Abdulrahman Almohannadi: supplied 11 photos + one video; project review remains pending.</a:t>
             </a:r>
           </a:p>
         </p:txBody>
@@ -4739,7 +4739,7 @@
                 <a:ea typeface="Bitstream Charter"/>
                 <a:cs typeface="Bitstream Charter"/>
               </a:rPr>
-              <a:t>Original site visits confirmed; photographs, detailed assessment and member reviews/rehearsals remain pending.</a:t>
+              <a:t>Photographed-site visits and supplied media collection confirmed by Nasser. Detailed assessment, member reviews and rehearsals remain pending.</a:t>
             </a:r>
           </a:p>
         </p:txBody>
@@ -5050,7 +5050,7 @@
               </a:defRPr>
             </a:pPr>
             <a:r>
-              <a:rPr sz="2400" b="0">
+              <a:rPr sz="1850" b="0">
                 <a:solidFill>
                   <a:srgbClr val="213846"/>
                 </a:solidFill>
@@ -5058,7 +5058,7 @@
                 <a:ea typeface="Bitstream Charter"/>
                 <a:cs typeface="Bitstream Charter"/>
               </a:rPr>
-              <a:t/>
+              <a:t>Field photos: Abdulrahman Almohannadi, 8 October 2026, shared 13:00–14:00 Qatar (UTC+3) window. Confirmed by Nasser, not EXIF; exact per-file times Unknown.</a:t>
             </a:r>
           </a:p>
         </p:txBody>
@@ -7218,28 +7218,412 @@
       </p:sp>
       <p:pic xmlns:a="http://schemas.openxmlformats.org/drawingml/2006/main" xmlns:r="http://schemas.openxmlformats.org/officeDocument/2006/relationships">
         <p:nvPicPr>
-          <p:cNvPr id="5" name="Picture 4" descr="presentation-case-map.png"/>
+          <p:cNvPr id="5" name="V04-23-01.jpeg" descr="V04-23 | Bus-stop road; V04-23-01.jpeg; 8 October 2026 | 13:00–14:00 Qatar (UTC+3) | Shared capture window; Photographer: Abdulrahman Almohannadi | Confirmed by Nasser, not EXIF | Exact per-file time: Unknown"/>
           <p:cNvPicPr>
             <a:picLocks noChangeAspect="1"/>
           </p:cNvPicPr>
           <p:nvPr/>
         </p:nvPicPr>
         <p:blipFill>
-          <a:blip r:embed="rId4"/>
+          <a:blip r:embed="rId5"/>
           <a:stretch>
             <a:fillRect/>
           </a:stretch>
         </p:blipFill>
         <p:spPr>
           <a:xfrm>
-            <a:off x="612648" y="1415415"/>
-            <a:ext cx="10972800" cy="3683726"/>
+            <a:off x="609904" y="2314575"/>
+            <a:ext cx="3474720" cy="1954529"/>
           </a:xfrm>
           <a:prstGeom prst="rect">
             <a:avLst/>
           </a:prstGeom>
         </p:spPr>
       </p:pic>
+      <p:sp xmlns:a="http://schemas.openxmlformats.org/drawingml/2006/main">
+        <p:nvSpPr>
+          <p:cNvPr id="6" name="TextBox 5"/>
+          <p:cNvSpPr txBox="1"/>
+          <p:nvPr/>
+        </p:nvSpPr>
+        <p:spPr>
+          <a:xfrm>
+            <a:off x="609904" y="1353312"/>
+            <a:ext cx="3474720" cy="320040"/>
+          </a:xfrm>
+          <a:prstGeom prst="rect">
+            <a:avLst/>
+          </a:prstGeom>
+          <a:noFill/>
+        </p:spPr>
+        <p:txBody>
+          <a:bodyPr wrap="square" lIns="0" rIns="0" tIns="0" bIns="0" anchor="t">
+            <a:spAutoFit/>
+          </a:bodyPr>
+          <a:lstStyle/>
+          <a:p>
+            <a:pPr algn="l">
+              <a:lnSpc>
+                <a:spcPct val="120000"/>
+              </a:lnSpc>
+              <a:spcAft>
+                <a:spcPts val="0"/>
+              </a:spcAft>
+            </a:pPr>
+            <a:r>
+              <a:rPr sz="1800" b="1">
+                <a:solidFill>
+                  <a:srgbClr val="163D46"/>
+                </a:solidFill>
+                <a:latin typeface="Bitstream Charter"/>
+              </a:rPr>
+              <a:t>V04-23 | Bus-stop road</a:t>
+            </a:r>
+          </a:p>
+        </p:txBody>
+      </p:sp>
+      <p:sp xmlns:a="http://schemas.openxmlformats.org/drawingml/2006/main">
+        <p:nvSpPr>
+          <p:cNvPr id="7" name="TextBox 6"/>
+          <p:cNvSpPr txBox="1"/>
+          <p:nvPr/>
+        </p:nvSpPr>
+        <p:spPr>
+          <a:xfrm>
+            <a:off x="609904" y="4956048"/>
+            <a:ext cx="3474720" cy="448056"/>
+          </a:xfrm>
+          <a:prstGeom prst="rect">
+            <a:avLst/>
+          </a:prstGeom>
+          <a:noFill/>
+        </p:spPr>
+        <p:txBody>
+          <a:bodyPr wrap="square" lIns="0" rIns="0" tIns="0" bIns="0" anchor="t">
+            <a:spAutoFit/>
+          </a:bodyPr>
+          <a:lstStyle/>
+          <a:p>
+            <a:pPr algn="l">
+              <a:lnSpc>
+                <a:spcPct val="120000"/>
+              </a:lnSpc>
+              <a:spcAft>
+                <a:spcPts val="0"/>
+              </a:spcAft>
+            </a:pPr>
+            <a:r>
+              <a:rPr sz="1250" b="0">
+                <a:solidFill>
+                  <a:srgbClr val="213846"/>
+                </a:solidFill>
+                <a:latin typeface="Bitstream Charter"/>
+              </a:rPr>
+              <a:t>Trees and stop sign; no shelter visible.</a:t>
+            </a:r>
+          </a:p>
+        </p:txBody>
+      </p:sp>
+      <p:pic xmlns:a="http://schemas.openxmlformats.org/drawingml/2006/main" xmlns:r="http://schemas.openxmlformats.org/officeDocument/2006/relationships">
+        <p:nvPicPr>
+          <p:cNvPr id="8" name="V28-17-04.jpeg" descr="V28-17 | Stadium parking; V28-17-04.jpeg; 8 October 2026 | 13:00–14:00 Qatar (UTC+3) | Shared capture window; Photographer: Abdulrahman Almohannadi | Confirmed by Nasser, not EXIF | Exact per-file time: Unknown"/>
+          <p:cNvPicPr>
+            <a:picLocks noChangeAspect="1"/>
+          </p:cNvPicPr>
+          <p:nvPr/>
+        </p:nvPicPr>
+        <p:blipFill>
+          <a:blip r:embed="rId6"/>
+          <a:stretch>
+            <a:fillRect/>
+          </a:stretch>
+        </p:blipFill>
+        <p:spPr>
+          <a:xfrm>
+            <a:off x="5196192" y="1691640"/>
+            <a:ext cx="1800225" cy="3200400"/>
+          </a:xfrm>
+          <a:prstGeom prst="rect">
+            <a:avLst/>
+          </a:prstGeom>
+        </p:spPr>
+      </p:pic>
+      <p:sp xmlns:a="http://schemas.openxmlformats.org/drawingml/2006/main">
+        <p:nvSpPr>
+          <p:cNvPr id="9" name="TextBox 8"/>
+          <p:cNvSpPr txBox="1"/>
+          <p:nvPr/>
+        </p:nvSpPr>
+        <p:spPr>
+          <a:xfrm>
+            <a:off x="4358944" y="1353312"/>
+            <a:ext cx="3474720" cy="320040"/>
+          </a:xfrm>
+          <a:prstGeom prst="rect">
+            <a:avLst/>
+          </a:prstGeom>
+          <a:noFill/>
+        </p:spPr>
+        <p:txBody>
+          <a:bodyPr wrap="square" lIns="0" rIns="0" tIns="0" bIns="0" anchor="t">
+            <a:spAutoFit/>
+          </a:bodyPr>
+          <a:lstStyle/>
+          <a:p>
+            <a:pPr algn="l">
+              <a:lnSpc>
+                <a:spcPct val="120000"/>
+              </a:lnSpc>
+              <a:spcAft>
+                <a:spcPts val="0"/>
+              </a:spcAft>
+            </a:pPr>
+            <a:r>
+              <a:rPr sz="1800" b="1">
+                <a:solidFill>
+                  <a:srgbClr val="163D46"/>
+                </a:solidFill>
+                <a:latin typeface="Bitstream Charter"/>
+              </a:rPr>
+              <a:t>V28-17 | Stadium parking</a:t>
+            </a:r>
+          </a:p>
+        </p:txBody>
+      </p:sp>
+      <p:sp xmlns:a="http://schemas.openxmlformats.org/drawingml/2006/main">
+        <p:nvSpPr>
+          <p:cNvPr id="10" name="TextBox 9"/>
+          <p:cNvSpPr txBox="1"/>
+          <p:nvPr/>
+        </p:nvSpPr>
+        <p:spPr>
+          <a:xfrm>
+            <a:off x="4358944" y="4956048"/>
+            <a:ext cx="3474720" cy="448056"/>
+          </a:xfrm>
+          <a:prstGeom prst="rect">
+            <a:avLst/>
+          </a:prstGeom>
+          <a:noFill/>
+        </p:spPr>
+        <p:txBody>
+          <a:bodyPr wrap="square" lIns="0" rIns="0" tIns="0" bIns="0" anchor="t">
+            <a:spAutoFit/>
+          </a:bodyPr>
+          <a:lstStyle/>
+          <a:p>
+            <a:pPr algn="l">
+              <a:lnSpc>
+                <a:spcPct val="120000"/>
+              </a:lnSpc>
+              <a:spcAft>
+                <a:spcPts val="0"/>
+              </a:spcAft>
+            </a:pPr>
+            <a:r>
+              <a:rPr sz="1250" b="0">
+                <a:solidFill>
+                  <a:srgbClr val="213846"/>
+                </a:solidFill>
+                <a:latin typeface="Bitstream Charter"/>
+              </a:rPr>
+              <a:t>Stadium and parking; use unmeasured.</a:t>
+            </a:r>
+          </a:p>
+        </p:txBody>
+      </p:sp>
+      <p:pic xmlns:a="http://schemas.openxmlformats.org/drawingml/2006/main" xmlns:r="http://schemas.openxmlformats.org/officeDocument/2006/relationships">
+        <p:nvPicPr>
+          <p:cNvPr id="11" name="V18-26-02.jpeg" descr="V18-26 | Jogging route; V18-26-02.jpeg; 8 October 2026 | 13:00–14:00 Qatar (UTC+3) | Shared capture window; Photographer: Abdulrahman Almohannadi | Confirmed by Nasser, not EXIF | Exact per-file time: Unknown"/>
+          <p:cNvPicPr>
+            <a:picLocks noChangeAspect="1"/>
+          </p:cNvPicPr>
+          <p:nvPr/>
+        </p:nvPicPr>
+        <p:blipFill>
+          <a:blip r:embed="rId7"/>
+          <a:stretch>
+            <a:fillRect/>
+          </a:stretch>
+        </p:blipFill>
+        <p:spPr>
+          <a:xfrm>
+            <a:off x="8945232" y="1691640"/>
+            <a:ext cx="1800225" cy="3200400"/>
+          </a:xfrm>
+          <a:prstGeom prst="rect">
+            <a:avLst/>
+          </a:prstGeom>
+        </p:spPr>
+      </p:pic>
+      <p:sp xmlns:a="http://schemas.openxmlformats.org/drawingml/2006/main">
+        <p:nvSpPr>
+          <p:cNvPr id="12" name="TextBox 11"/>
+          <p:cNvSpPr txBox="1"/>
+          <p:nvPr/>
+        </p:nvSpPr>
+        <p:spPr>
+          <a:xfrm>
+            <a:off x="8107984" y="1353312"/>
+            <a:ext cx="3474720" cy="320040"/>
+          </a:xfrm>
+          <a:prstGeom prst="rect">
+            <a:avLst/>
+          </a:prstGeom>
+          <a:noFill/>
+        </p:spPr>
+        <p:txBody>
+          <a:bodyPr wrap="square" lIns="0" rIns="0" tIns="0" bIns="0" anchor="t">
+            <a:spAutoFit/>
+          </a:bodyPr>
+          <a:lstStyle/>
+          <a:p>
+            <a:pPr algn="l">
+              <a:lnSpc>
+                <a:spcPct val="120000"/>
+              </a:lnSpc>
+              <a:spcAft>
+                <a:spcPts val="0"/>
+              </a:spcAft>
+            </a:pPr>
+            <a:r>
+              <a:rPr sz="1800" b="1">
+                <a:solidFill>
+                  <a:srgbClr val="163D46"/>
+                </a:solidFill>
+                <a:latin typeface="Bitstream Charter"/>
+              </a:rPr>
+              <a:t>V18-26 | Jogging route</a:t>
+            </a:r>
+          </a:p>
+        </p:txBody>
+      </p:sp>
+      <p:sp xmlns:a="http://schemas.openxmlformats.org/drawingml/2006/main">
+        <p:nvSpPr>
+          <p:cNvPr id="13" name="TextBox 12"/>
+          <p:cNvSpPr txBox="1"/>
+          <p:nvPr/>
+        </p:nvSpPr>
+        <p:spPr>
+          <a:xfrm>
+            <a:off x="8107984" y="4956048"/>
+            <a:ext cx="3474720" cy="448056"/>
+          </a:xfrm>
+          <a:prstGeom prst="rect">
+            <a:avLst/>
+          </a:prstGeom>
+          <a:noFill/>
+        </p:spPr>
+        <p:txBody>
+          <a:bodyPr wrap="square" lIns="0" rIns="0" tIns="0" bIns="0" anchor="t">
+            <a:spAutoFit/>
+          </a:bodyPr>
+          <a:lstStyle/>
+          <a:p>
+            <a:pPr algn="l">
+              <a:lnSpc>
+                <a:spcPct val="120000"/>
+              </a:lnSpc>
+              <a:spcAft>
+                <a:spcPts val="0"/>
+              </a:spcAft>
+            </a:pPr>
+            <a:r>
+              <a:rPr sz="1250" b="0">
+                <a:solidFill>
+                  <a:srgbClr val="213846"/>
+                </a:solidFill>
+                <a:latin typeface="Bitstream Charter"/>
+              </a:rPr>
+              <a:t>Marked path beside road and sandy ground.</a:t>
+            </a:r>
+          </a:p>
+        </p:txBody>
+      </p:sp>
+      <p:sp xmlns:a="http://schemas.openxmlformats.org/drawingml/2006/main">
+        <p:nvSpPr>
+          <p:cNvPr id="14" name="TextBox 13"/>
+          <p:cNvSpPr txBox="1"/>
+          <p:nvPr/>
+        </p:nvSpPr>
+        <p:spPr>
+          <a:xfrm>
+            <a:off x="609904" y="5513832"/>
+            <a:ext cx="10972800" cy="265176"/>
+          </a:xfrm>
+          <a:prstGeom prst="rect">
+            <a:avLst/>
+          </a:prstGeom>
+          <a:noFill/>
+        </p:spPr>
+        <p:txBody>
+          <a:bodyPr wrap="square" lIns="0" rIns="0" tIns="0" bIns="0" anchor="t">
+            <a:spAutoFit/>
+          </a:bodyPr>
+          <a:lstStyle/>
+          <a:p>
+            <a:pPr algn="l">
+              <a:lnSpc>
+                <a:spcPct val="120000"/>
+              </a:lnSpc>
+              <a:spcAft>
+                <a:spcPts val="0"/>
+              </a:spcAft>
+            </a:pPr>
+            <a:r>
+              <a:rPr sz="1520" b="0">
+                <a:solidFill>
+                  <a:srgbClr val="163D46"/>
+                </a:solidFill>
+                <a:latin typeface="Bitstream Charter"/>
+              </a:rPr>
+              <a:t>8 October 2026 | 13:00–14:00 Qatar (UTC+3) | Shared capture window</a:t>
+            </a:r>
+          </a:p>
+        </p:txBody>
+      </p:sp>
+      <p:sp xmlns:a="http://schemas.openxmlformats.org/drawingml/2006/main">
+        <p:nvSpPr>
+          <p:cNvPr id="15" name="TextBox 14"/>
+          <p:cNvSpPr txBox="1"/>
+          <p:nvPr/>
+        </p:nvSpPr>
+        <p:spPr>
+          <a:xfrm>
+            <a:off x="609904" y="5815584"/>
+            <a:ext cx="10972800" cy="219456"/>
+          </a:xfrm>
+          <a:prstGeom prst="rect">
+            <a:avLst/>
+          </a:prstGeom>
+          <a:noFill/>
+        </p:spPr>
+        <p:txBody>
+          <a:bodyPr wrap="square" lIns="0" rIns="0" tIns="0" bIns="0" anchor="t">
+            <a:spAutoFit/>
+          </a:bodyPr>
+          <a:lstStyle/>
+          <a:p>
+            <a:pPr algn="l">
+              <a:lnSpc>
+                <a:spcPct val="120000"/>
+              </a:lnSpc>
+              <a:spcAft>
+                <a:spcPts val="0"/>
+              </a:spcAft>
+            </a:pPr>
+            <a:r>
+              <a:rPr sz="1150" b="0">
+                <a:solidFill>
+                  <a:srgbClr val="526569"/>
+                </a:solidFill>
+                <a:latin typeface="Bitstream Charter"/>
+              </a:rPr>
+              <a:t>Photographer: Abdulrahman Almohannadi | Confirmed by Nasser, not EXIF | Exact per-file time: Unknown</a:t>
+            </a:r>
+          </a:p>
+        </p:txBody>
+      </p:sp>
     </p:spTree>
     <p:extLst>
       <p:ext uri="{BB962C8B-B14F-4D97-AF65-F5344CB8AC3E}">
@@ -8000,7 +8384,7 @@
                 <a:ea typeface="Bitstream Charter"/>
                 <a:cs typeface="Bitstream Charter"/>
               </a:rPr>
-              <a:t>Bus stop: waiting-area shade. Stadium: event use. Jogging route: reported lack of path shade; dated evidence pending.</a:t>
+              <a:t>Bus stop: waiting-area shade. Stadium: event use. Jogging route: reported lack of path shade. Photos received; use and detailed shade unmeasured.</a:t>
             </a:r>
           </a:p>
         </p:txBody>

--- a/docs/UrbanHeat-AlKhor-Pitch.pptx
+++ b/docs/UrbanHeat-AlKhor-Pitch.pptx
@@ -4188,7 +4188,7 @@
                 <a:ea typeface="Bitstream Charter"/>
                 <a:cs typeface="Bitstream Charter"/>
               </a:rPr>
-              <a:t>Next: detailed shade, use and access checks plus planner feedback; evaluate inspection decisions.</a:t>
+              <a:t>Proposed pilot: planner feedback and field shade/use/access checks; evaluate shortlist usefulness and feasibility.</a:t>
             </a:r>
           </a:p>
         </p:txBody>
@@ -4565,7 +4565,7 @@
                 <a:ea typeface="Bitstream Charter"/>
                 <a:cs typeface="Bitstream Charter"/>
               </a:rPr>
-              <a:t>Mohammed Almarri: practise the presentation and explain the project.</a:t>
+              <a:t>Mohammed Almarri: rehearse the live pitch (up to 10 min) and 5 min Q&amp;A.</a:t>
             </a:r>
           </a:p>
         </p:txBody>
@@ -4681,7 +4681,7 @@
                 <a:ea typeface="Bitstream Charter"/>
                 <a:cs typeface="Bitstream Charter"/>
               </a:rPr>
-              <a:t>Ali Alkubaisi: demonstrate the project and prepare judge questions.</a:t>
+              <a:t>Ali Alkubaisi: rehearse the offline demo and prepare five-minute judge Q&amp;A.</a:t>
             </a:r>
           </a:p>
         </p:txBody>
@@ -5261,7 +5261,7 @@
                 <a:ea typeface="Bitstream Charter"/>
                 <a:cs typeface="Bitstream Charter"/>
               </a:rPr>
-              <a:t>Find hot cells, then check who uses them and when.</a:t>
+              <a:t>Proposed user: a municipal planning team choosing where to inspect first.</a:t>
             </a:r>
           </a:p>
         </p:txBody>
@@ -5319,7 +5319,7 @@
                 <a:ea typeface="Bitstream Charter"/>
                 <a:cs typeface="Bitstream Charter"/>
               </a:rPr>
-              <a:t>Satellite screening helps organise visits; local review adds context about shade, access and planned use.</a:t>
+              <a:t>Shortlist cells, then inspect use, shade, access, ownership and feasibility before choosing an intervention.</a:t>
             </a:r>
           </a:p>
         </p:txBody>
@@ -5377,7 +5377,7 @@
                 <a:ea typeface="Bitstream Charter"/>
                 <a:cs typeface="Bitstream Charter"/>
               </a:rPr>
-              <a:t>Human exposure has not been measured. Trees, shelters and safer routes are options to assess.</a:t>
+              <a:t>Proposed value: organise evidence and inspection decisions. No adoption or measured benefit is established.</a:t>
             </a:r>
           </a:p>
         </p:txBody>
@@ -5754,7 +5754,7 @@
                 <a:ea typeface="Bitstream Charter"/>
                 <a:cs typeface="Bitstream Charter"/>
               </a:rPr>
-              <a:t>300 m values are not stop measurements. Nasser confirms unchanged physical conditions; visit dates unspecified.</a:t>
+              <a:t>300 m September values are not stop measurements. October field photos show context, not measured use or shade.</a:t>
             </a:r>
           </a:p>
         </p:txBody>
@@ -6073,7 +6073,7 @@
                 <a:ea typeface="Bitstream Charter"/>
                 <a:cs typeface="Bitstream Charter"/>
               </a:rPr>
-              <a:t>No hyperspectral, 813 or proprietary VHR data are used.</a:t>
+              <a:t>Field photos: 8 October 2026; thermal data: September. No hyperspectral, 813 or proprietary VHR data.</a:t>
             </a:r>
           </a:p>
         </p:txBody>
